--- a/decks/freelance-playbook.pptx
+++ b/decks/freelance-playbook.pptx
@@ -13,9 +13,15 @@
     <p:sldId id="261" r:id="rId7"/>
     <p:sldId id="262" r:id="rId8"/>
     <p:sldId id="263" r:id="rId9"/>
+    <p:sldId id="264" r:id="rId10"/>
+    <p:sldId id="265" r:id="rId11"/>
+    <p:sldId id="266" r:id="rId12"/>
+    <p:sldId id="267" r:id="rId13"/>
+    <p:sldId id="268" r:id="rId14"/>
+    <p:sldId id="269" r:id="rId15"/>
   </p:sldIdLst>
   <p:notesMasterIdLst>
-    <p:notesMasterId r:id="rId10"/>
+    <p:notesMasterId r:id="rId16"/>
   </p:notesMasterIdLst>
   <p:sldSz cx="12191695" cy="6858000"/>
   <p:notesSz cx="6858000" cy="12191695"/>
@@ -112,6 +118,1046 @@
     </a:lvl9pPr>
   </p:defaultTextStyle>
 </p:presentation>
+</file>
+
+<file path=ppt/charts/chart37.xml><?xml version="1.0" encoding="utf-8"?>
+<c:chartSpace xmlns:c="http://schemas.openxmlformats.org/drawingml/2006/chart" xmlns:a="http://schemas.openxmlformats.org/drawingml/2006/main" xmlns:r="http://schemas.openxmlformats.org/officeDocument/2006/relationships">
+  <c:date1904 val="0"/>
+  <c:roundedCorners val="1"/>
+  <c:chart>
+    <c:autoTitleDeleted val="1"/>
+    <c:plotArea>
+      <c:layout/>
+      <c:barChart>
+        <c:barDir val="col"/>
+        <c:grouping val="clustered"/>
+        <c:varyColors val="0"/>
+        <c:ser>
+          <c:idx val="0"/>
+          <c:order val="0"/>
+          <c:tx>
+            <c:strRef>
+              <c:f>Sheet1!$B$1</c:f>
+              <c:strCache>
+                <c:ptCount val="1"/>
+                <c:pt idx="0">
+                  <c:v>Share of incidents (illustrative)</c:v>
+                </c:pt>
+              </c:strCache>
+            </c:strRef>
+          </c:tx>
+          <c:spPr>
+            <a:solidFill>
+              <a:srgbClr val="3B82F6"/>
+            </a:solidFill>
+            <a:effectLst/>
+          </c:spPr>
+          <c:invertIfNegative val="0"/>
+          <c:dLbls>
+            <c:numFmt formatCode="#,##0" sourceLinked="0"/>
+            <c:txPr>
+              <a:bodyPr/>
+              <a:lstStyle/>
+              <a:p>
+                <a:pPr>
+                  <a:defRPr b="0" i="0" strike="noStrike" sz="1000" u="none">
+                    <a:solidFill>
+                      <a:srgbClr val="E2E8F0"/>
+                    </a:solidFill>
+                    <a:latin typeface="Segoe UI"/>
+                  </a:defRPr>
+                </a:pPr>
+              </a:p>
+            </c:txPr>
+            <c:showLegendKey val="0"/>
+            <c:showVal val="1"/>
+            <c:showCatName val="0"/>
+            <c:showSerName val="0"/>
+            <c:showPercent val="0"/>
+            <c:showBubbleSize val="0"/>
+            <c:showLeaderLines val="0"/>
+          </c:dLbls>
+          <c:dPt>
+            <c:idx val="0"/>
+            <c:invertIfNegative val="0"/>
+            <c:bubble3D val="0"/>
+            <c:spPr>
+              <a:solidFill>
+                <a:srgbClr val="3B82F6"/>
+              </a:solidFill>
+              <a:effectLst/>
+            </c:spPr>
+          </c:dPt>
+          <c:dPt>
+            <c:idx val="1"/>
+            <c:invertIfNegative val="0"/>
+            <c:bubble3D val="0"/>
+            <c:spPr>
+              <a:solidFill>
+                <a:srgbClr val="06B6D4"/>
+              </a:solidFill>
+              <a:effectLst/>
+            </c:spPr>
+          </c:dPt>
+          <c:dPt>
+            <c:idx val="2"/>
+            <c:invertIfNegative val="0"/>
+            <c:bubble3D val="0"/>
+            <c:spPr>
+              <a:solidFill>
+                <a:srgbClr val="22D3A0"/>
+              </a:solidFill>
+              <a:effectLst/>
+            </c:spPr>
+          </c:dPt>
+          <c:dPt>
+            <c:idx val="3"/>
+            <c:invertIfNegative val="0"/>
+            <c:bubble3D val="0"/>
+            <c:spPr>
+              <a:solidFill>
+                <a:srgbClr val="F59E0B"/>
+              </a:solidFill>
+              <a:effectLst/>
+            </c:spPr>
+          </c:dPt>
+          <c:dPt>
+            <c:idx val="4"/>
+            <c:invertIfNegative val="0"/>
+            <c:bubble3D val="0"/>
+            <c:spPr>
+              <a:solidFill>
+                <a:srgbClr val="3B82F6"/>
+              </a:solidFill>
+              <a:effectLst/>
+            </c:spPr>
+          </c:dPt>
+          <c:cat>
+            <c:multiLvlStrRef>
+              <c:f>Sheet1!$A$2:$A$6</c:f>
+              <c:multiLvlStrCache>
+                <c:ptCount val="5"/>
+                <c:lvl>
+                  <c:pt idx="0">
+                    <c:v>Markup drift</c:v>
+                  </c:pt>
+                  <c:pt idx="1">
+                    <c:v>Anti-bot walls</c:v>
+                  </c:pt>
+                  <c:pt idx="2">
+                    <c:v>Silent empty results</c:v>
+                  </c:pt>
+                  <c:pt idx="3">
+                    <c:v>Rate-limit collisions</c:v>
+                  </c:pt>
+                  <c:pt idx="4">
+                    <c:v>Environment drift</c:v>
+                  </c:pt>
+                </c:lvl>
+              </c:multiLvlStrCache>
+            </c:multiLvlStrRef>
+          </c:cat>
+          <c:val>
+            <c:numRef>
+              <c:f>Sheet1!$B$2:$B$6</c:f>
+              <c:numCache>
+                <c:formatCode>General</c:formatCode>
+                <c:ptCount val="5"/>
+                <c:pt idx="0">
+                  <c:v>35</c:v>
+                </c:pt>
+                <c:pt idx="1">
+                  <c:v>25</c:v>
+                </c:pt>
+                <c:pt idx="2">
+                  <c:v>20</c:v>
+                </c:pt>
+                <c:pt idx="3">
+                  <c:v>12</c:v>
+                </c:pt>
+                <c:pt idx="4">
+                  <c:v>8</c:v>
+                </c:pt>
+              </c:numCache>
+            </c:numRef>
+          </c:val>
+        </c:ser>
+        <c:dLbls>
+          <c:numFmt formatCode="#,##0" sourceLinked="0"/>
+          <c:txPr>
+            <a:bodyPr/>
+            <a:lstStyle/>
+            <a:p>
+              <a:pPr>
+                <a:defRPr b="0" i="0" strike="noStrike" sz="1000" u="none">
+                  <a:solidFill>
+                    <a:srgbClr val="E2E8F0"/>
+                  </a:solidFill>
+                  <a:latin typeface="Segoe UI"/>
+                </a:defRPr>
+              </a:pPr>
+            </a:p>
+          </c:txPr>
+          <c:showLegendKey val="0"/>
+          <c:showVal val="1"/>
+          <c:showCatName val="0"/>
+          <c:showSerName val="0"/>
+          <c:showPercent val="0"/>
+          <c:showBubbleSize val="0"/>
+          <c:showLeaderLines val="0"/>
+        </c:dLbls>
+        <c:gapWidth val="55"/>
+        <c:overlap val="0"/>
+        <c:axId val="2094734554"/>
+        <c:axId val="2094734552"/>
+        <c:axId val="2094734556"/>
+      </c:barChart>
+      <c:catAx>
+        <c:axId val="2094734554"/>
+        <c:scaling>
+          <c:orientation val="minMax"/>
+        </c:scaling>
+        <c:delete val="0"/>
+        <c:axPos val="b"/>
+        <c:numFmt formatCode="General" sourceLinked="1"/>
+        <c:majorTickMark val="out"/>
+        <c:minorTickMark val="none"/>
+        <c:tickLblPos val="low"/>
+        <c:spPr>
+          <a:ln w="12700" cap="flat">
+            <a:solidFill>
+              <a:srgbClr val="24365A"/>
+            </a:solidFill>
+            <a:prstDash val="solid"/>
+            <a:round/>
+          </a:ln>
+        </c:spPr>
+        <c:txPr>
+          <a:bodyPr/>
+          <a:lstStyle/>
+          <a:p>
+            <a:pPr>
+              <a:defRPr sz="1100" b="0" i="0" u="none" strike="noStrike">
+                <a:solidFill>
+                  <a:srgbClr val="94A3B8"/>
+                </a:solidFill>
+                <a:latin typeface="Segoe UI"/>
+              </a:defRPr>
+            </a:pPr>
+            <a:endParaRPr lang="en-US"/>
+          </a:p>
+        </c:txPr>
+        <c:crossAx val="2094734552"/>
+        <c:crosses val="autoZero"/>
+        <c:auto val="1"/>
+        <c:lblAlgn val="ctr"/>
+        <c:noMultiLvlLbl val="1"/>
+      </c:catAx>
+      <c:valAx>
+        <c:axId val="2094734552"/>
+        <c:scaling>
+          <c:orientation val="minMax"/>
+        </c:scaling>
+        <c:delete val="0"/>
+        <c:axPos val="l"/>
+        <c:majorGridlines>
+          <c:spPr>
+            <a:ln w="12700" cap="flat">
+              <a:solidFill>
+                <a:srgbClr val="18243D"/>
+              </a:solidFill>
+              <a:prstDash val="solid"/>
+              <a:round/>
+            </a:ln>
+          </c:spPr>
+        </c:majorGridlines>
+        <c:numFmt formatCode="General" sourceLinked="0"/>
+        <c:majorTickMark val="out"/>
+        <c:minorTickMark val="none"/>
+        <c:tickLblPos val="nextTo"/>
+        <c:spPr>
+          <a:ln w="12700" cap="flat">
+            <a:solidFill>
+              <a:srgbClr val="24365A"/>
+            </a:solidFill>
+            <a:prstDash val="solid"/>
+            <a:round/>
+          </a:ln>
+        </c:spPr>
+        <c:txPr>
+          <a:bodyPr/>
+          <a:lstStyle/>
+          <a:p>
+            <a:pPr>
+              <a:defRPr sz="1000" b="0" i="0" u="none" strike="noStrike">
+                <a:solidFill>
+                  <a:srgbClr val="94A3B8"/>
+                </a:solidFill>
+                <a:latin typeface="Segoe UI"/>
+              </a:defRPr>
+            </a:pPr>
+            <a:endParaRPr lang="en-US"/>
+          </a:p>
+        </c:txPr>
+        <c:crossAx val="2094734554"/>
+        <c:crosses val="autoZero"/>
+        <c:crossBetween val="between"/>
+      </c:valAx>
+      <c:spPr>
+        <a:solidFill>
+          <a:srgbClr val="0D1420"/>
+        </a:solidFill>
+        <a:ln>
+          <a:noFill/>
+        </a:ln>
+        <a:effectLst/>
+      </c:spPr>
+    </c:plotArea>
+    <c:plotVisOnly val="1"/>
+    <c:dispBlanksAs val="span"/>
+  </c:chart>
+  <c:spPr>
+    <a:solidFill>
+      <a:srgbClr val="0D1420"/>
+    </a:solidFill>
+    <a:ln w="12700" cap="flat">
+      <a:solidFill>
+        <a:srgbClr val="24365A"/>
+      </a:solidFill>
+    </a:ln>
+    <a:effectLst/>
+  </c:spPr>
+  <c:externalData r:id="rId1">
+    <c:autoUpdate val="0"/>
+  </c:externalData>
+</c:chartSpace>
+</file>
+
+<file path=ppt/charts/chart38.xml><?xml version="1.0" encoding="utf-8"?>
+<c:chartSpace xmlns:c="http://schemas.openxmlformats.org/drawingml/2006/chart" xmlns:a="http://schemas.openxmlformats.org/drawingml/2006/main" xmlns:r="http://schemas.openxmlformats.org/officeDocument/2006/relationships">
+  <c:date1904 val="0"/>
+  <c:roundedCorners val="1"/>
+  <c:chart>
+    <c:autoTitleDeleted val="1"/>
+    <c:plotArea>
+      <c:layout/>
+      <c:lineChart>
+        <c:varyColors val="0"/>
+        <c:ser>
+          <c:idx val="0"/>
+          <c:order val="0"/>
+          <c:tx>
+            <c:strRef>
+              <c:f>Sheet1!$B$1</c:f>
+              <c:strCache>
+                <c:ptCount val="1"/>
+                <c:pt idx="0">
+                  <c:v>Scope clarity (illustrative index)</c:v>
+                </c:pt>
+              </c:strCache>
+            </c:strRef>
+          </c:tx>
+          <c:spPr>
+            <a:solidFill>
+              <a:srgbClr val="3B82F6"/>
+            </a:solidFill>
+            <a:ln w="31750" cap="flat">
+              <a:solidFill>
+                <a:srgbClr val="3B82F6"/>
+              </a:solidFill>
+              <a:prstDash val="solid"/>
+              <a:round/>
+            </a:ln>
+            <a:effectLst/>
+          </c:spPr>
+          <c:invertIfNegative val="0"/>
+          <c:dLbls>
+            <c:numFmt formatCode="#,##0" sourceLinked="0"/>
+            <c:txPr>
+              <a:bodyPr/>
+              <a:lstStyle/>
+              <a:p>
+                <a:pPr>
+                  <a:defRPr b="0" i="0" strike="noStrike" sz="1200" u="none">
+                    <a:solidFill>
+                      <a:srgbClr val="000000"/>
+                    </a:solidFill>
+                    <a:latin typeface="Arial"/>
+                  </a:defRPr>
+                </a:pPr>
+              </a:p>
+            </c:txPr>
+            <c:showLegendKey val="0"/>
+            <c:showVal val="0"/>
+            <c:showCatName val="0"/>
+            <c:showSerName val="0"/>
+            <c:showPercent val="0"/>
+            <c:showBubbleSize val="0"/>
+            <c:showLeaderLines val="0"/>
+          </c:dLbls>
+          <c:marker>
+            <c:symbol val="circle"/>
+            <c:size val="6"/>
+            <c:spPr>
+              <a:solidFill>
+                <a:srgbClr val="3B82F6"/>
+              </a:solidFill>
+              <a:ln w="9525" cap="flat">
+                <a:solidFill>
+                  <a:srgbClr val="3B82F6"/>
+                </a:solidFill>
+                <a:prstDash val="solid"/>
+                <a:round/>
+              </a:ln>
+              <a:effectLst/>
+            </c:spPr>
+          </c:marker>
+          <c:cat>
+            <c:multiLvlStrRef>
+              <c:f>Sheet1!$A$2:$A$7</c:f>
+              <c:multiLvlStrCache>
+                <c:ptCount val="6"/>
+                <c:lvl>
+                  <c:pt idx="0">
+                    <c:v>Week 1</c:v>
+                  </c:pt>
+                  <c:pt idx="1">
+                    <c:v>Week 2</c:v>
+                  </c:pt>
+                  <c:pt idx="2">
+                    <c:v>Week 3</c:v>
+                  </c:pt>
+                  <c:pt idx="3">
+                    <c:v>Week 4</c:v>
+                  </c:pt>
+                  <c:pt idx="4">
+                    <c:v>Week 5</c:v>
+                  </c:pt>
+                  <c:pt idx="5">
+                    <c:v>Week 6</c:v>
+                  </c:pt>
+                </c:lvl>
+              </c:multiLvlStrCache>
+            </c:multiLvlStrRef>
+          </c:cat>
+          <c:val>
+            <c:numRef>
+              <c:f>Sheet1!$B$2:$B$7</c:f>
+              <c:numCache>
+                <c:formatCode>General</c:formatCode>
+                <c:ptCount val="6"/>
+                <c:pt idx="0">
+                  <c:v>3</c:v>
+                </c:pt>
+                <c:pt idx="1">
+                  <c:v>6</c:v>
+                </c:pt>
+                <c:pt idx="2">
+                  <c:v>8</c:v>
+                </c:pt>
+                <c:pt idx="3">
+                  <c:v>9</c:v>
+                </c:pt>
+                <c:pt idx="4">
+                  <c:v>9</c:v>
+                </c:pt>
+                <c:pt idx="5">
+                  <c:v>10</c:v>
+                </c:pt>
+              </c:numCache>
+            </c:numRef>
+          </c:val>
+          <c:smooth val="0"/>
+        </c:ser>
+        <c:ser>
+          <c:idx val="1"/>
+          <c:order val="1"/>
+          <c:tx>
+            <c:strRef>
+              <c:f>Sheet1!$C$1</c:f>
+              <c:strCache>
+                <c:ptCount val="1"/>
+                <c:pt idx="0">
+                  <c:v>Open surprises (illustrative index)</c:v>
+                </c:pt>
+              </c:strCache>
+            </c:strRef>
+          </c:tx>
+          <c:spPr>
+            <a:solidFill>
+              <a:srgbClr val="06B6D4"/>
+            </a:solidFill>
+            <a:ln w="31750" cap="flat">
+              <a:solidFill>
+                <a:srgbClr val="06B6D4"/>
+              </a:solidFill>
+              <a:prstDash val="solid"/>
+              <a:round/>
+            </a:ln>
+            <a:effectLst/>
+          </c:spPr>
+          <c:invertIfNegative val="0"/>
+          <c:dLbls>
+            <c:numFmt formatCode="#,##0" sourceLinked="0"/>
+            <c:txPr>
+              <a:bodyPr/>
+              <a:lstStyle/>
+              <a:p>
+                <a:pPr>
+                  <a:defRPr b="0" i="0" strike="noStrike" sz="1200" u="none">
+                    <a:solidFill>
+                      <a:srgbClr val="000000"/>
+                    </a:solidFill>
+                    <a:latin typeface="Arial"/>
+                  </a:defRPr>
+                </a:pPr>
+              </a:p>
+            </c:txPr>
+            <c:showLegendKey val="0"/>
+            <c:showVal val="0"/>
+            <c:showCatName val="0"/>
+            <c:showSerName val="0"/>
+            <c:showPercent val="0"/>
+            <c:showBubbleSize val="0"/>
+            <c:showLeaderLines val="0"/>
+          </c:dLbls>
+          <c:marker>
+            <c:symbol val="circle"/>
+            <c:size val="6"/>
+            <c:spPr>
+              <a:solidFill>
+                <a:srgbClr val="06B6D4"/>
+              </a:solidFill>
+              <a:ln w="9525" cap="flat">
+                <a:solidFill>
+                  <a:srgbClr val="06B6D4"/>
+                </a:solidFill>
+                <a:prstDash val="solid"/>
+                <a:round/>
+              </a:ln>
+              <a:effectLst/>
+            </c:spPr>
+          </c:marker>
+          <c:cat>
+            <c:multiLvlStrRef>
+              <c:f>Sheet1!$A$2:$A$7</c:f>
+              <c:multiLvlStrCache>
+                <c:ptCount val="6"/>
+                <c:lvl>
+                  <c:pt idx="0">
+                    <c:v>Week 1</c:v>
+                  </c:pt>
+                  <c:pt idx="1">
+                    <c:v>Week 2</c:v>
+                  </c:pt>
+                  <c:pt idx="2">
+                    <c:v>Week 3</c:v>
+                  </c:pt>
+                  <c:pt idx="3">
+                    <c:v>Week 4</c:v>
+                  </c:pt>
+                  <c:pt idx="4">
+                    <c:v>Week 5</c:v>
+                  </c:pt>
+                  <c:pt idx="5">
+                    <c:v>Week 6</c:v>
+                  </c:pt>
+                </c:lvl>
+              </c:multiLvlStrCache>
+            </c:multiLvlStrRef>
+          </c:cat>
+          <c:val>
+            <c:numRef>
+              <c:f>Sheet1!$C$2:$C$7</c:f>
+              <c:numCache>
+                <c:formatCode>General</c:formatCode>
+                <c:ptCount val="6"/>
+                <c:pt idx="0">
+                  <c:v>7</c:v>
+                </c:pt>
+                <c:pt idx="1">
+                  <c:v>5</c:v>
+                </c:pt>
+                <c:pt idx="2">
+                  <c:v>3</c:v>
+                </c:pt>
+                <c:pt idx="3">
+                  <c:v>2</c:v>
+                </c:pt>
+                <c:pt idx="4">
+                  <c:v>1</c:v>
+                </c:pt>
+                <c:pt idx="5">
+                  <c:v>0</c:v>
+                </c:pt>
+              </c:numCache>
+            </c:numRef>
+          </c:val>
+          <c:smooth val="0"/>
+        </c:ser>
+        <c:dLbls>
+          <c:numFmt formatCode="#,##0" sourceLinked="0"/>
+          <c:txPr>
+            <a:bodyPr/>
+            <a:lstStyle/>
+            <a:p>
+              <a:pPr>
+                <a:defRPr b="0" i="0" strike="noStrike" sz="1200" u="none">
+                  <a:solidFill>
+                    <a:srgbClr val="000000"/>
+                  </a:solidFill>
+                  <a:latin typeface="Arial"/>
+                </a:defRPr>
+              </a:pPr>
+            </a:p>
+          </c:txPr>
+          <c:showLegendKey val="0"/>
+          <c:showVal val="0"/>
+          <c:showCatName val="0"/>
+          <c:showSerName val="0"/>
+          <c:showPercent val="0"/>
+          <c:showBubbleSize val="0"/>
+          <c:showLeaderLines val="0"/>
+        </c:dLbls>
+        <c:marker val="1"/>
+        <c:axId val="2094734554"/>
+        <c:axId val="2094734552"/>
+        <c:axId val="2094734556"/>
+      </c:lineChart>
+      <c:catAx>
+        <c:axId val="2094734554"/>
+        <c:scaling>
+          <c:orientation val="minMax"/>
+        </c:scaling>
+        <c:delete val="0"/>
+        <c:axPos val="b"/>
+        <c:numFmt formatCode="General" sourceLinked="1"/>
+        <c:majorTickMark val="out"/>
+        <c:minorTickMark val="none"/>
+        <c:tickLblPos val="low"/>
+        <c:spPr>
+          <a:ln w="12700" cap="flat">
+            <a:solidFill>
+              <a:srgbClr val="24365A"/>
+            </a:solidFill>
+            <a:prstDash val="solid"/>
+            <a:round/>
+          </a:ln>
+        </c:spPr>
+        <c:txPr>
+          <a:bodyPr/>
+          <a:lstStyle/>
+          <a:p>
+            <a:pPr>
+              <a:defRPr sz="1100" b="0" i="0" u="none" strike="noStrike">
+                <a:solidFill>
+                  <a:srgbClr val="94A3B8"/>
+                </a:solidFill>
+                <a:latin typeface="Segoe UI"/>
+              </a:defRPr>
+            </a:pPr>
+            <a:endParaRPr lang="en-US"/>
+          </a:p>
+        </c:txPr>
+        <c:crossAx val="2094734552"/>
+        <c:crosses val="autoZero"/>
+        <c:auto val="1"/>
+        <c:lblAlgn val="ctr"/>
+        <c:noMultiLvlLbl val="1"/>
+      </c:catAx>
+      <c:valAx>
+        <c:axId val="2094734552"/>
+        <c:scaling>
+          <c:orientation val="minMax"/>
+        </c:scaling>
+        <c:delete val="0"/>
+        <c:axPos val="l"/>
+        <c:majorGridlines>
+          <c:spPr>
+            <a:ln w="12700" cap="flat">
+              <a:solidFill>
+                <a:srgbClr val="18243D"/>
+              </a:solidFill>
+              <a:prstDash val="solid"/>
+              <a:round/>
+            </a:ln>
+          </c:spPr>
+        </c:majorGridlines>
+        <c:numFmt formatCode="General" sourceLinked="0"/>
+        <c:majorTickMark val="out"/>
+        <c:minorTickMark val="none"/>
+        <c:tickLblPos val="nextTo"/>
+        <c:spPr>
+          <a:ln w="12700" cap="flat">
+            <a:solidFill>
+              <a:srgbClr val="24365A"/>
+            </a:solidFill>
+            <a:prstDash val="solid"/>
+            <a:round/>
+          </a:ln>
+        </c:spPr>
+        <c:txPr>
+          <a:bodyPr/>
+          <a:lstStyle/>
+          <a:p>
+            <a:pPr>
+              <a:defRPr sz="1000" b="0" i="0" u="none" strike="noStrike">
+                <a:solidFill>
+                  <a:srgbClr val="94A3B8"/>
+                </a:solidFill>
+                <a:latin typeface="Segoe UI"/>
+              </a:defRPr>
+            </a:pPr>
+            <a:endParaRPr lang="en-US"/>
+          </a:p>
+        </c:txPr>
+        <c:crossAx val="2094734554"/>
+        <c:crosses val="autoZero"/>
+        <c:crossBetween val="between"/>
+      </c:valAx>
+      <c:spPr>
+        <a:solidFill>
+          <a:srgbClr val="0D1420"/>
+        </a:solidFill>
+        <a:ln>
+          <a:noFill/>
+        </a:ln>
+        <a:effectLst/>
+      </c:spPr>
+    </c:plotArea>
+    <c:legend>
+      <c:legendPos val="b"/>
+      <c:overlay val="0"/>
+      <c:txPr>
+        <a:bodyPr/>
+        <a:lstStyle/>
+        <a:p>
+          <a:pPr>
+            <a:defRPr sz="1100">
+              <a:solidFill>
+                <a:srgbClr val="CBD5E1"/>
+              </a:solidFill>
+              <a:latin typeface="Segoe UI"/>
+              <a:cs typeface="Segoe UI"/>
+            </a:defRPr>
+          </a:pPr>
+          <a:endParaRPr lang="en-US"/>
+        </a:p>
+      </c:txPr>
+    </c:legend>
+    <c:plotVisOnly val="1"/>
+    <c:dispBlanksAs val="span"/>
+  </c:chart>
+  <c:spPr>
+    <a:solidFill>
+      <a:srgbClr val="0D1420"/>
+    </a:solidFill>
+    <a:ln w="12700" cap="flat">
+      <a:solidFill>
+        <a:srgbClr val="24365A"/>
+      </a:solidFill>
+    </a:ln>
+    <a:effectLst/>
+  </c:spPr>
+  <c:externalData r:id="rId1">
+    <c:autoUpdate val="0"/>
+  </c:externalData>
+</c:chartSpace>
+</file>
+
+<file path=ppt/charts/chart39.xml><?xml version="1.0" encoding="utf-8"?>
+<c:chartSpace xmlns:c="http://schemas.openxmlformats.org/drawingml/2006/chart" xmlns:a="http://schemas.openxmlformats.org/drawingml/2006/main" xmlns:r="http://schemas.openxmlformats.org/officeDocument/2006/relationships">
+  <c:date1904 val="0"/>
+  <c:roundedCorners val="1"/>
+  <c:chart>
+    <c:autoTitleDeleted val="1"/>
+    <c:plotArea>
+      <c:layout/>
+      <c:doughnutChart>
+        <c:varyColors val="1"/>
+        <c:ser>
+          <c:idx val="0"/>
+          <c:order val="0"/>
+          <c:tx>
+            <c:strRef>
+              <c:f>Sheet1!$B$1</c:f>
+              <c:strCache>
+                <c:ptCount val="1"/>
+                <c:pt idx="0">
+                  <c:v>Breakdown</c:v>
+                </c:pt>
+              </c:strCache>
+            </c:strRef>
+          </c:tx>
+          <c:spPr>
+            <a:solidFill>
+              <a:schemeClr val="accent1"/>
+            </a:solidFill>
+            <a:ln w="9525" cap="flat">
+              <a:solidFill>
+                <a:srgbClr val="F9F9F9"/>
+              </a:solidFill>
+              <a:prstDash val="solid"/>
+              <a:round/>
+            </a:ln>
+            <a:effectLst/>
+          </c:spPr>
+          <c:dPt>
+            <c:idx val="0"/>
+            <c:bubble3D val="0"/>
+            <c:spPr>
+              <a:solidFill>
+                <a:srgbClr val="3B82F6"/>
+              </a:solidFill>
+              <a:effectLst/>
+            </c:spPr>
+          </c:dPt>
+          <c:dPt>
+            <c:idx val="1"/>
+            <c:bubble3D val="0"/>
+            <c:spPr>
+              <a:solidFill>
+                <a:srgbClr val="06B6D4"/>
+              </a:solidFill>
+              <a:effectLst/>
+            </c:spPr>
+          </c:dPt>
+          <c:dPt>
+            <c:idx val="2"/>
+            <c:bubble3D val="0"/>
+            <c:spPr>
+              <a:solidFill>
+                <a:srgbClr val="22D3A0"/>
+              </a:solidFill>
+              <a:effectLst/>
+            </c:spPr>
+          </c:dPt>
+          <c:dPt>
+            <c:idx val="3"/>
+            <c:bubble3D val="0"/>
+            <c:spPr>
+              <a:solidFill>
+                <a:srgbClr val="F59E0B"/>
+              </a:solidFill>
+              <a:effectLst/>
+            </c:spPr>
+          </c:dPt>
+          <c:dLbls>
+            <c:dLbl>
+              <c:idx val="0"/>
+              <c:numFmt formatCode="0%" sourceLinked="0"/>
+              <c:spPr/>
+              <c:txPr>
+                <a:bodyPr/>
+                <a:lstStyle/>
+                <a:p>
+                  <a:pPr>
+                    <a:defRPr sz="1000" b="0" i="0" u="none" strike="noStrike">
+                      <a:solidFill>
+                        <a:srgbClr val="E2E8F0"/>
+                      </a:solidFill>
+                      <a:latin typeface="Segoe UI"/>
+                    </a:defRPr>
+                  </a:pPr>
+                </a:p>
+              </c:txPr>
+              <c:showLegendKey val="0"/>
+              <c:showVal val="0"/>
+              <c:showCatName val="0"/>
+              <c:showSerName val="0"/>
+              <c:showPercent val="1"/>
+              <c:showBubbleSize val="0"/>
+            </c:dLbl>
+            <c:dLbl>
+              <c:idx val="1"/>
+              <c:numFmt formatCode="0%" sourceLinked="0"/>
+              <c:spPr/>
+              <c:txPr>
+                <a:bodyPr/>
+                <a:lstStyle/>
+                <a:p>
+                  <a:pPr>
+                    <a:defRPr sz="1000" b="0" i="0" u="none" strike="noStrike">
+                      <a:solidFill>
+                        <a:srgbClr val="E2E8F0"/>
+                      </a:solidFill>
+                      <a:latin typeface="Segoe UI"/>
+                    </a:defRPr>
+                  </a:pPr>
+                </a:p>
+              </c:txPr>
+              <c:showLegendKey val="0"/>
+              <c:showVal val="0"/>
+              <c:showCatName val="0"/>
+              <c:showSerName val="0"/>
+              <c:showPercent val="1"/>
+              <c:showBubbleSize val="0"/>
+            </c:dLbl>
+            <c:dLbl>
+              <c:idx val="2"/>
+              <c:numFmt formatCode="0%" sourceLinked="0"/>
+              <c:spPr/>
+              <c:txPr>
+                <a:bodyPr/>
+                <a:lstStyle/>
+                <a:p>
+                  <a:pPr>
+                    <a:defRPr sz="1000" b="0" i="0" u="none" strike="noStrike">
+                      <a:solidFill>
+                        <a:srgbClr val="E2E8F0"/>
+                      </a:solidFill>
+                      <a:latin typeface="Segoe UI"/>
+                    </a:defRPr>
+                  </a:pPr>
+                </a:p>
+              </c:txPr>
+              <c:showLegendKey val="0"/>
+              <c:showVal val="0"/>
+              <c:showCatName val="0"/>
+              <c:showSerName val="0"/>
+              <c:showPercent val="1"/>
+              <c:showBubbleSize val="0"/>
+            </c:dLbl>
+            <c:dLbl>
+              <c:idx val="3"/>
+              <c:numFmt formatCode="0%" sourceLinked="0"/>
+              <c:spPr/>
+              <c:txPr>
+                <a:bodyPr/>
+                <a:lstStyle/>
+                <a:p>
+                  <a:pPr>
+                    <a:defRPr sz="1000" b="0" i="0" u="none" strike="noStrike">
+                      <a:solidFill>
+                        <a:srgbClr val="E2E8F0"/>
+                      </a:solidFill>
+                      <a:latin typeface="Segoe UI"/>
+                    </a:defRPr>
+                  </a:pPr>
+                </a:p>
+              </c:txPr>
+              <c:showLegendKey val="0"/>
+              <c:showVal val="0"/>
+              <c:showCatName val="0"/>
+              <c:showSerName val="0"/>
+              <c:showPercent val="1"/>
+              <c:showBubbleSize val="0"/>
+            </c:dLbl>
+            <c:numFmt formatCode="0%" sourceLinked="0"/>
+            <c:txPr>
+              <a:bodyPr/>
+              <a:lstStyle/>
+              <a:p>
+                <a:pPr>
+                  <a:defRPr sz="1800" b="0" i="0" u="none" strike="noStrike">
+                    <a:solidFill>
+                      <a:srgbClr val="000000"/>
+                    </a:solidFill>
+                    <a:latin typeface="Arial"/>
+                  </a:defRPr>
+                </a:pPr>
+              </a:p>
+            </c:txPr>
+            <c:showLegendKey val="0"/>
+            <c:showVal val="0"/>
+            <c:showCatName val="1"/>
+            <c:showSerName val="0"/>
+            <c:showPercent val="1"/>
+            <c:showBubbleSize val="0"/>
+            <c:showLeaderLines val="0"/>
+          </c:dLbls>
+          <c:cat>
+            <c:strRef>
+              <c:f>Sheet1!$A$2:$A$5</c:f>
+              <c:strCache>
+                <c:ptCount val="4"/>
+                <c:pt idx="0">
+                  <c:v>Build &amp; automation</c:v>
+                </c:pt>
+                <c:pt idx="1">
+                  <c:v>Validation &amp; QA</c:v>
+                </c:pt>
+                <c:pt idx="2">
+                  <c:v>Scoping &amp; definitions</c:v>
+                </c:pt>
+                <c:pt idx="3">
+                  <c:v>Docs &amp; handover</c:v>
+                </c:pt>
+              </c:strCache>
+            </c:strRef>
+          </c:cat>
+          <c:val>
+            <c:numRef>
+              <c:f>Sheet1!$B$2:$B$5</c:f>
+              <c:numCache>
+                <c:ptCount val="4"/>
+                <c:pt idx="0">
+                  <c:v>40</c:v>
+                </c:pt>
+                <c:pt idx="1">
+                  <c:v>25</c:v>
+                </c:pt>
+                <c:pt idx="2">
+                  <c:v>20</c:v>
+                </c:pt>
+                <c:pt idx="3">
+                  <c:v>15</c:v>
+                </c:pt>
+              </c:numCache>
+            </c:numRef>
+          </c:val>
+        </c:ser>
+        <c:firstSliceAng val="0"/>
+        <c:holeSize val="62"/>
+      </c:doughnutChart>
+      <c:spPr>
+        <a:solidFill>
+          <a:srgbClr val="0D1420"/>
+        </a:solidFill>
+        <a:ln>
+          <a:noFill/>
+        </a:ln>
+        <a:effectLst/>
+      </c:spPr>
+    </c:plotArea>
+    <c:legend>
+      <c:legendPos val="r"/>
+      <c:overlay val="0"/>
+      <c:txPr>
+        <a:bodyPr/>
+        <a:lstStyle/>
+        <a:p>
+          <a:pPr>
+            <a:defRPr sz="1100">
+              <a:solidFill>
+                <a:srgbClr val="CBD5E1"/>
+              </a:solidFill>
+              <a:latin typeface="Segoe UI"/>
+              <a:cs typeface="Segoe UI"/>
+            </a:defRPr>
+          </a:pPr>
+          <a:endParaRPr lang="en-US"/>
+        </a:p>
+      </c:txPr>
+    </c:legend>
+    <c:plotVisOnly val="1"/>
+    <c:dispBlanksAs val="span"/>
+  </c:chart>
+  <c:spPr>
+    <a:solidFill>
+      <a:srgbClr val="0D1420"/>
+    </a:solidFill>
+    <a:ln w="12700" cap="flat">
+      <a:solidFill>
+        <a:srgbClr val="24365A"/>
+      </a:solidFill>
+    </a:ln>
+    <a:effectLst/>
+  </c:spPr>
+  <c:externalData r:id="rId1">
+    <c:autoUpdate val="0"/>
+  </c:externalData>
+</c:chartSpace>
 </file>
 
 <file path=ppt/notesMasters/notesMaster1.xml><?xml version="1.0" encoding="utf-8"?>
@@ -551,6 +1597,446 @@
 </p:notes>
 </file>
 
+<file path=ppt/notesSlides/notesSlide10.xml><?xml version="1.0" encoding="utf-8"?>
+<p:notes xmlns:a="http://schemas.openxmlformats.org/drawingml/2006/main" xmlns:r="http://schemas.openxmlformats.org/officeDocument/2006/relationships" xmlns:p="http://schemas.openxmlformats.org/presentationml/2006/main">
+  <p:cSld>
+    <p:spTree>
+      <p:nvGrpSpPr>
+        <p:cNvPr id="1" name=""/>
+        <p:cNvGrpSpPr/>
+        <p:nvPr/>
+      </p:nvGrpSpPr>
+      <p:grpSpPr>
+        <a:xfrm>
+          <a:off x="0" y="0"/>
+          <a:ext cx="0" cy="0"/>
+          <a:chOff x="0" y="0"/>
+          <a:chExt cx="0" cy="0"/>
+        </a:xfrm>
+      </p:grpSpPr>
+      <p:sp>
+        <p:nvSpPr>
+          <p:cNvPr id="2" name="Slide Image Placeholder 1"/>
+          <p:cNvSpPr>
+            <a:spLocks noGrp="1" noRot="1" noChangeAspect="1"/>
+          </p:cNvSpPr>
+          <p:nvPr>
+            <p:ph type="sldImg"/>
+          </p:nvPr>
+        </p:nvSpPr>
+        <p:spPr/>
+      </p:sp>
+      <p:sp>
+        <p:nvSpPr>
+          <p:cNvPr id="3" name="Notes Placeholder 2"/>
+          <p:cNvSpPr>
+            <a:spLocks noGrp="1"/>
+          </p:cNvSpPr>
+          <p:nvPr>
+            <p:ph type="body" idx="1"/>
+          </p:nvPr>
+        </p:nvSpPr>
+        <p:spPr/>
+        <p:txBody>
+          <a:bodyPr/>
+          <a:lstStyle/>
+          <a:p>
+            <a:r>
+              <a:rPr lang="en-US" dirty="0"/>
+              <a:t/>
+            </a:r>
+            <a:endParaRPr lang="en-US" dirty="0"/>
+          </a:p>
+        </p:txBody>
+      </p:sp>
+      <p:sp>
+        <p:nvSpPr>
+          <p:cNvPr id="4" name="Slide Number Placeholder 3"/>
+          <p:cNvSpPr>
+            <a:spLocks noGrp="1"/>
+          </p:cNvSpPr>
+          <p:nvPr>
+            <p:ph type="sldNum" sz="quarter" idx="10"/>
+          </p:nvPr>
+        </p:nvSpPr>
+        <p:spPr/>
+        <p:txBody>
+          <a:bodyPr/>
+          <a:lstStyle/>
+          <a:p>
+            <a:fld id="{F7021451-1387-4CA6-816F-3879F97B5CBC}" type="slidenum">
+              <a:rPr lang="en-US"/>
+              <a:t>10</a:t>
+            </a:fld>
+            <a:endParaRPr lang="en-US"/>
+          </a:p>
+        </p:txBody>
+      </p:sp>
+    </p:spTree>
+    <p:extLst>
+      <p:ext uri="{BB962C8B-B14F-4D97-AF65-F5344CB8AC3E}">
+        <p14:creationId xmlns:p14="http://schemas.microsoft.com/office/powerpoint/2010/main" val="1024086991"/>
+      </p:ext>
+    </p:extLst>
+  </p:cSld>
+  <p:clrMapOvr>
+    <a:masterClrMapping/>
+  </p:clrMapOvr>
+</p:notes>
+</file>
+
+<file path=ppt/notesSlides/notesSlide11.xml><?xml version="1.0" encoding="utf-8"?>
+<p:notes xmlns:a="http://schemas.openxmlformats.org/drawingml/2006/main" xmlns:r="http://schemas.openxmlformats.org/officeDocument/2006/relationships" xmlns:p="http://schemas.openxmlformats.org/presentationml/2006/main">
+  <p:cSld>
+    <p:spTree>
+      <p:nvGrpSpPr>
+        <p:cNvPr id="1" name=""/>
+        <p:cNvGrpSpPr/>
+        <p:nvPr/>
+      </p:nvGrpSpPr>
+      <p:grpSpPr>
+        <a:xfrm>
+          <a:off x="0" y="0"/>
+          <a:ext cx="0" cy="0"/>
+          <a:chOff x="0" y="0"/>
+          <a:chExt cx="0" cy="0"/>
+        </a:xfrm>
+      </p:grpSpPr>
+      <p:sp>
+        <p:nvSpPr>
+          <p:cNvPr id="2" name="Slide Image Placeholder 1"/>
+          <p:cNvSpPr>
+            <a:spLocks noGrp="1" noRot="1" noChangeAspect="1"/>
+          </p:cNvSpPr>
+          <p:nvPr>
+            <p:ph type="sldImg"/>
+          </p:nvPr>
+        </p:nvSpPr>
+        <p:spPr/>
+      </p:sp>
+      <p:sp>
+        <p:nvSpPr>
+          <p:cNvPr id="3" name="Notes Placeholder 2"/>
+          <p:cNvSpPr>
+            <a:spLocks noGrp="1"/>
+          </p:cNvSpPr>
+          <p:nvPr>
+            <p:ph type="body" idx="1"/>
+          </p:nvPr>
+        </p:nvSpPr>
+        <p:spPr/>
+        <p:txBody>
+          <a:bodyPr/>
+          <a:lstStyle/>
+          <a:p>
+            <a:r>
+              <a:rPr lang="en-US" dirty="0"/>
+              <a:t/>
+            </a:r>
+            <a:endParaRPr lang="en-US" dirty="0"/>
+          </a:p>
+        </p:txBody>
+      </p:sp>
+      <p:sp>
+        <p:nvSpPr>
+          <p:cNvPr id="4" name="Slide Number Placeholder 3"/>
+          <p:cNvSpPr>
+            <a:spLocks noGrp="1"/>
+          </p:cNvSpPr>
+          <p:nvPr>
+            <p:ph type="sldNum" sz="quarter" idx="10"/>
+          </p:nvPr>
+        </p:nvSpPr>
+        <p:spPr/>
+        <p:txBody>
+          <a:bodyPr/>
+          <a:lstStyle/>
+          <a:p>
+            <a:fld id="{F7021451-1387-4CA6-816F-3879F97B5CBC}" type="slidenum">
+              <a:rPr lang="en-US"/>
+              <a:t>11</a:t>
+            </a:fld>
+            <a:endParaRPr lang="en-US"/>
+          </a:p>
+        </p:txBody>
+      </p:sp>
+    </p:spTree>
+    <p:extLst>
+      <p:ext uri="{BB962C8B-B14F-4D97-AF65-F5344CB8AC3E}">
+        <p14:creationId xmlns:p14="http://schemas.microsoft.com/office/powerpoint/2010/main" val="1024086991"/>
+      </p:ext>
+    </p:extLst>
+  </p:cSld>
+  <p:clrMapOvr>
+    <a:masterClrMapping/>
+  </p:clrMapOvr>
+</p:notes>
+</file>
+
+<file path=ppt/notesSlides/notesSlide12.xml><?xml version="1.0" encoding="utf-8"?>
+<p:notes xmlns:a="http://schemas.openxmlformats.org/drawingml/2006/main" xmlns:r="http://schemas.openxmlformats.org/officeDocument/2006/relationships" xmlns:p="http://schemas.openxmlformats.org/presentationml/2006/main">
+  <p:cSld>
+    <p:spTree>
+      <p:nvGrpSpPr>
+        <p:cNvPr id="1" name=""/>
+        <p:cNvGrpSpPr/>
+        <p:nvPr/>
+      </p:nvGrpSpPr>
+      <p:grpSpPr>
+        <a:xfrm>
+          <a:off x="0" y="0"/>
+          <a:ext cx="0" cy="0"/>
+          <a:chOff x="0" y="0"/>
+          <a:chExt cx="0" cy="0"/>
+        </a:xfrm>
+      </p:grpSpPr>
+      <p:sp>
+        <p:nvSpPr>
+          <p:cNvPr id="2" name="Slide Image Placeholder 1"/>
+          <p:cNvSpPr>
+            <a:spLocks noGrp="1" noRot="1" noChangeAspect="1"/>
+          </p:cNvSpPr>
+          <p:nvPr>
+            <p:ph type="sldImg"/>
+          </p:nvPr>
+        </p:nvSpPr>
+        <p:spPr/>
+      </p:sp>
+      <p:sp>
+        <p:nvSpPr>
+          <p:cNvPr id="3" name="Notes Placeholder 2"/>
+          <p:cNvSpPr>
+            <a:spLocks noGrp="1"/>
+          </p:cNvSpPr>
+          <p:nvPr>
+            <p:ph type="body" idx="1"/>
+          </p:nvPr>
+        </p:nvSpPr>
+        <p:spPr/>
+        <p:txBody>
+          <a:bodyPr/>
+          <a:lstStyle/>
+          <a:p>
+            <a:r>
+              <a:rPr lang="en-US" dirty="0"/>
+              <a:t/>
+            </a:r>
+            <a:endParaRPr lang="en-US" dirty="0"/>
+          </a:p>
+        </p:txBody>
+      </p:sp>
+      <p:sp>
+        <p:nvSpPr>
+          <p:cNvPr id="4" name="Slide Number Placeholder 3"/>
+          <p:cNvSpPr>
+            <a:spLocks noGrp="1"/>
+          </p:cNvSpPr>
+          <p:nvPr>
+            <p:ph type="sldNum" sz="quarter" idx="10"/>
+          </p:nvPr>
+        </p:nvSpPr>
+        <p:spPr/>
+        <p:txBody>
+          <a:bodyPr/>
+          <a:lstStyle/>
+          <a:p>
+            <a:fld id="{F7021451-1387-4CA6-816F-3879F97B5CBC}" type="slidenum">
+              <a:rPr lang="en-US"/>
+              <a:t>12</a:t>
+            </a:fld>
+            <a:endParaRPr lang="en-US"/>
+          </a:p>
+        </p:txBody>
+      </p:sp>
+    </p:spTree>
+    <p:extLst>
+      <p:ext uri="{BB962C8B-B14F-4D97-AF65-F5344CB8AC3E}">
+        <p14:creationId xmlns:p14="http://schemas.microsoft.com/office/powerpoint/2010/main" val="1024086991"/>
+      </p:ext>
+    </p:extLst>
+  </p:cSld>
+  <p:clrMapOvr>
+    <a:masterClrMapping/>
+  </p:clrMapOvr>
+</p:notes>
+</file>
+
+<file path=ppt/notesSlides/notesSlide13.xml><?xml version="1.0" encoding="utf-8"?>
+<p:notes xmlns:a="http://schemas.openxmlformats.org/drawingml/2006/main" xmlns:r="http://schemas.openxmlformats.org/officeDocument/2006/relationships" xmlns:p="http://schemas.openxmlformats.org/presentationml/2006/main">
+  <p:cSld>
+    <p:spTree>
+      <p:nvGrpSpPr>
+        <p:cNvPr id="1" name=""/>
+        <p:cNvGrpSpPr/>
+        <p:nvPr/>
+      </p:nvGrpSpPr>
+      <p:grpSpPr>
+        <a:xfrm>
+          <a:off x="0" y="0"/>
+          <a:ext cx="0" cy="0"/>
+          <a:chOff x="0" y="0"/>
+          <a:chExt cx="0" cy="0"/>
+        </a:xfrm>
+      </p:grpSpPr>
+      <p:sp>
+        <p:nvSpPr>
+          <p:cNvPr id="2" name="Slide Image Placeholder 1"/>
+          <p:cNvSpPr>
+            <a:spLocks noGrp="1" noRot="1" noChangeAspect="1"/>
+          </p:cNvSpPr>
+          <p:nvPr>
+            <p:ph type="sldImg"/>
+          </p:nvPr>
+        </p:nvSpPr>
+        <p:spPr/>
+      </p:sp>
+      <p:sp>
+        <p:nvSpPr>
+          <p:cNvPr id="3" name="Notes Placeholder 2"/>
+          <p:cNvSpPr>
+            <a:spLocks noGrp="1"/>
+          </p:cNvSpPr>
+          <p:nvPr>
+            <p:ph type="body" idx="1"/>
+          </p:nvPr>
+        </p:nvSpPr>
+        <p:spPr/>
+        <p:txBody>
+          <a:bodyPr/>
+          <a:lstStyle/>
+          <a:p>
+            <a:r>
+              <a:rPr lang="en-US" dirty="0"/>
+              <a:t/>
+            </a:r>
+            <a:endParaRPr lang="en-US" dirty="0"/>
+          </a:p>
+        </p:txBody>
+      </p:sp>
+      <p:sp>
+        <p:nvSpPr>
+          <p:cNvPr id="4" name="Slide Number Placeholder 3"/>
+          <p:cNvSpPr>
+            <a:spLocks noGrp="1"/>
+          </p:cNvSpPr>
+          <p:nvPr>
+            <p:ph type="sldNum" sz="quarter" idx="10"/>
+          </p:nvPr>
+        </p:nvSpPr>
+        <p:spPr/>
+        <p:txBody>
+          <a:bodyPr/>
+          <a:lstStyle/>
+          <a:p>
+            <a:fld id="{F7021451-1387-4CA6-816F-3879F97B5CBC}" type="slidenum">
+              <a:rPr lang="en-US"/>
+              <a:t>13</a:t>
+            </a:fld>
+            <a:endParaRPr lang="en-US"/>
+          </a:p>
+        </p:txBody>
+      </p:sp>
+    </p:spTree>
+    <p:extLst>
+      <p:ext uri="{BB962C8B-B14F-4D97-AF65-F5344CB8AC3E}">
+        <p14:creationId xmlns:p14="http://schemas.microsoft.com/office/powerpoint/2010/main" val="1024086991"/>
+      </p:ext>
+    </p:extLst>
+  </p:cSld>
+  <p:clrMapOvr>
+    <a:masterClrMapping/>
+  </p:clrMapOvr>
+</p:notes>
+</file>
+
+<file path=ppt/notesSlides/notesSlide14.xml><?xml version="1.0" encoding="utf-8"?>
+<p:notes xmlns:a="http://schemas.openxmlformats.org/drawingml/2006/main" xmlns:r="http://schemas.openxmlformats.org/officeDocument/2006/relationships" xmlns:p="http://schemas.openxmlformats.org/presentationml/2006/main">
+  <p:cSld>
+    <p:spTree>
+      <p:nvGrpSpPr>
+        <p:cNvPr id="1" name=""/>
+        <p:cNvGrpSpPr/>
+        <p:nvPr/>
+      </p:nvGrpSpPr>
+      <p:grpSpPr>
+        <a:xfrm>
+          <a:off x="0" y="0"/>
+          <a:ext cx="0" cy="0"/>
+          <a:chOff x="0" y="0"/>
+          <a:chExt cx="0" cy="0"/>
+        </a:xfrm>
+      </p:grpSpPr>
+      <p:sp>
+        <p:nvSpPr>
+          <p:cNvPr id="2" name="Slide Image Placeholder 1"/>
+          <p:cNvSpPr>
+            <a:spLocks noGrp="1" noRot="1" noChangeAspect="1"/>
+          </p:cNvSpPr>
+          <p:nvPr>
+            <p:ph type="sldImg"/>
+          </p:nvPr>
+        </p:nvSpPr>
+        <p:spPr/>
+      </p:sp>
+      <p:sp>
+        <p:nvSpPr>
+          <p:cNvPr id="3" name="Notes Placeholder 2"/>
+          <p:cNvSpPr>
+            <a:spLocks noGrp="1"/>
+          </p:cNvSpPr>
+          <p:nvPr>
+            <p:ph type="body" idx="1"/>
+          </p:nvPr>
+        </p:nvSpPr>
+        <p:spPr/>
+        <p:txBody>
+          <a:bodyPr/>
+          <a:lstStyle/>
+          <a:p>
+            <a:r>
+              <a:rPr lang="en-US" dirty="0"/>
+              <a:t/>
+            </a:r>
+            <a:endParaRPr lang="en-US" dirty="0"/>
+          </a:p>
+        </p:txBody>
+      </p:sp>
+      <p:sp>
+        <p:nvSpPr>
+          <p:cNvPr id="4" name="Slide Number Placeholder 3"/>
+          <p:cNvSpPr>
+            <a:spLocks noGrp="1"/>
+          </p:cNvSpPr>
+          <p:nvPr>
+            <p:ph type="sldNum" sz="quarter" idx="10"/>
+          </p:nvPr>
+        </p:nvSpPr>
+        <p:spPr/>
+        <p:txBody>
+          <a:bodyPr/>
+          <a:lstStyle/>
+          <a:p>
+            <a:fld id="{F7021451-1387-4CA6-816F-3879F97B5CBC}" type="slidenum">
+              <a:rPr lang="en-US"/>
+              <a:t>14</a:t>
+            </a:fld>
+            <a:endParaRPr lang="en-US"/>
+          </a:p>
+        </p:txBody>
+      </p:sp>
+    </p:spTree>
+    <p:extLst>
+      <p:ext uri="{BB962C8B-B14F-4D97-AF65-F5344CB8AC3E}">
+        <p14:creationId xmlns:p14="http://schemas.microsoft.com/office/powerpoint/2010/main" val="1024086991"/>
+      </p:ext>
+    </p:extLst>
+  </p:cSld>
+  <p:clrMapOvr>
+    <a:masterClrMapping/>
+  </p:clrMapOvr>
+</p:notes>
+</file>
+
 <file path=ppt/notesSlides/notesSlide2.xml><?xml version="1.0" encoding="utf-8"?>
 <p:notes xmlns:a="http://schemas.openxmlformats.org/drawingml/2006/main" xmlns:r="http://schemas.openxmlformats.org/officeDocument/2006/relationships" xmlns:p="http://schemas.openxmlformats.org/presentationml/2006/main">
   <p:cSld>
@@ -1149,6 +2635,94 @@
             <a:fld id="{F7021451-1387-4CA6-816F-3879F97B5CBC}" type="slidenum">
               <a:rPr lang="en-US"/>
               <a:t>8</a:t>
+            </a:fld>
+            <a:endParaRPr lang="en-US"/>
+          </a:p>
+        </p:txBody>
+      </p:sp>
+    </p:spTree>
+    <p:extLst>
+      <p:ext uri="{BB962C8B-B14F-4D97-AF65-F5344CB8AC3E}">
+        <p14:creationId xmlns:p14="http://schemas.microsoft.com/office/powerpoint/2010/main" val="1024086991"/>
+      </p:ext>
+    </p:extLst>
+  </p:cSld>
+  <p:clrMapOvr>
+    <a:masterClrMapping/>
+  </p:clrMapOvr>
+</p:notes>
+</file>
+
+<file path=ppt/notesSlides/notesSlide9.xml><?xml version="1.0" encoding="utf-8"?>
+<p:notes xmlns:a="http://schemas.openxmlformats.org/drawingml/2006/main" xmlns:r="http://schemas.openxmlformats.org/officeDocument/2006/relationships" xmlns:p="http://schemas.openxmlformats.org/presentationml/2006/main">
+  <p:cSld>
+    <p:spTree>
+      <p:nvGrpSpPr>
+        <p:cNvPr id="1" name=""/>
+        <p:cNvGrpSpPr/>
+        <p:nvPr/>
+      </p:nvGrpSpPr>
+      <p:grpSpPr>
+        <a:xfrm>
+          <a:off x="0" y="0"/>
+          <a:ext cx="0" cy="0"/>
+          <a:chOff x="0" y="0"/>
+          <a:chExt cx="0" cy="0"/>
+        </a:xfrm>
+      </p:grpSpPr>
+      <p:sp>
+        <p:nvSpPr>
+          <p:cNvPr id="2" name="Slide Image Placeholder 1"/>
+          <p:cNvSpPr>
+            <a:spLocks noGrp="1" noRot="1" noChangeAspect="1"/>
+          </p:cNvSpPr>
+          <p:nvPr>
+            <p:ph type="sldImg"/>
+          </p:nvPr>
+        </p:nvSpPr>
+        <p:spPr/>
+      </p:sp>
+      <p:sp>
+        <p:nvSpPr>
+          <p:cNvPr id="3" name="Notes Placeholder 2"/>
+          <p:cNvSpPr>
+            <a:spLocks noGrp="1"/>
+          </p:cNvSpPr>
+          <p:nvPr>
+            <p:ph type="body" idx="1"/>
+          </p:nvPr>
+        </p:nvSpPr>
+        <p:spPr/>
+        <p:txBody>
+          <a:bodyPr/>
+          <a:lstStyle/>
+          <a:p>
+            <a:r>
+              <a:rPr lang="en-US" dirty="0"/>
+              <a:t/>
+            </a:r>
+            <a:endParaRPr lang="en-US" dirty="0"/>
+          </a:p>
+        </p:txBody>
+      </p:sp>
+      <p:sp>
+        <p:nvSpPr>
+          <p:cNvPr id="4" name="Slide Number Placeholder 3"/>
+          <p:cNvSpPr>
+            <a:spLocks noGrp="1"/>
+          </p:cNvSpPr>
+          <p:nvPr>
+            <p:ph type="sldNum" sz="quarter" idx="10"/>
+          </p:nvPr>
+        </p:nvSpPr>
+        <p:spPr/>
+        <p:txBody>
+          <a:bodyPr/>
+          <a:lstStyle/>
+          <a:p>
+            <a:fld id="{F7021451-1387-4CA6-816F-3879F97B5CBC}" type="slidenum">
+              <a:rPr lang="en-US"/>
+              <a:t>9</a:t>
             </a:fld>
             <a:endParaRPr lang="en-US"/>
           </a:p>
@@ -1546,7 +3120,7 @@
         </p:nvSpPr>
         <p:spPr>
           <a:xfrm>
-            <a:off x="822960" y="1554480"/>
+            <a:off x="822960" y="1783080"/>
             <a:ext cx="10515600" cy="457200"/>
           </a:xfrm>
           <a:prstGeom prst="rect">
@@ -1571,7 +3145,7 @@
                 <a:ea typeface="Consolas" pitchFamily="34" charset="-122"/>
                 <a:cs typeface="Consolas" pitchFamily="34" charset="-120"/>
               </a:rPr>
-              <a:t>SERVICES</a:t>
+              <a:t>ZALIN PLATFORM · SERVICES</a:t>
             </a:r>
             <a:endParaRPr lang="en-US" sz="1400" dirty="0"/>
           </a:p>
@@ -1586,7 +3160,7 @@
         <p:spPr>
           <a:xfrm>
             <a:off x="822960" y="2286000"/>
-            <a:ext cx="10515600" cy="1737360"/>
+            <a:ext cx="10607040" cy="1691640"/>
           </a:xfrm>
           <a:prstGeom prst="rect">
             <a:avLst/>
@@ -1602,7 +3176,7 @@
               <a:buNone/>
             </a:pPr>
             <a:r>
-              <a:rPr lang="en-US" sz="4400" b="1" dirty="0">
+              <a:rPr lang="en-US" sz="4100" b="1" dirty="0">
                 <a:solidFill>
                   <a:srgbClr val="FFFFFF"/>
                 </a:solidFill>
@@ -1610,9 +3184,9 @@
                 <a:ea typeface="Segoe UI" pitchFamily="34" charset="-122"/>
                 <a:cs typeface="Segoe UI" pitchFamily="34" charset="-120"/>
               </a:rPr>
-              <a:t>The freelance delivery playbook</a:t>
-            </a:r>
-            <a:endParaRPr lang="en-US" sz="4400" dirty="0"/>
+              <a:t>The Freelance Delivery Playbook: Data and AI Projects Worldwide</a:t>
+            </a:r>
+            <a:endParaRPr lang="en-US" sz="4100" dirty="0"/>
           </a:p>
         </p:txBody>
       </p:sp>
@@ -1624,8 +3198,8 @@
         </p:nvSpPr>
         <p:spPr>
           <a:xfrm>
-            <a:off x="822960" y="4206240"/>
-            <a:ext cx="10515600" cy="914400"/>
+            <a:off x="822960" y="4023360"/>
+            <a:ext cx="10058400" cy="777240"/>
           </a:xfrm>
           <a:prstGeom prst="rect">
             <a:avLst/>
@@ -1641,7 +3215,7 @@
               <a:buNone/>
             </a:pPr>
             <a:r>
-              <a:rPr lang="en-US" sz="1600" dirty="0">
+              <a:rPr lang="en-US" sz="1700" dirty="0">
                 <a:solidFill>
                   <a:srgbClr val="94A3B8"/>
                 </a:solidFill>
@@ -1649,21 +3223,83 @@
                 <a:ea typeface="Segoe UI" pitchFamily="34" charset="-122"/>
                 <a:cs typeface="Segoe UI" pitchFamily="34" charset="-120"/>
               </a:rPr>
-              <a:t>Data scraping, BI, and AI automation - delivered worldwide via Upwork · Rezalian Vatiady</a:t>
-            </a:r>
-            <a:endParaRPr lang="en-US" sz="1600" dirty="0"/>
-          </a:p>
-        </p:txBody>
-      </p:sp>
-      <p:sp>
-        <p:nvSpPr>
-          <p:cNvPr id="7" name="Text 5"/>
-          <p:cNvSpPr/>
-          <p:nvPr/>
-        </p:nvSpPr>
-        <p:spPr>
-          <a:xfrm>
-            <a:off x="10698480" y="6355080"/>
+              <a:t>Delivery discipline for scraping, BI, and AI automation clients - from scoping call to handover</a:t>
+            </a:r>
+            <a:endParaRPr lang="en-US" sz="1700" dirty="0"/>
+          </a:p>
+        </p:txBody>
+      </p:sp>
+      <p:sp>
+        <p:nvSpPr>
+          <p:cNvPr id="7" name="Shape 5"/>
+          <p:cNvSpPr/>
+          <p:nvPr/>
+        </p:nvSpPr>
+        <p:spPr>
+          <a:xfrm>
+            <a:off x="822960" y="5440680"/>
+            <a:ext cx="4114800" cy="0"/>
+          </a:xfrm>
+          <a:prstGeom prst="line">
+            <a:avLst/>
+          </a:prstGeom>
+          <a:noFill/>
+          <a:ln w="31750">
+            <a:solidFill>
+              <a:srgbClr val="3B82F6"/>
+            </a:solidFill>
+            <a:prstDash val="solid"/>
+          </a:ln>
+        </p:spPr>
+      </p:sp>
+      <p:sp>
+        <p:nvSpPr>
+          <p:cNvPr id="8" name="Text 6"/>
+          <p:cNvSpPr/>
+          <p:nvPr/>
+        </p:nvSpPr>
+        <p:spPr>
+          <a:xfrm>
+            <a:off x="822960" y="5596128"/>
+            <a:ext cx="10058400" cy="457200"/>
+          </a:xfrm>
+          <a:prstGeom prst="rect">
+            <a:avLst/>
+          </a:prstGeom>
+          <a:noFill/>
+          <a:ln/>
+        </p:spPr>
+        <p:txBody>
+          <a:bodyPr wrap="square" rtlCol="0" anchor="ctr"/>
+          <a:lstStyle/>
+          <a:p>
+            <a:pPr indent="0" marL="0">
+              <a:buNone/>
+            </a:pPr>
+            <a:r>
+              <a:rPr lang="en-US" sz="1250" dirty="0">
+                <a:solidFill>
+                  <a:srgbClr val="64748B"/>
+                </a:solidFill>
+                <a:latin typeface="Segoe UI" pitchFamily="34" charset="0"/>
+                <a:ea typeface="Segoe UI" pitchFamily="34" charset="-122"/>
+                <a:cs typeface="Segoe UI" pitchFamily="34" charset="-120"/>
+              </a:rPr>
+              <a:t>Rezalian Vatiady · Zalin Labs · 2026</a:t>
+            </a:r>
+            <a:endParaRPr lang="en-US" sz="1250" dirty="0"/>
+          </a:p>
+        </p:txBody>
+      </p:sp>
+      <p:sp>
+        <p:nvSpPr>
+          <p:cNvPr id="9" name="Text 7"/>
+          <p:cNvSpPr/>
+          <p:nvPr/>
+        </p:nvSpPr>
+        <p:spPr>
+          <a:xfrm>
+            <a:off x="10698480" y="6382512"/>
             <a:ext cx="1188720" cy="365760"/>
           </a:xfrm>
           <a:prstGeom prst="rect">
@@ -1688,7 +3324,2004 @@
                 <a:ea typeface="Consolas" pitchFamily="34" charset="-122"/>
                 <a:cs typeface="Consolas" pitchFamily="34" charset="-120"/>
               </a:rPr>
-              <a:t>1 / 8</a:t>
+              <a:t>1 / 14</a:t>
+            </a:r>
+            <a:endParaRPr lang="en-US" sz="1000" dirty="0"/>
+          </a:p>
+        </p:txBody>
+      </p:sp>
+    </p:spTree>
+  </p:cSld>
+  <p:clrMapOvr>
+    <a:masterClrMapping/>
+  </p:clrMapOvr>
+</p:sld>
+</file>
+
+<file path=ppt/slides/slide10.xml><?xml version="1.0" encoding="utf-8"?>
+<p:sld xmlns:a="http://schemas.openxmlformats.org/drawingml/2006/main" xmlns:r="http://schemas.openxmlformats.org/officeDocument/2006/relationships" xmlns:p="http://schemas.openxmlformats.org/presentationml/2006/main">
+  <p:cSld name="Slide 10">
+    <p:bg>
+      <p:bgPr>
+        <a:solidFill>
+          <a:srgbClr val="0A0C12"/>
+        </a:solidFill>
+      </p:bgPr>
+    </p:bg>
+    <p:spTree>
+      <p:nvGrpSpPr>
+        <p:cNvPr id="1" name=""/>
+        <p:cNvGrpSpPr/>
+        <p:nvPr/>
+      </p:nvGrpSpPr>
+      <p:grpSpPr>
+        <a:xfrm>
+          <a:off x="0" y="0"/>
+          <a:ext cx="0" cy="0"/>
+          <a:chOff x="0" y="0"/>
+          <a:chExt cx="0" cy="0"/>
+        </a:xfrm>
+      </p:grpSpPr>
+      <p:sp>
+        <p:nvSpPr>
+          <p:cNvPr id="2" name="Shape 0"/>
+          <p:cNvSpPr/>
+          <p:nvPr/>
+        </p:nvSpPr>
+        <p:spPr>
+          <a:xfrm>
+            <a:off x="0" y="0"/>
+            <a:ext cx="7680960" cy="64008"/>
+          </a:xfrm>
+          <a:prstGeom prst="rect">
+            <a:avLst/>
+          </a:prstGeom>
+          <a:solidFill>
+            <a:srgbClr val="3B82F6"/>
+          </a:solidFill>
+          <a:ln/>
+        </p:spPr>
+      </p:sp>
+      <p:sp>
+        <p:nvSpPr>
+          <p:cNvPr id="3" name="Shape 1"/>
+          <p:cNvSpPr/>
+          <p:nvPr/>
+        </p:nvSpPr>
+        <p:spPr>
+          <a:xfrm>
+            <a:off x="7680960" y="0"/>
+            <a:ext cx="4510735" cy="64008"/>
+          </a:xfrm>
+          <a:prstGeom prst="rect">
+            <a:avLst/>
+          </a:prstGeom>
+          <a:solidFill>
+            <a:srgbClr val="06B6D4"/>
+          </a:solidFill>
+          <a:ln/>
+        </p:spPr>
+      </p:sp>
+      <p:sp>
+        <p:nvSpPr>
+          <p:cNvPr id="4" name="Text 2"/>
+          <p:cNvSpPr/>
+          <p:nvPr/>
+        </p:nvSpPr>
+        <p:spPr>
+          <a:xfrm>
+            <a:off x="822960" y="502920"/>
+            <a:ext cx="10515600" cy="365760"/>
+          </a:xfrm>
+          <a:prstGeom prst="rect">
+            <a:avLst/>
+          </a:prstGeom>
+          <a:noFill/>
+          <a:ln/>
+        </p:spPr>
+        <p:txBody>
+          <a:bodyPr wrap="square" rtlCol="0" anchor="ctr"/>
+          <a:lstStyle/>
+          <a:p>
+            <a:pPr indent="0" marL="0">
+              <a:buNone/>
+            </a:pPr>
+            <a:r>
+              <a:rPr lang="en-US" sz="1200" spc="300" kern="0" dirty="0">
+                <a:solidFill>
+                  <a:srgbClr val="06B6D4"/>
+                </a:solidFill>
+                <a:latin typeface="Consolas" pitchFamily="34" charset="0"/>
+                <a:ea typeface="Consolas" pitchFamily="34" charset="-122"/>
+                <a:cs typeface="Consolas" pitchFamily="34" charset="-120"/>
+              </a:rPr>
+              <a:t>COMMUNICATION</a:t>
+            </a:r>
+            <a:endParaRPr lang="en-US" sz="1200" dirty="0"/>
+          </a:p>
+        </p:txBody>
+      </p:sp>
+      <p:sp>
+        <p:nvSpPr>
+          <p:cNvPr id="5" name="Text 3"/>
+          <p:cNvSpPr/>
+          <p:nvPr/>
+        </p:nvSpPr>
+        <p:spPr>
+          <a:xfrm>
+            <a:off x="822960" y="914400"/>
+            <a:ext cx="10561320" cy="868680"/>
+          </a:xfrm>
+          <a:prstGeom prst="rect">
+            <a:avLst/>
+          </a:prstGeom>
+          <a:noFill/>
+          <a:ln/>
+        </p:spPr>
+        <p:txBody>
+          <a:bodyPr wrap="square" rtlCol="0" anchor="ctr"/>
+          <a:lstStyle/>
+          <a:p>
+            <a:pPr indent="0" marL="0">
+              <a:buNone/>
+            </a:pPr>
+            <a:r>
+              <a:rPr lang="en-US" sz="2700" b="1" dirty="0">
+                <a:solidFill>
+                  <a:srgbClr val="FFFFFF"/>
+                </a:solidFill>
+                <a:latin typeface="Segoe UI" pitchFamily="34" charset="0"/>
+                <a:ea typeface="Segoe UI" pitchFamily="34" charset="-122"/>
+                <a:cs typeface="Segoe UI" pitchFamily="34" charset="-120"/>
+              </a:rPr>
+              <a:t>Clarity climbs early; surprises burn down fast</a:t>
+            </a:r>
+            <a:endParaRPr lang="en-US" sz="2700" dirty="0"/>
+          </a:p>
+        </p:txBody>
+      </p:sp>
+      <p:graphicFrame>
+        <p:nvGraphicFramePr>
+          <p:cNvPr id="6" name="Chart 0" descr=""/>
+          <p:cNvGraphicFramePr/>
+          <p:nvPr/>
+        </p:nvGraphicFramePr>
+        <p:xfrm>
+          <a:off x="822960" y="1874520"/>
+          <a:ext cx="10515600" cy="3337560"/>
+        </p:xfrm>
+        <a:graphic xmlns:a="http://schemas.openxmlformats.org/drawingml/2006/main">
+          <a:graphicData uri="http://schemas.openxmlformats.org/drawingml/2006/chart">
+            <c:chart xmlns:c="http://schemas.openxmlformats.org/drawingml/2006/chart" r:id="rId1"/>
+          </a:graphicData>
+        </a:graphic>
+      </p:graphicFrame>
+      <p:sp>
+        <p:nvSpPr>
+          <p:cNvPr id="7" name="Shape 4"/>
+          <p:cNvSpPr/>
+          <p:nvPr/>
+        </p:nvSpPr>
+        <p:spPr>
+          <a:xfrm>
+            <a:off x="822960" y="5413248"/>
+            <a:ext cx="10515600" cy="0"/>
+          </a:xfrm>
+          <a:prstGeom prst="line">
+            <a:avLst/>
+          </a:prstGeom>
+          <a:noFill/>
+          <a:ln w="12700">
+            <a:solidFill>
+              <a:srgbClr val="1E2D45"/>
+            </a:solidFill>
+            <a:prstDash val="solid"/>
+          </a:ln>
+        </p:spPr>
+      </p:sp>
+      <p:sp>
+        <p:nvSpPr>
+          <p:cNvPr id="8" name="Text 5"/>
+          <p:cNvSpPr/>
+          <p:nvPr/>
+        </p:nvSpPr>
+        <p:spPr>
+          <a:xfrm>
+            <a:off x="822960" y="5504688"/>
+            <a:ext cx="10424160" cy="411480"/>
+          </a:xfrm>
+          <a:prstGeom prst="rect">
+            <a:avLst/>
+          </a:prstGeom>
+          <a:noFill/>
+          <a:ln/>
+        </p:spPr>
+        <p:txBody>
+          <a:bodyPr wrap="square" rtlCol="0" anchor="ctr"/>
+          <a:lstStyle/>
+          <a:p>
+            <a:pPr indent="0" marL="0">
+              <a:buNone/>
+            </a:pPr>
+            <a:r>
+              <a:rPr lang="en-US" sz="1300" i="1" dirty="0">
+                <a:solidFill>
+                  <a:srgbClr val="06B6D4"/>
+                </a:solidFill>
+                <a:latin typeface="Segoe UI" pitchFamily="34" charset="0"/>
+                <a:ea typeface="Segoe UI" pitchFamily="34" charset="-122"/>
+                <a:cs typeface="Segoe UI" pitchFamily="34" charset="-120"/>
+              </a:rPr>
+              <a:t>→  Week one writes the definition of done, so clarity climbs immediately; surprises decay because bad news travels first and fast.</a:t>
+            </a:r>
+            <a:endParaRPr lang="en-US" sz="1300" dirty="0"/>
+          </a:p>
+        </p:txBody>
+      </p:sp>
+      <p:sp>
+        <p:nvSpPr>
+          <p:cNvPr id="9" name="Shape 6"/>
+          <p:cNvSpPr/>
+          <p:nvPr/>
+        </p:nvSpPr>
+        <p:spPr>
+          <a:xfrm>
+            <a:off x="822960" y="5961888"/>
+            <a:ext cx="10515600" cy="0"/>
+          </a:xfrm>
+          <a:prstGeom prst="line">
+            <a:avLst/>
+          </a:prstGeom>
+          <a:noFill/>
+          <a:ln w="12700">
+            <a:solidFill>
+              <a:srgbClr val="1E2D45"/>
+            </a:solidFill>
+            <a:prstDash val="solid"/>
+          </a:ln>
+        </p:spPr>
+      </p:sp>
+      <p:sp>
+        <p:nvSpPr>
+          <p:cNvPr id="10" name="Text 7"/>
+          <p:cNvSpPr/>
+          <p:nvPr/>
+        </p:nvSpPr>
+        <p:spPr>
+          <a:xfrm>
+            <a:off x="822960" y="6053328"/>
+            <a:ext cx="9692640" cy="457200"/>
+          </a:xfrm>
+          <a:prstGeom prst="rect">
+            <a:avLst/>
+          </a:prstGeom>
+          <a:noFill/>
+          <a:ln/>
+        </p:spPr>
+        <p:txBody>
+          <a:bodyPr wrap="square" rtlCol="0" anchor="ctr"/>
+          <a:lstStyle/>
+          <a:p>
+            <a:pPr indent="0" marL="0">
+              <a:buNone/>
+            </a:pPr>
+            <a:r>
+              <a:rPr lang="en-US" sz="1150" dirty="0">
+                <a:solidFill>
+                  <a:srgbClr val="64748B"/>
+                </a:solidFill>
+                <a:latin typeface="Segoe UI" pitchFamily="34" charset="0"/>
+                <a:ea typeface="Segoe UI" pitchFamily="34" charset="-122"/>
+                <a:cs typeface="Segoe UI" pitchFamily="34" charset="-120"/>
+              </a:rPr>
+              <a:t>Illustrative engagement profile; every real project ships short written updates on a fixed rhythm with evidence attached.</a:t>
+            </a:r>
+            <a:endParaRPr lang="en-US" sz="1150" dirty="0"/>
+          </a:p>
+        </p:txBody>
+      </p:sp>
+      <p:sp>
+        <p:nvSpPr>
+          <p:cNvPr id="11" name="Text 8"/>
+          <p:cNvSpPr/>
+          <p:nvPr/>
+        </p:nvSpPr>
+        <p:spPr>
+          <a:xfrm>
+            <a:off x="10698480" y="6382512"/>
+            <a:ext cx="1188720" cy="365760"/>
+          </a:xfrm>
+          <a:prstGeom prst="rect">
+            <a:avLst/>
+          </a:prstGeom>
+          <a:noFill/>
+          <a:ln/>
+        </p:spPr>
+        <p:txBody>
+          <a:bodyPr wrap="square" rtlCol="0" anchor="ctr"/>
+          <a:lstStyle/>
+          <a:p>
+            <a:pPr algn="r" indent="0" marL="0">
+              <a:buNone/>
+            </a:pPr>
+            <a:r>
+              <a:rPr lang="en-US" sz="1000" dirty="0">
+                <a:solidFill>
+                  <a:srgbClr val="64748B"/>
+                </a:solidFill>
+                <a:latin typeface="Consolas" pitchFamily="34" charset="0"/>
+                <a:ea typeface="Consolas" pitchFamily="34" charset="-122"/>
+                <a:cs typeface="Consolas" pitchFamily="34" charset="-120"/>
+              </a:rPr>
+              <a:t>10 / 14</a:t>
+            </a:r>
+            <a:endParaRPr lang="en-US" sz="1000" dirty="0"/>
+          </a:p>
+        </p:txBody>
+      </p:sp>
+    </p:spTree>
+  </p:cSld>
+  <p:clrMapOvr>
+    <a:masterClrMapping/>
+  </p:clrMapOvr>
+</p:sld>
+</file>
+
+<file path=ppt/slides/slide11.xml><?xml version="1.0" encoding="utf-8"?>
+<p:sld xmlns:a="http://schemas.openxmlformats.org/drawingml/2006/main" xmlns:r="http://schemas.openxmlformats.org/officeDocument/2006/relationships" xmlns:p="http://schemas.openxmlformats.org/presentationml/2006/main">
+  <p:cSld name="Slide 11">
+    <p:bg>
+      <p:bgPr>
+        <a:solidFill>
+          <a:srgbClr val="0A0C12"/>
+        </a:solidFill>
+      </p:bgPr>
+    </p:bg>
+    <p:spTree>
+      <p:nvGrpSpPr>
+        <p:cNvPr id="1" name=""/>
+        <p:cNvGrpSpPr/>
+        <p:nvPr/>
+      </p:nvGrpSpPr>
+      <p:grpSpPr>
+        <a:xfrm>
+          <a:off x="0" y="0"/>
+          <a:ext cx="0" cy="0"/>
+          <a:chOff x="0" y="0"/>
+          <a:chExt cx="0" cy="0"/>
+        </a:xfrm>
+      </p:grpSpPr>
+      <p:sp>
+        <p:nvSpPr>
+          <p:cNvPr id="2" name="Shape 0"/>
+          <p:cNvSpPr/>
+          <p:nvPr/>
+        </p:nvSpPr>
+        <p:spPr>
+          <a:xfrm>
+            <a:off x="0" y="0"/>
+            <a:ext cx="7680960" cy="64008"/>
+          </a:xfrm>
+          <a:prstGeom prst="rect">
+            <a:avLst/>
+          </a:prstGeom>
+          <a:solidFill>
+            <a:srgbClr val="3B82F6"/>
+          </a:solidFill>
+          <a:ln/>
+        </p:spPr>
+      </p:sp>
+      <p:sp>
+        <p:nvSpPr>
+          <p:cNvPr id="3" name="Shape 1"/>
+          <p:cNvSpPr/>
+          <p:nvPr/>
+        </p:nvSpPr>
+        <p:spPr>
+          <a:xfrm>
+            <a:off x="7680960" y="0"/>
+            <a:ext cx="4510735" cy="64008"/>
+          </a:xfrm>
+          <a:prstGeom prst="rect">
+            <a:avLst/>
+          </a:prstGeom>
+          <a:solidFill>
+            <a:srgbClr val="06B6D4"/>
+          </a:solidFill>
+          <a:ln/>
+        </p:spPr>
+      </p:sp>
+      <p:sp>
+        <p:nvSpPr>
+          <p:cNvPr id="4" name="Text 2"/>
+          <p:cNvSpPr/>
+          <p:nvPr/>
+        </p:nvSpPr>
+        <p:spPr>
+          <a:xfrm>
+            <a:off x="822960" y="502920"/>
+            <a:ext cx="10515600" cy="365760"/>
+          </a:xfrm>
+          <a:prstGeom prst="rect">
+            <a:avLst/>
+          </a:prstGeom>
+          <a:noFill/>
+          <a:ln/>
+        </p:spPr>
+        <p:txBody>
+          <a:bodyPr wrap="square" rtlCol="0" anchor="ctr"/>
+          <a:lstStyle/>
+          <a:p>
+            <a:pPr indent="0" marL="0">
+              <a:buNone/>
+            </a:pPr>
+            <a:r>
+              <a:rPr lang="en-US" sz="1200" spc="300" kern="0" dirty="0">
+                <a:solidFill>
+                  <a:srgbClr val="06B6D4"/>
+                </a:solidFill>
+                <a:latin typeface="Consolas" pitchFamily="34" charset="0"/>
+                <a:ea typeface="Consolas" pitchFamily="34" charset="-122"/>
+                <a:cs typeface="Consolas" pitchFamily="34" charset="-120"/>
+              </a:rPr>
+              <a:t>COMPARISON</a:t>
+            </a:r>
+            <a:endParaRPr lang="en-US" sz="1200" dirty="0"/>
+          </a:p>
+        </p:txBody>
+      </p:sp>
+      <p:sp>
+        <p:nvSpPr>
+          <p:cNvPr id="5" name="Text 3"/>
+          <p:cNvSpPr/>
+          <p:nvPr/>
+        </p:nvSpPr>
+        <p:spPr>
+          <a:xfrm>
+            <a:off x="822960" y="914400"/>
+            <a:ext cx="10561320" cy="868680"/>
+          </a:xfrm>
+          <a:prstGeom prst="rect">
+            <a:avLst/>
+          </a:prstGeom>
+          <a:noFill/>
+          <a:ln/>
+        </p:spPr>
+        <p:txBody>
+          <a:bodyPr wrap="square" rtlCol="0" anchor="ctr"/>
+          <a:lstStyle/>
+          <a:p>
+            <a:pPr indent="0" marL="0">
+              <a:buNone/>
+            </a:pPr>
+            <a:r>
+              <a:rPr lang="en-US" sz="2700" b="1" dirty="0">
+                <a:solidFill>
+                  <a:srgbClr val="FFFFFF"/>
+                </a:solidFill>
+                <a:latin typeface="Segoe UI" pitchFamily="34" charset="0"/>
+                <a:ea typeface="Segoe UI" pitchFamily="34" charset="-122"/>
+                <a:cs typeface="Segoe UI" pitchFamily="34" charset="-120"/>
+              </a:rPr>
+              <a:t>Typical freelance delivery versus this playbook</a:t>
+            </a:r>
+            <a:endParaRPr lang="en-US" sz="2700" dirty="0"/>
+          </a:p>
+        </p:txBody>
+      </p:sp>
+      <p:sp>
+        <p:nvSpPr>
+          <p:cNvPr id="6" name="Shape 4"/>
+          <p:cNvSpPr/>
+          <p:nvPr/>
+        </p:nvSpPr>
+        <p:spPr>
+          <a:xfrm>
+            <a:off x="822960" y="2011680"/>
+            <a:ext cx="5074920" cy="3611880"/>
+          </a:xfrm>
+          <a:prstGeom prst="roundRect">
+            <a:avLst>
+              <a:gd name="adj" fmla="val 2025"/>
+            </a:avLst>
+          </a:prstGeom>
+          <a:solidFill>
+            <a:srgbClr val="111A2E"/>
+          </a:solidFill>
+          <a:ln w="12700">
+            <a:solidFill>
+              <a:srgbClr val="1E2D45"/>
+            </a:solidFill>
+            <a:prstDash val="solid"/>
+          </a:ln>
+        </p:spPr>
+      </p:sp>
+      <p:sp>
+        <p:nvSpPr>
+          <p:cNvPr id="7" name="Text 5"/>
+          <p:cNvSpPr/>
+          <p:nvPr/>
+        </p:nvSpPr>
+        <p:spPr>
+          <a:xfrm>
+            <a:off x="1097280" y="2240280"/>
+            <a:ext cx="4526280" cy="502920"/>
+          </a:xfrm>
+          <a:prstGeom prst="rect">
+            <a:avLst/>
+          </a:prstGeom>
+          <a:noFill/>
+          <a:ln/>
+        </p:spPr>
+        <p:txBody>
+          <a:bodyPr wrap="square" rtlCol="0" anchor="ctr"/>
+          <a:lstStyle/>
+          <a:p>
+            <a:pPr indent="0" marL="0">
+              <a:buNone/>
+            </a:pPr>
+            <a:r>
+              <a:rPr lang="en-US" sz="1650" b="1" dirty="0">
+                <a:solidFill>
+                  <a:srgbClr val="06B6D4"/>
+                </a:solidFill>
+                <a:latin typeface="Segoe UI" pitchFamily="34" charset="0"/>
+                <a:ea typeface="Segoe UI" pitchFamily="34" charset="-122"/>
+                <a:cs typeface="Segoe UI" pitchFamily="34" charset="-120"/>
+              </a:rPr>
+              <a:t>Typical delivery</a:t>
+            </a:r>
+            <a:endParaRPr lang="en-US" sz="1650" dirty="0"/>
+          </a:p>
+        </p:txBody>
+      </p:sp>
+      <p:sp>
+        <p:nvSpPr>
+          <p:cNvPr id="8" name="Text 6"/>
+          <p:cNvSpPr/>
+          <p:nvPr/>
+        </p:nvSpPr>
+        <p:spPr>
+          <a:xfrm>
+            <a:off x="1097280" y="2834640"/>
+            <a:ext cx="4553712" cy="2651760"/>
+          </a:xfrm>
+          <a:prstGeom prst="rect">
+            <a:avLst/>
+          </a:prstGeom>
+          <a:noFill/>
+          <a:ln/>
+        </p:spPr>
+        <p:txBody>
+          <a:bodyPr wrap="square" rtlCol="0" anchor="t"/>
+          <a:lstStyle/>
+          <a:p>
+            <a:pPr marL="342900" indent="-342900">
+              <a:lnSpc>
+                <a:spcPct val="112000"/>
+              </a:lnSpc>
+              <a:spcAft>
+                <a:spcPts val="900"/>
+              </a:spcAft>
+              <a:buSzPct val="100000"/>
+              <a:buChar char="▸"/>
+            </a:pPr>
+            <a:r>
+              <a:rPr lang="en-US" sz="1280" dirty="0">
+                <a:solidFill>
+                  <a:srgbClr val="CBD5E1"/>
+                </a:solidFill>
+                <a:latin typeface="Segoe UI" pitchFamily="34" charset="0"/>
+                <a:ea typeface="Segoe UI" pitchFamily="34" charset="-122"/>
+                <a:cs typeface="Segoe UI" pitchFamily="34" charset="-120"/>
+              </a:rPr>
+              <a:t>A script that worked once, in a demo</a:t>
+            </a:r>
+            <a:endParaRPr lang="en-US" sz="1280" dirty="0"/>
+          </a:p>
+          <a:p>
+            <a:pPr marL="342900" indent="-342900">
+              <a:lnSpc>
+                <a:spcPct val="112000"/>
+              </a:lnSpc>
+              <a:spcAft>
+                <a:spcPts val="900"/>
+              </a:spcAft>
+              <a:buSzPct val="100000"/>
+              <a:buChar char="▸"/>
+            </a:pPr>
+            <a:r>
+              <a:rPr lang="en-US" sz="1280" dirty="0">
+                <a:solidFill>
+                  <a:srgbClr val="CBD5E1"/>
+                </a:solidFill>
+                <a:latin typeface="Segoe UI" pitchFamily="34" charset="0"/>
+                <a:ea typeface="Segoe UI" pitchFamily="34" charset="-122"/>
+                <a:cs typeface="Segoe UI" pitchFamily="34" charset="-120"/>
+              </a:rPr>
+              <a:t>Silent failures discovered by you</a:t>
+            </a:r>
+            <a:endParaRPr lang="en-US" sz="1280" dirty="0"/>
+          </a:p>
+          <a:p>
+            <a:pPr marL="342900" indent="-342900">
+              <a:lnSpc>
+                <a:spcPct val="112000"/>
+              </a:lnSpc>
+              <a:spcAft>
+                <a:spcPts val="900"/>
+              </a:spcAft>
+              <a:buSzPct val="100000"/>
+              <a:buChar char="▸"/>
+            </a:pPr>
+            <a:r>
+              <a:rPr lang="en-US" sz="1280" dirty="0">
+                <a:solidFill>
+                  <a:srgbClr val="CBD5E1"/>
+                </a:solidFill>
+                <a:latin typeface="Segoe UI" pitchFamily="34" charset="0"/>
+                <a:ea typeface="Segoe UI" pitchFamily="34" charset="-122"/>
+                <a:cs typeface="Segoe UI" pitchFamily="34" charset="-120"/>
+              </a:rPr>
+              <a:t>Knowledge locked in one head</a:t>
+            </a:r>
+            <a:endParaRPr lang="en-US" sz="1280" dirty="0"/>
+          </a:p>
+          <a:p>
+            <a:pPr marL="342900" indent="-342900">
+              <a:lnSpc>
+                <a:spcPct val="112000"/>
+              </a:lnSpc>
+              <a:spcAft>
+                <a:spcPts val="900"/>
+              </a:spcAft>
+              <a:buSzPct val="100000"/>
+              <a:buChar char="▸"/>
+            </a:pPr>
+            <a:r>
+              <a:rPr lang="en-US" sz="1280" dirty="0">
+                <a:solidFill>
+                  <a:srgbClr val="CBD5E1"/>
+                </a:solidFill>
+                <a:latin typeface="Segoe UI" pitchFamily="34" charset="0"/>
+                <a:ea typeface="Segoe UI" pitchFamily="34" charset="-122"/>
+                <a:cs typeface="Segoe UI" pitchFamily="34" charset="-120"/>
+              </a:rPr>
+              <a:t>Dependency by design</a:t>
+            </a:r>
+            <a:endParaRPr lang="en-US" sz="1280" dirty="0"/>
+          </a:p>
+        </p:txBody>
+      </p:sp>
+      <p:sp>
+        <p:nvSpPr>
+          <p:cNvPr id="9" name="Shape 7"/>
+          <p:cNvSpPr/>
+          <p:nvPr/>
+        </p:nvSpPr>
+        <p:spPr>
+          <a:xfrm>
+            <a:off x="6291072" y="2011680"/>
+            <a:ext cx="5074920" cy="3611880"/>
+          </a:xfrm>
+          <a:prstGeom prst="roundRect">
+            <a:avLst>
+              <a:gd name="adj" fmla="val 2025"/>
+            </a:avLst>
+          </a:prstGeom>
+          <a:solidFill>
+            <a:srgbClr val="111A2E"/>
+          </a:solidFill>
+          <a:ln w="12700">
+            <a:solidFill>
+              <a:srgbClr val="1E2D45"/>
+            </a:solidFill>
+            <a:prstDash val="solid"/>
+          </a:ln>
+        </p:spPr>
+      </p:sp>
+      <p:sp>
+        <p:nvSpPr>
+          <p:cNvPr id="10" name="Text 8"/>
+          <p:cNvSpPr/>
+          <p:nvPr/>
+        </p:nvSpPr>
+        <p:spPr>
+          <a:xfrm>
+            <a:off x="6565392" y="2240280"/>
+            <a:ext cx="4526280" cy="502920"/>
+          </a:xfrm>
+          <a:prstGeom prst="rect">
+            <a:avLst/>
+          </a:prstGeom>
+          <a:noFill/>
+          <a:ln/>
+        </p:spPr>
+        <p:txBody>
+          <a:bodyPr wrap="square" rtlCol="0" anchor="ctr"/>
+          <a:lstStyle/>
+          <a:p>
+            <a:pPr indent="0" marL="0">
+              <a:buNone/>
+            </a:pPr>
+            <a:r>
+              <a:rPr lang="en-US" sz="1650" b="1" dirty="0">
+                <a:solidFill>
+                  <a:srgbClr val="93C5FD"/>
+                </a:solidFill>
+                <a:latin typeface="Segoe UI" pitchFamily="34" charset="0"/>
+                <a:ea typeface="Segoe UI" pitchFamily="34" charset="-122"/>
+                <a:cs typeface="Segoe UI" pitchFamily="34" charset="-120"/>
+              </a:rPr>
+              <a:t>This playbook</a:t>
+            </a:r>
+            <a:endParaRPr lang="en-US" sz="1650" dirty="0"/>
+          </a:p>
+        </p:txBody>
+      </p:sp>
+      <p:sp>
+        <p:nvSpPr>
+          <p:cNvPr id="11" name="Text 9"/>
+          <p:cNvSpPr/>
+          <p:nvPr/>
+        </p:nvSpPr>
+        <p:spPr>
+          <a:xfrm>
+            <a:off x="6565392" y="2834640"/>
+            <a:ext cx="4553712" cy="2651760"/>
+          </a:xfrm>
+          <a:prstGeom prst="rect">
+            <a:avLst/>
+          </a:prstGeom>
+          <a:noFill/>
+          <a:ln/>
+        </p:spPr>
+        <p:txBody>
+          <a:bodyPr wrap="square" rtlCol="0" anchor="t"/>
+          <a:lstStyle/>
+          <a:p>
+            <a:pPr marL="342900" indent="-342900">
+              <a:lnSpc>
+                <a:spcPct val="112000"/>
+              </a:lnSpc>
+              <a:spcAft>
+                <a:spcPts val="900"/>
+              </a:spcAft>
+              <a:buSzPct val="100000"/>
+              <a:buChar char="▸"/>
+            </a:pPr>
+            <a:r>
+              <a:rPr lang="en-US" sz="1280" dirty="0">
+                <a:solidFill>
+                  <a:srgbClr val="CBD5E1"/>
+                </a:solidFill>
+                <a:latin typeface="Segoe UI" pitchFamily="34" charset="0"/>
+                <a:ea typeface="Segoe UI" pitchFamily="34" charset="-122"/>
+                <a:cs typeface="Segoe UI" pitchFamily="34" charset="-120"/>
+              </a:rPr>
+              <a:t>Pipelines that validate every run</a:t>
+            </a:r>
+            <a:endParaRPr lang="en-US" sz="1280" dirty="0"/>
+          </a:p>
+          <a:p>
+            <a:pPr marL="342900" indent="-342900">
+              <a:lnSpc>
+                <a:spcPct val="112000"/>
+              </a:lnSpc>
+              <a:spcAft>
+                <a:spcPts val="900"/>
+              </a:spcAft>
+              <a:buSzPct val="100000"/>
+              <a:buChar char="▸"/>
+            </a:pPr>
+            <a:r>
+              <a:rPr lang="en-US" sz="1280" dirty="0">
+                <a:solidFill>
+                  <a:srgbClr val="CBD5E1"/>
+                </a:solidFill>
+                <a:latin typeface="Segoe UI" pitchFamily="34" charset="0"/>
+                <a:ea typeface="Segoe UI" pitchFamily="34" charset="-122"/>
+                <a:cs typeface="Segoe UI" pitchFamily="34" charset="-120"/>
+              </a:rPr>
+              <a:t>Loud failures with structured logs</a:t>
+            </a:r>
+            <a:endParaRPr lang="en-US" sz="1280" dirty="0"/>
+          </a:p>
+          <a:p>
+            <a:pPr marL="342900" indent="-342900">
+              <a:lnSpc>
+                <a:spcPct val="112000"/>
+              </a:lnSpc>
+              <a:spcAft>
+                <a:spcPts val="900"/>
+              </a:spcAft>
+              <a:buSzPct val="100000"/>
+              <a:buChar char="▸"/>
+            </a:pPr>
+            <a:r>
+              <a:rPr lang="en-US" sz="1280" dirty="0">
+                <a:solidFill>
+                  <a:srgbClr val="CBD5E1"/>
+                </a:solidFill>
+                <a:latin typeface="Segoe UI" pitchFamily="34" charset="0"/>
+                <a:ea typeface="Segoe UI" pitchFamily="34" charset="-122"/>
+                <a:cs typeface="Segoe UI" pitchFamily="34" charset="-120"/>
+              </a:rPr>
+              <a:t>Docs and runbooks next to the code</a:t>
+            </a:r>
+            <a:endParaRPr lang="en-US" sz="1280" dirty="0"/>
+          </a:p>
+          <a:p>
+            <a:pPr marL="342900" indent="-342900">
+              <a:lnSpc>
+                <a:spcPct val="112000"/>
+              </a:lnSpc>
+              <a:spcAft>
+                <a:spcPts val="900"/>
+              </a:spcAft>
+              <a:buSzPct val="100000"/>
+              <a:buChar char="▸"/>
+            </a:pPr>
+            <a:r>
+              <a:rPr lang="en-US" sz="1280" dirty="0">
+                <a:solidFill>
+                  <a:srgbClr val="CBD5E1"/>
+                </a:solidFill>
+                <a:latin typeface="Segoe UI" pitchFamily="34" charset="0"/>
+                <a:ea typeface="Segoe UI" pitchFamily="34" charset="-122"/>
+                <a:cs typeface="Segoe UI" pitchFamily="34" charset="-120"/>
+              </a:rPr>
+              <a:t>Handover that removes my dependency</a:t>
+            </a:r>
+            <a:endParaRPr lang="en-US" sz="1280" dirty="0"/>
+          </a:p>
+        </p:txBody>
+      </p:sp>
+      <p:sp>
+        <p:nvSpPr>
+          <p:cNvPr id="12" name="Shape 10"/>
+          <p:cNvSpPr/>
+          <p:nvPr/>
+        </p:nvSpPr>
+        <p:spPr>
+          <a:xfrm>
+            <a:off x="822960" y="5961888"/>
+            <a:ext cx="10515600" cy="0"/>
+          </a:xfrm>
+          <a:prstGeom prst="line">
+            <a:avLst/>
+          </a:prstGeom>
+          <a:noFill/>
+          <a:ln w="12700">
+            <a:solidFill>
+              <a:srgbClr val="1E2D45"/>
+            </a:solidFill>
+            <a:prstDash val="solid"/>
+          </a:ln>
+        </p:spPr>
+      </p:sp>
+      <p:sp>
+        <p:nvSpPr>
+          <p:cNvPr id="13" name="Text 11"/>
+          <p:cNvSpPr/>
+          <p:nvPr/>
+        </p:nvSpPr>
+        <p:spPr>
+          <a:xfrm>
+            <a:off x="822960" y="6053328"/>
+            <a:ext cx="9692640" cy="457200"/>
+          </a:xfrm>
+          <a:prstGeom prst="rect">
+            <a:avLst/>
+          </a:prstGeom>
+          <a:noFill/>
+          <a:ln/>
+        </p:spPr>
+        <p:txBody>
+          <a:bodyPr wrap="square" rtlCol="0" anchor="ctr"/>
+          <a:lstStyle/>
+          <a:p>
+            <a:pPr indent="0" marL="0">
+              <a:buNone/>
+            </a:pPr>
+            <a:r>
+              <a:rPr lang="en-US" sz="1150" dirty="0">
+                <a:solidFill>
+                  <a:srgbClr val="64748B"/>
+                </a:solidFill>
+                <a:latin typeface="Segoe UI" pitchFamily="34" charset="0"/>
+                <a:ea typeface="Segoe UI" pitchFamily="34" charset="-122"/>
+                <a:cs typeface="Segoe UI" pitchFamily="34" charset="-120"/>
+              </a:rPr>
+              <a:t>The difference is not the tools - it is validation, honesty, and handover as defaults.</a:t>
+            </a:r>
+            <a:endParaRPr lang="en-US" sz="1150" dirty="0"/>
+          </a:p>
+        </p:txBody>
+      </p:sp>
+      <p:sp>
+        <p:nvSpPr>
+          <p:cNvPr id="14" name="Text 12"/>
+          <p:cNvSpPr/>
+          <p:nvPr/>
+        </p:nvSpPr>
+        <p:spPr>
+          <a:xfrm>
+            <a:off x="10698480" y="6382512"/>
+            <a:ext cx="1188720" cy="365760"/>
+          </a:xfrm>
+          <a:prstGeom prst="rect">
+            <a:avLst/>
+          </a:prstGeom>
+          <a:noFill/>
+          <a:ln/>
+        </p:spPr>
+        <p:txBody>
+          <a:bodyPr wrap="square" rtlCol="0" anchor="ctr"/>
+          <a:lstStyle/>
+          <a:p>
+            <a:pPr algn="r" indent="0" marL="0">
+              <a:buNone/>
+            </a:pPr>
+            <a:r>
+              <a:rPr lang="en-US" sz="1000" dirty="0">
+                <a:solidFill>
+                  <a:srgbClr val="64748B"/>
+                </a:solidFill>
+                <a:latin typeface="Consolas" pitchFamily="34" charset="0"/>
+                <a:ea typeface="Consolas" pitchFamily="34" charset="-122"/>
+                <a:cs typeface="Consolas" pitchFamily="34" charset="-120"/>
+              </a:rPr>
+              <a:t>11 / 14</a:t>
+            </a:r>
+            <a:endParaRPr lang="en-US" sz="1000" dirty="0"/>
+          </a:p>
+        </p:txBody>
+      </p:sp>
+    </p:spTree>
+  </p:cSld>
+  <p:clrMapOvr>
+    <a:masterClrMapping/>
+  </p:clrMapOvr>
+</p:sld>
+</file>
+
+<file path=ppt/slides/slide12.xml><?xml version="1.0" encoding="utf-8"?>
+<p:sld xmlns:a="http://schemas.openxmlformats.org/drawingml/2006/main" xmlns:r="http://schemas.openxmlformats.org/officeDocument/2006/relationships" xmlns:p="http://schemas.openxmlformats.org/presentationml/2006/main">
+  <p:cSld name="Slide 12">
+    <p:bg>
+      <p:bgPr>
+        <a:solidFill>
+          <a:srgbClr val="0A0C12"/>
+        </a:solidFill>
+      </p:bgPr>
+    </p:bg>
+    <p:spTree>
+      <p:nvGrpSpPr>
+        <p:cNvPr id="1" name=""/>
+        <p:cNvGrpSpPr/>
+        <p:nvPr/>
+      </p:nvGrpSpPr>
+      <p:grpSpPr>
+        <a:xfrm>
+          <a:off x="0" y="0"/>
+          <a:ext cx="0" cy="0"/>
+          <a:chOff x="0" y="0"/>
+          <a:chExt cx="0" cy="0"/>
+        </a:xfrm>
+      </p:grpSpPr>
+      <p:sp>
+        <p:nvSpPr>
+          <p:cNvPr id="2" name="Shape 0"/>
+          <p:cNvSpPr/>
+          <p:nvPr/>
+        </p:nvSpPr>
+        <p:spPr>
+          <a:xfrm>
+            <a:off x="0" y="0"/>
+            <a:ext cx="7680960" cy="64008"/>
+          </a:xfrm>
+          <a:prstGeom prst="rect">
+            <a:avLst/>
+          </a:prstGeom>
+          <a:solidFill>
+            <a:srgbClr val="3B82F6"/>
+          </a:solidFill>
+          <a:ln/>
+        </p:spPr>
+      </p:sp>
+      <p:sp>
+        <p:nvSpPr>
+          <p:cNvPr id="3" name="Shape 1"/>
+          <p:cNvSpPr/>
+          <p:nvPr/>
+        </p:nvSpPr>
+        <p:spPr>
+          <a:xfrm>
+            <a:off x="7680960" y="0"/>
+            <a:ext cx="4510735" cy="64008"/>
+          </a:xfrm>
+          <a:prstGeom prst="rect">
+            <a:avLst/>
+          </a:prstGeom>
+          <a:solidFill>
+            <a:srgbClr val="06B6D4"/>
+          </a:solidFill>
+          <a:ln/>
+        </p:spPr>
+      </p:sp>
+      <p:sp>
+        <p:nvSpPr>
+          <p:cNvPr id="4" name="Text 2"/>
+          <p:cNvSpPr/>
+          <p:nvPr/>
+        </p:nvSpPr>
+        <p:spPr>
+          <a:xfrm>
+            <a:off x="822960" y="502920"/>
+            <a:ext cx="10515600" cy="365760"/>
+          </a:xfrm>
+          <a:prstGeom prst="rect">
+            <a:avLst/>
+          </a:prstGeom>
+          <a:noFill/>
+          <a:ln/>
+        </p:spPr>
+        <p:txBody>
+          <a:bodyPr wrap="square" rtlCol="0" anchor="ctr"/>
+          <a:lstStyle/>
+          <a:p>
+            <a:pPr indent="0" marL="0">
+              <a:buNone/>
+            </a:pPr>
+            <a:r>
+              <a:rPr lang="en-US" sz="1200" spc="300" kern="0" dirty="0">
+                <a:solidFill>
+                  <a:srgbClr val="06B6D4"/>
+                </a:solidFill>
+                <a:latin typeface="Consolas" pitchFamily="34" charset="0"/>
+                <a:ea typeface="Consolas" pitchFamily="34" charset="-122"/>
+                <a:cs typeface="Consolas" pitchFamily="34" charset="-120"/>
+              </a:rPr>
+              <a:t>EFFORT MIX</a:t>
+            </a:r>
+            <a:endParaRPr lang="en-US" sz="1200" dirty="0"/>
+          </a:p>
+        </p:txBody>
+      </p:sp>
+      <p:sp>
+        <p:nvSpPr>
+          <p:cNvPr id="5" name="Text 3"/>
+          <p:cNvSpPr/>
+          <p:nvPr/>
+        </p:nvSpPr>
+        <p:spPr>
+          <a:xfrm>
+            <a:off x="822960" y="914400"/>
+            <a:ext cx="10561320" cy="868680"/>
+          </a:xfrm>
+          <a:prstGeom prst="rect">
+            <a:avLst/>
+          </a:prstGeom>
+          <a:noFill/>
+          <a:ln/>
+        </p:spPr>
+        <p:txBody>
+          <a:bodyPr wrap="square" rtlCol="0" anchor="ctr"/>
+          <a:lstStyle/>
+          <a:p>
+            <a:pPr indent="0" marL="0">
+              <a:buNone/>
+            </a:pPr>
+            <a:r>
+              <a:rPr lang="en-US" sz="2700" b="1" dirty="0">
+                <a:solidFill>
+                  <a:srgbClr val="FFFFFF"/>
+                </a:solidFill>
+                <a:latin typeface="Segoe UI" pitchFamily="34" charset="0"/>
+                <a:ea typeface="Segoe UI" pitchFamily="34" charset="-122"/>
+                <a:cs typeface="Segoe UI" pitchFamily="34" charset="-120"/>
+              </a:rPr>
+              <a:t>Where the hours go on a healthy engagement</a:t>
+            </a:r>
+            <a:endParaRPr lang="en-US" sz="2700" dirty="0"/>
+          </a:p>
+        </p:txBody>
+      </p:sp>
+      <p:graphicFrame>
+        <p:nvGraphicFramePr>
+          <p:cNvPr id="6" name="Chart 0" descr=""/>
+          <p:cNvGraphicFramePr/>
+          <p:nvPr/>
+        </p:nvGraphicFramePr>
+        <p:xfrm>
+          <a:off x="822960" y="1874520"/>
+          <a:ext cx="10515600" cy="3337560"/>
+        </p:xfrm>
+        <a:graphic xmlns:a="http://schemas.openxmlformats.org/drawingml/2006/main">
+          <a:graphicData uri="http://schemas.openxmlformats.org/drawingml/2006/chart">
+            <c:chart xmlns:c="http://schemas.openxmlformats.org/drawingml/2006/chart" r:id="rId1"/>
+          </a:graphicData>
+        </a:graphic>
+      </p:graphicFrame>
+      <p:sp>
+        <p:nvSpPr>
+          <p:cNvPr id="7" name="Shape 4"/>
+          <p:cNvSpPr/>
+          <p:nvPr/>
+        </p:nvSpPr>
+        <p:spPr>
+          <a:xfrm>
+            <a:off x="822960" y="5413248"/>
+            <a:ext cx="10515600" cy="0"/>
+          </a:xfrm>
+          <a:prstGeom prst="line">
+            <a:avLst/>
+          </a:prstGeom>
+          <a:noFill/>
+          <a:ln w="12700">
+            <a:solidFill>
+              <a:srgbClr val="1E2D45"/>
+            </a:solidFill>
+            <a:prstDash val="solid"/>
+          </a:ln>
+        </p:spPr>
+      </p:sp>
+      <p:sp>
+        <p:nvSpPr>
+          <p:cNvPr id="8" name="Text 5"/>
+          <p:cNvSpPr/>
+          <p:nvPr/>
+        </p:nvSpPr>
+        <p:spPr>
+          <a:xfrm>
+            <a:off x="822960" y="5504688"/>
+            <a:ext cx="10424160" cy="411480"/>
+          </a:xfrm>
+          <a:prstGeom prst="rect">
+            <a:avLst/>
+          </a:prstGeom>
+          <a:noFill/>
+          <a:ln/>
+        </p:spPr>
+        <p:txBody>
+          <a:bodyPr wrap="square" rtlCol="0" anchor="ctr"/>
+          <a:lstStyle/>
+          <a:p>
+            <a:pPr indent="0" marL="0">
+              <a:buNone/>
+            </a:pPr>
+            <a:r>
+              <a:rPr lang="en-US" sz="1300" i="1" dirty="0">
+                <a:solidFill>
+                  <a:srgbClr val="06B6D4"/>
+                </a:solidFill>
+                <a:latin typeface="Segoe UI" pitchFamily="34" charset="0"/>
+                <a:ea typeface="Segoe UI" pitchFamily="34" charset="-122"/>
+                <a:cs typeface="Segoe UI" pitchFamily="34" charset="-120"/>
+              </a:rPr>
+              <a:t>→  More than a third of the work happens before and after the code - that is what makes the code keep working after I leave.</a:t>
+            </a:r>
+            <a:endParaRPr lang="en-US" sz="1300" dirty="0"/>
+          </a:p>
+        </p:txBody>
+      </p:sp>
+      <p:sp>
+        <p:nvSpPr>
+          <p:cNvPr id="9" name="Shape 6"/>
+          <p:cNvSpPr/>
+          <p:nvPr/>
+        </p:nvSpPr>
+        <p:spPr>
+          <a:xfrm>
+            <a:off x="822960" y="5961888"/>
+            <a:ext cx="10515600" cy="0"/>
+          </a:xfrm>
+          <a:prstGeom prst="line">
+            <a:avLst/>
+          </a:prstGeom>
+          <a:noFill/>
+          <a:ln w="12700">
+            <a:solidFill>
+              <a:srgbClr val="1E2D45"/>
+            </a:solidFill>
+            <a:prstDash val="solid"/>
+          </a:ln>
+        </p:spPr>
+      </p:sp>
+      <p:sp>
+        <p:nvSpPr>
+          <p:cNvPr id="10" name="Text 7"/>
+          <p:cNvSpPr/>
+          <p:nvPr/>
+        </p:nvSpPr>
+        <p:spPr>
+          <a:xfrm>
+            <a:off x="822960" y="6053328"/>
+            <a:ext cx="9692640" cy="457200"/>
+          </a:xfrm>
+          <a:prstGeom prst="rect">
+            <a:avLst/>
+          </a:prstGeom>
+          <a:noFill/>
+          <a:ln/>
+        </p:spPr>
+        <p:txBody>
+          <a:bodyPr wrap="square" rtlCol="0" anchor="ctr"/>
+          <a:lstStyle/>
+          <a:p>
+            <a:pPr indent="0" marL="0">
+              <a:buNone/>
+            </a:pPr>
+            <a:r>
+              <a:rPr lang="en-US" sz="1150" dirty="0">
+                <a:solidFill>
+                  <a:srgbClr val="64748B"/>
+                </a:solidFill>
+                <a:latin typeface="Segoe UI" pitchFamily="34" charset="0"/>
+                <a:ea typeface="Segoe UI" pitchFamily="34" charset="-122"/>
+                <a:cs typeface="Segoe UI" pitchFamily="34" charset="-120"/>
+              </a:rPr>
+              <a:t>Illustrative effort split for a mid-size scraping or automation engagement.</a:t>
+            </a:r>
+            <a:endParaRPr lang="en-US" sz="1150" dirty="0"/>
+          </a:p>
+        </p:txBody>
+      </p:sp>
+      <p:sp>
+        <p:nvSpPr>
+          <p:cNvPr id="11" name="Text 8"/>
+          <p:cNvSpPr/>
+          <p:nvPr/>
+        </p:nvSpPr>
+        <p:spPr>
+          <a:xfrm>
+            <a:off x="10698480" y="6382512"/>
+            <a:ext cx="1188720" cy="365760"/>
+          </a:xfrm>
+          <a:prstGeom prst="rect">
+            <a:avLst/>
+          </a:prstGeom>
+          <a:noFill/>
+          <a:ln/>
+        </p:spPr>
+        <p:txBody>
+          <a:bodyPr wrap="square" rtlCol="0" anchor="ctr"/>
+          <a:lstStyle/>
+          <a:p>
+            <a:pPr algn="r" indent="0" marL="0">
+              <a:buNone/>
+            </a:pPr>
+            <a:r>
+              <a:rPr lang="en-US" sz="1000" dirty="0">
+                <a:solidFill>
+                  <a:srgbClr val="64748B"/>
+                </a:solidFill>
+                <a:latin typeface="Consolas" pitchFamily="34" charset="0"/>
+                <a:ea typeface="Consolas" pitchFamily="34" charset="-122"/>
+                <a:cs typeface="Consolas" pitchFamily="34" charset="-120"/>
+              </a:rPr>
+              <a:t>12 / 14</a:t>
+            </a:r>
+            <a:endParaRPr lang="en-US" sz="1000" dirty="0"/>
+          </a:p>
+        </p:txBody>
+      </p:sp>
+    </p:spTree>
+  </p:cSld>
+  <p:clrMapOvr>
+    <a:masterClrMapping/>
+  </p:clrMapOvr>
+</p:sld>
+</file>
+
+<file path=ppt/slides/slide13.xml><?xml version="1.0" encoding="utf-8"?>
+<p:sld xmlns:a="http://schemas.openxmlformats.org/drawingml/2006/main" xmlns:r="http://schemas.openxmlformats.org/officeDocument/2006/relationships" xmlns:p="http://schemas.openxmlformats.org/presentationml/2006/main">
+  <p:cSld name="Slide 13">
+    <p:bg>
+      <p:bgPr>
+        <a:solidFill>
+          <a:srgbClr val="0A0C12"/>
+        </a:solidFill>
+      </p:bgPr>
+    </p:bg>
+    <p:spTree>
+      <p:nvGrpSpPr>
+        <p:cNvPr id="1" name=""/>
+        <p:cNvGrpSpPr/>
+        <p:nvPr/>
+      </p:nvGrpSpPr>
+      <p:grpSpPr>
+        <a:xfrm>
+          <a:off x="0" y="0"/>
+          <a:ext cx="0" cy="0"/>
+          <a:chOff x="0" y="0"/>
+          <a:chExt cx="0" cy="0"/>
+        </a:xfrm>
+      </p:grpSpPr>
+      <p:sp>
+        <p:nvSpPr>
+          <p:cNvPr id="2" name="Shape 0"/>
+          <p:cNvSpPr/>
+          <p:nvPr/>
+        </p:nvSpPr>
+        <p:spPr>
+          <a:xfrm>
+            <a:off x="0" y="0"/>
+            <a:ext cx="7680960" cy="64008"/>
+          </a:xfrm>
+          <a:prstGeom prst="rect">
+            <a:avLst/>
+          </a:prstGeom>
+          <a:solidFill>
+            <a:srgbClr val="3B82F6"/>
+          </a:solidFill>
+          <a:ln/>
+        </p:spPr>
+      </p:sp>
+      <p:sp>
+        <p:nvSpPr>
+          <p:cNvPr id="3" name="Shape 1"/>
+          <p:cNvSpPr/>
+          <p:nvPr/>
+        </p:nvSpPr>
+        <p:spPr>
+          <a:xfrm>
+            <a:off x="7680960" y="0"/>
+            <a:ext cx="4510735" cy="64008"/>
+          </a:xfrm>
+          <a:prstGeom prst="rect">
+            <a:avLst/>
+          </a:prstGeom>
+          <a:solidFill>
+            <a:srgbClr val="06B6D4"/>
+          </a:solidFill>
+          <a:ln/>
+        </p:spPr>
+      </p:sp>
+      <p:sp>
+        <p:nvSpPr>
+          <p:cNvPr id="4" name="Text 2"/>
+          <p:cNvSpPr/>
+          <p:nvPr/>
+        </p:nvSpPr>
+        <p:spPr>
+          <a:xfrm>
+            <a:off x="822960" y="502920"/>
+            <a:ext cx="10515600" cy="365760"/>
+          </a:xfrm>
+          <a:prstGeom prst="rect">
+            <a:avLst/>
+          </a:prstGeom>
+          <a:noFill/>
+          <a:ln/>
+        </p:spPr>
+        <p:txBody>
+          <a:bodyPr wrap="square" rtlCol="0" anchor="ctr"/>
+          <a:lstStyle/>
+          <a:p>
+            <a:pPr indent="0" marL="0">
+              <a:buNone/>
+            </a:pPr>
+            <a:r>
+              <a:rPr lang="en-US" sz="1200" spc="300" kern="0" dirty="0">
+                <a:solidFill>
+                  <a:srgbClr val="06B6D4"/>
+                </a:solidFill>
+                <a:latin typeface="Consolas" pitchFamily="34" charset="0"/>
+                <a:ea typeface="Consolas" pitchFamily="34" charset="-122"/>
+                <a:cs typeface="Consolas" pitchFamily="34" charset="-120"/>
+              </a:rPr>
+              <a:t>HANDOVER</a:t>
+            </a:r>
+            <a:endParaRPr lang="en-US" sz="1200" dirty="0"/>
+          </a:p>
+        </p:txBody>
+      </p:sp>
+      <p:sp>
+        <p:nvSpPr>
+          <p:cNvPr id="5" name="Text 3"/>
+          <p:cNvSpPr/>
+          <p:nvPr/>
+        </p:nvSpPr>
+        <p:spPr>
+          <a:xfrm>
+            <a:off x="822960" y="914400"/>
+            <a:ext cx="10561320" cy="868680"/>
+          </a:xfrm>
+          <a:prstGeom prst="rect">
+            <a:avLst/>
+          </a:prstGeom>
+          <a:noFill/>
+          <a:ln/>
+        </p:spPr>
+        <p:txBody>
+          <a:bodyPr wrap="square" rtlCol="0" anchor="ctr"/>
+          <a:lstStyle/>
+          <a:p>
+            <a:pPr indent="0" marL="0">
+              <a:buNone/>
+            </a:pPr>
+            <a:r>
+              <a:rPr lang="en-US" sz="2700" b="1" dirty="0">
+                <a:solidFill>
+                  <a:srgbClr val="FFFFFF"/>
+                </a:solidFill>
+                <a:latin typeface="Segoe UI" pitchFamily="34" charset="0"/>
+                <a:ea typeface="Segoe UI" pitchFamily="34" charset="-122"/>
+                <a:cs typeface="Segoe UI" pitchFamily="34" charset="-120"/>
+              </a:rPr>
+              <a:t>The best ending is not needing me</a:t>
+            </a:r>
+            <a:endParaRPr lang="en-US" sz="2700" dirty="0"/>
+          </a:p>
+        </p:txBody>
+      </p:sp>
+      <p:sp>
+        <p:nvSpPr>
+          <p:cNvPr id="6" name="Text 4"/>
+          <p:cNvSpPr/>
+          <p:nvPr/>
+        </p:nvSpPr>
+        <p:spPr>
+          <a:xfrm>
+            <a:off x="868680" y="2011680"/>
+            <a:ext cx="10424160" cy="3566160"/>
+          </a:xfrm>
+          <a:prstGeom prst="rect">
+            <a:avLst/>
+          </a:prstGeom>
+          <a:noFill/>
+          <a:ln/>
+        </p:spPr>
+        <p:txBody>
+          <a:bodyPr wrap="square" rtlCol="0" anchor="t"/>
+          <a:lstStyle/>
+          <a:p>
+            <a:pPr marL="342900" indent="-342900">
+              <a:lnSpc>
+                <a:spcPct val="112000"/>
+              </a:lnSpc>
+              <a:spcAft>
+                <a:spcPts val="900"/>
+              </a:spcAft>
+              <a:buSzPct val="100000"/>
+              <a:buChar char="▸"/>
+            </a:pPr>
+            <a:r>
+              <a:rPr lang="en-US" sz="1600" dirty="0">
+                <a:solidFill>
+                  <a:srgbClr val="CBD5E1"/>
+                </a:solidFill>
+                <a:latin typeface="Segoe UI" pitchFamily="34" charset="0"/>
+                <a:ea typeface="Segoe UI" pitchFamily="34" charset="-122"/>
+                <a:cs typeface="Segoe UI" pitchFamily="34" charset="-120"/>
+              </a:rPr>
+              <a:t>Documentation written for the person who was not in the room - a new hire can follow it.</a:t>
+            </a:r>
+            <a:endParaRPr lang="en-US" sz="1600" dirty="0"/>
+          </a:p>
+          <a:p>
+            <a:pPr marL="342900" indent="-342900">
+              <a:lnSpc>
+                <a:spcPct val="112000"/>
+              </a:lnSpc>
+              <a:spcAft>
+                <a:spcPts val="900"/>
+              </a:spcAft>
+              <a:buSzPct val="100000"/>
+              <a:buChar char="▸"/>
+            </a:pPr>
+            <a:r>
+              <a:rPr lang="en-US" sz="1600" dirty="0">
+                <a:solidFill>
+                  <a:srgbClr val="CBD5E1"/>
+                </a:solidFill>
+                <a:latin typeface="Segoe UI" pitchFamily="34" charset="0"/>
+                <a:ea typeface="Segoe UI" pitchFamily="34" charset="-122"/>
+                <a:cs typeface="Segoe UI" pitchFamily="34" charset="-120"/>
+              </a:rPr>
+              <a:t>Runbooks live next to the pipelines: restart, re-run, and recovery are one page each.</a:t>
+            </a:r>
+            <a:endParaRPr lang="en-US" sz="1600" dirty="0"/>
+          </a:p>
+          <a:p>
+            <a:pPr marL="342900" indent="-342900">
+              <a:lnSpc>
+                <a:spcPct val="112000"/>
+              </a:lnSpc>
+              <a:spcAft>
+                <a:spcPts val="900"/>
+              </a:spcAft>
+              <a:buSzPct val="100000"/>
+              <a:buChar char="▸"/>
+            </a:pPr>
+            <a:r>
+              <a:rPr lang="en-US" sz="1600" dirty="0">
+                <a:solidFill>
+                  <a:srgbClr val="CBD5E1"/>
+                </a:solidFill>
+                <a:latin typeface="Segoe UI" pitchFamily="34" charset="0"/>
+                <a:ea typeface="Segoe UI" pitchFamily="34" charset="-122"/>
+                <a:cs typeface="Segoe UI" pitchFamily="34" charset="-120"/>
+              </a:rPr>
+              <a:t>Your data stays where you decide it should - local-first options keep sensitive data on your infrastructure.</a:t>
+            </a:r>
+            <a:endParaRPr lang="en-US" sz="1600" dirty="0"/>
+          </a:p>
+          <a:p>
+            <a:pPr marL="342900" indent="-342900">
+              <a:lnSpc>
+                <a:spcPct val="112000"/>
+              </a:lnSpc>
+              <a:spcAft>
+                <a:spcPts val="900"/>
+              </a:spcAft>
+              <a:buSzPct val="100000"/>
+              <a:buChar char="▸"/>
+            </a:pPr>
+            <a:r>
+              <a:rPr lang="en-US" sz="1600" dirty="0">
+                <a:solidFill>
+                  <a:srgbClr val="CBD5E1"/>
+                </a:solidFill>
+                <a:latin typeface="Segoe UI" pitchFamily="34" charset="0"/>
+                <a:ea typeface="Segoe UI" pitchFamily="34" charset="-122"/>
+                <a:cs typeface="Segoe UI" pitchFamily="34" charset="-120"/>
+              </a:rPr>
+              <a:t>Scraping is designed ethically: public data, robots directives respected, rate limits built in.</a:t>
+            </a:r>
+            <a:endParaRPr lang="en-US" sz="1600" dirty="0"/>
+          </a:p>
+          <a:p>
+            <a:pPr marL="342900" indent="-342900">
+              <a:lnSpc>
+                <a:spcPct val="112000"/>
+              </a:lnSpc>
+              <a:spcAft>
+                <a:spcPts val="900"/>
+              </a:spcAft>
+              <a:buSzPct val="100000"/>
+              <a:buChar char="▸"/>
+            </a:pPr>
+            <a:r>
+              <a:rPr lang="en-US" sz="1600" dirty="0">
+                <a:solidFill>
+                  <a:srgbClr val="CBD5E1"/>
+                </a:solidFill>
+                <a:latin typeface="Segoe UI" pitchFamily="34" charset="0"/>
+                <a:ea typeface="Segoe UI" pitchFamily="34" charset="-122"/>
+                <a:cs typeface="Segoe UI" pitchFamily="34" charset="-120"/>
+              </a:rPr>
+              <a:t>Maintenance is offered, never forced - the goal is that you stop needing me.</a:t>
+            </a:r>
+            <a:endParaRPr lang="en-US" sz="1600" dirty="0"/>
+          </a:p>
+        </p:txBody>
+      </p:sp>
+      <p:sp>
+        <p:nvSpPr>
+          <p:cNvPr id="7" name="Shape 5"/>
+          <p:cNvSpPr/>
+          <p:nvPr/>
+        </p:nvSpPr>
+        <p:spPr>
+          <a:xfrm>
+            <a:off x="822960" y="5961888"/>
+            <a:ext cx="10515600" cy="0"/>
+          </a:xfrm>
+          <a:prstGeom prst="line">
+            <a:avLst/>
+          </a:prstGeom>
+          <a:noFill/>
+          <a:ln w="12700">
+            <a:solidFill>
+              <a:srgbClr val="1E2D45"/>
+            </a:solidFill>
+            <a:prstDash val="solid"/>
+          </a:ln>
+        </p:spPr>
+      </p:sp>
+      <p:sp>
+        <p:nvSpPr>
+          <p:cNvPr id="8" name="Text 6"/>
+          <p:cNvSpPr/>
+          <p:nvPr/>
+        </p:nvSpPr>
+        <p:spPr>
+          <a:xfrm>
+            <a:off x="822960" y="6053328"/>
+            <a:ext cx="9692640" cy="457200"/>
+          </a:xfrm>
+          <a:prstGeom prst="rect">
+            <a:avLst/>
+          </a:prstGeom>
+          <a:noFill/>
+          <a:ln/>
+        </p:spPr>
+        <p:txBody>
+          <a:bodyPr wrap="square" rtlCol="0" anchor="ctr"/>
+          <a:lstStyle/>
+          <a:p>
+            <a:pPr indent="0" marL="0">
+              <a:buNone/>
+            </a:pPr>
+            <a:r>
+              <a:rPr lang="en-US" sz="1150" dirty="0">
+                <a:solidFill>
+                  <a:srgbClr val="64748B"/>
+                </a:solidFill>
+                <a:latin typeface="Segoe UI" pitchFamily="34" charset="0"/>
+                <a:ea typeface="Segoe UI" pitchFamily="34" charset="-122"/>
+                <a:cs typeface="Segoe UI" pitchFamily="34" charset="-120"/>
+              </a:rPr>
+              <a:t>Professionals have boundaries and boring technology; both make handover boring - which is the point.</a:t>
+            </a:r>
+            <a:endParaRPr lang="en-US" sz="1150" dirty="0"/>
+          </a:p>
+        </p:txBody>
+      </p:sp>
+      <p:sp>
+        <p:nvSpPr>
+          <p:cNvPr id="9" name="Text 7"/>
+          <p:cNvSpPr/>
+          <p:nvPr/>
+        </p:nvSpPr>
+        <p:spPr>
+          <a:xfrm>
+            <a:off x="10698480" y="6382512"/>
+            <a:ext cx="1188720" cy="365760"/>
+          </a:xfrm>
+          <a:prstGeom prst="rect">
+            <a:avLst/>
+          </a:prstGeom>
+          <a:noFill/>
+          <a:ln/>
+        </p:spPr>
+        <p:txBody>
+          <a:bodyPr wrap="square" rtlCol="0" anchor="ctr"/>
+          <a:lstStyle/>
+          <a:p>
+            <a:pPr algn="r" indent="0" marL="0">
+              <a:buNone/>
+            </a:pPr>
+            <a:r>
+              <a:rPr lang="en-US" sz="1000" dirty="0">
+                <a:solidFill>
+                  <a:srgbClr val="64748B"/>
+                </a:solidFill>
+                <a:latin typeface="Consolas" pitchFamily="34" charset="0"/>
+                <a:ea typeface="Consolas" pitchFamily="34" charset="-122"/>
+                <a:cs typeface="Consolas" pitchFamily="34" charset="-120"/>
+              </a:rPr>
+              <a:t>13 / 14</a:t>
+            </a:r>
+            <a:endParaRPr lang="en-US" sz="1000" dirty="0"/>
+          </a:p>
+        </p:txBody>
+      </p:sp>
+    </p:spTree>
+  </p:cSld>
+  <p:clrMapOvr>
+    <a:masterClrMapping/>
+  </p:clrMapOvr>
+</p:sld>
+</file>
+
+<file path=ppt/slides/slide14.xml><?xml version="1.0" encoding="utf-8"?>
+<p:sld xmlns:a="http://schemas.openxmlformats.org/drawingml/2006/main" xmlns:r="http://schemas.openxmlformats.org/officeDocument/2006/relationships" xmlns:p="http://schemas.openxmlformats.org/presentationml/2006/main">
+  <p:cSld name="Slide 14">
+    <p:bg>
+      <p:bgPr>
+        <a:solidFill>
+          <a:srgbClr val="0A0C12"/>
+        </a:solidFill>
+      </p:bgPr>
+    </p:bg>
+    <p:spTree>
+      <p:nvGrpSpPr>
+        <p:cNvPr id="1" name=""/>
+        <p:cNvGrpSpPr/>
+        <p:nvPr/>
+      </p:nvGrpSpPr>
+      <p:grpSpPr>
+        <a:xfrm>
+          <a:off x="0" y="0"/>
+          <a:ext cx="0" cy="0"/>
+          <a:chOff x="0" y="0"/>
+          <a:chExt cx="0" cy="0"/>
+        </a:xfrm>
+      </p:grpSpPr>
+      <p:sp>
+        <p:nvSpPr>
+          <p:cNvPr id="2" name="Shape 0"/>
+          <p:cNvSpPr/>
+          <p:nvPr/>
+        </p:nvSpPr>
+        <p:spPr>
+          <a:xfrm>
+            <a:off x="0" y="0"/>
+            <a:ext cx="7680960" cy="64008"/>
+          </a:xfrm>
+          <a:prstGeom prst="rect">
+            <a:avLst/>
+          </a:prstGeom>
+          <a:solidFill>
+            <a:srgbClr val="3B82F6"/>
+          </a:solidFill>
+          <a:ln/>
+        </p:spPr>
+      </p:sp>
+      <p:sp>
+        <p:nvSpPr>
+          <p:cNvPr id="3" name="Shape 1"/>
+          <p:cNvSpPr/>
+          <p:nvPr/>
+        </p:nvSpPr>
+        <p:spPr>
+          <a:xfrm>
+            <a:off x="7680960" y="0"/>
+            <a:ext cx="4510735" cy="64008"/>
+          </a:xfrm>
+          <a:prstGeom prst="rect">
+            <a:avLst/>
+          </a:prstGeom>
+          <a:solidFill>
+            <a:srgbClr val="06B6D4"/>
+          </a:solidFill>
+          <a:ln/>
+        </p:spPr>
+      </p:sp>
+      <p:sp>
+        <p:nvSpPr>
+          <p:cNvPr id="4" name="Text 2"/>
+          <p:cNvSpPr/>
+          <p:nvPr/>
+        </p:nvSpPr>
+        <p:spPr>
+          <a:xfrm>
+            <a:off x="822960" y="1417320"/>
+            <a:ext cx="10515600" cy="411480"/>
+          </a:xfrm>
+          <a:prstGeom prst="rect">
+            <a:avLst/>
+          </a:prstGeom>
+          <a:noFill/>
+          <a:ln/>
+        </p:spPr>
+        <p:txBody>
+          <a:bodyPr wrap="square" rtlCol="0" anchor="ctr"/>
+          <a:lstStyle/>
+          <a:p>
+            <a:pPr algn="ctr" indent="0" marL="0">
+              <a:buNone/>
+            </a:pPr>
+            <a:r>
+              <a:rPr lang="en-US" sz="1300" spc="400" kern="0" dirty="0">
+                <a:solidFill>
+                  <a:srgbClr val="06B6D4"/>
+                </a:solidFill>
+                <a:latin typeface="Consolas" pitchFamily="34" charset="0"/>
+                <a:ea typeface="Consolas" pitchFamily="34" charset="-122"/>
+                <a:cs typeface="Consolas" pitchFamily="34" charset="-120"/>
+              </a:rPr>
+              <a:t>WORK WITH ME</a:t>
+            </a:r>
+            <a:endParaRPr lang="en-US" sz="1300" dirty="0"/>
+          </a:p>
+        </p:txBody>
+      </p:sp>
+      <p:sp>
+        <p:nvSpPr>
+          <p:cNvPr id="5" name="Text 3"/>
+          <p:cNvSpPr/>
+          <p:nvPr/>
+        </p:nvSpPr>
+        <p:spPr>
+          <a:xfrm>
+            <a:off x="822960" y="1920240"/>
+            <a:ext cx="10515600" cy="1371600"/>
+          </a:xfrm>
+          <a:prstGeom prst="rect">
+            <a:avLst/>
+          </a:prstGeom>
+          <a:noFill/>
+          <a:ln/>
+        </p:spPr>
+        <p:txBody>
+          <a:bodyPr wrap="square" rtlCol="0" anchor="ctr"/>
+          <a:lstStyle/>
+          <a:p>
+            <a:pPr algn="ctr" indent="0" marL="0">
+              <a:buNone/>
+            </a:pPr>
+            <a:r>
+              <a:rPr lang="en-US" sz="3200" b="1" dirty="0">
+                <a:solidFill>
+                  <a:srgbClr val="FFFFFF"/>
+                </a:solidFill>
+                <a:latin typeface="Segoe UI" pitchFamily="34" charset="0"/>
+                <a:ea typeface="Segoe UI" pitchFamily="34" charset="-122"/>
+                <a:cs typeface="Segoe UI" pitchFamily="34" charset="-120"/>
+              </a:rPr>
+              <a:t>Hire discipline, not tools</a:t>
+            </a:r>
+            <a:endParaRPr lang="en-US" sz="3200" dirty="0"/>
+          </a:p>
+        </p:txBody>
+      </p:sp>
+      <p:sp>
+        <p:nvSpPr>
+          <p:cNvPr id="6" name="Text 4"/>
+          <p:cNvSpPr/>
+          <p:nvPr/>
+        </p:nvSpPr>
+        <p:spPr>
+          <a:xfrm>
+            <a:off x="2011680" y="3429000"/>
+            <a:ext cx="8183880" cy="1554480"/>
+          </a:xfrm>
+          <a:prstGeom prst="rect">
+            <a:avLst/>
+          </a:prstGeom>
+          <a:noFill/>
+          <a:ln/>
+        </p:spPr>
+        <p:txBody>
+          <a:bodyPr wrap="square" rtlCol="0" anchor="t"/>
+          <a:lstStyle/>
+          <a:p>
+            <a:pPr algn="ctr" indent="0" marL="0">
+              <a:spcAft>
+                <a:spcPts val="800"/>
+              </a:spcAft>
+              <a:buNone/>
+            </a:pPr>
+            <a:r>
+              <a:rPr lang="en-US" sz="1500" dirty="0">
+                <a:solidFill>
+                  <a:srgbClr val="CBD5E1"/>
+                </a:solidFill>
+                <a:latin typeface="Segoe UI" pitchFamily="34" charset="0"/>
+                <a:ea typeface="Segoe UI" pitchFamily="34" charset="-122"/>
+                <a:cs typeface="Segoe UI" pitchFamily="34" charset="-120"/>
+              </a:rPr>
+              <a:t>Data scraping, BI, and AI automation delivered worldwide via Upwork</a:t>
+            </a:r>
+            <a:pPr algn="ctr" indent="0" marL="0">
+              <a:spcAft>
+                <a:spcPts val="800"/>
+              </a:spcAft>
+              <a:buNone/>
+            </a:pPr>
+            <a:r>
+              <a:rPr lang="en-US" sz="1500" dirty="0">
+                <a:solidFill>
+                  <a:srgbClr val="CBD5E1"/>
+                </a:solidFill>
+                <a:latin typeface="Segoe UI" pitchFamily="34" charset="0"/>
+                <a:ea typeface="Segoe UI" pitchFamily="34" charset="-122"/>
+                <a:cs typeface="Segoe UI" pitchFamily="34" charset="-120"/>
+              </a:rPr>
+              <a:t>Start with a scoping call: decision, success criteria, sources - then a fixed written scope</a:t>
+            </a:r>
+            <a:pPr algn="ctr" indent="0" marL="0">
+              <a:spcAft>
+                <a:spcPts val="800"/>
+              </a:spcAft>
+              <a:buNone/>
+            </a:pPr>
+            <a:r>
+              <a:rPr lang="en-US" sz="1500" dirty="0">
+                <a:solidFill>
+                  <a:srgbClr val="CBD5E1"/>
+                </a:solidFill>
+                <a:latin typeface="Segoe UI" pitchFamily="34" charset="0"/>
+                <a:ea typeface="Segoe UI" pitchFamily="34" charset="-122"/>
+                <a:cs typeface="Segoe UI" pitchFamily="34" charset="-120"/>
+              </a:rPr>
+              <a:t>Ask me the seven filter questions; my answers are all in this deck</a:t>
+            </a:r>
+            <a:endParaRPr lang="en-US" sz="1500" dirty="0"/>
+          </a:p>
+        </p:txBody>
+      </p:sp>
+      <p:sp>
+        <p:nvSpPr>
+          <p:cNvPr id="7" name="Shape 5"/>
+          <p:cNvSpPr/>
+          <p:nvPr/>
+        </p:nvSpPr>
+        <p:spPr>
+          <a:xfrm>
+            <a:off x="3566160" y="5212080"/>
+            <a:ext cx="5074920" cy="0"/>
+          </a:xfrm>
+          <a:prstGeom prst="line">
+            <a:avLst/>
+          </a:prstGeom>
+          <a:noFill/>
+          <a:ln w="25400">
+            <a:solidFill>
+              <a:srgbClr val="3B82F6"/>
+            </a:solidFill>
+            <a:prstDash val="solid"/>
+          </a:ln>
+        </p:spPr>
+      </p:sp>
+      <p:sp>
+        <p:nvSpPr>
+          <p:cNvPr id="8" name="Text 6"/>
+          <p:cNvSpPr/>
+          <p:nvPr/>
+        </p:nvSpPr>
+        <p:spPr>
+          <a:xfrm>
+            <a:off x="822960" y="5376672"/>
+            <a:ext cx="10515600" cy="457200"/>
+          </a:xfrm>
+          <a:prstGeom prst="rect">
+            <a:avLst/>
+          </a:prstGeom>
+          <a:noFill/>
+          <a:ln/>
+        </p:spPr>
+        <p:txBody>
+          <a:bodyPr wrap="square" rtlCol="0" anchor="ctr"/>
+          <a:lstStyle/>
+          <a:p>
+            <a:pPr algn="ctr" indent="0" marL="0">
+              <a:buNone/>
+            </a:pPr>
+            <a:r>
+              <a:rPr lang="en-US" sz="1350" b="1" dirty="0">
+                <a:solidFill>
+                  <a:srgbClr val="06B6D4"/>
+                </a:solidFill>
+                <a:latin typeface="Consolas" pitchFamily="34" charset="0"/>
+                <a:ea typeface="Consolas" pitchFamily="34" charset="-122"/>
+                <a:cs typeface="Consolas" pitchFamily="34" charset="-120"/>
+              </a:rPr>
+              <a:t>rezalianvatiady.github.io · github.com/rezalianvatiady</a:t>
+            </a:r>
+            <a:endParaRPr lang="en-US" sz="1350" dirty="0"/>
+          </a:p>
+        </p:txBody>
+      </p:sp>
+      <p:sp>
+        <p:nvSpPr>
+          <p:cNvPr id="9" name="Text 7"/>
+          <p:cNvSpPr/>
+          <p:nvPr/>
+        </p:nvSpPr>
+        <p:spPr>
+          <a:xfrm>
+            <a:off x="10698480" y="6382512"/>
+            <a:ext cx="1188720" cy="365760"/>
+          </a:xfrm>
+          <a:prstGeom prst="rect">
+            <a:avLst/>
+          </a:prstGeom>
+          <a:noFill/>
+          <a:ln/>
+        </p:spPr>
+        <p:txBody>
+          <a:bodyPr wrap="square" rtlCol="0" anchor="ctr"/>
+          <a:lstStyle/>
+          <a:p>
+            <a:pPr algn="r" indent="0" marL="0">
+              <a:buNone/>
+            </a:pPr>
+            <a:r>
+              <a:rPr lang="en-US" sz="1000" dirty="0">
+                <a:solidFill>
+                  <a:srgbClr val="64748B"/>
+                </a:solidFill>
+                <a:latin typeface="Consolas" pitchFamily="34" charset="0"/>
+                <a:ea typeface="Consolas" pitchFamily="34" charset="-122"/>
+                <a:cs typeface="Consolas" pitchFamily="34" charset="-120"/>
+              </a:rPr>
+              <a:t>14 / 14</a:t>
             </a:r>
             <a:endParaRPr lang="en-US" sz="1000" dirty="0"/>
           </a:p>
@@ -1799,7 +5432,7 @@
                 <a:ea typeface="Consolas" pitchFamily="34" charset="-122"/>
                 <a:cs typeface="Consolas" pitchFamily="34" charset="-120"/>
               </a:rPr>
-              <a:t>SERVICES</a:t>
+              <a:t>AGENDA</a:t>
             </a:r>
             <a:endParaRPr lang="en-US" sz="1200" dirty="0"/>
           </a:p>
@@ -1813,8 +5446,8 @@
         </p:nvSpPr>
         <p:spPr>
           <a:xfrm>
-            <a:off x="822960" y="960120"/>
-            <a:ext cx="10515600" cy="868680"/>
+            <a:off x="822960" y="914400"/>
+            <a:ext cx="10561320" cy="868680"/>
           </a:xfrm>
           <a:prstGeom prst="rect">
             <a:avLst/>
@@ -1830,7 +5463,7 @@
               <a:buNone/>
             </a:pPr>
             <a:r>
-              <a:rPr lang="en-US" sz="3000" b="1" dirty="0">
+              <a:rPr lang="en-US" sz="2700" b="1" dirty="0">
                 <a:solidFill>
                   <a:srgbClr val="FFFFFF"/>
                 </a:solidFill>
@@ -1838,45 +5471,102 @@
                 <a:ea typeface="Segoe UI" pitchFamily="34" charset="-122"/>
                 <a:cs typeface="Segoe UI" pitchFamily="34" charset="-120"/>
               </a:rPr>
-              <a:t>What I take on</a:t>
-            </a:r>
-            <a:endParaRPr lang="en-US" sz="3000" dirty="0"/>
-          </a:p>
-        </p:txBody>
-      </p:sp>
-      <p:sp>
-        <p:nvSpPr>
-          <p:cNvPr id="6" name="Text 4"/>
-          <p:cNvSpPr/>
-          <p:nvPr/>
-        </p:nvSpPr>
-        <p:spPr>
-          <a:xfrm>
-            <a:off x="868680" y="2057400"/>
-            <a:ext cx="10424160" cy="3566160"/>
-          </a:xfrm>
-          <a:prstGeom prst="rect">
-            <a:avLst/>
-          </a:prstGeom>
-          <a:noFill/>
-          <a:ln/>
-        </p:spPr>
-        <p:txBody>
-          <a:bodyPr wrap="square" rtlCol="0" anchor="t"/>
-          <a:lstStyle/>
-          <a:p>
-            <a:pPr marL="342900" indent="-342900">
-              <a:lnSpc>
-                <a:spcPct val="115000"/>
-              </a:lnSpc>
-              <a:spcAft>
-                <a:spcPts val="1000"/>
-              </a:spcAft>
-              <a:buSzPct val="100000"/>
-              <a:buChar char="▸"/>
-            </a:pPr>
-            <a:r>
-              <a:rPr lang="en-US" sz="1600" dirty="0">
+              <a:t>What this deck covers</a:t>
+            </a:r>
+            <a:endParaRPr lang="en-US" sz="2700" dirty="0"/>
+          </a:p>
+        </p:txBody>
+      </p:sp>
+      <p:sp>
+        <p:nvSpPr>
+          <p:cNvPr id="6" name="Shape 4"/>
+          <p:cNvSpPr/>
+          <p:nvPr/>
+        </p:nvSpPr>
+        <p:spPr>
+          <a:xfrm>
+            <a:off x="868680" y="2112264"/>
+            <a:ext cx="420624" cy="420624"/>
+          </a:xfrm>
+          <a:prstGeom prst="ellipse">
+            <a:avLst/>
+          </a:prstGeom>
+          <a:solidFill>
+            <a:srgbClr val="111A2E"/>
+          </a:solidFill>
+          <a:ln w="19050">
+            <a:solidFill>
+              <a:srgbClr val="3B82F6"/>
+            </a:solidFill>
+            <a:prstDash val="solid"/>
+          </a:ln>
+        </p:spPr>
+      </p:sp>
+      <p:sp>
+        <p:nvSpPr>
+          <p:cNvPr id="7" name="Text 5"/>
+          <p:cNvSpPr/>
+          <p:nvPr/>
+        </p:nvSpPr>
+        <p:spPr>
+          <a:xfrm>
+            <a:off x="868680" y="2112264"/>
+            <a:ext cx="420624" cy="420624"/>
+          </a:xfrm>
+          <a:prstGeom prst="rect">
+            <a:avLst/>
+          </a:prstGeom>
+          <a:noFill/>
+          <a:ln/>
+        </p:spPr>
+        <p:txBody>
+          <a:bodyPr wrap="square" rtlCol="0" anchor="ctr"/>
+          <a:lstStyle/>
+          <a:p>
+            <a:pPr algn="ctr" indent="0" marL="0">
+              <a:buNone/>
+            </a:pPr>
+            <a:r>
+              <a:rPr lang="en-US" sz="1300" b="1" dirty="0">
+                <a:solidFill>
+                  <a:srgbClr val="3B82F6"/>
+                </a:solidFill>
+                <a:latin typeface="Consolas" pitchFamily="34" charset="0"/>
+                <a:ea typeface="Consolas" pitchFamily="34" charset="-122"/>
+                <a:cs typeface="Consolas" pitchFamily="34" charset="-120"/>
+              </a:rPr>
+              <a:t>1</a:t>
+            </a:r>
+            <a:endParaRPr lang="en-US" sz="1300" dirty="0"/>
+          </a:p>
+        </p:txBody>
+      </p:sp>
+      <p:sp>
+        <p:nvSpPr>
+          <p:cNvPr id="8" name="Text 6"/>
+          <p:cNvSpPr/>
+          <p:nvPr/>
+        </p:nvSpPr>
+        <p:spPr>
+          <a:xfrm>
+            <a:off x="1435608" y="2057400"/>
+            <a:ext cx="4480560" cy="822960"/>
+          </a:xfrm>
+          <a:prstGeom prst="rect">
+            <a:avLst/>
+          </a:prstGeom>
+          <a:noFill/>
+          <a:ln/>
+        </p:spPr>
+        <p:txBody>
+          <a:bodyPr wrap="square" rtlCol="0" anchor="ctr"/>
+          <a:lstStyle/>
+          <a:p>
+            <a:pPr indent="0" marL="0">
+              <a:buNone/>
+            </a:pPr>
+            <a:r>
+              <a:rPr lang="en-US" sz="1450" dirty="0">
                 <a:solidFill>
                   <a:srgbClr val="CBD5E1"/>
                 </a:solidFill>
@@ -1884,23 +5574,102 @@
                 <a:ea typeface="Segoe UI" pitchFamily="34" charset="-122"/>
                 <a:cs typeface="Segoe UI" pitchFamily="34" charset="-120"/>
               </a:rPr>
-              <a:t>Web scraping and data collection pipelines</a:t>
-            </a:r>
-            <a:endParaRPr lang="en-US" sz="1600" dirty="0"/>
-          </a:p>
-          <a:p>
-            <a:pPr marL="342900" indent="-342900">
-              <a:lnSpc>
-                <a:spcPct val="115000"/>
-              </a:lnSpc>
-              <a:spcAft>
-                <a:spcPts val="1000"/>
-              </a:spcAft>
-              <a:buSzPct val="100000"/>
-              <a:buChar char="▸"/>
-            </a:pPr>
-            <a:r>
-              <a:rPr lang="en-US" sz="1600" dirty="0">
+              <a:t>What I take on - and the open-source frameworks behind it</a:t>
+            </a:r>
+            <a:endParaRPr lang="en-US" sz="1450" dirty="0"/>
+          </a:p>
+        </p:txBody>
+      </p:sp>
+      <p:sp>
+        <p:nvSpPr>
+          <p:cNvPr id="9" name="Shape 7"/>
+          <p:cNvSpPr/>
+          <p:nvPr/>
+        </p:nvSpPr>
+        <p:spPr>
+          <a:xfrm>
+            <a:off x="868680" y="3044952"/>
+            <a:ext cx="420624" cy="420624"/>
+          </a:xfrm>
+          <a:prstGeom prst="ellipse">
+            <a:avLst/>
+          </a:prstGeom>
+          <a:solidFill>
+            <a:srgbClr val="111A2E"/>
+          </a:solidFill>
+          <a:ln w="19050">
+            <a:solidFill>
+              <a:srgbClr val="06B6D4"/>
+            </a:solidFill>
+            <a:prstDash val="solid"/>
+          </a:ln>
+        </p:spPr>
+      </p:sp>
+      <p:sp>
+        <p:nvSpPr>
+          <p:cNvPr id="10" name="Text 8"/>
+          <p:cNvSpPr/>
+          <p:nvPr/>
+        </p:nvSpPr>
+        <p:spPr>
+          <a:xfrm>
+            <a:off x="868680" y="3044952"/>
+            <a:ext cx="420624" cy="420624"/>
+          </a:xfrm>
+          <a:prstGeom prst="rect">
+            <a:avLst/>
+          </a:prstGeom>
+          <a:noFill/>
+          <a:ln/>
+        </p:spPr>
+        <p:txBody>
+          <a:bodyPr wrap="square" rtlCol="0" anchor="ctr"/>
+          <a:lstStyle/>
+          <a:p>
+            <a:pPr algn="ctr" indent="0" marL="0">
+              <a:buNone/>
+            </a:pPr>
+            <a:r>
+              <a:rPr lang="en-US" sz="1300" b="1" dirty="0">
+                <a:solidFill>
+                  <a:srgbClr val="06B6D4"/>
+                </a:solidFill>
+                <a:latin typeface="Consolas" pitchFamily="34" charset="0"/>
+                <a:ea typeface="Consolas" pitchFamily="34" charset="-122"/>
+                <a:cs typeface="Consolas" pitchFamily="34" charset="-120"/>
+              </a:rPr>
+              <a:t>2</a:t>
+            </a:r>
+            <a:endParaRPr lang="en-US" sz="1300" dirty="0"/>
+          </a:p>
+        </p:txBody>
+      </p:sp>
+      <p:sp>
+        <p:nvSpPr>
+          <p:cNvPr id="11" name="Text 9"/>
+          <p:cNvSpPr/>
+          <p:nvPr/>
+        </p:nvSpPr>
+        <p:spPr>
+          <a:xfrm>
+            <a:off x="1435608" y="2990088"/>
+            <a:ext cx="4480560" cy="822960"/>
+          </a:xfrm>
+          <a:prstGeom prst="rect">
+            <a:avLst/>
+          </a:prstGeom>
+          <a:noFill/>
+          <a:ln/>
+        </p:spPr>
+        <p:txBody>
+          <a:bodyPr wrap="square" rtlCol="0" anchor="ctr"/>
+          <a:lstStyle/>
+          <a:p>
+            <a:pPr indent="0" marL="0">
+              <a:buNone/>
+            </a:pPr>
+            <a:r>
+              <a:rPr lang="en-US" sz="1450" dirty="0">
                 <a:solidFill>
                   <a:srgbClr val="CBD5E1"/>
                 </a:solidFill>
@@ -1908,23 +5677,102 @@
                 <a:ea typeface="Segoe UI" pitchFamily="34" charset="-122"/>
                 <a:cs typeface="Segoe UI" pitchFamily="34" charset="-120"/>
               </a:rPr>
-              <a:t>BI and analytics: dashboards, reconciliation, reporting</a:t>
-            </a:r>
-            <a:endParaRPr lang="en-US" sz="1600" dirty="0"/>
-          </a:p>
-          <a:p>
-            <a:pPr marL="342900" indent="-342900">
-              <a:lnSpc>
-                <a:spcPct val="115000"/>
-              </a:lnSpc>
-              <a:spcAft>
-                <a:spcPts val="1000"/>
-              </a:spcAft>
-              <a:buSzPct val="100000"/>
-              <a:buChar char="▸"/>
-            </a:pPr>
-            <a:r>
-              <a:rPr lang="en-US" sz="1600" dirty="0">
+              <a:t>Week one: scoping that decides the project</a:t>
+            </a:r>
+            <a:endParaRPr lang="en-US" sz="1450" dirty="0"/>
+          </a:p>
+        </p:txBody>
+      </p:sp>
+      <p:sp>
+        <p:nvSpPr>
+          <p:cNvPr id="12" name="Shape 10"/>
+          <p:cNvSpPr/>
+          <p:nvPr/>
+        </p:nvSpPr>
+        <p:spPr>
+          <a:xfrm>
+            <a:off x="868680" y="3977640"/>
+            <a:ext cx="420624" cy="420624"/>
+          </a:xfrm>
+          <a:prstGeom prst="ellipse">
+            <a:avLst/>
+          </a:prstGeom>
+          <a:solidFill>
+            <a:srgbClr val="111A2E"/>
+          </a:solidFill>
+          <a:ln w="19050">
+            <a:solidFill>
+              <a:srgbClr val="3B82F6"/>
+            </a:solidFill>
+            <a:prstDash val="solid"/>
+          </a:ln>
+        </p:spPr>
+      </p:sp>
+      <p:sp>
+        <p:nvSpPr>
+          <p:cNvPr id="13" name="Text 11"/>
+          <p:cNvSpPr/>
+          <p:nvPr/>
+        </p:nvSpPr>
+        <p:spPr>
+          <a:xfrm>
+            <a:off x="868680" y="3977640"/>
+            <a:ext cx="420624" cy="420624"/>
+          </a:xfrm>
+          <a:prstGeom prst="rect">
+            <a:avLst/>
+          </a:prstGeom>
+          <a:noFill/>
+          <a:ln/>
+        </p:spPr>
+        <p:txBody>
+          <a:bodyPr wrap="square" rtlCol="0" anchor="ctr"/>
+          <a:lstStyle/>
+          <a:p>
+            <a:pPr algn="ctr" indent="0" marL="0">
+              <a:buNone/>
+            </a:pPr>
+            <a:r>
+              <a:rPr lang="en-US" sz="1300" b="1" dirty="0">
+                <a:solidFill>
+                  <a:srgbClr val="3B82F6"/>
+                </a:solidFill>
+                <a:latin typeface="Consolas" pitchFamily="34" charset="0"/>
+                <a:ea typeface="Consolas" pitchFamily="34" charset="-122"/>
+                <a:cs typeface="Consolas" pitchFamily="34" charset="-120"/>
+              </a:rPr>
+              <a:t>3</a:t>
+            </a:r>
+            <a:endParaRPr lang="en-US" sz="1300" dirty="0"/>
+          </a:p>
+        </p:txBody>
+      </p:sp>
+      <p:sp>
+        <p:nvSpPr>
+          <p:cNvPr id="14" name="Text 12"/>
+          <p:cNvSpPr/>
+          <p:nvPr/>
+        </p:nvSpPr>
+        <p:spPr>
+          <a:xfrm>
+            <a:off x="1435608" y="3922776"/>
+            <a:ext cx="4480560" cy="822960"/>
+          </a:xfrm>
+          <a:prstGeom prst="rect">
+            <a:avLst/>
+          </a:prstGeom>
+          <a:noFill/>
+          <a:ln/>
+        </p:spPr>
+        <p:txBody>
+          <a:bodyPr wrap="square" rtlCol="0" anchor="ctr"/>
+          <a:lstStyle/>
+          <a:p>
+            <a:pPr indent="0" marL="0">
+              <a:buNone/>
+            </a:pPr>
+            <a:r>
+              <a:rPr lang="en-US" sz="1450" dirty="0">
                 <a:solidFill>
                   <a:srgbClr val="CBD5E1"/>
                 </a:solidFill>
@@ -1932,23 +5780,102 @@
                 <a:ea typeface="Segoe UI" pitchFamily="34" charset="-122"/>
                 <a:cs typeface="Segoe UI" pitchFamily="34" charset="-120"/>
               </a:rPr>
-              <a:t>AI automation: agents, document workflows, local-first LLM systems</a:t>
-            </a:r>
-            <a:endParaRPr lang="en-US" sz="1600" dirty="0"/>
-          </a:p>
-          <a:p>
-            <a:pPr marL="342900" indent="-342900">
-              <a:lnSpc>
-                <a:spcPct val="115000"/>
-              </a:lnSpc>
-              <a:spcAft>
-                <a:spcPts val="1000"/>
-              </a:spcAft>
-              <a:buSzPct val="100000"/>
-              <a:buChar char="▸"/>
-            </a:pPr>
-            <a:r>
-              <a:rPr lang="en-US" sz="1600" dirty="0">
+              <a:t>Validation-first delivery and honest communication</a:t>
+            </a:r>
+            <a:endParaRPr lang="en-US" sz="1450" dirty="0"/>
+          </a:p>
+        </p:txBody>
+      </p:sp>
+      <p:sp>
+        <p:nvSpPr>
+          <p:cNvPr id="15" name="Shape 13"/>
+          <p:cNvSpPr/>
+          <p:nvPr/>
+        </p:nvSpPr>
+        <p:spPr>
+          <a:xfrm>
+            <a:off x="6355080" y="2112264"/>
+            <a:ext cx="420624" cy="420624"/>
+          </a:xfrm>
+          <a:prstGeom prst="ellipse">
+            <a:avLst/>
+          </a:prstGeom>
+          <a:solidFill>
+            <a:srgbClr val="111A2E"/>
+          </a:solidFill>
+          <a:ln w="19050">
+            <a:solidFill>
+              <a:srgbClr val="06B6D4"/>
+            </a:solidFill>
+            <a:prstDash val="solid"/>
+          </a:ln>
+        </p:spPr>
+      </p:sp>
+      <p:sp>
+        <p:nvSpPr>
+          <p:cNvPr id="16" name="Text 14"/>
+          <p:cNvSpPr/>
+          <p:nvPr/>
+        </p:nvSpPr>
+        <p:spPr>
+          <a:xfrm>
+            <a:off x="6355080" y="2112264"/>
+            <a:ext cx="420624" cy="420624"/>
+          </a:xfrm>
+          <a:prstGeom prst="rect">
+            <a:avLst/>
+          </a:prstGeom>
+          <a:noFill/>
+          <a:ln/>
+        </p:spPr>
+        <p:txBody>
+          <a:bodyPr wrap="square" rtlCol="0" anchor="ctr"/>
+          <a:lstStyle/>
+          <a:p>
+            <a:pPr algn="ctr" indent="0" marL="0">
+              <a:buNone/>
+            </a:pPr>
+            <a:r>
+              <a:rPr lang="en-US" sz="1300" b="1" dirty="0">
+                <a:solidFill>
+                  <a:srgbClr val="06B6D4"/>
+                </a:solidFill>
+                <a:latin typeface="Consolas" pitchFamily="34" charset="0"/>
+                <a:ea typeface="Consolas" pitchFamily="34" charset="-122"/>
+                <a:cs typeface="Consolas" pitchFamily="34" charset="-120"/>
+              </a:rPr>
+              <a:t>4</a:t>
+            </a:r>
+            <a:endParaRPr lang="en-US" sz="1300" dirty="0"/>
+          </a:p>
+        </p:txBody>
+      </p:sp>
+      <p:sp>
+        <p:nvSpPr>
+          <p:cNvPr id="17" name="Text 15"/>
+          <p:cNvSpPr/>
+          <p:nvPr/>
+        </p:nvSpPr>
+        <p:spPr>
+          <a:xfrm>
+            <a:off x="6922008" y="2057400"/>
+            <a:ext cx="4480560" cy="822960"/>
+          </a:xfrm>
+          <a:prstGeom prst="rect">
+            <a:avLst/>
+          </a:prstGeom>
+          <a:noFill/>
+          <a:ln/>
+        </p:spPr>
+        <p:txBody>
+          <a:bodyPr wrap="square" rtlCol="0" anchor="ctr"/>
+          <a:lstStyle/>
+          <a:p>
+            <a:pPr indent="0" marL="0">
+              <a:buNone/>
+            </a:pPr>
+            <a:r>
+              <a:rPr lang="en-US" sz="1450" dirty="0">
                 <a:solidFill>
                   <a:srgbClr val="CBD5E1"/>
                 </a:solidFill>
@@ -1956,22 +5883,47 @@
                 <a:ea typeface="Segoe UI" pitchFamily="34" charset="-122"/>
                 <a:cs typeface="Segoe UI" pitchFamily="34" charset="-120"/>
               </a:rPr>
-              <a:t>Frameworks behind it: ODIS (4,305 LOC) and Web Scraping Toolkit (4,398 LOC), open source</a:t>
-            </a:r>
-            <a:endParaRPr lang="en-US" sz="1600" dirty="0"/>
-          </a:p>
-        </p:txBody>
-      </p:sp>
-      <p:sp>
-        <p:nvSpPr>
-          <p:cNvPr id="7" name="Text 5"/>
-          <p:cNvSpPr/>
-          <p:nvPr/>
-        </p:nvSpPr>
-        <p:spPr>
-          <a:xfrm>
-            <a:off x="10698480" y="6355080"/>
-            <a:ext cx="1188720" cy="365760"/>
+              <a:t>Handover: the best ending is not needing me</a:t>
+            </a:r>
+            <a:endParaRPr lang="en-US" sz="1450" dirty="0"/>
+          </a:p>
+        </p:txBody>
+      </p:sp>
+      <p:sp>
+        <p:nvSpPr>
+          <p:cNvPr id="18" name="Shape 16"/>
+          <p:cNvSpPr/>
+          <p:nvPr/>
+        </p:nvSpPr>
+        <p:spPr>
+          <a:xfrm>
+            <a:off x="6355080" y="3044952"/>
+            <a:ext cx="420624" cy="420624"/>
+          </a:xfrm>
+          <a:prstGeom prst="ellipse">
+            <a:avLst/>
+          </a:prstGeom>
+          <a:solidFill>
+            <a:srgbClr val="111A2E"/>
+          </a:solidFill>
+          <a:ln w="19050">
+            <a:solidFill>
+              <a:srgbClr val="3B82F6"/>
+            </a:solidFill>
+            <a:prstDash val="solid"/>
+          </a:ln>
+        </p:spPr>
+      </p:sp>
+      <p:sp>
+        <p:nvSpPr>
+          <p:cNvPr id="19" name="Text 17"/>
+          <p:cNvSpPr/>
+          <p:nvPr/>
+        </p:nvSpPr>
+        <p:spPr>
+          <a:xfrm>
+            <a:off x="6355080" y="3044952"/>
+            <a:ext cx="420624" cy="420624"/>
           </a:xfrm>
           <a:prstGeom prst="rect">
             <a:avLst/>
@@ -1983,19 +5935,97 @@
           <a:bodyPr wrap="square" rtlCol="0" anchor="ctr"/>
           <a:lstStyle/>
           <a:p>
-            <a:pPr algn="r" indent="0" marL="0">
+            <a:pPr algn="ctr" indent="0" marL="0">
               <a:buNone/>
             </a:pPr>
             <a:r>
-              <a:rPr lang="en-US" sz="1000" dirty="0">
-                <a:solidFill>
-                  <a:srgbClr val="64748B"/>
+              <a:rPr lang="en-US" sz="1300" b="1" dirty="0">
+                <a:solidFill>
+                  <a:srgbClr val="3B82F6"/>
                 </a:solidFill>
                 <a:latin typeface="Consolas" pitchFamily="34" charset="0"/>
                 <a:ea typeface="Consolas" pitchFamily="34" charset="-122"/>
                 <a:cs typeface="Consolas" pitchFamily="34" charset="-120"/>
               </a:rPr>
-              <a:t>2 / 8</a:t>
+              <a:t>5</a:t>
+            </a:r>
+            <a:endParaRPr lang="en-US" sz="1300" dirty="0"/>
+          </a:p>
+        </p:txBody>
+      </p:sp>
+      <p:sp>
+        <p:nvSpPr>
+          <p:cNvPr id="20" name="Text 18"/>
+          <p:cNvSpPr/>
+          <p:nvPr/>
+        </p:nvSpPr>
+        <p:spPr>
+          <a:xfrm>
+            <a:off x="6922008" y="2990088"/>
+            <a:ext cx="4480560" cy="822960"/>
+          </a:xfrm>
+          <a:prstGeom prst="rect">
+            <a:avLst/>
+          </a:prstGeom>
+          <a:noFill/>
+          <a:ln/>
+        </p:spPr>
+        <p:txBody>
+          <a:bodyPr wrap="square" rtlCol="0" anchor="ctr"/>
+          <a:lstStyle/>
+          <a:p>
+            <a:pPr indent="0" marL="0">
+              <a:buNone/>
+            </a:pPr>
+            <a:r>
+              <a:rPr lang="en-US" sz="1450" dirty="0">
+                <a:solidFill>
+                  <a:srgbClr val="CBD5E1"/>
+                </a:solidFill>
+                <a:latin typeface="Segoe UI" pitchFamily="34" charset="0"/>
+                <a:ea typeface="Segoe UI" pitchFamily="34" charset="-122"/>
+                <a:cs typeface="Segoe UI" pitchFamily="34" charset="-120"/>
+              </a:rPr>
+              <a:t>How to start: a scoping call, not a sales pitch</a:t>
+            </a:r>
+            <a:endParaRPr lang="en-US" sz="1450" dirty="0"/>
+          </a:p>
+        </p:txBody>
+      </p:sp>
+      <p:sp>
+        <p:nvSpPr>
+          <p:cNvPr id="21" name="Text 19"/>
+          <p:cNvSpPr/>
+          <p:nvPr/>
+        </p:nvSpPr>
+        <p:spPr>
+          <a:xfrm>
+            <a:off x="10698480" y="6382512"/>
+            <a:ext cx="1188720" cy="365760"/>
+          </a:xfrm>
+          <a:prstGeom prst="rect">
+            <a:avLst/>
+          </a:prstGeom>
+          <a:noFill/>
+          <a:ln/>
+        </p:spPr>
+        <p:txBody>
+          <a:bodyPr wrap="square" rtlCol="0" anchor="ctr"/>
+          <a:lstStyle/>
+          <a:p>
+            <a:pPr algn="r" indent="0" marL="0">
+              <a:buNone/>
+            </a:pPr>
+            <a:r>
+              <a:rPr lang="en-US" sz="1000" dirty="0">
+                <a:solidFill>
+                  <a:srgbClr val="64748B"/>
+                </a:solidFill>
+                <a:latin typeface="Consolas" pitchFamily="34" charset="0"/>
+                <a:ea typeface="Consolas" pitchFamily="34" charset="-122"/>
+                <a:cs typeface="Consolas" pitchFamily="34" charset="-120"/>
+              </a:rPr>
+              <a:t>2 / 14</a:t>
             </a:r>
             <a:endParaRPr lang="en-US" sz="1000" dirty="0"/>
           </a:p>
@@ -2106,7 +6136,7 @@
                 <a:ea typeface="Consolas" pitchFamily="34" charset="-122"/>
                 <a:cs typeface="Consolas" pitchFamily="34" charset="-120"/>
               </a:rPr>
-              <a:t>SCOPING</a:t>
+              <a:t>SERVICES</a:t>
             </a:r>
             <a:endParaRPr lang="en-US" sz="1200" dirty="0"/>
           </a:p>
@@ -2120,8 +6150,8 @@
         </p:nvSpPr>
         <p:spPr>
           <a:xfrm>
-            <a:off x="822960" y="960120"/>
-            <a:ext cx="10515600" cy="868680"/>
+            <a:off x="822960" y="914400"/>
+            <a:ext cx="10561320" cy="868680"/>
           </a:xfrm>
           <a:prstGeom prst="rect">
             <a:avLst/>
@@ -2137,7 +6167,7 @@
               <a:buNone/>
             </a:pPr>
             <a:r>
-              <a:rPr lang="en-US" sz="3000" b="1" dirty="0">
+              <a:rPr lang="en-US" sz="2700" b="1" dirty="0">
                 <a:solidFill>
                   <a:srgbClr val="FFFFFF"/>
                 </a:solidFill>
@@ -2145,9 +6175,9 @@
                 <a:ea typeface="Segoe UI" pitchFamily="34" charset="-122"/>
                 <a:cs typeface="Segoe UI" pitchFamily="34" charset="-120"/>
               </a:rPr>
-              <a:t>Week one decides the project</a:t>
-            </a:r>
-            <a:endParaRPr lang="en-US" sz="3000" dirty="0"/>
+              <a:t>What I take on - and what powers it</a:t>
+            </a:r>
+            <a:endParaRPr lang="en-US" sz="2700" dirty="0"/>
           </a:p>
         </p:txBody>
       </p:sp>
@@ -2159,7 +6189,7 @@
         </p:nvSpPr>
         <p:spPr>
           <a:xfrm>
-            <a:off x="868680" y="2057400"/>
+            <a:off x="868680" y="2011680"/>
             <a:ext cx="10424160" cy="3566160"/>
           </a:xfrm>
           <a:prstGeom prst="rect">
@@ -2174,10 +6204,10 @@
           <a:p>
             <a:pPr marL="342900" indent="-342900">
               <a:lnSpc>
-                <a:spcPct val="115000"/>
+                <a:spcPct val="112000"/>
               </a:lnSpc>
               <a:spcAft>
-                <a:spcPts val="1000"/>
+                <a:spcPts val="900"/>
               </a:spcAft>
               <a:buSzPct val="100000"/>
               <a:buChar char="▸"/>
@@ -2191,17 +6221,17 @@
                 <a:ea typeface="Segoe UI" pitchFamily="34" charset="-122"/>
                 <a:cs typeface="Segoe UI" pitchFamily="34" charset="-120"/>
               </a:rPr>
-              <a:t>The decision the client will make with the data - written down first</a:t>
+              <a:t>Web scraping and data collection: market monitoring, price tracking, and research pipelines that survive the real web.</a:t>
             </a:r>
             <a:endParaRPr lang="en-US" sz="1600" dirty="0"/>
           </a:p>
           <a:p>
             <a:pPr marL="342900" indent="-342900">
               <a:lnSpc>
-                <a:spcPct val="115000"/>
+                <a:spcPct val="112000"/>
               </a:lnSpc>
               <a:spcAft>
-                <a:spcPts val="1000"/>
+                <a:spcPts val="900"/>
               </a:spcAft>
               <a:buSzPct val="100000"/>
               <a:buChar char="▸"/>
@@ -2215,17 +6245,17 @@
                 <a:ea typeface="Segoe UI" pitchFamily="34" charset="-122"/>
                 <a:cs typeface="Segoe UI" pitchFamily="34" charset="-120"/>
               </a:rPr>
-              <a:t>Success criteria as measurable checks, not vibes</a:t>
+              <a:t>BI and analytics: dashboards, reconciliation, and reporting built on Qlik Sense, Tableau, SQL, and Alteryx.</a:t>
             </a:r>
             <a:endParaRPr lang="en-US" sz="1600" dirty="0"/>
           </a:p>
           <a:p>
             <a:pPr marL="342900" indent="-342900">
               <a:lnSpc>
-                <a:spcPct val="115000"/>
+                <a:spcPct val="112000"/>
               </a:lnSpc>
               <a:spcAft>
-                <a:spcPts val="1000"/>
+                <a:spcPts val="900"/>
               </a:spcAft>
               <a:buSzPct val="100000"/>
               <a:buChar char="▸"/>
@@ -2239,17 +6269,17 @@
                 <a:ea typeface="Segoe UI" pitchFamily="34" charset="-122"/>
                 <a:cs typeface="Segoe UI" pitchFamily="34" charset="-120"/>
               </a:rPr>
-              <a:t>Sources profiled: quirks, cadence, edge cases</a:t>
+              <a:t>AI automation: agents, document workflows, and local-first LLM systems that keep sensitive data on your machine.</a:t>
             </a:r>
             <a:endParaRPr lang="en-US" sz="1600" dirty="0"/>
           </a:p>
           <a:p>
             <a:pPr marL="342900" indent="-342900">
               <a:lnSpc>
-                <a:spcPct val="115000"/>
+                <a:spcPct val="112000"/>
               </a:lnSpc>
               <a:spcAft>
-                <a:spcPts val="1000"/>
+                <a:spcPts val="900"/>
               </a:spcAft>
               <a:buSzPct val="100000"/>
               <a:buChar char="▸"/>
@@ -2263,7 +6293,7 @@
                 <a:ea typeface="Segoe UI" pitchFamily="34" charset="-122"/>
                 <a:cs typeface="Segoe UI" pitchFamily="34" charset="-120"/>
               </a:rPr>
-              <a:t>If scope is fuzzy, the first deliverable is clarity</a:t>
+              <a:t>The frameworks behind it are open source: ODIS (4,305 LOC) and the Web Scraping Toolkit (4,398 LOC).</a:t>
             </a:r>
             <a:endParaRPr lang="en-US" sz="1600" dirty="0"/>
           </a:p>
@@ -2271,13 +6301,75 @@
       </p:sp>
       <p:sp>
         <p:nvSpPr>
-          <p:cNvPr id="7" name="Text 5"/>
-          <p:cNvSpPr/>
-          <p:nvPr/>
-        </p:nvSpPr>
-        <p:spPr>
-          <a:xfrm>
-            <a:off x="10698480" y="6355080"/>
+          <p:cNvPr id="7" name="Shape 5"/>
+          <p:cNvSpPr/>
+          <p:nvPr/>
+        </p:nvSpPr>
+        <p:spPr>
+          <a:xfrm>
+            <a:off x="822960" y="5961888"/>
+            <a:ext cx="10515600" cy="0"/>
+          </a:xfrm>
+          <a:prstGeom prst="line">
+            <a:avLst/>
+          </a:prstGeom>
+          <a:noFill/>
+          <a:ln w="12700">
+            <a:solidFill>
+              <a:srgbClr val="1E2D45"/>
+            </a:solidFill>
+            <a:prstDash val="solid"/>
+          </a:ln>
+        </p:spPr>
+      </p:sp>
+      <p:sp>
+        <p:nvSpPr>
+          <p:cNvPr id="8" name="Text 6"/>
+          <p:cNvSpPr/>
+          <p:nvPr/>
+        </p:nvSpPr>
+        <p:spPr>
+          <a:xfrm>
+            <a:off x="822960" y="6053328"/>
+            <a:ext cx="9692640" cy="457200"/>
+          </a:xfrm>
+          <a:prstGeom prst="rect">
+            <a:avLst/>
+          </a:prstGeom>
+          <a:noFill/>
+          <a:ln/>
+        </p:spPr>
+        <p:txBody>
+          <a:bodyPr wrap="square" rtlCol="0" anchor="ctr"/>
+          <a:lstStyle/>
+          <a:p>
+            <a:pPr indent="0" marL="0">
+              <a:buNone/>
+            </a:pPr>
+            <a:r>
+              <a:rPr lang="en-US" sz="1150" dirty="0">
+                <a:solidFill>
+                  <a:srgbClr val="64748B"/>
+                </a:solidFill>
+                <a:latin typeface="Segoe UI" pitchFamily="34" charset="0"/>
+                <a:ea typeface="Segoe UI" pitchFamily="34" charset="-122"/>
+                <a:cs typeface="Segoe UI" pitchFamily="34" charset="-120"/>
+              </a:rPr>
+              <a:t>Delivered worldwide via Upwork - code, data, and documentation always land in your hands.</a:t>
+            </a:r>
+            <a:endParaRPr lang="en-US" sz="1150" dirty="0"/>
+          </a:p>
+        </p:txBody>
+      </p:sp>
+      <p:sp>
+        <p:nvSpPr>
+          <p:cNvPr id="9" name="Text 7"/>
+          <p:cNvSpPr/>
+          <p:nvPr/>
+        </p:nvSpPr>
+        <p:spPr>
+          <a:xfrm>
+            <a:off x="10698480" y="6382512"/>
             <a:ext cx="1188720" cy="365760"/>
           </a:xfrm>
           <a:prstGeom prst="rect">
@@ -2302,7 +6394,7 @@
                 <a:ea typeface="Consolas" pitchFamily="34" charset="-122"/>
                 <a:cs typeface="Consolas" pitchFamily="34" charset="-120"/>
               </a:rPr>
-              <a:t>3 / 8</a:t>
+              <a:t>3 / 14</a:t>
             </a:r>
             <a:endParaRPr lang="en-US" sz="1000" dirty="0"/>
           </a:p>
@@ -2413,7 +6505,7 @@
                 <a:ea typeface="Consolas" pitchFamily="34" charset="-122"/>
                 <a:cs typeface="Consolas" pitchFamily="34" charset="-120"/>
               </a:rPr>
-              <a:t>DELIVERY</a:t>
+              <a:t>TRACK RECORD</a:t>
             </a:r>
             <a:endParaRPr lang="en-US" sz="1200" dirty="0"/>
           </a:p>
@@ -2427,8 +6519,8 @@
         </p:nvSpPr>
         <p:spPr>
           <a:xfrm>
-            <a:off x="822960" y="960120"/>
-            <a:ext cx="10515600" cy="868680"/>
+            <a:off x="822960" y="914400"/>
+            <a:ext cx="10561320" cy="868680"/>
           </a:xfrm>
           <a:prstGeom prst="rect">
             <a:avLst/>
@@ -2444,7 +6536,7 @@
               <a:buNone/>
             </a:pPr>
             <a:r>
-              <a:rPr lang="en-US" sz="3000" b="1" dirty="0">
+              <a:rPr lang="en-US" sz="2700" b="1" dirty="0">
                 <a:solidFill>
                   <a:srgbClr val="FFFFFF"/>
                 </a:solidFill>
@@ -2452,139 +6544,659 @@
                 <a:ea typeface="Segoe UI" pitchFamily="34" charset="-122"/>
                 <a:cs typeface="Segoe UI" pitchFamily="34" charset="-120"/>
               </a:rPr>
-              <a:t>Validation-first builds</a:t>
-            </a:r>
-            <a:endParaRPr lang="en-US" sz="3000" dirty="0"/>
-          </a:p>
-        </p:txBody>
-      </p:sp>
-      <p:sp>
-        <p:nvSpPr>
-          <p:cNvPr id="6" name="Text 4"/>
-          <p:cNvSpPr/>
-          <p:nvPr/>
-        </p:nvSpPr>
-        <p:spPr>
-          <a:xfrm>
-            <a:off x="868680" y="2057400"/>
-            <a:ext cx="10424160" cy="3566160"/>
-          </a:xfrm>
-          <a:prstGeom prst="rect">
-            <a:avLst/>
-          </a:prstGeom>
-          <a:noFill/>
-          <a:ln/>
-        </p:spPr>
-        <p:txBody>
-          <a:bodyPr wrap="square" rtlCol="0" anchor="t"/>
-          <a:lstStyle/>
-          <a:p>
-            <a:pPr marL="342900" indent="-342900">
-              <a:lnSpc>
-                <a:spcPct val="115000"/>
-              </a:lnSpc>
-              <a:spcAft>
-                <a:spcPts val="1000"/>
-              </a:spcAft>
-              <a:buSzPct val="100000"/>
-              <a:buChar char="▸"/>
-            </a:pPr>
-            <a:r>
-              <a:rPr lang="en-US" sz="1600" dirty="0">
-                <a:solidFill>
-                  <a:srgbClr val="CBD5E1"/>
+              <a:t>The record behind the playbook</a:t>
+            </a:r>
+            <a:endParaRPr lang="en-US" sz="2700" dirty="0"/>
+          </a:p>
+        </p:txBody>
+      </p:sp>
+      <p:sp>
+        <p:nvSpPr>
+          <p:cNvPr id="6" name="Shape 4"/>
+          <p:cNvSpPr/>
+          <p:nvPr/>
+        </p:nvSpPr>
+        <p:spPr>
+          <a:xfrm>
+            <a:off x="822960" y="2194560"/>
+            <a:ext cx="2423160" cy="2697480"/>
+          </a:xfrm>
+          <a:prstGeom prst="roundRect">
+            <a:avLst>
+              <a:gd name="adj" fmla="val 3019"/>
+            </a:avLst>
+          </a:prstGeom>
+          <a:solidFill>
+            <a:srgbClr val="111A2E"/>
+          </a:solidFill>
+          <a:ln w="12700">
+            <a:solidFill>
+              <a:srgbClr val="1E2D45"/>
+            </a:solidFill>
+            <a:prstDash val="solid"/>
+          </a:ln>
+        </p:spPr>
+      </p:sp>
+      <p:sp>
+        <p:nvSpPr>
+          <p:cNvPr id="7" name="Text 5"/>
+          <p:cNvSpPr/>
+          <p:nvPr/>
+        </p:nvSpPr>
+        <p:spPr>
+          <a:xfrm>
+            <a:off x="960120" y="2514600"/>
+            <a:ext cx="2148840" cy="914400"/>
+          </a:xfrm>
+          <a:prstGeom prst="rect">
+            <a:avLst/>
+          </a:prstGeom>
+          <a:noFill/>
+          <a:ln/>
+        </p:spPr>
+        <p:txBody>
+          <a:bodyPr wrap="square" rtlCol="0" anchor="ctr"/>
+          <a:lstStyle/>
+          <a:p>
+            <a:pPr algn="ctr" indent="0" marL="0">
+              <a:buNone/>
+            </a:pPr>
+            <a:r>
+              <a:rPr lang="en-US" sz="3800" b="1" dirty="0">
+                <a:solidFill>
+                  <a:srgbClr val="3B82F6"/>
                 </a:solidFill>
                 <a:latin typeface="Segoe UI" pitchFamily="34" charset="0"/>
                 <a:ea typeface="Segoe UI" pitchFamily="34" charset="-122"/>
                 <a:cs typeface="Segoe UI" pitchFamily="34" charset="-120"/>
               </a:rPr>
-              <a:t>Every run validates row counts, schema, and sanity ranges</a:t>
-            </a:r>
-            <a:endParaRPr lang="en-US" sz="1600" dirty="0"/>
-          </a:p>
-          <a:p>
-            <a:pPr marL="342900" indent="-342900">
-              <a:lnSpc>
-                <a:spcPct val="115000"/>
-              </a:lnSpc>
-              <a:spcAft>
-                <a:spcPts val="1000"/>
-              </a:spcAft>
-              <a:buSzPct val="100000"/>
-              <a:buChar char="▸"/>
-            </a:pPr>
-            <a:r>
-              <a:rPr lang="en-US" sz="1600" dirty="0">
-                <a:solidFill>
-                  <a:srgbClr val="CBD5E1"/>
+              <a:t>20</a:t>
+            </a:r>
+            <a:endParaRPr lang="en-US" sz="3800" dirty="0"/>
+          </a:p>
+        </p:txBody>
+      </p:sp>
+      <p:sp>
+        <p:nvSpPr>
+          <p:cNvPr id="8" name="Text 6"/>
+          <p:cNvSpPr/>
+          <p:nvPr/>
+        </p:nvSpPr>
+        <p:spPr>
+          <a:xfrm>
+            <a:off x="960120" y="3520440"/>
+            <a:ext cx="2148840" cy="502920"/>
+          </a:xfrm>
+          <a:prstGeom prst="rect">
+            <a:avLst/>
+          </a:prstGeom>
+          <a:noFill/>
+          <a:ln/>
+        </p:spPr>
+        <p:txBody>
+          <a:bodyPr wrap="square" rtlCol="0" anchor="ctr"/>
+          <a:lstStyle/>
+          <a:p>
+            <a:pPr algn="ctr" indent="0" marL="0">
+              <a:buNone/>
+            </a:pPr>
+            <a:r>
+              <a:rPr lang="en-US" sz="1450" b="1" dirty="0">
+                <a:solidFill>
+                  <a:srgbClr val="FFFFFF"/>
                 </a:solidFill>
                 <a:latin typeface="Segoe UI" pitchFamily="34" charset="0"/>
                 <a:ea typeface="Segoe UI" pitchFamily="34" charset="-122"/>
                 <a:cs typeface="Segoe UI" pitchFamily="34" charset="-120"/>
               </a:rPr>
-              <a:t>Structured logs: fetched, skipped, doubted</a:t>
-            </a:r>
-            <a:endParaRPr lang="en-US" sz="1600" dirty="0"/>
-          </a:p>
-          <a:p>
-            <a:pPr marL="342900" indent="-342900">
-              <a:lnSpc>
-                <a:spcPct val="115000"/>
-              </a:lnSpc>
-              <a:spcAft>
-                <a:spcPts val="1000"/>
-              </a:spcAft>
-              <a:buSzPct val="100000"/>
-              <a:buChar char="▸"/>
-            </a:pPr>
-            <a:r>
-              <a:rPr lang="en-US" sz="1600" dirty="0">
-                <a:solidFill>
-                  <a:srgbClr val="CBD5E1"/>
+              <a:t>Scrapers shipped</a:t>
+            </a:r>
+            <a:endParaRPr lang="en-US" sz="1450" dirty="0"/>
+          </a:p>
+        </p:txBody>
+      </p:sp>
+      <p:sp>
+        <p:nvSpPr>
+          <p:cNvPr id="9" name="Text 7"/>
+          <p:cNvSpPr/>
+          <p:nvPr/>
+        </p:nvSpPr>
+        <p:spPr>
+          <a:xfrm>
+            <a:off x="1005840" y="4069080"/>
+            <a:ext cx="2057400" cy="685800"/>
+          </a:xfrm>
+          <a:prstGeom prst="rect">
+            <a:avLst/>
+          </a:prstGeom>
+          <a:noFill/>
+          <a:ln/>
+        </p:spPr>
+        <p:txBody>
+          <a:bodyPr wrap="square" rtlCol="0" anchor="ctr"/>
+          <a:lstStyle/>
+          <a:p>
+            <a:pPr algn="ctr" indent="0" marL="0">
+              <a:buNone/>
+            </a:pPr>
+            <a:r>
+              <a:rPr lang="en-US" sz="1050" dirty="0">
+                <a:solidFill>
+                  <a:srgbClr val="94A3B8"/>
                 </a:solidFill>
                 <a:latin typeface="Segoe UI" pitchFamily="34" charset="0"/>
                 <a:ea typeface="Segoe UI" pitchFamily="34" charset="-122"/>
                 <a:cs typeface="Segoe UI" pitchFamily="34" charset="-120"/>
               </a:rPr>
-              <a:t>Failures reported loudly - never silently retried into fiction</a:t>
-            </a:r>
-            <a:endParaRPr lang="en-US" sz="1600" dirty="0"/>
-          </a:p>
-          <a:p>
-            <a:pPr marL="342900" indent="-342900">
-              <a:lnSpc>
-                <a:spcPct val="115000"/>
-              </a:lnSpc>
-              <a:spcAft>
-                <a:spcPts val="1000"/>
-              </a:spcAft>
-              <a:buSzPct val="100000"/>
-              <a:buChar char="▸"/>
-            </a:pPr>
-            <a:r>
-              <a:rPr lang="en-US" sz="1600" dirty="0">
-                <a:solidFill>
-                  <a:srgbClr val="CBD5E1"/>
+              <a:t>10 ODIS plus 10 WST, documented in the public portfolio</a:t>
+            </a:r>
+            <a:endParaRPr lang="en-US" sz="1050" dirty="0"/>
+          </a:p>
+        </p:txBody>
+      </p:sp>
+      <p:sp>
+        <p:nvSpPr>
+          <p:cNvPr id="10" name="Shape 8"/>
+          <p:cNvSpPr/>
+          <p:nvPr/>
+        </p:nvSpPr>
+        <p:spPr>
+          <a:xfrm>
+            <a:off x="3520440" y="2194560"/>
+            <a:ext cx="2423160" cy="2697480"/>
+          </a:xfrm>
+          <a:prstGeom prst="roundRect">
+            <a:avLst>
+              <a:gd name="adj" fmla="val 3019"/>
+            </a:avLst>
+          </a:prstGeom>
+          <a:solidFill>
+            <a:srgbClr val="111A2E"/>
+          </a:solidFill>
+          <a:ln w="12700">
+            <a:solidFill>
+              <a:srgbClr val="1E2D45"/>
+            </a:solidFill>
+            <a:prstDash val="solid"/>
+          </a:ln>
+        </p:spPr>
+      </p:sp>
+      <p:sp>
+        <p:nvSpPr>
+          <p:cNvPr id="11" name="Text 9"/>
+          <p:cNvSpPr/>
+          <p:nvPr/>
+        </p:nvSpPr>
+        <p:spPr>
+          <a:xfrm>
+            <a:off x="3657600" y="2514600"/>
+            <a:ext cx="2148840" cy="914400"/>
+          </a:xfrm>
+          <a:prstGeom prst="rect">
+            <a:avLst/>
+          </a:prstGeom>
+          <a:noFill/>
+          <a:ln/>
+        </p:spPr>
+        <p:txBody>
+          <a:bodyPr wrap="square" rtlCol="0" anchor="ctr"/>
+          <a:lstStyle/>
+          <a:p>
+            <a:pPr algn="ctr" indent="0" marL="0">
+              <a:buNone/>
+            </a:pPr>
+            <a:r>
+              <a:rPr lang="en-US" sz="3800" b="1" dirty="0">
+                <a:solidFill>
+                  <a:srgbClr val="06B6D4"/>
                 </a:solidFill>
                 <a:latin typeface="Segoe UI" pitchFamily="34" charset="0"/>
                 <a:ea typeface="Segoe UI" pitchFamily="34" charset="-122"/>
                 <a:cs typeface="Segoe UI" pitchFamily="34" charset="-120"/>
               </a:rPr>
-              <a:t>Partial delivery with honest warnings beats silent perfectionism</a:t>
-            </a:r>
-            <a:endParaRPr lang="en-US" sz="1600" dirty="0"/>
-          </a:p>
-        </p:txBody>
-      </p:sp>
-      <p:sp>
-        <p:nvSpPr>
-          <p:cNvPr id="7" name="Text 5"/>
-          <p:cNvSpPr/>
-          <p:nvPr/>
-        </p:nvSpPr>
-        <p:spPr>
-          <a:xfrm>
-            <a:off x="10698480" y="6355080"/>
+              <a:t>8.7K+</a:t>
+            </a:r>
+            <a:endParaRPr lang="en-US" sz="3800" dirty="0"/>
+          </a:p>
+        </p:txBody>
+      </p:sp>
+      <p:sp>
+        <p:nvSpPr>
+          <p:cNvPr id="12" name="Text 10"/>
+          <p:cNvSpPr/>
+          <p:nvPr/>
+        </p:nvSpPr>
+        <p:spPr>
+          <a:xfrm>
+            <a:off x="3657600" y="3520440"/>
+            <a:ext cx="2148840" cy="502920"/>
+          </a:xfrm>
+          <a:prstGeom prst="rect">
+            <a:avLst/>
+          </a:prstGeom>
+          <a:noFill/>
+          <a:ln/>
+        </p:spPr>
+        <p:txBody>
+          <a:bodyPr wrap="square" rtlCol="0" anchor="ctr"/>
+          <a:lstStyle/>
+          <a:p>
+            <a:pPr algn="ctr" indent="0" marL="0">
+              <a:buNone/>
+            </a:pPr>
+            <a:r>
+              <a:rPr lang="en-US" sz="1450" b="1" dirty="0">
+                <a:solidFill>
+                  <a:srgbClr val="FFFFFF"/>
+                </a:solidFill>
+                <a:latin typeface="Segoe UI" pitchFamily="34" charset="0"/>
+                <a:ea typeface="Segoe UI" pitchFamily="34" charset="-122"/>
+                <a:cs typeface="Segoe UI" pitchFamily="34" charset="-120"/>
+              </a:rPr>
+              <a:t>Lines of code</a:t>
+            </a:r>
+            <a:endParaRPr lang="en-US" sz="1450" dirty="0"/>
+          </a:p>
+        </p:txBody>
+      </p:sp>
+      <p:sp>
+        <p:nvSpPr>
+          <p:cNvPr id="13" name="Text 11"/>
+          <p:cNvSpPr/>
+          <p:nvPr/>
+        </p:nvSpPr>
+        <p:spPr>
+          <a:xfrm>
+            <a:off x="3703320" y="4069080"/>
+            <a:ext cx="2057400" cy="685800"/>
+          </a:xfrm>
+          <a:prstGeom prst="rect">
+            <a:avLst/>
+          </a:prstGeom>
+          <a:noFill/>
+          <a:ln/>
+        </p:spPr>
+        <p:txBody>
+          <a:bodyPr wrap="square" rtlCol="0" anchor="ctr"/>
+          <a:lstStyle/>
+          <a:p>
+            <a:pPr algn="ctr" indent="0" marL="0">
+              <a:buNone/>
+            </a:pPr>
+            <a:r>
+              <a:rPr lang="en-US" sz="1050" dirty="0">
+                <a:solidFill>
+                  <a:srgbClr val="94A3B8"/>
+                </a:solidFill>
+                <a:latin typeface="Segoe UI" pitchFamily="34" charset="0"/>
+                <a:ea typeface="Segoe UI" pitchFamily="34" charset="-122"/>
+                <a:cs typeface="Segoe UI" pitchFamily="34" charset="-120"/>
+              </a:rPr>
+              <a:t>Two open-source frameworks any client can audit before hiring</a:t>
+            </a:r>
+            <a:endParaRPr lang="en-US" sz="1050" dirty="0"/>
+          </a:p>
+        </p:txBody>
+      </p:sp>
+      <p:sp>
+        <p:nvSpPr>
+          <p:cNvPr id="14" name="Shape 12"/>
+          <p:cNvSpPr/>
+          <p:nvPr/>
+        </p:nvSpPr>
+        <p:spPr>
+          <a:xfrm>
+            <a:off x="6217920" y="2194560"/>
+            <a:ext cx="2423160" cy="2697480"/>
+          </a:xfrm>
+          <a:prstGeom prst="roundRect">
+            <a:avLst>
+              <a:gd name="adj" fmla="val 3019"/>
+            </a:avLst>
+          </a:prstGeom>
+          <a:solidFill>
+            <a:srgbClr val="111A2E"/>
+          </a:solidFill>
+          <a:ln w="12700">
+            <a:solidFill>
+              <a:srgbClr val="1E2D45"/>
+            </a:solidFill>
+            <a:prstDash val="solid"/>
+          </a:ln>
+        </p:spPr>
+      </p:sp>
+      <p:sp>
+        <p:nvSpPr>
+          <p:cNvPr id="15" name="Text 13"/>
+          <p:cNvSpPr/>
+          <p:nvPr/>
+        </p:nvSpPr>
+        <p:spPr>
+          <a:xfrm>
+            <a:off x="6355080" y="2514600"/>
+            <a:ext cx="2148840" cy="914400"/>
+          </a:xfrm>
+          <a:prstGeom prst="rect">
+            <a:avLst/>
+          </a:prstGeom>
+          <a:noFill/>
+          <a:ln/>
+        </p:spPr>
+        <p:txBody>
+          <a:bodyPr wrap="square" rtlCol="0" anchor="ctr"/>
+          <a:lstStyle/>
+          <a:p>
+            <a:pPr algn="ctr" indent="0" marL="0">
+              <a:buNone/>
+            </a:pPr>
+            <a:r>
+              <a:rPr lang="en-US" sz="3800" b="1" dirty="0">
+                <a:solidFill>
+                  <a:srgbClr val="22D3A0"/>
+                </a:solidFill>
+                <a:latin typeface="Segoe UI" pitchFamily="34" charset="0"/>
+                <a:ea typeface="Segoe UI" pitchFamily="34" charset="-122"/>
+                <a:cs typeface="Segoe UI" pitchFamily="34" charset="-120"/>
+              </a:rPr>
+              <a:t>4</a:t>
+            </a:r>
+            <a:endParaRPr lang="en-US" sz="3800" dirty="0"/>
+          </a:p>
+        </p:txBody>
+      </p:sp>
+      <p:sp>
+        <p:nvSpPr>
+          <p:cNvPr id="16" name="Text 14"/>
+          <p:cNvSpPr/>
+          <p:nvPr/>
+        </p:nvSpPr>
+        <p:spPr>
+          <a:xfrm>
+            <a:off x="6355080" y="3520440"/>
+            <a:ext cx="2148840" cy="502920"/>
+          </a:xfrm>
+          <a:prstGeom prst="rect">
+            <a:avLst/>
+          </a:prstGeom>
+          <a:noFill/>
+          <a:ln/>
+        </p:spPr>
+        <p:txBody>
+          <a:bodyPr wrap="square" rtlCol="0" anchor="ctr"/>
+          <a:lstStyle/>
+          <a:p>
+            <a:pPr algn="ctr" indent="0" marL="0">
+              <a:buNone/>
+            </a:pPr>
+            <a:r>
+              <a:rPr lang="en-US" sz="1450" b="1" dirty="0">
+                <a:solidFill>
+                  <a:srgbClr val="FFFFFF"/>
+                </a:solidFill>
+                <a:latin typeface="Segoe UI" pitchFamily="34" charset="0"/>
+                <a:ea typeface="Segoe UI" pitchFamily="34" charset="-122"/>
+                <a:cs typeface="Segoe UI" pitchFamily="34" charset="-120"/>
+              </a:rPr>
+              <a:t>BI countries</a:t>
+            </a:r>
+            <a:endParaRPr lang="en-US" sz="1450" dirty="0"/>
+          </a:p>
+        </p:txBody>
+      </p:sp>
+      <p:sp>
+        <p:nvSpPr>
+          <p:cNvPr id="17" name="Text 15"/>
+          <p:cNvSpPr/>
+          <p:nvPr/>
+        </p:nvSpPr>
+        <p:spPr>
+          <a:xfrm>
+            <a:off x="6400800" y="4069080"/>
+            <a:ext cx="2057400" cy="685800"/>
+          </a:xfrm>
+          <a:prstGeom prst="rect">
+            <a:avLst/>
+          </a:prstGeom>
+          <a:noFill/>
+          <a:ln/>
+        </p:spPr>
+        <p:txBody>
+          <a:bodyPr wrap="square" rtlCol="0" anchor="ctr"/>
+          <a:lstStyle/>
+          <a:p>
+            <a:pPr algn="ctr" indent="0" marL="0">
+              <a:buNone/>
+            </a:pPr>
+            <a:r>
+              <a:rPr lang="en-US" sz="1050" dirty="0">
+                <a:solidFill>
+                  <a:srgbClr val="94A3B8"/>
+                </a:solidFill>
+                <a:latin typeface="Segoe UI" pitchFamily="34" charset="0"/>
+                <a:ea typeface="Segoe UI" pitchFamily="34" charset="-122"/>
+                <a:cs typeface="Segoe UI" pitchFamily="34" charset="-120"/>
+              </a:rPr>
+              <a:t>Enterprise operations for Indonesia, Taiwan, Hong Kong, and Macau</a:t>
+            </a:r>
+            <a:endParaRPr lang="en-US" sz="1050" dirty="0"/>
+          </a:p>
+        </p:txBody>
+      </p:sp>
+      <p:sp>
+        <p:nvSpPr>
+          <p:cNvPr id="18" name="Shape 16"/>
+          <p:cNvSpPr/>
+          <p:nvPr/>
+        </p:nvSpPr>
+        <p:spPr>
+          <a:xfrm>
+            <a:off x="8915400" y="2194560"/>
+            <a:ext cx="2423160" cy="2697480"/>
+          </a:xfrm>
+          <a:prstGeom prst="roundRect">
+            <a:avLst>
+              <a:gd name="adj" fmla="val 3019"/>
+            </a:avLst>
+          </a:prstGeom>
+          <a:solidFill>
+            <a:srgbClr val="111A2E"/>
+          </a:solidFill>
+          <a:ln w="12700">
+            <a:solidFill>
+              <a:srgbClr val="1E2D45"/>
+            </a:solidFill>
+            <a:prstDash val="solid"/>
+          </a:ln>
+        </p:spPr>
+      </p:sp>
+      <p:sp>
+        <p:nvSpPr>
+          <p:cNvPr id="19" name="Text 17"/>
+          <p:cNvSpPr/>
+          <p:nvPr/>
+        </p:nvSpPr>
+        <p:spPr>
+          <a:xfrm>
+            <a:off x="9052560" y="2514600"/>
+            <a:ext cx="2148840" cy="914400"/>
+          </a:xfrm>
+          <a:prstGeom prst="rect">
+            <a:avLst/>
+          </a:prstGeom>
+          <a:noFill/>
+          <a:ln/>
+        </p:spPr>
+        <p:txBody>
+          <a:bodyPr wrap="square" rtlCol="0" anchor="ctr"/>
+          <a:lstStyle/>
+          <a:p>
+            <a:pPr algn="ctr" indent="0" marL="0">
+              <a:buNone/>
+            </a:pPr>
+            <a:r>
+              <a:rPr lang="en-US" sz="3800" b="1" dirty="0">
+                <a:solidFill>
+                  <a:srgbClr val="F59E0B"/>
+                </a:solidFill>
+                <a:latin typeface="Segoe UI" pitchFamily="34" charset="0"/>
+                <a:ea typeface="Segoe UI" pitchFamily="34" charset="-122"/>
+                <a:cs typeface="Segoe UI" pitchFamily="34" charset="-120"/>
+              </a:rPr>
+              <a:t>10/10</a:t>
+            </a:r>
+            <a:endParaRPr lang="en-US" sz="3800" dirty="0"/>
+          </a:p>
+        </p:txBody>
+      </p:sp>
+      <p:sp>
+        <p:nvSpPr>
+          <p:cNvPr id="20" name="Text 18"/>
+          <p:cNvSpPr/>
+          <p:nvPr/>
+        </p:nvSpPr>
+        <p:spPr>
+          <a:xfrm>
+            <a:off x="9052560" y="3520440"/>
+            <a:ext cx="2148840" cy="502920"/>
+          </a:xfrm>
+          <a:prstGeom prst="rect">
+            <a:avLst/>
+          </a:prstGeom>
+          <a:noFill/>
+          <a:ln/>
+        </p:spPr>
+        <p:txBody>
+          <a:bodyPr wrap="square" rtlCol="0" anchor="ctr"/>
+          <a:lstStyle/>
+          <a:p>
+            <a:pPr algn="ctr" indent="0" marL="0">
+              <a:buNone/>
+            </a:pPr>
+            <a:r>
+              <a:rPr lang="en-US" sz="1450" b="1" dirty="0">
+                <a:solidFill>
+                  <a:srgbClr val="FFFFFF"/>
+                </a:solidFill>
+                <a:latin typeface="Segoe UI" pitchFamily="34" charset="0"/>
+                <a:ea typeface="Segoe UI" pitchFamily="34" charset="-122"/>
+                <a:cs typeface="Segoe UI" pitchFamily="34" charset="-120"/>
+              </a:rPr>
+              <a:t>Templates verified</a:t>
+            </a:r>
+            <a:endParaRPr lang="en-US" sz="1450" dirty="0"/>
+          </a:p>
+        </p:txBody>
+      </p:sp>
+      <p:sp>
+        <p:nvSpPr>
+          <p:cNvPr id="21" name="Text 19"/>
+          <p:cNvSpPr/>
+          <p:nvPr/>
+        </p:nvSpPr>
+        <p:spPr>
+          <a:xfrm>
+            <a:off x="9098280" y="4069080"/>
+            <a:ext cx="2057400" cy="685800"/>
+          </a:xfrm>
+          <a:prstGeom prst="rect">
+            <a:avLst/>
+          </a:prstGeom>
+          <a:noFill/>
+          <a:ln/>
+        </p:spPr>
+        <p:txBody>
+          <a:bodyPr wrap="square" rtlCol="0" anchor="ctr"/>
+          <a:lstStyle/>
+          <a:p>
+            <a:pPr algn="ctr" indent="0" marL="0">
+              <a:buNone/>
+            </a:pPr>
+            <a:r>
+              <a:rPr lang="en-US" sz="1050" dirty="0">
+                <a:solidFill>
+                  <a:srgbClr val="94A3B8"/>
+                </a:solidFill>
+                <a:latin typeface="Segoe UI" pitchFamily="34" charset="0"/>
+                <a:ea typeface="Segoe UI" pitchFamily="34" charset="-122"/>
+                <a:cs typeface="Segoe UI" pitchFamily="34" charset="-120"/>
+              </a:rPr>
+              <a:t>Every scraping toolkit template tested against live targets</a:t>
+            </a:r>
+            <a:endParaRPr lang="en-US" sz="1050" dirty="0"/>
+          </a:p>
+        </p:txBody>
+      </p:sp>
+      <p:sp>
+        <p:nvSpPr>
+          <p:cNvPr id="22" name="Shape 20"/>
+          <p:cNvSpPr/>
+          <p:nvPr/>
+        </p:nvSpPr>
+        <p:spPr>
+          <a:xfrm>
+            <a:off x="822960" y="5413248"/>
+            <a:ext cx="10515600" cy="0"/>
+          </a:xfrm>
+          <a:prstGeom prst="line">
+            <a:avLst/>
+          </a:prstGeom>
+          <a:noFill/>
+          <a:ln w="12700">
+            <a:solidFill>
+              <a:srgbClr val="1E2D45"/>
+            </a:solidFill>
+            <a:prstDash val="solid"/>
+          </a:ln>
+        </p:spPr>
+      </p:sp>
+      <p:sp>
+        <p:nvSpPr>
+          <p:cNvPr id="23" name="Text 21"/>
+          <p:cNvSpPr/>
+          <p:nvPr/>
+        </p:nvSpPr>
+        <p:spPr>
+          <a:xfrm>
+            <a:off x="822960" y="5504688"/>
+            <a:ext cx="10424160" cy="411480"/>
+          </a:xfrm>
+          <a:prstGeom prst="rect">
+            <a:avLst/>
+          </a:prstGeom>
+          <a:noFill/>
+          <a:ln/>
+        </p:spPr>
+        <p:txBody>
+          <a:bodyPr wrap="square" rtlCol="0" anchor="ctr"/>
+          <a:lstStyle/>
+          <a:p>
+            <a:pPr indent="0" marL="0">
+              <a:buNone/>
+            </a:pPr>
+            <a:r>
+              <a:rPr lang="en-US" sz="1300" i="1" dirty="0">
+                <a:solidFill>
+                  <a:srgbClr val="06B6D4"/>
+                </a:solidFill>
+                <a:latin typeface="Segoe UI" pitchFamily="34" charset="0"/>
+                <a:ea typeface="Segoe UI" pitchFamily="34" charset="-122"/>
+                <a:cs typeface="Segoe UI" pitchFamily="34" charset="-120"/>
+              </a:rPr>
+              <a:t>→  Track record from the live portfolio - inspect it before we even talk.</a:t>
+            </a:r>
+            <a:endParaRPr lang="en-US" sz="1300" dirty="0"/>
+          </a:p>
+        </p:txBody>
+      </p:sp>
+      <p:sp>
+        <p:nvSpPr>
+          <p:cNvPr id="24" name="Text 22"/>
+          <p:cNvSpPr/>
+          <p:nvPr/>
+        </p:nvSpPr>
+        <p:spPr>
+          <a:xfrm>
+            <a:off x="10698480" y="6382512"/>
             <a:ext cx="1188720" cy="365760"/>
           </a:xfrm>
           <a:prstGeom prst="rect">
@@ -2609,7 +7221,7 @@
                 <a:ea typeface="Consolas" pitchFamily="34" charset="-122"/>
                 <a:cs typeface="Consolas" pitchFamily="34" charset="-120"/>
               </a:rPr>
-              <a:t>4 / 8</a:t>
+              <a:t>4 / 14</a:t>
             </a:r>
             <a:endParaRPr lang="en-US" sz="1000" dirty="0"/>
           </a:p>
@@ -2720,7 +7332,7 @@
                 <a:ea typeface="Consolas" pitchFamily="34" charset="-122"/>
                 <a:cs typeface="Consolas" pitchFamily="34" charset="-120"/>
               </a:rPr>
-              <a:t>COMMUNICATION</a:t>
+              <a:t>DELIVERY LOOP</a:t>
             </a:r>
             <a:endParaRPr lang="en-US" sz="1200" dirty="0"/>
           </a:p>
@@ -2734,8 +7346,8 @@
         </p:nvSpPr>
         <p:spPr>
           <a:xfrm>
-            <a:off x="822960" y="960120"/>
-            <a:ext cx="10515600" cy="868680"/>
+            <a:off x="822960" y="914400"/>
+            <a:ext cx="10561320" cy="868680"/>
           </a:xfrm>
           <a:prstGeom prst="rect">
             <a:avLst/>
@@ -2751,7 +7363,7 @@
               <a:buNone/>
             </a:pPr>
             <a:r>
-              <a:rPr lang="en-US" sz="3000" b="1" dirty="0">
+              <a:rPr lang="en-US" sz="2700" b="1" dirty="0">
                 <a:solidFill>
                   <a:srgbClr val="FFFFFF"/>
                 </a:solidFill>
@@ -2759,69 +7371,143 @@
                 <a:ea typeface="Segoe UI" pitchFamily="34" charset="-122"/>
                 <a:cs typeface="Segoe UI" pitchFamily="34" charset="-120"/>
               </a:rPr>
-              <a:t>A cadence clients can set clocks by</a:t>
-            </a:r>
-            <a:endParaRPr lang="en-US" sz="3000" dirty="0"/>
-          </a:p>
-        </p:txBody>
-      </p:sp>
-      <p:sp>
-        <p:nvSpPr>
-          <p:cNvPr id="6" name="Text 4"/>
-          <p:cNvSpPr/>
-          <p:nvPr/>
-        </p:nvSpPr>
-        <p:spPr>
-          <a:xfrm>
-            <a:off x="868680" y="2057400"/>
-            <a:ext cx="10424160" cy="3566160"/>
-          </a:xfrm>
-          <a:prstGeom prst="rect">
-            <a:avLst/>
-          </a:prstGeom>
-          <a:noFill/>
-          <a:ln/>
-        </p:spPr>
-        <p:txBody>
-          <a:bodyPr wrap="square" rtlCol="0" anchor="t"/>
-          <a:lstStyle/>
-          <a:p>
-            <a:pPr marL="342900" indent="-342900">
-              <a:lnSpc>
-                <a:spcPct val="115000"/>
-              </a:lnSpc>
-              <a:spcAft>
-                <a:spcPts val="1000"/>
-              </a:spcAft>
-              <a:buSzPct val="100000"/>
-              <a:buChar char="▸"/>
-            </a:pPr>
-            <a:r>
-              <a:rPr lang="en-US" sz="1600" dirty="0">
-                <a:solidFill>
-                  <a:srgbClr val="CBD5E1"/>
+              <a:t>The loop every project runs, regardless of size</a:t>
+            </a:r>
+            <a:endParaRPr lang="en-US" sz="2700" dirty="0"/>
+          </a:p>
+        </p:txBody>
+      </p:sp>
+      <p:sp>
+        <p:nvSpPr>
+          <p:cNvPr id="6" name="Shape 4"/>
+          <p:cNvSpPr/>
+          <p:nvPr/>
+        </p:nvSpPr>
+        <p:spPr>
+          <a:xfrm>
+            <a:off x="774040" y="2514600"/>
+            <a:ext cx="1938528" cy="2103120"/>
+          </a:xfrm>
+          <a:prstGeom prst="roundRect">
+            <a:avLst>
+              <a:gd name="adj" fmla="val 3302"/>
+            </a:avLst>
+          </a:prstGeom>
+          <a:solidFill>
+            <a:srgbClr val="111A2E"/>
+          </a:solidFill>
+          <a:ln w="19050">
+            <a:solidFill>
+              <a:srgbClr val="3B82F6"/>
+            </a:solidFill>
+            <a:prstDash val="solid"/>
+          </a:ln>
+        </p:spPr>
+      </p:sp>
+      <p:sp>
+        <p:nvSpPr>
+          <p:cNvPr id="7" name="Text 5"/>
+          <p:cNvSpPr/>
+          <p:nvPr/>
+        </p:nvSpPr>
+        <p:spPr>
+          <a:xfrm>
+            <a:off x="902056" y="2633472"/>
+            <a:ext cx="1682496" cy="310896"/>
+          </a:xfrm>
+          <a:prstGeom prst="rect">
+            <a:avLst/>
+          </a:prstGeom>
+          <a:noFill/>
+          <a:ln/>
+        </p:spPr>
+        <p:txBody>
+          <a:bodyPr wrap="square" rtlCol="0" anchor="ctr"/>
+          <a:lstStyle/>
+          <a:p>
+            <a:pPr indent="0" marL="0">
+              <a:buNone/>
+            </a:pPr>
+            <a:r>
+              <a:rPr lang="en-US" sz="1100" b="1" dirty="0">
+                <a:solidFill>
+                  <a:srgbClr val="3B82F6"/>
+                </a:solidFill>
+                <a:latin typeface="Consolas" pitchFamily="34" charset="0"/>
+                <a:ea typeface="Consolas" pitchFamily="34" charset="-122"/>
+                <a:cs typeface="Consolas" pitchFamily="34" charset="-120"/>
+              </a:rPr>
+              <a:t>01</a:t>
+            </a:r>
+            <a:endParaRPr lang="en-US" sz="1100" dirty="0"/>
+          </a:p>
+        </p:txBody>
+      </p:sp>
+      <p:sp>
+        <p:nvSpPr>
+          <p:cNvPr id="8" name="Text 6"/>
+          <p:cNvSpPr/>
+          <p:nvPr/>
+        </p:nvSpPr>
+        <p:spPr>
+          <a:xfrm>
+            <a:off x="902056" y="2962656"/>
+            <a:ext cx="1682496" cy="566928"/>
+          </a:xfrm>
+          <a:prstGeom prst="rect">
+            <a:avLst/>
+          </a:prstGeom>
+          <a:noFill/>
+          <a:ln/>
+        </p:spPr>
+        <p:txBody>
+          <a:bodyPr wrap="square" rtlCol="0" anchor="ctr"/>
+          <a:lstStyle/>
+          <a:p>
+            <a:pPr indent="0" marL="0">
+              <a:buNone/>
+            </a:pPr>
+            <a:r>
+              <a:rPr lang="en-US" sz="1350" b="1" dirty="0">
+                <a:solidFill>
+                  <a:srgbClr val="FFFFFF"/>
                 </a:solidFill>
                 <a:latin typeface="Segoe UI" pitchFamily="34" charset="0"/>
                 <a:ea typeface="Segoe UI" pitchFamily="34" charset="-122"/>
                 <a:cs typeface="Segoe UI" pitchFamily="34" charset="-120"/>
               </a:rPr>
-              <a:t>Short written updates on a fixed rhythm</a:t>
-            </a:r>
-            <a:endParaRPr lang="en-US" sz="1600" dirty="0"/>
-          </a:p>
-          <a:p>
-            <a:pPr marL="342900" indent="-342900">
-              <a:lnSpc>
-                <a:spcPct val="115000"/>
-              </a:lnSpc>
-              <a:spcAft>
-                <a:spcPts val="1000"/>
-              </a:spcAft>
-              <a:buSzPct val="100000"/>
-              <a:buChar char="▸"/>
-            </a:pPr>
-            <a:r>
-              <a:rPr lang="en-US" sz="1600" dirty="0">
+              <a:t>Scope</a:t>
+            </a:r>
+            <a:endParaRPr lang="en-US" sz="1350" dirty="0"/>
+          </a:p>
+        </p:txBody>
+      </p:sp>
+      <p:sp>
+        <p:nvSpPr>
+          <p:cNvPr id="9" name="Text 7"/>
+          <p:cNvSpPr/>
+          <p:nvPr/>
+        </p:nvSpPr>
+        <p:spPr>
+          <a:xfrm>
+            <a:off x="902056" y="3566160"/>
+            <a:ext cx="1682496" cy="960120"/>
+          </a:xfrm>
+          <a:prstGeom prst="rect">
+            <a:avLst/>
+          </a:prstGeom>
+          <a:noFill/>
+          <a:ln/>
+        </p:spPr>
+        <p:txBody>
+          <a:bodyPr wrap="square" rtlCol="0" anchor="ctr"/>
+          <a:lstStyle/>
+          <a:p>
+            <a:pPr indent="0" marL="0">
+              <a:buNone/>
+            </a:pPr>
+            <a:r>
+              <a:rPr lang="en-US" sz="980" dirty="0">
                 <a:solidFill>
                   <a:srgbClr val="CBD5E1"/>
                 </a:solidFill>
@@ -2829,47 +7515,163 @@
                 <a:ea typeface="Segoe UI" pitchFamily="34" charset="-122"/>
                 <a:cs typeface="Segoe UI" pitchFamily="34" charset="-120"/>
               </a:rPr>
-              <a:t>Evidence attached to every claim - links, files, screenshots</a:t>
-            </a:r>
-            <a:endParaRPr lang="en-US" sz="1600" dirty="0"/>
-          </a:p>
-          <a:p>
-            <a:pPr marL="342900" indent="-342900">
-              <a:lnSpc>
-                <a:spcPct val="115000"/>
-              </a:lnSpc>
-              <a:spcAft>
-                <a:spcPts val="1000"/>
-              </a:spcAft>
-              <a:buSzPct val="100000"/>
-              <a:buChar char="▸"/>
-            </a:pPr>
-            <a:r>
-              <a:rPr lang="en-US" sz="1600" dirty="0">
-                <a:solidFill>
-                  <a:srgbClr val="CBD5E1"/>
+              <a:t>The decision and its success criteria get written down before any code.</a:t>
+            </a:r>
+            <a:endParaRPr lang="en-US" sz="980" dirty="0"/>
+          </a:p>
+        </p:txBody>
+      </p:sp>
+      <p:sp>
+        <p:nvSpPr>
+          <p:cNvPr id="10" name="Shape 8"/>
+          <p:cNvSpPr/>
+          <p:nvPr/>
+        </p:nvSpPr>
+        <p:spPr>
+          <a:xfrm>
+            <a:off x="2726284" y="3419856"/>
+            <a:ext cx="210312" cy="274320"/>
+          </a:xfrm>
+          <a:prstGeom prst="rightArrow">
+            <a:avLst/>
+          </a:prstGeom>
+          <a:solidFill>
+            <a:srgbClr val="06B6D4"/>
+          </a:solidFill>
+          <a:ln/>
+        </p:spPr>
+      </p:sp>
+      <p:sp>
+        <p:nvSpPr>
+          <p:cNvPr id="11" name="Shape 9"/>
+          <p:cNvSpPr/>
+          <p:nvPr/>
+        </p:nvSpPr>
+        <p:spPr>
+          <a:xfrm>
+            <a:off x="2950312" y="2514600"/>
+            <a:ext cx="1938528" cy="2103120"/>
+          </a:xfrm>
+          <a:prstGeom prst="roundRect">
+            <a:avLst>
+              <a:gd name="adj" fmla="val 3302"/>
+            </a:avLst>
+          </a:prstGeom>
+          <a:solidFill>
+            <a:srgbClr val="111A2E"/>
+          </a:solidFill>
+          <a:ln w="19050">
+            <a:solidFill>
+              <a:srgbClr val="06B6D4"/>
+            </a:solidFill>
+            <a:prstDash val="solid"/>
+          </a:ln>
+        </p:spPr>
+      </p:sp>
+      <p:sp>
+        <p:nvSpPr>
+          <p:cNvPr id="12" name="Text 10"/>
+          <p:cNvSpPr/>
+          <p:nvPr/>
+        </p:nvSpPr>
+        <p:spPr>
+          <a:xfrm>
+            <a:off x="3078328" y="2633472"/>
+            <a:ext cx="1682496" cy="310896"/>
+          </a:xfrm>
+          <a:prstGeom prst="rect">
+            <a:avLst/>
+          </a:prstGeom>
+          <a:noFill/>
+          <a:ln/>
+        </p:spPr>
+        <p:txBody>
+          <a:bodyPr wrap="square" rtlCol="0" anchor="ctr"/>
+          <a:lstStyle/>
+          <a:p>
+            <a:pPr indent="0" marL="0">
+              <a:buNone/>
+            </a:pPr>
+            <a:r>
+              <a:rPr lang="en-US" sz="1100" b="1" dirty="0">
+                <a:solidFill>
+                  <a:srgbClr val="06B6D4"/>
+                </a:solidFill>
+                <a:latin typeface="Consolas" pitchFamily="34" charset="0"/>
+                <a:ea typeface="Consolas" pitchFamily="34" charset="-122"/>
+                <a:cs typeface="Consolas" pitchFamily="34" charset="-120"/>
+              </a:rPr>
+              <a:t>02</a:t>
+            </a:r>
+            <a:endParaRPr lang="en-US" sz="1100" dirty="0"/>
+          </a:p>
+        </p:txBody>
+      </p:sp>
+      <p:sp>
+        <p:nvSpPr>
+          <p:cNvPr id="13" name="Text 11"/>
+          <p:cNvSpPr/>
+          <p:nvPr/>
+        </p:nvSpPr>
+        <p:spPr>
+          <a:xfrm>
+            <a:off x="3078328" y="2962656"/>
+            <a:ext cx="1682496" cy="566928"/>
+          </a:xfrm>
+          <a:prstGeom prst="rect">
+            <a:avLst/>
+          </a:prstGeom>
+          <a:noFill/>
+          <a:ln/>
+        </p:spPr>
+        <p:txBody>
+          <a:bodyPr wrap="square" rtlCol="0" anchor="ctr"/>
+          <a:lstStyle/>
+          <a:p>
+            <a:pPr indent="0" marL="0">
+              <a:buNone/>
+            </a:pPr>
+            <a:r>
+              <a:rPr lang="en-US" sz="1350" b="1" dirty="0">
+                <a:solidFill>
+                  <a:srgbClr val="FFFFFF"/>
                 </a:solidFill>
                 <a:latin typeface="Segoe UI" pitchFamily="34" charset="0"/>
                 <a:ea typeface="Segoe UI" pitchFamily="34" charset="-122"/>
                 <a:cs typeface="Segoe UI" pitchFamily="34" charset="-120"/>
               </a:rPr>
-              <a:t>Bad news travels first and fast</a:t>
-            </a:r>
-            <a:endParaRPr lang="en-US" sz="1600" dirty="0"/>
-          </a:p>
-          <a:p>
-            <a:pPr marL="342900" indent="-342900">
-              <a:lnSpc>
-                <a:spcPct val="115000"/>
-              </a:lnSpc>
-              <a:spcAft>
-                <a:spcPts val="1000"/>
-              </a:spcAft>
-              <a:buSzPct val="100000"/>
-              <a:buChar char="▸"/>
-            </a:pPr>
-            <a:r>
-              <a:rPr lang="en-US" sz="1600" dirty="0">
+              <a:t>Profile</a:t>
+            </a:r>
+            <a:endParaRPr lang="en-US" sz="1350" dirty="0"/>
+          </a:p>
+        </p:txBody>
+      </p:sp>
+      <p:sp>
+        <p:nvSpPr>
+          <p:cNvPr id="14" name="Text 12"/>
+          <p:cNvSpPr/>
+          <p:nvPr/>
+        </p:nvSpPr>
+        <p:spPr>
+          <a:xfrm>
+            <a:off x="3078328" y="3566160"/>
+            <a:ext cx="1682496" cy="960120"/>
+          </a:xfrm>
+          <a:prstGeom prst="rect">
+            <a:avLst/>
+          </a:prstGeom>
+          <a:noFill/>
+          <a:ln/>
+        </p:spPr>
+        <p:txBody>
+          <a:bodyPr wrap="square" rtlCol="0" anchor="ctr"/>
+          <a:lstStyle/>
+          <a:p>
+            <a:pPr indent="0" marL="0">
+              <a:buNone/>
+            </a:pPr>
+            <a:r>
+              <a:rPr lang="en-US" sz="980" dirty="0">
                 <a:solidFill>
                   <a:srgbClr val="CBD5E1"/>
                 </a:solidFill>
@@ -2877,22 +7679,69 @@
                 <a:ea typeface="Segoe UI" pitchFamily="34" charset="-122"/>
                 <a:cs typeface="Segoe UI" pitchFamily="34" charset="-120"/>
               </a:rPr>
-              <a:t>One place where every deliverable lives</a:t>
-            </a:r>
-            <a:endParaRPr lang="en-US" sz="1600" dirty="0"/>
-          </a:p>
-        </p:txBody>
-      </p:sp>
-      <p:sp>
-        <p:nvSpPr>
-          <p:cNvPr id="7" name="Text 5"/>
-          <p:cNvSpPr/>
-          <p:nvPr/>
-        </p:nvSpPr>
-        <p:spPr>
-          <a:xfrm>
-            <a:off x="10698480" y="6355080"/>
-            <a:ext cx="1188720" cy="365760"/>
+              <a:t>Sources mapped for quirks, cadence, edge cases, and polite collection.</a:t>
+            </a:r>
+            <a:endParaRPr lang="en-US" sz="980" dirty="0"/>
+          </a:p>
+        </p:txBody>
+      </p:sp>
+      <p:sp>
+        <p:nvSpPr>
+          <p:cNvPr id="15" name="Shape 13"/>
+          <p:cNvSpPr/>
+          <p:nvPr/>
+        </p:nvSpPr>
+        <p:spPr>
+          <a:xfrm>
+            <a:off x="4902556" y="3419856"/>
+            <a:ext cx="210312" cy="274320"/>
+          </a:xfrm>
+          <a:prstGeom prst="rightArrow">
+            <a:avLst/>
+          </a:prstGeom>
+          <a:solidFill>
+            <a:srgbClr val="06B6D4"/>
+          </a:solidFill>
+          <a:ln/>
+        </p:spPr>
+      </p:sp>
+      <p:sp>
+        <p:nvSpPr>
+          <p:cNvPr id="16" name="Shape 14"/>
+          <p:cNvSpPr/>
+          <p:nvPr/>
+        </p:nvSpPr>
+        <p:spPr>
+          <a:xfrm>
+            <a:off x="5126584" y="2514600"/>
+            <a:ext cx="1938528" cy="2103120"/>
+          </a:xfrm>
+          <a:prstGeom prst="roundRect">
+            <a:avLst>
+              <a:gd name="adj" fmla="val 3302"/>
+            </a:avLst>
+          </a:prstGeom>
+          <a:solidFill>
+            <a:srgbClr val="111A2E"/>
+          </a:solidFill>
+          <a:ln w="19050">
+            <a:solidFill>
+              <a:srgbClr val="3B82F6"/>
+            </a:solidFill>
+            <a:prstDash val="solid"/>
+          </a:ln>
+        </p:spPr>
+      </p:sp>
+      <p:sp>
+        <p:nvSpPr>
+          <p:cNvPr id="17" name="Text 15"/>
+          <p:cNvSpPr/>
+          <p:nvPr/>
+        </p:nvSpPr>
+        <p:spPr>
+          <a:xfrm>
+            <a:off x="5254600" y="2633472"/>
+            <a:ext cx="1682496" cy="310896"/>
           </a:xfrm>
           <a:prstGeom prst="rect">
             <a:avLst/>
@@ -2904,19 +7753,526 @@
           <a:bodyPr wrap="square" rtlCol="0" anchor="ctr"/>
           <a:lstStyle/>
           <a:p>
-            <a:pPr algn="r" indent="0" marL="0">
+            <a:pPr indent="0" marL="0">
               <a:buNone/>
             </a:pPr>
             <a:r>
-              <a:rPr lang="en-US" sz="1000" dirty="0">
-                <a:solidFill>
-                  <a:srgbClr val="64748B"/>
+              <a:rPr lang="en-US" sz="1100" b="1" dirty="0">
+                <a:solidFill>
+                  <a:srgbClr val="3B82F6"/>
                 </a:solidFill>
                 <a:latin typeface="Consolas" pitchFamily="34" charset="0"/>
                 <a:ea typeface="Consolas" pitchFamily="34" charset="-122"/>
                 <a:cs typeface="Consolas" pitchFamily="34" charset="-120"/>
               </a:rPr>
-              <a:t>5 / 8</a:t>
+              <a:t>03</a:t>
+            </a:r>
+            <a:endParaRPr lang="en-US" sz="1100" dirty="0"/>
+          </a:p>
+        </p:txBody>
+      </p:sp>
+      <p:sp>
+        <p:nvSpPr>
+          <p:cNvPr id="18" name="Text 16"/>
+          <p:cNvSpPr/>
+          <p:nvPr/>
+        </p:nvSpPr>
+        <p:spPr>
+          <a:xfrm>
+            <a:off x="5254600" y="2962656"/>
+            <a:ext cx="1682496" cy="566928"/>
+          </a:xfrm>
+          <a:prstGeom prst="rect">
+            <a:avLst/>
+          </a:prstGeom>
+          <a:noFill/>
+          <a:ln/>
+        </p:spPr>
+        <p:txBody>
+          <a:bodyPr wrap="square" rtlCol="0" anchor="ctr"/>
+          <a:lstStyle/>
+          <a:p>
+            <a:pPr indent="0" marL="0">
+              <a:buNone/>
+            </a:pPr>
+            <a:r>
+              <a:rPr lang="en-US" sz="1350" b="1" dirty="0">
+                <a:solidFill>
+                  <a:srgbClr val="FFFFFF"/>
+                </a:solidFill>
+                <a:latin typeface="Segoe UI" pitchFamily="34" charset="0"/>
+                <a:ea typeface="Segoe UI" pitchFamily="34" charset="-122"/>
+                <a:cs typeface="Segoe UI" pitchFamily="34" charset="-120"/>
+              </a:rPr>
+              <a:t>Build</a:t>
+            </a:r>
+            <a:endParaRPr lang="en-US" sz="1350" dirty="0"/>
+          </a:p>
+        </p:txBody>
+      </p:sp>
+      <p:sp>
+        <p:nvSpPr>
+          <p:cNvPr id="19" name="Text 17"/>
+          <p:cNvSpPr/>
+          <p:nvPr/>
+        </p:nvSpPr>
+        <p:spPr>
+          <a:xfrm>
+            <a:off x="5254600" y="3566160"/>
+            <a:ext cx="1682496" cy="960120"/>
+          </a:xfrm>
+          <a:prstGeom prst="rect">
+            <a:avLst/>
+          </a:prstGeom>
+          <a:noFill/>
+          <a:ln/>
+        </p:spPr>
+        <p:txBody>
+          <a:bodyPr wrap="square" rtlCol="0" anchor="ctr"/>
+          <a:lstStyle/>
+          <a:p>
+            <a:pPr indent="0" marL="0">
+              <a:buNone/>
+            </a:pPr>
+            <a:r>
+              <a:rPr lang="en-US" sz="980" dirty="0">
+                <a:solidFill>
+                  <a:srgbClr val="CBD5E1"/>
+                </a:solidFill>
+                <a:latin typeface="Segoe UI" pitchFamily="34" charset="0"/>
+                <a:ea typeface="Segoe UI" pitchFamily="34" charset="-122"/>
+                <a:cs typeface="Segoe UI" pitchFamily="34" charset="-120"/>
+              </a:rPr>
+              <a:t>Validation-first pipelines with structured logs and loud failures.</a:t>
+            </a:r>
+            <a:endParaRPr lang="en-US" sz="980" dirty="0"/>
+          </a:p>
+        </p:txBody>
+      </p:sp>
+      <p:sp>
+        <p:nvSpPr>
+          <p:cNvPr id="20" name="Shape 18"/>
+          <p:cNvSpPr/>
+          <p:nvPr/>
+        </p:nvSpPr>
+        <p:spPr>
+          <a:xfrm>
+            <a:off x="7078828" y="3419856"/>
+            <a:ext cx="210312" cy="274320"/>
+          </a:xfrm>
+          <a:prstGeom prst="rightArrow">
+            <a:avLst/>
+          </a:prstGeom>
+          <a:solidFill>
+            <a:srgbClr val="06B6D4"/>
+          </a:solidFill>
+          <a:ln/>
+        </p:spPr>
+      </p:sp>
+      <p:sp>
+        <p:nvSpPr>
+          <p:cNvPr id="21" name="Shape 19"/>
+          <p:cNvSpPr/>
+          <p:nvPr/>
+        </p:nvSpPr>
+        <p:spPr>
+          <a:xfrm>
+            <a:off x="7302856" y="2514600"/>
+            <a:ext cx="1938528" cy="2103120"/>
+          </a:xfrm>
+          <a:prstGeom prst="roundRect">
+            <a:avLst>
+              <a:gd name="adj" fmla="val 3302"/>
+            </a:avLst>
+          </a:prstGeom>
+          <a:solidFill>
+            <a:srgbClr val="111A2E"/>
+          </a:solidFill>
+          <a:ln w="19050">
+            <a:solidFill>
+              <a:srgbClr val="06B6D4"/>
+            </a:solidFill>
+            <a:prstDash val="solid"/>
+          </a:ln>
+        </p:spPr>
+      </p:sp>
+      <p:sp>
+        <p:nvSpPr>
+          <p:cNvPr id="22" name="Text 20"/>
+          <p:cNvSpPr/>
+          <p:nvPr/>
+        </p:nvSpPr>
+        <p:spPr>
+          <a:xfrm>
+            <a:off x="7430872" y="2633472"/>
+            <a:ext cx="1682496" cy="310896"/>
+          </a:xfrm>
+          <a:prstGeom prst="rect">
+            <a:avLst/>
+          </a:prstGeom>
+          <a:noFill/>
+          <a:ln/>
+        </p:spPr>
+        <p:txBody>
+          <a:bodyPr wrap="square" rtlCol="0" anchor="ctr"/>
+          <a:lstStyle/>
+          <a:p>
+            <a:pPr indent="0" marL="0">
+              <a:buNone/>
+            </a:pPr>
+            <a:r>
+              <a:rPr lang="en-US" sz="1100" b="1" dirty="0">
+                <a:solidFill>
+                  <a:srgbClr val="06B6D4"/>
+                </a:solidFill>
+                <a:latin typeface="Consolas" pitchFamily="34" charset="0"/>
+                <a:ea typeface="Consolas" pitchFamily="34" charset="-122"/>
+                <a:cs typeface="Consolas" pitchFamily="34" charset="-120"/>
+              </a:rPr>
+              <a:t>04</a:t>
+            </a:r>
+            <a:endParaRPr lang="en-US" sz="1100" dirty="0"/>
+          </a:p>
+        </p:txBody>
+      </p:sp>
+      <p:sp>
+        <p:nvSpPr>
+          <p:cNvPr id="23" name="Text 21"/>
+          <p:cNvSpPr/>
+          <p:nvPr/>
+        </p:nvSpPr>
+        <p:spPr>
+          <a:xfrm>
+            <a:off x="7430872" y="2962656"/>
+            <a:ext cx="1682496" cy="566928"/>
+          </a:xfrm>
+          <a:prstGeom prst="rect">
+            <a:avLst/>
+          </a:prstGeom>
+          <a:noFill/>
+          <a:ln/>
+        </p:spPr>
+        <p:txBody>
+          <a:bodyPr wrap="square" rtlCol="0" anchor="ctr"/>
+          <a:lstStyle/>
+          <a:p>
+            <a:pPr indent="0" marL="0">
+              <a:buNone/>
+            </a:pPr>
+            <a:r>
+              <a:rPr lang="en-US" sz="1350" b="1" dirty="0">
+                <a:solidFill>
+                  <a:srgbClr val="FFFFFF"/>
+                </a:solidFill>
+                <a:latin typeface="Segoe UI" pitchFamily="34" charset="0"/>
+                <a:ea typeface="Segoe UI" pitchFamily="34" charset="-122"/>
+                <a:cs typeface="Segoe UI" pitchFamily="34" charset="-120"/>
+              </a:rPr>
+              <a:t>Prove</a:t>
+            </a:r>
+            <a:endParaRPr lang="en-US" sz="1350" dirty="0"/>
+          </a:p>
+        </p:txBody>
+      </p:sp>
+      <p:sp>
+        <p:nvSpPr>
+          <p:cNvPr id="24" name="Text 22"/>
+          <p:cNvSpPr/>
+          <p:nvPr/>
+        </p:nvSpPr>
+        <p:spPr>
+          <a:xfrm>
+            <a:off x="7430872" y="3566160"/>
+            <a:ext cx="1682496" cy="960120"/>
+          </a:xfrm>
+          <a:prstGeom prst="rect">
+            <a:avLst/>
+          </a:prstGeom>
+          <a:noFill/>
+          <a:ln/>
+        </p:spPr>
+        <p:txBody>
+          <a:bodyPr wrap="square" rtlCol="0" anchor="ctr"/>
+          <a:lstStyle/>
+          <a:p>
+            <a:pPr indent="0" marL="0">
+              <a:buNone/>
+            </a:pPr>
+            <a:r>
+              <a:rPr lang="en-US" sz="980" dirty="0">
+                <a:solidFill>
+                  <a:srgbClr val="CBD5E1"/>
+                </a:solidFill>
+                <a:latin typeface="Segoe UI" pitchFamily="34" charset="0"/>
+                <a:ea typeface="Segoe UI" pitchFamily="34" charset="-122"/>
+                <a:cs typeface="Segoe UI" pitchFamily="34" charset="-120"/>
+              </a:rPr>
+              <a:t>Evidence attached to every claim: files, logs, links, screenshots.</a:t>
+            </a:r>
+            <a:endParaRPr lang="en-US" sz="980" dirty="0"/>
+          </a:p>
+        </p:txBody>
+      </p:sp>
+      <p:sp>
+        <p:nvSpPr>
+          <p:cNvPr id="25" name="Shape 23"/>
+          <p:cNvSpPr/>
+          <p:nvPr/>
+        </p:nvSpPr>
+        <p:spPr>
+          <a:xfrm>
+            <a:off x="9255100" y="3419856"/>
+            <a:ext cx="210312" cy="274320"/>
+          </a:xfrm>
+          <a:prstGeom prst="rightArrow">
+            <a:avLst/>
+          </a:prstGeom>
+          <a:solidFill>
+            <a:srgbClr val="06B6D4"/>
+          </a:solidFill>
+          <a:ln/>
+        </p:spPr>
+      </p:sp>
+      <p:sp>
+        <p:nvSpPr>
+          <p:cNvPr id="26" name="Shape 24"/>
+          <p:cNvSpPr/>
+          <p:nvPr/>
+        </p:nvSpPr>
+        <p:spPr>
+          <a:xfrm>
+            <a:off x="9479128" y="2514600"/>
+            <a:ext cx="1938528" cy="2103120"/>
+          </a:xfrm>
+          <a:prstGeom prst="roundRect">
+            <a:avLst>
+              <a:gd name="adj" fmla="val 3302"/>
+            </a:avLst>
+          </a:prstGeom>
+          <a:solidFill>
+            <a:srgbClr val="111A2E"/>
+          </a:solidFill>
+          <a:ln w="19050">
+            <a:solidFill>
+              <a:srgbClr val="3B82F6"/>
+            </a:solidFill>
+            <a:prstDash val="solid"/>
+          </a:ln>
+        </p:spPr>
+      </p:sp>
+      <p:sp>
+        <p:nvSpPr>
+          <p:cNvPr id="27" name="Text 25"/>
+          <p:cNvSpPr/>
+          <p:nvPr/>
+        </p:nvSpPr>
+        <p:spPr>
+          <a:xfrm>
+            <a:off x="9607144" y="2633472"/>
+            <a:ext cx="1682496" cy="310896"/>
+          </a:xfrm>
+          <a:prstGeom prst="rect">
+            <a:avLst/>
+          </a:prstGeom>
+          <a:noFill/>
+          <a:ln/>
+        </p:spPr>
+        <p:txBody>
+          <a:bodyPr wrap="square" rtlCol="0" anchor="ctr"/>
+          <a:lstStyle/>
+          <a:p>
+            <a:pPr indent="0" marL="0">
+              <a:buNone/>
+            </a:pPr>
+            <a:r>
+              <a:rPr lang="en-US" sz="1100" b="1" dirty="0">
+                <a:solidFill>
+                  <a:srgbClr val="3B82F6"/>
+                </a:solidFill>
+                <a:latin typeface="Consolas" pitchFamily="34" charset="0"/>
+                <a:ea typeface="Consolas" pitchFamily="34" charset="-122"/>
+                <a:cs typeface="Consolas" pitchFamily="34" charset="-120"/>
+              </a:rPr>
+              <a:t>05</a:t>
+            </a:r>
+            <a:endParaRPr lang="en-US" sz="1100" dirty="0"/>
+          </a:p>
+        </p:txBody>
+      </p:sp>
+      <p:sp>
+        <p:nvSpPr>
+          <p:cNvPr id="28" name="Text 26"/>
+          <p:cNvSpPr/>
+          <p:nvPr/>
+        </p:nvSpPr>
+        <p:spPr>
+          <a:xfrm>
+            <a:off x="9607144" y="2962656"/>
+            <a:ext cx="1682496" cy="566928"/>
+          </a:xfrm>
+          <a:prstGeom prst="rect">
+            <a:avLst/>
+          </a:prstGeom>
+          <a:noFill/>
+          <a:ln/>
+        </p:spPr>
+        <p:txBody>
+          <a:bodyPr wrap="square" rtlCol="0" anchor="ctr"/>
+          <a:lstStyle/>
+          <a:p>
+            <a:pPr indent="0" marL="0">
+              <a:buNone/>
+            </a:pPr>
+            <a:r>
+              <a:rPr lang="en-US" sz="1350" b="1" dirty="0">
+                <a:solidFill>
+                  <a:srgbClr val="FFFFFF"/>
+                </a:solidFill>
+                <a:latin typeface="Segoe UI" pitchFamily="34" charset="0"/>
+                <a:ea typeface="Segoe UI" pitchFamily="34" charset="-122"/>
+                <a:cs typeface="Segoe UI" pitchFamily="34" charset="-120"/>
+              </a:rPr>
+              <a:t>Handover</a:t>
+            </a:r>
+            <a:endParaRPr lang="en-US" sz="1350" dirty="0"/>
+          </a:p>
+        </p:txBody>
+      </p:sp>
+      <p:sp>
+        <p:nvSpPr>
+          <p:cNvPr id="29" name="Text 27"/>
+          <p:cNvSpPr/>
+          <p:nvPr/>
+        </p:nvSpPr>
+        <p:spPr>
+          <a:xfrm>
+            <a:off x="9607144" y="3566160"/>
+            <a:ext cx="1682496" cy="960120"/>
+          </a:xfrm>
+          <a:prstGeom prst="rect">
+            <a:avLst/>
+          </a:prstGeom>
+          <a:noFill/>
+          <a:ln/>
+        </p:spPr>
+        <p:txBody>
+          <a:bodyPr wrap="square" rtlCol="0" anchor="ctr"/>
+          <a:lstStyle/>
+          <a:p>
+            <a:pPr indent="0" marL="0">
+              <a:buNone/>
+            </a:pPr>
+            <a:r>
+              <a:rPr lang="en-US" sz="980" dirty="0">
+                <a:solidFill>
+                  <a:srgbClr val="CBD5E1"/>
+                </a:solidFill>
+                <a:latin typeface="Segoe UI" pitchFamily="34" charset="0"/>
+                <a:ea typeface="Segoe UI" pitchFamily="34" charset="-122"/>
+                <a:cs typeface="Segoe UI" pitchFamily="34" charset="-120"/>
+              </a:rPr>
+              <a:t>Docs and runbooks that make your team independent of me.</a:t>
+            </a:r>
+            <a:endParaRPr lang="en-US" sz="980" dirty="0"/>
+          </a:p>
+        </p:txBody>
+      </p:sp>
+      <p:sp>
+        <p:nvSpPr>
+          <p:cNvPr id="30" name="Shape 28"/>
+          <p:cNvSpPr/>
+          <p:nvPr/>
+        </p:nvSpPr>
+        <p:spPr>
+          <a:xfrm>
+            <a:off x="822960" y="5961888"/>
+            <a:ext cx="10515600" cy="0"/>
+          </a:xfrm>
+          <a:prstGeom prst="line">
+            <a:avLst/>
+          </a:prstGeom>
+          <a:noFill/>
+          <a:ln w="12700">
+            <a:solidFill>
+              <a:srgbClr val="1E2D45"/>
+            </a:solidFill>
+            <a:prstDash val="solid"/>
+          </a:ln>
+        </p:spPr>
+      </p:sp>
+      <p:sp>
+        <p:nvSpPr>
+          <p:cNvPr id="31" name="Text 29"/>
+          <p:cNvSpPr/>
+          <p:nvPr/>
+        </p:nvSpPr>
+        <p:spPr>
+          <a:xfrm>
+            <a:off x="822960" y="6053328"/>
+            <a:ext cx="9692640" cy="457200"/>
+          </a:xfrm>
+          <a:prstGeom prst="rect">
+            <a:avLst/>
+          </a:prstGeom>
+          <a:noFill/>
+          <a:ln/>
+        </p:spPr>
+        <p:txBody>
+          <a:bodyPr wrap="square" rtlCol="0" anchor="ctr"/>
+          <a:lstStyle/>
+          <a:p>
+            <a:pPr indent="0" marL="0">
+              <a:buNone/>
+            </a:pPr>
+            <a:r>
+              <a:rPr lang="en-US" sz="1150" dirty="0">
+                <a:solidFill>
+                  <a:srgbClr val="64748B"/>
+                </a:solidFill>
+                <a:latin typeface="Segoe UI" pitchFamily="34" charset="0"/>
+                <a:ea typeface="Segoe UI" pitchFamily="34" charset="-122"/>
+                <a:cs typeface="Segoe UI" pitchFamily="34" charset="-120"/>
+              </a:rPr>
+              <a:t>The loop is the same for a two-week scrape and a multi-month BI build - only the depth changes.</a:t>
+            </a:r>
+            <a:endParaRPr lang="en-US" sz="1150" dirty="0"/>
+          </a:p>
+        </p:txBody>
+      </p:sp>
+      <p:sp>
+        <p:nvSpPr>
+          <p:cNvPr id="32" name="Text 30"/>
+          <p:cNvSpPr/>
+          <p:nvPr/>
+        </p:nvSpPr>
+        <p:spPr>
+          <a:xfrm>
+            <a:off x="10698480" y="6382512"/>
+            <a:ext cx="1188720" cy="365760"/>
+          </a:xfrm>
+          <a:prstGeom prst="rect">
+            <a:avLst/>
+          </a:prstGeom>
+          <a:noFill/>
+          <a:ln/>
+        </p:spPr>
+        <p:txBody>
+          <a:bodyPr wrap="square" rtlCol="0" anchor="ctr"/>
+          <a:lstStyle/>
+          <a:p>
+            <a:pPr algn="r" indent="0" marL="0">
+              <a:buNone/>
+            </a:pPr>
+            <a:r>
+              <a:rPr lang="en-US" sz="1000" dirty="0">
+                <a:solidFill>
+                  <a:srgbClr val="64748B"/>
+                </a:solidFill>
+                <a:latin typeface="Consolas" pitchFamily="34" charset="0"/>
+                <a:ea typeface="Consolas" pitchFamily="34" charset="-122"/>
+                <a:cs typeface="Consolas" pitchFamily="34" charset="-120"/>
+              </a:rPr>
+              <a:t>5 / 14</a:t>
             </a:r>
             <a:endParaRPr lang="en-US" sz="1000" dirty="0"/>
           </a:p>
@@ -3027,7 +8383,7 @@
                 <a:ea typeface="Consolas" pitchFamily="34" charset="-122"/>
                 <a:cs typeface="Consolas" pitchFamily="34" charset="-120"/>
               </a:rPr>
-              <a:t>HANDOVER</a:t>
+              <a:t>WHAT YOU GET</a:t>
             </a:r>
             <a:endParaRPr lang="en-US" sz="1200" dirty="0"/>
           </a:p>
@@ -3041,8 +8397,8 @@
         </p:nvSpPr>
         <p:spPr>
           <a:xfrm>
-            <a:off x="822960" y="960120"/>
-            <a:ext cx="10515600" cy="868680"/>
+            <a:off x="822960" y="914400"/>
+            <a:ext cx="10561320" cy="868680"/>
           </a:xfrm>
           <a:prstGeom prst="rect">
             <a:avLst/>
@@ -3058,7 +8414,7 @@
               <a:buNone/>
             </a:pPr>
             <a:r>
-              <a:rPr lang="en-US" sz="3000" b="1" dirty="0">
+              <a:rPr lang="en-US" sz="2700" b="1" dirty="0">
                 <a:solidFill>
                   <a:srgbClr val="FFFFFF"/>
                 </a:solidFill>
@@ -3066,139 +8422,1485 @@
                 <a:ea typeface="Segoe UI" pitchFamily="34" charset="-122"/>
                 <a:cs typeface="Segoe UI" pitchFamily="34" charset="-120"/>
               </a:rPr>
-              <a:t>The best ending is not needing me</a:t>
-            </a:r>
-            <a:endParaRPr lang="en-US" sz="3000" dirty="0"/>
-          </a:p>
-        </p:txBody>
-      </p:sp>
-      <p:sp>
-        <p:nvSpPr>
-          <p:cNvPr id="6" name="Text 4"/>
-          <p:cNvSpPr/>
-          <p:nvPr/>
-        </p:nvSpPr>
-        <p:spPr>
-          <a:xfrm>
-            <a:off x="868680" y="2057400"/>
-            <a:ext cx="10424160" cy="3566160"/>
-          </a:xfrm>
-          <a:prstGeom prst="rect">
-            <a:avLst/>
-          </a:prstGeom>
-          <a:noFill/>
-          <a:ln/>
-        </p:spPr>
-        <p:txBody>
-          <a:bodyPr wrap="square" rtlCol="0" anchor="t"/>
-          <a:lstStyle/>
-          <a:p>
-            <a:pPr marL="342900" indent="-342900">
-              <a:lnSpc>
-                <a:spcPct val="115000"/>
-              </a:lnSpc>
-              <a:spcAft>
-                <a:spcPts val="1000"/>
-              </a:spcAft>
-              <a:buSzPct val="100000"/>
-              <a:buChar char="▸"/>
-            </a:pPr>
-            <a:r>
-              <a:rPr lang="en-US" sz="1600" dirty="0">
-                <a:solidFill>
-                  <a:srgbClr val="CBD5E1"/>
+              <a:t>Services, deliverables, and what you own</a:t>
+            </a:r>
+            <a:endParaRPr lang="en-US" sz="2700" dirty="0"/>
+          </a:p>
+        </p:txBody>
+      </p:sp>
+      <p:graphicFrame>
+        <p:nvGraphicFramePr>
+          <p:cNvPr id="7" name="Table 0"/>
+          <p:cNvGraphicFramePr>
+            <a:graphicFrameLocks noGrp="1"/>
+          </p:cNvGraphicFramePr>
+          <p:nvPr>
+            <p:extLst>
+              <p:ext uri="{D42A27DB-BD31-4B8C-83A1-F6EECF244321}">
+                <p14:modId xmlns:p14="http://schemas.microsoft.com/office/powerpoint/2010/main" val="1579011935"/>
+              </p:ext>
+            </p:extLst>
+          </p:nvPr>
+        </p:nvGraphicFramePr>
+        <p:xfrm>
+          <a:off x="822960" y="2011680"/>
+          <a:ext cx="10515600" cy="914400"/>
+        </p:xfrm>
+        <a:graphic>
+          <a:graphicData uri="http://schemas.openxmlformats.org/drawingml/2006/table">
+            <a:tbl>
+              <a:tblPr/>
+              <a:tblGrid>
+                <a:gridCol w="2628900"/>
+                <a:gridCol w="2628900"/>
+                <a:gridCol w="2628900"/>
+                <a:gridCol w="2628900"/>
+              </a:tblGrid>
+              <a:tr h="402336">
+                <a:tc>
+                  <a:txBody>
+                    <a:bodyPr/>
+                    <a:lstStyle/>
+                    <a:p>
+                      <a:pPr indent="0" marL="0">
+                        <a:buNone/>
+                      </a:pPr>
+                      <a:r>
+                        <a:rPr lang="en-US" sz="1150" b="1" dirty="0">
+                          <a:solidFill>
+                            <a:srgbClr val="FFFFFF"/>
+                          </a:solidFill>
+                          <a:latin typeface="Segoe UI" pitchFamily="34" charset="0"/>
+                          <a:ea typeface="Segoe UI" pitchFamily="34" charset="-122"/>
+                          <a:cs typeface="Segoe UI" pitchFamily="34" charset="-120"/>
+                        </a:rPr>
+                        <a:t>Service</a:t>
+                      </a:r>
+                      <a:endParaRPr lang="en-US" sz="1150" dirty="0">
+                        <a:latin typeface="Segoe UI" charset="0"/>
+                        <a:ea typeface="Segoe UI" charset="0"/>
+                        <a:cs typeface="Segoe UI" charset="0"/>
+                      </a:endParaRPr>
+                    </a:p>
+                  </a:txBody>
+                  <a:tcPr marL="64008" marR="64008" marT="64008" marB="64008" anchor="ctr">
+                    <a:lnL w="6350" cap="flat" cmpd="sng" algn="ctr">
+                      <a:solidFill>
+                        <a:srgbClr val="24365A"/>
+                      </a:solidFill>
+                      <a:prstDash val="solid"/>
+                      <a:round/>
+                      <a:headEnd type="none" w="med" len="med"/>
+                      <a:tailEnd type="none" w="med" len="med"/>
+                    </a:lnL>
+                    <a:lnR w="6350" cap="flat" cmpd="sng" algn="ctr">
+                      <a:solidFill>
+                        <a:srgbClr val="24365A"/>
+                      </a:solidFill>
+                      <a:prstDash val="solid"/>
+                      <a:round/>
+                      <a:headEnd type="none" w="med" len="med"/>
+                      <a:tailEnd type="none" w="med" len="med"/>
+                    </a:lnR>
+                    <a:lnT w="6350" cap="flat" cmpd="sng" algn="ctr">
+                      <a:solidFill>
+                        <a:srgbClr val="24365A"/>
+                      </a:solidFill>
+                      <a:prstDash val="solid"/>
+                      <a:round/>
+                      <a:headEnd type="none" w="med" len="med"/>
+                      <a:tailEnd type="none" w="med" len="med"/>
+                    </a:lnT>
+                    <a:lnB w="6350" cap="flat" cmpd="sng" algn="ctr">
+                      <a:solidFill>
+                        <a:srgbClr val="24365A"/>
+                      </a:solidFill>
+                      <a:prstDash val="solid"/>
+                      <a:round/>
+                      <a:headEnd type="none" w="med" len="med"/>
+                      <a:tailEnd type="none" w="med" len="med"/>
+                    </a:lnB>
+                    <a:solidFill>
+                      <a:srgbClr val="16233B"/>
+                    </a:solidFill>
+                  </a:tcPr>
+                </a:tc>
+                <a:tc>
+                  <a:txBody>
+                    <a:bodyPr/>
+                    <a:lstStyle/>
+                    <a:p>
+                      <a:pPr indent="0" marL="0">
+                        <a:buNone/>
+                      </a:pPr>
+                      <a:r>
+                        <a:rPr lang="en-US" sz="1150" b="1" dirty="0">
+                          <a:solidFill>
+                            <a:srgbClr val="FFFFFF"/>
+                          </a:solidFill>
+                          <a:latin typeface="Segoe UI" pitchFamily="34" charset="0"/>
+                          <a:ea typeface="Segoe UI" pitchFamily="34" charset="-122"/>
+                          <a:cs typeface="Segoe UI" pitchFamily="34" charset="-120"/>
+                        </a:rPr>
+                        <a:t>Deliverable</a:t>
+                      </a:r>
+                      <a:endParaRPr lang="en-US" sz="1150" dirty="0">
+                        <a:latin typeface="Segoe UI" charset="0"/>
+                        <a:ea typeface="Segoe UI" charset="0"/>
+                        <a:cs typeface="Segoe UI" charset="0"/>
+                      </a:endParaRPr>
+                    </a:p>
+                  </a:txBody>
+                  <a:tcPr marL="64008" marR="64008" marT="64008" marB="64008" anchor="ctr">
+                    <a:lnL w="6350" cap="flat" cmpd="sng" algn="ctr">
+                      <a:solidFill>
+                        <a:srgbClr val="24365A"/>
+                      </a:solidFill>
+                      <a:prstDash val="solid"/>
+                      <a:round/>
+                      <a:headEnd type="none" w="med" len="med"/>
+                      <a:tailEnd type="none" w="med" len="med"/>
+                    </a:lnL>
+                    <a:lnR w="6350" cap="flat" cmpd="sng" algn="ctr">
+                      <a:solidFill>
+                        <a:srgbClr val="24365A"/>
+                      </a:solidFill>
+                      <a:prstDash val="solid"/>
+                      <a:round/>
+                      <a:headEnd type="none" w="med" len="med"/>
+                      <a:tailEnd type="none" w="med" len="med"/>
+                    </a:lnR>
+                    <a:lnT w="6350" cap="flat" cmpd="sng" algn="ctr">
+                      <a:solidFill>
+                        <a:srgbClr val="24365A"/>
+                      </a:solidFill>
+                      <a:prstDash val="solid"/>
+                      <a:round/>
+                      <a:headEnd type="none" w="med" len="med"/>
+                      <a:tailEnd type="none" w="med" len="med"/>
+                    </a:lnT>
+                    <a:lnB w="6350" cap="flat" cmpd="sng" algn="ctr">
+                      <a:solidFill>
+                        <a:srgbClr val="24365A"/>
+                      </a:solidFill>
+                      <a:prstDash val="solid"/>
+                      <a:round/>
+                      <a:headEnd type="none" w="med" len="med"/>
+                      <a:tailEnd type="none" w="med" len="med"/>
+                    </a:lnB>
+                    <a:solidFill>
+                      <a:srgbClr val="16233B"/>
+                    </a:solidFill>
+                  </a:tcPr>
+                </a:tc>
+                <a:tc>
+                  <a:txBody>
+                    <a:bodyPr/>
+                    <a:lstStyle/>
+                    <a:p>
+                      <a:pPr indent="0" marL="0">
+                        <a:buNone/>
+                      </a:pPr>
+                      <a:r>
+                        <a:rPr lang="en-US" sz="1150" b="1" dirty="0">
+                          <a:solidFill>
+                            <a:srgbClr val="FFFFFF"/>
+                          </a:solidFill>
+                          <a:latin typeface="Segoe UI" pitchFamily="34" charset="0"/>
+                          <a:ea typeface="Segoe UI" pitchFamily="34" charset="-122"/>
+                          <a:cs typeface="Segoe UI" pitchFamily="34" charset="-120"/>
+                        </a:rPr>
+                        <a:t>Built on</a:t>
+                      </a:r>
+                      <a:endParaRPr lang="en-US" sz="1150" dirty="0">
+                        <a:latin typeface="Segoe UI" charset="0"/>
+                        <a:ea typeface="Segoe UI" charset="0"/>
+                        <a:cs typeface="Segoe UI" charset="0"/>
+                      </a:endParaRPr>
+                    </a:p>
+                  </a:txBody>
+                  <a:tcPr marL="64008" marR="64008" marT="64008" marB="64008" anchor="ctr">
+                    <a:lnL w="6350" cap="flat" cmpd="sng" algn="ctr">
+                      <a:solidFill>
+                        <a:srgbClr val="24365A"/>
+                      </a:solidFill>
+                      <a:prstDash val="solid"/>
+                      <a:round/>
+                      <a:headEnd type="none" w="med" len="med"/>
+                      <a:tailEnd type="none" w="med" len="med"/>
+                    </a:lnL>
+                    <a:lnR w="6350" cap="flat" cmpd="sng" algn="ctr">
+                      <a:solidFill>
+                        <a:srgbClr val="24365A"/>
+                      </a:solidFill>
+                      <a:prstDash val="solid"/>
+                      <a:round/>
+                      <a:headEnd type="none" w="med" len="med"/>
+                      <a:tailEnd type="none" w="med" len="med"/>
+                    </a:lnR>
+                    <a:lnT w="6350" cap="flat" cmpd="sng" algn="ctr">
+                      <a:solidFill>
+                        <a:srgbClr val="24365A"/>
+                      </a:solidFill>
+                      <a:prstDash val="solid"/>
+                      <a:round/>
+                      <a:headEnd type="none" w="med" len="med"/>
+                      <a:tailEnd type="none" w="med" len="med"/>
+                    </a:lnT>
+                    <a:lnB w="6350" cap="flat" cmpd="sng" algn="ctr">
+                      <a:solidFill>
+                        <a:srgbClr val="24365A"/>
+                      </a:solidFill>
+                      <a:prstDash val="solid"/>
+                      <a:round/>
+                      <a:headEnd type="none" w="med" len="med"/>
+                      <a:tailEnd type="none" w="med" len="med"/>
+                    </a:lnB>
+                    <a:solidFill>
+                      <a:srgbClr val="16233B"/>
+                    </a:solidFill>
+                  </a:tcPr>
+                </a:tc>
+                <a:tc>
+                  <a:txBody>
+                    <a:bodyPr/>
+                    <a:lstStyle/>
+                    <a:p>
+                      <a:pPr indent="0" marL="0">
+                        <a:buNone/>
+                      </a:pPr>
+                      <a:r>
+                        <a:rPr lang="en-US" sz="1150" b="1" dirty="0">
+                          <a:solidFill>
+                            <a:srgbClr val="FFFFFF"/>
+                          </a:solidFill>
+                          <a:latin typeface="Segoe UI" pitchFamily="34" charset="0"/>
+                          <a:ea typeface="Segoe UI" pitchFamily="34" charset="-122"/>
+                          <a:cs typeface="Segoe UI" pitchFamily="34" charset="-120"/>
+                        </a:rPr>
+                        <a:t>You own</a:t>
+                      </a:r>
+                      <a:endParaRPr lang="en-US" sz="1150" dirty="0">
+                        <a:latin typeface="Segoe UI" charset="0"/>
+                        <a:ea typeface="Segoe UI" charset="0"/>
+                        <a:cs typeface="Segoe UI" charset="0"/>
+                      </a:endParaRPr>
+                    </a:p>
+                  </a:txBody>
+                  <a:tcPr marL="64008" marR="64008" marT="64008" marB="64008" anchor="ctr">
+                    <a:lnL w="6350" cap="flat" cmpd="sng" algn="ctr">
+                      <a:solidFill>
+                        <a:srgbClr val="24365A"/>
+                      </a:solidFill>
+                      <a:prstDash val="solid"/>
+                      <a:round/>
+                      <a:headEnd type="none" w="med" len="med"/>
+                      <a:tailEnd type="none" w="med" len="med"/>
+                    </a:lnL>
+                    <a:lnR w="6350" cap="flat" cmpd="sng" algn="ctr">
+                      <a:solidFill>
+                        <a:srgbClr val="24365A"/>
+                      </a:solidFill>
+                      <a:prstDash val="solid"/>
+                      <a:round/>
+                      <a:headEnd type="none" w="med" len="med"/>
+                      <a:tailEnd type="none" w="med" len="med"/>
+                    </a:lnR>
+                    <a:lnT w="6350" cap="flat" cmpd="sng" algn="ctr">
+                      <a:solidFill>
+                        <a:srgbClr val="24365A"/>
+                      </a:solidFill>
+                      <a:prstDash val="solid"/>
+                      <a:round/>
+                      <a:headEnd type="none" w="med" len="med"/>
+                      <a:tailEnd type="none" w="med" len="med"/>
+                    </a:lnT>
+                    <a:lnB w="6350" cap="flat" cmpd="sng" algn="ctr">
+                      <a:solidFill>
+                        <a:srgbClr val="24365A"/>
+                      </a:solidFill>
+                      <a:prstDash val="solid"/>
+                      <a:round/>
+                      <a:headEnd type="none" w="med" len="med"/>
+                      <a:tailEnd type="none" w="med" len="med"/>
+                    </a:lnB>
+                    <a:solidFill>
+                      <a:srgbClr val="16233B"/>
+                    </a:solidFill>
+                  </a:tcPr>
+                </a:tc>
+              </a:tr>
+              <a:tr h="402336">
+                <a:tc>
+                  <a:txBody>
+                    <a:bodyPr/>
+                    <a:lstStyle/>
+                    <a:p>
+                      <a:pPr indent="0" marL="0">
+                        <a:buNone/>
+                      </a:pPr>
+                      <a:r>
+                        <a:rPr lang="en-US" sz="1080" dirty="0">
+                          <a:solidFill>
+                            <a:srgbClr val="CBD5E1"/>
+                          </a:solidFill>
+                          <a:latin typeface="Segoe UI" pitchFamily="34" charset="0"/>
+                          <a:ea typeface="Segoe UI" pitchFamily="34" charset="-122"/>
+                          <a:cs typeface="Segoe UI" pitchFamily="34" charset="-120"/>
+                        </a:rPr>
+                        <a:t>Web scraping &amp; collection</a:t>
+                      </a:r>
+                      <a:endParaRPr lang="en-US" sz="1080" dirty="0">
+                        <a:latin typeface="Segoe UI" charset="0"/>
+                        <a:ea typeface="Segoe UI" charset="0"/>
+                        <a:cs typeface="Segoe UI" charset="0"/>
+                      </a:endParaRPr>
+                    </a:p>
+                  </a:txBody>
+                  <a:tcPr marL="64008" marR="64008" marT="64008" marB="64008" anchor="ctr">
+                    <a:lnL w="6350" cap="flat" cmpd="sng" algn="ctr">
+                      <a:solidFill>
+                        <a:srgbClr val="24365A"/>
+                      </a:solidFill>
+                      <a:prstDash val="solid"/>
+                      <a:round/>
+                      <a:headEnd type="none" w="med" len="med"/>
+                      <a:tailEnd type="none" w="med" len="med"/>
+                    </a:lnL>
+                    <a:lnR w="6350" cap="flat" cmpd="sng" algn="ctr">
+                      <a:solidFill>
+                        <a:srgbClr val="24365A"/>
+                      </a:solidFill>
+                      <a:prstDash val="solid"/>
+                      <a:round/>
+                      <a:headEnd type="none" w="med" len="med"/>
+                      <a:tailEnd type="none" w="med" len="med"/>
+                    </a:lnR>
+                    <a:lnT w="6350" cap="flat" cmpd="sng" algn="ctr">
+                      <a:solidFill>
+                        <a:srgbClr val="24365A"/>
+                      </a:solidFill>
+                      <a:prstDash val="solid"/>
+                      <a:round/>
+                      <a:headEnd type="none" w="med" len="med"/>
+                      <a:tailEnd type="none" w="med" len="med"/>
+                    </a:lnT>
+                    <a:lnB w="6350" cap="flat" cmpd="sng" algn="ctr">
+                      <a:solidFill>
+                        <a:srgbClr val="24365A"/>
+                      </a:solidFill>
+                      <a:prstDash val="solid"/>
+                      <a:round/>
+                      <a:headEnd type="none" w="med" len="med"/>
+                      <a:tailEnd type="none" w="med" len="med"/>
+                    </a:lnB>
+                    <a:solidFill>
+                      <a:srgbClr val="101A2D"/>
+                    </a:solidFill>
+                  </a:tcPr>
+                </a:tc>
+                <a:tc>
+                  <a:txBody>
+                    <a:bodyPr/>
+                    <a:lstStyle/>
+                    <a:p>
+                      <a:pPr indent="0" marL="0">
+                        <a:buNone/>
+                      </a:pPr>
+                      <a:r>
+                        <a:rPr lang="en-US" sz="1080" dirty="0">
+                          <a:solidFill>
+                            <a:srgbClr val="CBD5E1"/>
+                          </a:solidFill>
+                          <a:latin typeface="Segoe UI" pitchFamily="34" charset="0"/>
+                          <a:ea typeface="Segoe UI" pitchFamily="34" charset="-122"/>
+                          <a:cs typeface="Segoe UI" pitchFamily="34" charset="-120"/>
+                        </a:rPr>
+                        <a:t>Validated pipelines with readable run logs</a:t>
+                      </a:r>
+                      <a:endParaRPr lang="en-US" sz="1080" dirty="0">
+                        <a:latin typeface="Segoe UI" charset="0"/>
+                        <a:ea typeface="Segoe UI" charset="0"/>
+                        <a:cs typeface="Segoe UI" charset="0"/>
+                      </a:endParaRPr>
+                    </a:p>
+                  </a:txBody>
+                  <a:tcPr marL="64008" marR="64008" marT="64008" marB="64008" anchor="ctr">
+                    <a:lnL w="6350" cap="flat" cmpd="sng" algn="ctr">
+                      <a:solidFill>
+                        <a:srgbClr val="24365A"/>
+                      </a:solidFill>
+                      <a:prstDash val="solid"/>
+                      <a:round/>
+                      <a:headEnd type="none" w="med" len="med"/>
+                      <a:tailEnd type="none" w="med" len="med"/>
+                    </a:lnL>
+                    <a:lnR w="6350" cap="flat" cmpd="sng" algn="ctr">
+                      <a:solidFill>
+                        <a:srgbClr val="24365A"/>
+                      </a:solidFill>
+                      <a:prstDash val="solid"/>
+                      <a:round/>
+                      <a:headEnd type="none" w="med" len="med"/>
+                      <a:tailEnd type="none" w="med" len="med"/>
+                    </a:lnR>
+                    <a:lnT w="6350" cap="flat" cmpd="sng" algn="ctr">
+                      <a:solidFill>
+                        <a:srgbClr val="24365A"/>
+                      </a:solidFill>
+                      <a:prstDash val="solid"/>
+                      <a:round/>
+                      <a:headEnd type="none" w="med" len="med"/>
+                      <a:tailEnd type="none" w="med" len="med"/>
+                    </a:lnT>
+                    <a:lnB w="6350" cap="flat" cmpd="sng" algn="ctr">
+                      <a:solidFill>
+                        <a:srgbClr val="24365A"/>
+                      </a:solidFill>
+                      <a:prstDash val="solid"/>
+                      <a:round/>
+                      <a:headEnd type="none" w="med" len="med"/>
+                      <a:tailEnd type="none" w="med" len="med"/>
+                    </a:lnB>
+                    <a:solidFill>
+                      <a:srgbClr val="101A2D"/>
+                    </a:solidFill>
+                  </a:tcPr>
+                </a:tc>
+                <a:tc>
+                  <a:txBody>
+                    <a:bodyPr/>
+                    <a:lstStyle/>
+                    <a:p>
+                      <a:pPr indent="0" marL="0">
+                        <a:buNone/>
+                      </a:pPr>
+                      <a:r>
+                        <a:rPr lang="en-US" sz="1080" dirty="0">
+                          <a:solidFill>
+                            <a:srgbClr val="CBD5E1"/>
+                          </a:solidFill>
+                          <a:latin typeface="Segoe UI" pitchFamily="34" charset="0"/>
+                          <a:ea typeface="Segoe UI" pitchFamily="34" charset="-122"/>
+                          <a:cs typeface="Segoe UI" pitchFamily="34" charset="-120"/>
+                        </a:rPr>
+                        <a:t>Web Scraping Toolkit, Playwright</a:t>
+                      </a:r>
+                      <a:endParaRPr lang="en-US" sz="1080" dirty="0">
+                        <a:latin typeface="Segoe UI" charset="0"/>
+                        <a:ea typeface="Segoe UI" charset="0"/>
+                        <a:cs typeface="Segoe UI" charset="0"/>
+                      </a:endParaRPr>
+                    </a:p>
+                  </a:txBody>
+                  <a:tcPr marL="64008" marR="64008" marT="64008" marB="64008" anchor="ctr">
+                    <a:lnL w="6350" cap="flat" cmpd="sng" algn="ctr">
+                      <a:solidFill>
+                        <a:srgbClr val="24365A"/>
+                      </a:solidFill>
+                      <a:prstDash val="solid"/>
+                      <a:round/>
+                      <a:headEnd type="none" w="med" len="med"/>
+                      <a:tailEnd type="none" w="med" len="med"/>
+                    </a:lnL>
+                    <a:lnR w="6350" cap="flat" cmpd="sng" algn="ctr">
+                      <a:solidFill>
+                        <a:srgbClr val="24365A"/>
+                      </a:solidFill>
+                      <a:prstDash val="solid"/>
+                      <a:round/>
+                      <a:headEnd type="none" w="med" len="med"/>
+                      <a:tailEnd type="none" w="med" len="med"/>
+                    </a:lnR>
+                    <a:lnT w="6350" cap="flat" cmpd="sng" algn="ctr">
+                      <a:solidFill>
+                        <a:srgbClr val="24365A"/>
+                      </a:solidFill>
+                      <a:prstDash val="solid"/>
+                      <a:round/>
+                      <a:headEnd type="none" w="med" len="med"/>
+                      <a:tailEnd type="none" w="med" len="med"/>
+                    </a:lnT>
+                    <a:lnB w="6350" cap="flat" cmpd="sng" algn="ctr">
+                      <a:solidFill>
+                        <a:srgbClr val="24365A"/>
+                      </a:solidFill>
+                      <a:prstDash val="solid"/>
+                      <a:round/>
+                      <a:headEnd type="none" w="med" len="med"/>
+                      <a:tailEnd type="none" w="med" len="med"/>
+                    </a:lnB>
+                    <a:solidFill>
+                      <a:srgbClr val="101A2D"/>
+                    </a:solidFill>
+                  </a:tcPr>
+                </a:tc>
+                <a:tc>
+                  <a:txBody>
+                    <a:bodyPr/>
+                    <a:lstStyle/>
+                    <a:p>
+                      <a:pPr indent="0" marL="0">
+                        <a:buNone/>
+                      </a:pPr>
+                      <a:r>
+                        <a:rPr lang="en-US" sz="1080" dirty="0">
+                          <a:solidFill>
+                            <a:srgbClr val="CBD5E1"/>
+                          </a:solidFill>
+                          <a:latin typeface="Segoe UI" pitchFamily="34" charset="0"/>
+                          <a:ea typeface="Segoe UI" pitchFamily="34" charset="-122"/>
+                          <a:cs typeface="Segoe UI" pitchFamily="34" charset="-120"/>
+                        </a:rPr>
+                        <a:t>Code, data, and schedule</a:t>
+                      </a:r>
+                      <a:endParaRPr lang="en-US" sz="1080" dirty="0">
+                        <a:latin typeface="Segoe UI" charset="0"/>
+                        <a:ea typeface="Segoe UI" charset="0"/>
+                        <a:cs typeface="Segoe UI" charset="0"/>
+                      </a:endParaRPr>
+                    </a:p>
+                  </a:txBody>
+                  <a:tcPr marL="64008" marR="64008" marT="64008" marB="64008" anchor="ctr">
+                    <a:lnL w="6350" cap="flat" cmpd="sng" algn="ctr">
+                      <a:solidFill>
+                        <a:srgbClr val="24365A"/>
+                      </a:solidFill>
+                      <a:prstDash val="solid"/>
+                      <a:round/>
+                      <a:headEnd type="none" w="med" len="med"/>
+                      <a:tailEnd type="none" w="med" len="med"/>
+                    </a:lnL>
+                    <a:lnR w="6350" cap="flat" cmpd="sng" algn="ctr">
+                      <a:solidFill>
+                        <a:srgbClr val="24365A"/>
+                      </a:solidFill>
+                      <a:prstDash val="solid"/>
+                      <a:round/>
+                      <a:headEnd type="none" w="med" len="med"/>
+                      <a:tailEnd type="none" w="med" len="med"/>
+                    </a:lnR>
+                    <a:lnT w="6350" cap="flat" cmpd="sng" algn="ctr">
+                      <a:solidFill>
+                        <a:srgbClr val="24365A"/>
+                      </a:solidFill>
+                      <a:prstDash val="solid"/>
+                      <a:round/>
+                      <a:headEnd type="none" w="med" len="med"/>
+                      <a:tailEnd type="none" w="med" len="med"/>
+                    </a:lnT>
+                    <a:lnB w="6350" cap="flat" cmpd="sng" algn="ctr">
+                      <a:solidFill>
+                        <a:srgbClr val="24365A"/>
+                      </a:solidFill>
+                      <a:prstDash val="solid"/>
+                      <a:round/>
+                      <a:headEnd type="none" w="med" len="med"/>
+                      <a:tailEnd type="none" w="med" len="med"/>
+                    </a:lnB>
+                    <a:solidFill>
+                      <a:srgbClr val="101A2D"/>
+                    </a:solidFill>
+                  </a:tcPr>
+                </a:tc>
+              </a:tr>
+              <a:tr h="402336">
+                <a:tc>
+                  <a:txBody>
+                    <a:bodyPr/>
+                    <a:lstStyle/>
+                    <a:p>
+                      <a:pPr indent="0" marL="0">
+                        <a:buNone/>
+                      </a:pPr>
+                      <a:r>
+                        <a:rPr lang="en-US" sz="1080" dirty="0">
+                          <a:solidFill>
+                            <a:srgbClr val="CBD5E1"/>
+                          </a:solidFill>
+                          <a:latin typeface="Segoe UI" pitchFamily="34" charset="0"/>
+                          <a:ea typeface="Segoe UI" pitchFamily="34" charset="-122"/>
+                          <a:cs typeface="Segoe UI" pitchFamily="34" charset="-120"/>
+                        </a:rPr>
+                        <a:t>BI &amp; analytics</a:t>
+                      </a:r>
+                      <a:endParaRPr lang="en-US" sz="1080" dirty="0">
+                        <a:latin typeface="Segoe UI" charset="0"/>
+                        <a:ea typeface="Segoe UI" charset="0"/>
+                        <a:cs typeface="Segoe UI" charset="0"/>
+                      </a:endParaRPr>
+                    </a:p>
+                  </a:txBody>
+                  <a:tcPr marL="64008" marR="64008" marT="64008" marB="64008" anchor="ctr">
+                    <a:lnL w="6350" cap="flat" cmpd="sng" algn="ctr">
+                      <a:solidFill>
+                        <a:srgbClr val="24365A"/>
+                      </a:solidFill>
+                      <a:prstDash val="solid"/>
+                      <a:round/>
+                      <a:headEnd type="none" w="med" len="med"/>
+                      <a:tailEnd type="none" w="med" len="med"/>
+                    </a:lnL>
+                    <a:lnR w="6350" cap="flat" cmpd="sng" algn="ctr">
+                      <a:solidFill>
+                        <a:srgbClr val="24365A"/>
+                      </a:solidFill>
+                      <a:prstDash val="solid"/>
+                      <a:round/>
+                      <a:headEnd type="none" w="med" len="med"/>
+                      <a:tailEnd type="none" w="med" len="med"/>
+                    </a:lnR>
+                    <a:lnT w="6350" cap="flat" cmpd="sng" algn="ctr">
+                      <a:solidFill>
+                        <a:srgbClr val="24365A"/>
+                      </a:solidFill>
+                      <a:prstDash val="solid"/>
+                      <a:round/>
+                      <a:headEnd type="none" w="med" len="med"/>
+                      <a:tailEnd type="none" w="med" len="med"/>
+                    </a:lnT>
+                    <a:lnB w="6350" cap="flat" cmpd="sng" algn="ctr">
+                      <a:solidFill>
+                        <a:srgbClr val="24365A"/>
+                      </a:solidFill>
+                      <a:prstDash val="solid"/>
+                      <a:round/>
+                      <a:headEnd type="none" w="med" len="med"/>
+                      <a:tailEnd type="none" w="med" len="med"/>
+                    </a:lnB>
+                    <a:solidFill>
+                      <a:srgbClr val="0D1420"/>
+                    </a:solidFill>
+                  </a:tcPr>
+                </a:tc>
+                <a:tc>
+                  <a:txBody>
+                    <a:bodyPr/>
+                    <a:lstStyle/>
+                    <a:p>
+                      <a:pPr indent="0" marL="0">
+                        <a:buNone/>
+                      </a:pPr>
+                      <a:r>
+                        <a:rPr lang="en-US" sz="1080" dirty="0">
+                          <a:solidFill>
+                            <a:srgbClr val="CBD5E1"/>
+                          </a:solidFill>
+                          <a:latin typeface="Segoe UI" pitchFamily="34" charset="0"/>
+                          <a:ea typeface="Segoe UI" pitchFamily="34" charset="-122"/>
+                          <a:cs typeface="Segoe UI" pitchFamily="34" charset="-120"/>
+                        </a:rPr>
+                        <a:t>Dashboards, reconciliation, reporting</a:t>
+                      </a:r>
+                      <a:endParaRPr lang="en-US" sz="1080" dirty="0">
+                        <a:latin typeface="Segoe UI" charset="0"/>
+                        <a:ea typeface="Segoe UI" charset="0"/>
+                        <a:cs typeface="Segoe UI" charset="0"/>
+                      </a:endParaRPr>
+                    </a:p>
+                  </a:txBody>
+                  <a:tcPr marL="64008" marR="64008" marT="64008" marB="64008" anchor="ctr">
+                    <a:lnL w="6350" cap="flat" cmpd="sng" algn="ctr">
+                      <a:solidFill>
+                        <a:srgbClr val="24365A"/>
+                      </a:solidFill>
+                      <a:prstDash val="solid"/>
+                      <a:round/>
+                      <a:headEnd type="none" w="med" len="med"/>
+                      <a:tailEnd type="none" w="med" len="med"/>
+                    </a:lnL>
+                    <a:lnR w="6350" cap="flat" cmpd="sng" algn="ctr">
+                      <a:solidFill>
+                        <a:srgbClr val="24365A"/>
+                      </a:solidFill>
+                      <a:prstDash val="solid"/>
+                      <a:round/>
+                      <a:headEnd type="none" w="med" len="med"/>
+                      <a:tailEnd type="none" w="med" len="med"/>
+                    </a:lnR>
+                    <a:lnT w="6350" cap="flat" cmpd="sng" algn="ctr">
+                      <a:solidFill>
+                        <a:srgbClr val="24365A"/>
+                      </a:solidFill>
+                      <a:prstDash val="solid"/>
+                      <a:round/>
+                      <a:headEnd type="none" w="med" len="med"/>
+                      <a:tailEnd type="none" w="med" len="med"/>
+                    </a:lnT>
+                    <a:lnB w="6350" cap="flat" cmpd="sng" algn="ctr">
+                      <a:solidFill>
+                        <a:srgbClr val="24365A"/>
+                      </a:solidFill>
+                      <a:prstDash val="solid"/>
+                      <a:round/>
+                      <a:headEnd type="none" w="med" len="med"/>
+                      <a:tailEnd type="none" w="med" len="med"/>
+                    </a:lnB>
+                    <a:solidFill>
+                      <a:srgbClr val="0D1420"/>
+                    </a:solidFill>
+                  </a:tcPr>
+                </a:tc>
+                <a:tc>
+                  <a:txBody>
+                    <a:bodyPr/>
+                    <a:lstStyle/>
+                    <a:p>
+                      <a:pPr indent="0" marL="0">
+                        <a:buNone/>
+                      </a:pPr>
+                      <a:r>
+                        <a:rPr lang="en-US" sz="1080" dirty="0">
+                          <a:solidFill>
+                            <a:srgbClr val="CBD5E1"/>
+                          </a:solidFill>
+                          <a:latin typeface="Segoe UI" pitchFamily="34" charset="0"/>
+                          <a:ea typeface="Segoe UI" pitchFamily="34" charset="-122"/>
+                          <a:cs typeface="Segoe UI" pitchFamily="34" charset="-120"/>
+                        </a:rPr>
+                        <a:t>Qlik Sense, Tableau, SQL, Alteryx</a:t>
+                      </a:r>
+                      <a:endParaRPr lang="en-US" sz="1080" dirty="0">
+                        <a:latin typeface="Segoe UI" charset="0"/>
+                        <a:ea typeface="Segoe UI" charset="0"/>
+                        <a:cs typeface="Segoe UI" charset="0"/>
+                      </a:endParaRPr>
+                    </a:p>
+                  </a:txBody>
+                  <a:tcPr marL="64008" marR="64008" marT="64008" marB="64008" anchor="ctr">
+                    <a:lnL w="6350" cap="flat" cmpd="sng" algn="ctr">
+                      <a:solidFill>
+                        <a:srgbClr val="24365A"/>
+                      </a:solidFill>
+                      <a:prstDash val="solid"/>
+                      <a:round/>
+                      <a:headEnd type="none" w="med" len="med"/>
+                      <a:tailEnd type="none" w="med" len="med"/>
+                    </a:lnL>
+                    <a:lnR w="6350" cap="flat" cmpd="sng" algn="ctr">
+                      <a:solidFill>
+                        <a:srgbClr val="24365A"/>
+                      </a:solidFill>
+                      <a:prstDash val="solid"/>
+                      <a:round/>
+                      <a:headEnd type="none" w="med" len="med"/>
+                      <a:tailEnd type="none" w="med" len="med"/>
+                    </a:lnR>
+                    <a:lnT w="6350" cap="flat" cmpd="sng" algn="ctr">
+                      <a:solidFill>
+                        <a:srgbClr val="24365A"/>
+                      </a:solidFill>
+                      <a:prstDash val="solid"/>
+                      <a:round/>
+                      <a:headEnd type="none" w="med" len="med"/>
+                      <a:tailEnd type="none" w="med" len="med"/>
+                    </a:lnT>
+                    <a:lnB w="6350" cap="flat" cmpd="sng" algn="ctr">
+                      <a:solidFill>
+                        <a:srgbClr val="24365A"/>
+                      </a:solidFill>
+                      <a:prstDash val="solid"/>
+                      <a:round/>
+                      <a:headEnd type="none" w="med" len="med"/>
+                      <a:tailEnd type="none" w="med" len="med"/>
+                    </a:lnB>
+                    <a:solidFill>
+                      <a:srgbClr val="0D1420"/>
+                    </a:solidFill>
+                  </a:tcPr>
+                </a:tc>
+                <a:tc>
+                  <a:txBody>
+                    <a:bodyPr/>
+                    <a:lstStyle/>
+                    <a:p>
+                      <a:pPr indent="0" marL="0">
+                        <a:buNone/>
+                      </a:pPr>
+                      <a:r>
+                        <a:rPr lang="en-US" sz="1080" dirty="0">
+                          <a:solidFill>
+                            <a:srgbClr val="CBD5E1"/>
+                          </a:solidFill>
+                          <a:latin typeface="Segoe UI" pitchFamily="34" charset="0"/>
+                          <a:ea typeface="Segoe UI" pitchFamily="34" charset="-122"/>
+                          <a:cs typeface="Segoe UI" pitchFamily="34" charset="-120"/>
+                        </a:rPr>
+                        <a:t>Definitions registry</a:t>
+                      </a:r>
+                      <a:endParaRPr lang="en-US" sz="1080" dirty="0">
+                        <a:latin typeface="Segoe UI" charset="0"/>
+                        <a:ea typeface="Segoe UI" charset="0"/>
+                        <a:cs typeface="Segoe UI" charset="0"/>
+                      </a:endParaRPr>
+                    </a:p>
+                  </a:txBody>
+                  <a:tcPr marL="64008" marR="64008" marT="64008" marB="64008" anchor="ctr">
+                    <a:lnL w="6350" cap="flat" cmpd="sng" algn="ctr">
+                      <a:solidFill>
+                        <a:srgbClr val="24365A"/>
+                      </a:solidFill>
+                      <a:prstDash val="solid"/>
+                      <a:round/>
+                      <a:headEnd type="none" w="med" len="med"/>
+                      <a:tailEnd type="none" w="med" len="med"/>
+                    </a:lnL>
+                    <a:lnR w="6350" cap="flat" cmpd="sng" algn="ctr">
+                      <a:solidFill>
+                        <a:srgbClr val="24365A"/>
+                      </a:solidFill>
+                      <a:prstDash val="solid"/>
+                      <a:round/>
+                      <a:headEnd type="none" w="med" len="med"/>
+                      <a:tailEnd type="none" w="med" len="med"/>
+                    </a:lnR>
+                    <a:lnT w="6350" cap="flat" cmpd="sng" algn="ctr">
+                      <a:solidFill>
+                        <a:srgbClr val="24365A"/>
+                      </a:solidFill>
+                      <a:prstDash val="solid"/>
+                      <a:round/>
+                      <a:headEnd type="none" w="med" len="med"/>
+                      <a:tailEnd type="none" w="med" len="med"/>
+                    </a:lnT>
+                    <a:lnB w="6350" cap="flat" cmpd="sng" algn="ctr">
+                      <a:solidFill>
+                        <a:srgbClr val="24365A"/>
+                      </a:solidFill>
+                      <a:prstDash val="solid"/>
+                      <a:round/>
+                      <a:headEnd type="none" w="med" len="med"/>
+                      <a:tailEnd type="none" w="med" len="med"/>
+                    </a:lnB>
+                    <a:solidFill>
+                      <a:srgbClr val="0D1420"/>
+                    </a:solidFill>
+                  </a:tcPr>
+                </a:tc>
+              </a:tr>
+              <a:tr h="402336">
+                <a:tc>
+                  <a:txBody>
+                    <a:bodyPr/>
+                    <a:lstStyle/>
+                    <a:p>
+                      <a:pPr indent="0" marL="0">
+                        <a:buNone/>
+                      </a:pPr>
+                      <a:r>
+                        <a:rPr lang="en-US" sz="1080" dirty="0">
+                          <a:solidFill>
+                            <a:srgbClr val="CBD5E1"/>
+                          </a:solidFill>
+                          <a:latin typeface="Segoe UI" pitchFamily="34" charset="0"/>
+                          <a:ea typeface="Segoe UI" pitchFamily="34" charset="-122"/>
+                          <a:cs typeface="Segoe UI" pitchFamily="34" charset="-120"/>
+                        </a:rPr>
+                        <a:t>AI automation</a:t>
+                      </a:r>
+                      <a:endParaRPr lang="en-US" sz="1080" dirty="0">
+                        <a:latin typeface="Segoe UI" charset="0"/>
+                        <a:ea typeface="Segoe UI" charset="0"/>
+                        <a:cs typeface="Segoe UI" charset="0"/>
+                      </a:endParaRPr>
+                    </a:p>
+                  </a:txBody>
+                  <a:tcPr marL="64008" marR="64008" marT="64008" marB="64008" anchor="ctr">
+                    <a:lnL w="6350" cap="flat" cmpd="sng" algn="ctr">
+                      <a:solidFill>
+                        <a:srgbClr val="24365A"/>
+                      </a:solidFill>
+                      <a:prstDash val="solid"/>
+                      <a:round/>
+                      <a:headEnd type="none" w="med" len="med"/>
+                      <a:tailEnd type="none" w="med" len="med"/>
+                    </a:lnL>
+                    <a:lnR w="6350" cap="flat" cmpd="sng" algn="ctr">
+                      <a:solidFill>
+                        <a:srgbClr val="24365A"/>
+                      </a:solidFill>
+                      <a:prstDash val="solid"/>
+                      <a:round/>
+                      <a:headEnd type="none" w="med" len="med"/>
+                      <a:tailEnd type="none" w="med" len="med"/>
+                    </a:lnR>
+                    <a:lnT w="6350" cap="flat" cmpd="sng" algn="ctr">
+                      <a:solidFill>
+                        <a:srgbClr val="24365A"/>
+                      </a:solidFill>
+                      <a:prstDash val="solid"/>
+                      <a:round/>
+                      <a:headEnd type="none" w="med" len="med"/>
+                      <a:tailEnd type="none" w="med" len="med"/>
+                    </a:lnT>
+                    <a:lnB w="6350" cap="flat" cmpd="sng" algn="ctr">
+                      <a:solidFill>
+                        <a:srgbClr val="24365A"/>
+                      </a:solidFill>
+                      <a:prstDash val="solid"/>
+                      <a:round/>
+                      <a:headEnd type="none" w="med" len="med"/>
+                      <a:tailEnd type="none" w="med" len="med"/>
+                    </a:lnB>
+                    <a:solidFill>
+                      <a:srgbClr val="101A2D"/>
+                    </a:solidFill>
+                  </a:tcPr>
+                </a:tc>
+                <a:tc>
+                  <a:txBody>
+                    <a:bodyPr/>
+                    <a:lstStyle/>
+                    <a:p>
+                      <a:pPr indent="0" marL="0">
+                        <a:buNone/>
+                      </a:pPr>
+                      <a:r>
+                        <a:rPr lang="en-US" sz="1080" dirty="0">
+                          <a:solidFill>
+                            <a:srgbClr val="CBD5E1"/>
+                          </a:solidFill>
+                          <a:latin typeface="Segoe UI" pitchFamily="34" charset="0"/>
+                          <a:ea typeface="Segoe UI" pitchFamily="34" charset="-122"/>
+                          <a:cs typeface="Segoe UI" pitchFamily="34" charset="-120"/>
+                        </a:rPr>
+                        <a:t>Agents and document workflows</a:t>
+                      </a:r>
+                      <a:endParaRPr lang="en-US" sz="1080" dirty="0">
+                        <a:latin typeface="Segoe UI" charset="0"/>
+                        <a:ea typeface="Segoe UI" charset="0"/>
+                        <a:cs typeface="Segoe UI" charset="0"/>
+                      </a:endParaRPr>
+                    </a:p>
+                  </a:txBody>
+                  <a:tcPr marL="64008" marR="64008" marT="64008" marB="64008" anchor="ctr">
+                    <a:lnL w="6350" cap="flat" cmpd="sng" algn="ctr">
+                      <a:solidFill>
+                        <a:srgbClr val="24365A"/>
+                      </a:solidFill>
+                      <a:prstDash val="solid"/>
+                      <a:round/>
+                      <a:headEnd type="none" w="med" len="med"/>
+                      <a:tailEnd type="none" w="med" len="med"/>
+                    </a:lnL>
+                    <a:lnR w="6350" cap="flat" cmpd="sng" algn="ctr">
+                      <a:solidFill>
+                        <a:srgbClr val="24365A"/>
+                      </a:solidFill>
+                      <a:prstDash val="solid"/>
+                      <a:round/>
+                      <a:headEnd type="none" w="med" len="med"/>
+                      <a:tailEnd type="none" w="med" len="med"/>
+                    </a:lnR>
+                    <a:lnT w="6350" cap="flat" cmpd="sng" algn="ctr">
+                      <a:solidFill>
+                        <a:srgbClr val="24365A"/>
+                      </a:solidFill>
+                      <a:prstDash val="solid"/>
+                      <a:round/>
+                      <a:headEnd type="none" w="med" len="med"/>
+                      <a:tailEnd type="none" w="med" len="med"/>
+                    </a:lnT>
+                    <a:lnB w="6350" cap="flat" cmpd="sng" algn="ctr">
+                      <a:solidFill>
+                        <a:srgbClr val="24365A"/>
+                      </a:solidFill>
+                      <a:prstDash val="solid"/>
+                      <a:round/>
+                      <a:headEnd type="none" w="med" len="med"/>
+                      <a:tailEnd type="none" w="med" len="med"/>
+                    </a:lnB>
+                    <a:solidFill>
+                      <a:srgbClr val="101A2D"/>
+                    </a:solidFill>
+                  </a:tcPr>
+                </a:tc>
+                <a:tc>
+                  <a:txBody>
+                    <a:bodyPr/>
+                    <a:lstStyle/>
+                    <a:p>
+                      <a:pPr indent="0" marL="0">
+                        <a:buNone/>
+                      </a:pPr>
+                      <a:r>
+                        <a:rPr lang="en-US" sz="1080" dirty="0">
+                          <a:solidFill>
+                            <a:srgbClr val="CBD5E1"/>
+                          </a:solidFill>
+                          <a:latin typeface="Segoe UI" pitchFamily="34" charset="0"/>
+                          <a:ea typeface="Segoe UI" pitchFamily="34" charset="-122"/>
+                          <a:cs typeface="Segoe UI" pitchFamily="34" charset="-120"/>
+                        </a:rPr>
+                        <a:t>Python, FastAPI, Ollama</a:t>
+                      </a:r>
+                      <a:endParaRPr lang="en-US" sz="1080" dirty="0">
+                        <a:latin typeface="Segoe UI" charset="0"/>
+                        <a:ea typeface="Segoe UI" charset="0"/>
+                        <a:cs typeface="Segoe UI" charset="0"/>
+                      </a:endParaRPr>
+                    </a:p>
+                  </a:txBody>
+                  <a:tcPr marL="64008" marR="64008" marT="64008" marB="64008" anchor="ctr">
+                    <a:lnL w="6350" cap="flat" cmpd="sng" algn="ctr">
+                      <a:solidFill>
+                        <a:srgbClr val="24365A"/>
+                      </a:solidFill>
+                      <a:prstDash val="solid"/>
+                      <a:round/>
+                      <a:headEnd type="none" w="med" len="med"/>
+                      <a:tailEnd type="none" w="med" len="med"/>
+                    </a:lnL>
+                    <a:lnR w="6350" cap="flat" cmpd="sng" algn="ctr">
+                      <a:solidFill>
+                        <a:srgbClr val="24365A"/>
+                      </a:solidFill>
+                      <a:prstDash val="solid"/>
+                      <a:round/>
+                      <a:headEnd type="none" w="med" len="med"/>
+                      <a:tailEnd type="none" w="med" len="med"/>
+                    </a:lnR>
+                    <a:lnT w="6350" cap="flat" cmpd="sng" algn="ctr">
+                      <a:solidFill>
+                        <a:srgbClr val="24365A"/>
+                      </a:solidFill>
+                      <a:prstDash val="solid"/>
+                      <a:round/>
+                      <a:headEnd type="none" w="med" len="med"/>
+                      <a:tailEnd type="none" w="med" len="med"/>
+                    </a:lnT>
+                    <a:lnB w="6350" cap="flat" cmpd="sng" algn="ctr">
+                      <a:solidFill>
+                        <a:srgbClr val="24365A"/>
+                      </a:solidFill>
+                      <a:prstDash val="solid"/>
+                      <a:round/>
+                      <a:headEnd type="none" w="med" len="med"/>
+                      <a:tailEnd type="none" w="med" len="med"/>
+                    </a:lnB>
+                    <a:solidFill>
+                      <a:srgbClr val="101A2D"/>
+                    </a:solidFill>
+                  </a:tcPr>
+                </a:tc>
+                <a:tc>
+                  <a:txBody>
+                    <a:bodyPr/>
+                    <a:lstStyle/>
+                    <a:p>
+                      <a:pPr indent="0" marL="0">
+                        <a:buNone/>
+                      </a:pPr>
+                      <a:r>
+                        <a:rPr lang="en-US" sz="1080" dirty="0">
+                          <a:solidFill>
+                            <a:srgbClr val="CBD5E1"/>
+                          </a:solidFill>
+                          <a:latin typeface="Segoe UI" pitchFamily="34" charset="0"/>
+                          <a:ea typeface="Segoe UI" pitchFamily="34" charset="-122"/>
+                          <a:cs typeface="Segoe UI" pitchFamily="34" charset="-120"/>
+                        </a:rPr>
+                        <a:t>The full local stack</a:t>
+                      </a:r>
+                      <a:endParaRPr lang="en-US" sz="1080" dirty="0">
+                        <a:latin typeface="Segoe UI" charset="0"/>
+                        <a:ea typeface="Segoe UI" charset="0"/>
+                        <a:cs typeface="Segoe UI" charset="0"/>
+                      </a:endParaRPr>
+                    </a:p>
+                  </a:txBody>
+                  <a:tcPr marL="64008" marR="64008" marT="64008" marB="64008" anchor="ctr">
+                    <a:lnL w="6350" cap="flat" cmpd="sng" algn="ctr">
+                      <a:solidFill>
+                        <a:srgbClr val="24365A"/>
+                      </a:solidFill>
+                      <a:prstDash val="solid"/>
+                      <a:round/>
+                      <a:headEnd type="none" w="med" len="med"/>
+                      <a:tailEnd type="none" w="med" len="med"/>
+                    </a:lnL>
+                    <a:lnR w="6350" cap="flat" cmpd="sng" algn="ctr">
+                      <a:solidFill>
+                        <a:srgbClr val="24365A"/>
+                      </a:solidFill>
+                      <a:prstDash val="solid"/>
+                      <a:round/>
+                      <a:headEnd type="none" w="med" len="med"/>
+                      <a:tailEnd type="none" w="med" len="med"/>
+                    </a:lnR>
+                    <a:lnT w="6350" cap="flat" cmpd="sng" algn="ctr">
+                      <a:solidFill>
+                        <a:srgbClr val="24365A"/>
+                      </a:solidFill>
+                      <a:prstDash val="solid"/>
+                      <a:round/>
+                      <a:headEnd type="none" w="med" len="med"/>
+                      <a:tailEnd type="none" w="med" len="med"/>
+                    </a:lnT>
+                    <a:lnB w="6350" cap="flat" cmpd="sng" algn="ctr">
+                      <a:solidFill>
+                        <a:srgbClr val="24365A"/>
+                      </a:solidFill>
+                      <a:prstDash val="solid"/>
+                      <a:round/>
+                      <a:headEnd type="none" w="med" len="med"/>
+                      <a:tailEnd type="none" w="med" len="med"/>
+                    </a:lnB>
+                    <a:solidFill>
+                      <a:srgbClr val="101A2D"/>
+                    </a:solidFill>
+                  </a:tcPr>
+                </a:tc>
+              </a:tr>
+              <a:tr h="402336">
+                <a:tc>
+                  <a:txBody>
+                    <a:bodyPr/>
+                    <a:lstStyle/>
+                    <a:p>
+                      <a:pPr indent="0" marL="0">
+                        <a:buNone/>
+                      </a:pPr>
+                      <a:r>
+                        <a:rPr lang="en-US" sz="1080" dirty="0">
+                          <a:solidFill>
+                            <a:srgbClr val="CBD5E1"/>
+                          </a:solidFill>
+                          <a:latin typeface="Segoe UI" pitchFamily="34" charset="0"/>
+                          <a:ea typeface="Segoe UI" pitchFamily="34" charset="-122"/>
+                          <a:cs typeface="Segoe UI" pitchFamily="34" charset="-120"/>
+                        </a:rPr>
+                        <a:t>Data engineering</a:t>
+                      </a:r>
+                      <a:endParaRPr lang="en-US" sz="1080" dirty="0">
+                        <a:latin typeface="Segoe UI" charset="0"/>
+                        <a:ea typeface="Segoe UI" charset="0"/>
+                        <a:cs typeface="Segoe UI" charset="0"/>
+                      </a:endParaRPr>
+                    </a:p>
+                  </a:txBody>
+                  <a:tcPr marL="64008" marR="64008" marT="64008" marB="64008" anchor="ctr">
+                    <a:lnL w="6350" cap="flat" cmpd="sng" algn="ctr">
+                      <a:solidFill>
+                        <a:srgbClr val="24365A"/>
+                      </a:solidFill>
+                      <a:prstDash val="solid"/>
+                      <a:round/>
+                      <a:headEnd type="none" w="med" len="med"/>
+                      <a:tailEnd type="none" w="med" len="med"/>
+                    </a:lnL>
+                    <a:lnR w="6350" cap="flat" cmpd="sng" algn="ctr">
+                      <a:solidFill>
+                        <a:srgbClr val="24365A"/>
+                      </a:solidFill>
+                      <a:prstDash val="solid"/>
+                      <a:round/>
+                      <a:headEnd type="none" w="med" len="med"/>
+                      <a:tailEnd type="none" w="med" len="med"/>
+                    </a:lnR>
+                    <a:lnT w="6350" cap="flat" cmpd="sng" algn="ctr">
+                      <a:solidFill>
+                        <a:srgbClr val="24365A"/>
+                      </a:solidFill>
+                      <a:prstDash val="solid"/>
+                      <a:round/>
+                      <a:headEnd type="none" w="med" len="med"/>
+                      <a:tailEnd type="none" w="med" len="med"/>
+                    </a:lnT>
+                    <a:lnB w="6350" cap="flat" cmpd="sng" algn="ctr">
+                      <a:solidFill>
+                        <a:srgbClr val="24365A"/>
+                      </a:solidFill>
+                      <a:prstDash val="solid"/>
+                      <a:round/>
+                      <a:headEnd type="none" w="med" len="med"/>
+                      <a:tailEnd type="none" w="med" len="med"/>
+                    </a:lnB>
+                    <a:solidFill>
+                      <a:srgbClr val="0D1420"/>
+                    </a:solidFill>
+                  </a:tcPr>
+                </a:tc>
+                <a:tc>
+                  <a:txBody>
+                    <a:bodyPr/>
+                    <a:lstStyle/>
+                    <a:p>
+                      <a:pPr indent="0" marL="0">
+                        <a:buNone/>
+                      </a:pPr>
+                      <a:r>
+                        <a:rPr lang="en-US" sz="1080" dirty="0">
+                          <a:solidFill>
+                            <a:srgbClr val="CBD5E1"/>
+                          </a:solidFill>
+                          <a:latin typeface="Segoe UI" pitchFamily="34" charset="0"/>
+                          <a:ea typeface="Segoe UI" pitchFamily="34" charset="-122"/>
+                          <a:cs typeface="Segoe UI" pitchFamily="34" charset="-120"/>
+                        </a:rPr>
+                        <a:t>ETL with built-in quality checks</a:t>
+                      </a:r>
+                      <a:endParaRPr lang="en-US" sz="1080" dirty="0">
+                        <a:latin typeface="Segoe UI" charset="0"/>
+                        <a:ea typeface="Segoe UI" charset="0"/>
+                        <a:cs typeface="Segoe UI" charset="0"/>
+                      </a:endParaRPr>
+                    </a:p>
+                  </a:txBody>
+                  <a:tcPr marL="64008" marR="64008" marT="64008" marB="64008" anchor="ctr">
+                    <a:lnL w="6350" cap="flat" cmpd="sng" algn="ctr">
+                      <a:solidFill>
+                        <a:srgbClr val="24365A"/>
+                      </a:solidFill>
+                      <a:prstDash val="solid"/>
+                      <a:round/>
+                      <a:headEnd type="none" w="med" len="med"/>
+                      <a:tailEnd type="none" w="med" len="med"/>
+                    </a:lnL>
+                    <a:lnR w="6350" cap="flat" cmpd="sng" algn="ctr">
+                      <a:solidFill>
+                        <a:srgbClr val="24365A"/>
+                      </a:solidFill>
+                      <a:prstDash val="solid"/>
+                      <a:round/>
+                      <a:headEnd type="none" w="med" len="med"/>
+                      <a:tailEnd type="none" w="med" len="med"/>
+                    </a:lnR>
+                    <a:lnT w="6350" cap="flat" cmpd="sng" algn="ctr">
+                      <a:solidFill>
+                        <a:srgbClr val="24365A"/>
+                      </a:solidFill>
+                      <a:prstDash val="solid"/>
+                      <a:round/>
+                      <a:headEnd type="none" w="med" len="med"/>
+                      <a:tailEnd type="none" w="med" len="med"/>
+                    </a:lnT>
+                    <a:lnB w="6350" cap="flat" cmpd="sng" algn="ctr">
+                      <a:solidFill>
+                        <a:srgbClr val="24365A"/>
+                      </a:solidFill>
+                      <a:prstDash val="solid"/>
+                      <a:round/>
+                      <a:headEnd type="none" w="med" len="med"/>
+                      <a:tailEnd type="none" w="med" len="med"/>
+                    </a:lnB>
+                    <a:solidFill>
+                      <a:srgbClr val="0D1420"/>
+                    </a:solidFill>
+                  </a:tcPr>
+                </a:tc>
+                <a:tc>
+                  <a:txBody>
+                    <a:bodyPr/>
+                    <a:lstStyle/>
+                    <a:p>
+                      <a:pPr indent="0" marL="0">
+                        <a:buNone/>
+                      </a:pPr>
+                      <a:r>
+                        <a:rPr lang="en-US" sz="1080" dirty="0">
+                          <a:solidFill>
+                            <a:srgbClr val="CBD5E1"/>
+                          </a:solidFill>
+                          <a:latin typeface="Segoe UI" pitchFamily="34" charset="0"/>
+                          <a:ea typeface="Segoe UI" pitchFamily="34" charset="-122"/>
+                          <a:cs typeface="Segoe UI" pitchFamily="34" charset="-120"/>
+                        </a:rPr>
+                        <a:t>Python, DuckDB, PostgreSQL</a:t>
+                      </a:r>
+                      <a:endParaRPr lang="en-US" sz="1080" dirty="0">
+                        <a:latin typeface="Segoe UI" charset="0"/>
+                        <a:ea typeface="Segoe UI" charset="0"/>
+                        <a:cs typeface="Segoe UI" charset="0"/>
+                      </a:endParaRPr>
+                    </a:p>
+                  </a:txBody>
+                  <a:tcPr marL="64008" marR="64008" marT="64008" marB="64008" anchor="ctr">
+                    <a:lnL w="6350" cap="flat" cmpd="sng" algn="ctr">
+                      <a:solidFill>
+                        <a:srgbClr val="24365A"/>
+                      </a:solidFill>
+                      <a:prstDash val="solid"/>
+                      <a:round/>
+                      <a:headEnd type="none" w="med" len="med"/>
+                      <a:tailEnd type="none" w="med" len="med"/>
+                    </a:lnL>
+                    <a:lnR w="6350" cap="flat" cmpd="sng" algn="ctr">
+                      <a:solidFill>
+                        <a:srgbClr val="24365A"/>
+                      </a:solidFill>
+                      <a:prstDash val="solid"/>
+                      <a:round/>
+                      <a:headEnd type="none" w="med" len="med"/>
+                      <a:tailEnd type="none" w="med" len="med"/>
+                    </a:lnR>
+                    <a:lnT w="6350" cap="flat" cmpd="sng" algn="ctr">
+                      <a:solidFill>
+                        <a:srgbClr val="24365A"/>
+                      </a:solidFill>
+                      <a:prstDash val="solid"/>
+                      <a:round/>
+                      <a:headEnd type="none" w="med" len="med"/>
+                      <a:tailEnd type="none" w="med" len="med"/>
+                    </a:lnT>
+                    <a:lnB w="6350" cap="flat" cmpd="sng" algn="ctr">
+                      <a:solidFill>
+                        <a:srgbClr val="24365A"/>
+                      </a:solidFill>
+                      <a:prstDash val="solid"/>
+                      <a:round/>
+                      <a:headEnd type="none" w="med" len="med"/>
+                      <a:tailEnd type="none" w="med" len="med"/>
+                    </a:lnB>
+                    <a:solidFill>
+                      <a:srgbClr val="0D1420"/>
+                    </a:solidFill>
+                  </a:tcPr>
+                </a:tc>
+                <a:tc>
+                  <a:txBody>
+                    <a:bodyPr/>
+                    <a:lstStyle/>
+                    <a:p>
+                      <a:pPr indent="0" marL="0">
+                        <a:buNone/>
+                      </a:pPr>
+                      <a:r>
+                        <a:rPr lang="en-US" sz="1080" dirty="0">
+                          <a:solidFill>
+                            <a:srgbClr val="CBD5E1"/>
+                          </a:solidFill>
+                          <a:latin typeface="Segoe UI" pitchFamily="34" charset="0"/>
+                          <a:ea typeface="Segoe UI" pitchFamily="34" charset="-122"/>
+                          <a:cs typeface="Segoe UI" pitchFamily="34" charset="-120"/>
+                        </a:rPr>
+                        <a:t>Pipelines and documentation</a:t>
+                      </a:r>
+                      <a:endParaRPr lang="en-US" sz="1080" dirty="0">
+                        <a:latin typeface="Segoe UI" charset="0"/>
+                        <a:ea typeface="Segoe UI" charset="0"/>
+                        <a:cs typeface="Segoe UI" charset="0"/>
+                      </a:endParaRPr>
+                    </a:p>
+                  </a:txBody>
+                  <a:tcPr marL="64008" marR="64008" marT="64008" marB="64008" anchor="ctr">
+                    <a:lnL w="6350" cap="flat" cmpd="sng" algn="ctr">
+                      <a:solidFill>
+                        <a:srgbClr val="24365A"/>
+                      </a:solidFill>
+                      <a:prstDash val="solid"/>
+                      <a:round/>
+                      <a:headEnd type="none" w="med" len="med"/>
+                      <a:tailEnd type="none" w="med" len="med"/>
+                    </a:lnL>
+                    <a:lnR w="6350" cap="flat" cmpd="sng" algn="ctr">
+                      <a:solidFill>
+                        <a:srgbClr val="24365A"/>
+                      </a:solidFill>
+                      <a:prstDash val="solid"/>
+                      <a:round/>
+                      <a:headEnd type="none" w="med" len="med"/>
+                      <a:tailEnd type="none" w="med" len="med"/>
+                    </a:lnR>
+                    <a:lnT w="6350" cap="flat" cmpd="sng" algn="ctr">
+                      <a:solidFill>
+                        <a:srgbClr val="24365A"/>
+                      </a:solidFill>
+                      <a:prstDash val="solid"/>
+                      <a:round/>
+                      <a:headEnd type="none" w="med" len="med"/>
+                      <a:tailEnd type="none" w="med" len="med"/>
+                    </a:lnT>
+                    <a:lnB w="6350" cap="flat" cmpd="sng" algn="ctr">
+                      <a:solidFill>
+                        <a:srgbClr val="24365A"/>
+                      </a:solidFill>
+                      <a:prstDash val="solid"/>
+                      <a:round/>
+                      <a:headEnd type="none" w="med" len="med"/>
+                      <a:tailEnd type="none" w="med" len="med"/>
+                    </a:lnB>
+                    <a:solidFill>
+                      <a:srgbClr val="0D1420"/>
+                    </a:solidFill>
+                  </a:tcPr>
+                </a:tc>
+              </a:tr>
+            </a:tbl>
+          </a:graphicData>
+        </a:graphic>
+      </p:graphicFrame>
+      <p:sp>
+        <p:nvSpPr>
+          <p:cNvPr id="7" name="Shape 4"/>
+          <p:cNvSpPr/>
+          <p:nvPr/>
+        </p:nvSpPr>
+        <p:spPr>
+          <a:xfrm>
+            <a:off x="822960" y="5961888"/>
+            <a:ext cx="10515600" cy="0"/>
+          </a:xfrm>
+          <a:prstGeom prst="line">
+            <a:avLst/>
+          </a:prstGeom>
+          <a:noFill/>
+          <a:ln w="12700">
+            <a:solidFill>
+              <a:srgbClr val="1E2D45"/>
+            </a:solidFill>
+            <a:prstDash val="solid"/>
+          </a:ln>
+        </p:spPr>
+      </p:sp>
+      <p:sp>
+        <p:nvSpPr>
+          <p:cNvPr id="8" name="Text 5"/>
+          <p:cNvSpPr/>
+          <p:nvPr/>
+        </p:nvSpPr>
+        <p:spPr>
+          <a:xfrm>
+            <a:off x="822960" y="6053328"/>
+            <a:ext cx="9692640" cy="457200"/>
+          </a:xfrm>
+          <a:prstGeom prst="rect">
+            <a:avLst/>
+          </a:prstGeom>
+          <a:noFill/>
+          <a:ln/>
+        </p:spPr>
+        <p:txBody>
+          <a:bodyPr wrap="square" rtlCol="0" anchor="ctr"/>
+          <a:lstStyle/>
+          <a:p>
+            <a:pPr indent="0" marL="0">
+              <a:buNone/>
+            </a:pPr>
+            <a:r>
+              <a:rPr lang="en-US" sz="1150" dirty="0">
+                <a:solidFill>
+                  <a:srgbClr val="64748B"/>
                 </a:solidFill>
                 <a:latin typeface="Segoe UI" pitchFamily="34" charset="0"/>
                 <a:ea typeface="Segoe UI" pitchFamily="34" charset="-122"/>
                 <a:cs typeface="Segoe UI" pitchFamily="34" charset="-120"/>
               </a:rPr>
-              <a:t>Documentation a new hire can follow</a:t>
-            </a:r>
-            <a:endParaRPr lang="en-US" sz="1600" dirty="0"/>
-          </a:p>
-          <a:p>
-            <a:pPr marL="342900" indent="-342900">
-              <a:lnSpc>
-                <a:spcPct val="115000"/>
-              </a:lnSpc>
-              <a:spcAft>
-                <a:spcPts val="1000"/>
-              </a:spcAft>
-              <a:buSzPct val="100000"/>
-              <a:buChar char="▸"/>
-            </a:pPr>
-            <a:r>
-              <a:rPr lang="en-US" sz="1600" dirty="0">
-                <a:solidFill>
-                  <a:srgbClr val="CBD5E1"/>
-                </a:solidFill>
-                <a:latin typeface="Segoe UI" pitchFamily="34" charset="0"/>
-                <a:ea typeface="Segoe UI" pitchFamily="34" charset="-122"/>
-                <a:cs typeface="Segoe UI" pitchFamily="34" charset="-120"/>
-              </a:rPr>
-              <a:t>Runbooks next to the pipelines</a:t>
-            </a:r>
-            <a:endParaRPr lang="en-US" sz="1600" dirty="0"/>
-          </a:p>
-          <a:p>
-            <a:pPr marL="342900" indent="-342900">
-              <a:lnSpc>
-                <a:spcPct val="115000"/>
-              </a:lnSpc>
-              <a:spcAft>
-                <a:spcPts val="1000"/>
-              </a:spcAft>
-              <a:buSzPct val="100000"/>
-              <a:buChar char="▸"/>
-            </a:pPr>
-            <a:r>
-              <a:rPr lang="en-US" sz="1600" dirty="0">
-                <a:solidFill>
-                  <a:srgbClr val="CBD5E1"/>
-                </a:solidFill>
-                <a:latin typeface="Segoe UI" pitchFamily="34" charset="0"/>
-                <a:ea typeface="Segoe UI" pitchFamily="34" charset="-122"/>
-                <a:cs typeface="Segoe UI" pitchFamily="34" charset="-120"/>
-              </a:rPr>
-              <a:t>Data stays where the client decides it should</a:t>
-            </a:r>
-            <a:endParaRPr lang="en-US" sz="1600" dirty="0"/>
-          </a:p>
-          <a:p>
-            <a:pPr marL="342900" indent="-342900">
-              <a:lnSpc>
-                <a:spcPct val="115000"/>
-              </a:lnSpc>
-              <a:spcAft>
-                <a:spcPts val="1000"/>
-              </a:spcAft>
-              <a:buSzPct val="100000"/>
-              <a:buChar char="▸"/>
-            </a:pPr>
-            <a:r>
-              <a:rPr lang="en-US" sz="1600" dirty="0">
-                <a:solidFill>
-                  <a:srgbClr val="CBD5E1"/>
-                </a:solidFill>
-                <a:latin typeface="Segoe UI" pitchFamily="34" charset="0"/>
-                <a:ea typeface="Segoe UI" pitchFamily="34" charset="-122"/>
-                <a:cs typeface="Segoe UI" pitchFamily="34" charset="-120"/>
-              </a:rPr>
-              <a:t>Maintenance offered, never forced</a:t>
-            </a:r>
-            <a:endParaRPr lang="en-US" sz="1600" dirty="0"/>
-          </a:p>
-        </p:txBody>
-      </p:sp>
-      <p:sp>
-        <p:nvSpPr>
-          <p:cNvPr id="7" name="Text 5"/>
-          <p:cNvSpPr/>
-          <p:nvPr/>
-        </p:nvSpPr>
-        <p:spPr>
-          <a:xfrm>
-            <a:off x="10698480" y="6355080"/>
+              <a:t>No black boxes: everything I build, you can run, read, and extend without me.</a:t>
+            </a:r>
+            <a:endParaRPr lang="en-US" sz="1150" dirty="0"/>
+          </a:p>
+        </p:txBody>
+      </p:sp>
+      <p:sp>
+        <p:nvSpPr>
+          <p:cNvPr id="9" name="Text 6"/>
+          <p:cNvSpPr/>
+          <p:nvPr/>
+        </p:nvSpPr>
+        <p:spPr>
+          <a:xfrm>
+            <a:off x="10698480" y="6382512"/>
             <a:ext cx="1188720" cy="365760"/>
           </a:xfrm>
           <a:prstGeom prst="rect">
@@ -3223,7 +9925,7 @@
                 <a:ea typeface="Consolas" pitchFamily="34" charset="-122"/>
                 <a:cs typeface="Consolas" pitchFamily="34" charset="-120"/>
               </a:rPr>
-              <a:t>6 / 8</a:t>
+              <a:t>6 / 14</a:t>
             </a:r>
             <a:endParaRPr lang="en-US" sz="1000" dirty="0"/>
           </a:p>
@@ -3334,7 +10036,7 @@
                 <a:ea typeface="Consolas" pitchFamily="34" charset="-122"/>
                 <a:cs typeface="Consolas" pitchFamily="34" charset="-120"/>
               </a:rPr>
-              <a:t>WHY IT WORKS</a:t>
+              <a:t>SCOPING</a:t>
             </a:r>
             <a:endParaRPr lang="en-US" sz="1200" dirty="0"/>
           </a:p>
@@ -3348,8 +10050,8 @@
         </p:nvSpPr>
         <p:spPr>
           <a:xfrm>
-            <a:off x="822960" y="960120"/>
-            <a:ext cx="10515600" cy="868680"/>
+            <a:off x="822960" y="914400"/>
+            <a:ext cx="10561320" cy="868680"/>
           </a:xfrm>
           <a:prstGeom prst="rect">
             <a:avLst/>
@@ -3365,7 +10067,7 @@
               <a:buNone/>
             </a:pPr>
             <a:r>
-              <a:rPr lang="en-US" sz="3000" b="1" dirty="0">
+              <a:rPr lang="en-US" sz="2700" b="1" dirty="0">
                 <a:solidFill>
                   <a:srgbClr val="FFFFFF"/>
                 </a:solidFill>
@@ -3373,9 +10075,9 @@
                 <a:ea typeface="Segoe UI" pitchFamily="34" charset="-122"/>
                 <a:cs typeface="Segoe UI" pitchFamily="34" charset="-120"/>
               </a:rPr>
-              <a:t>The same discipline as my own company</a:t>
-            </a:r>
-            <a:endParaRPr lang="en-US" sz="3000" dirty="0"/>
+              <a:t>Week one decides the project</a:t>
+            </a:r>
+            <a:endParaRPr lang="en-US" sz="2700" dirty="0"/>
           </a:p>
         </p:txBody>
       </p:sp>
@@ -3387,7 +10089,7 @@
         </p:nvSpPr>
         <p:spPr>
           <a:xfrm>
-            <a:off x="868680" y="2057400"/>
+            <a:off x="868680" y="2011680"/>
             <a:ext cx="10424160" cy="3566160"/>
           </a:xfrm>
           <a:prstGeom prst="rect">
@@ -3402,10 +10104,10 @@
           <a:p>
             <a:pPr marL="342900" indent="-342900">
               <a:lnSpc>
-                <a:spcPct val="115000"/>
+                <a:spcPct val="112000"/>
               </a:lnSpc>
               <a:spcAft>
-                <a:spcPts val="1000"/>
+                <a:spcPts val="900"/>
               </a:spcAft>
               <a:buSzPct val="100000"/>
               <a:buChar char="▸"/>
@@ -3419,17 +10121,17 @@
                 <a:ea typeface="Segoe UI" pitchFamily="34" charset="-122"/>
                 <a:cs typeface="Segoe UI" pitchFamily="34" charset="-120"/>
               </a:rPr>
-              <a:t>Quality gates: golden path, zero dead flows, evidence required</a:t>
+              <a:t>The decision the client will make with the data gets written down first - analysis without a decision is trivia.</a:t>
             </a:r>
             <a:endParaRPr lang="en-US" sz="1600" dirty="0"/>
           </a:p>
           <a:p>
             <a:pPr marL="342900" indent="-342900">
               <a:lnSpc>
-                <a:spcPct val="115000"/>
+                <a:spcPct val="112000"/>
               </a:lnSpc>
               <a:spcAft>
-                <a:spcPts val="1000"/>
+                <a:spcPts val="900"/>
               </a:spcAft>
               <a:buSzPct val="100000"/>
               <a:buChar char="▸"/>
@@ -3443,17 +10145,17 @@
                 <a:ea typeface="Segoe UI" pitchFamily="34" charset="-122"/>
                 <a:cs typeface="Segoe UI" pitchFamily="34" charset="-120"/>
               </a:rPr>
-              <a:t>The stack that ships 30+ apps also ships client work</a:t>
+              <a:t>Success criteria are defined as measurable checks: row counts, schema, sanity ranges - not vibes.</a:t>
             </a:r>
             <a:endParaRPr lang="en-US" sz="1600" dirty="0"/>
           </a:p>
           <a:p>
             <a:pPr marL="342900" indent="-342900">
               <a:lnSpc>
-                <a:spcPct val="115000"/>
+                <a:spcPct val="112000"/>
               </a:lnSpc>
               <a:spcAft>
-                <a:spcPts val="1000"/>
+                <a:spcPts val="900"/>
               </a:spcAft>
               <a:buSzPct val="100000"/>
               <a:buChar char="▸"/>
@@ -3467,17 +10169,17 @@
                 <a:ea typeface="Segoe UI" pitchFamily="34" charset="-122"/>
                 <a:cs typeface="Segoe UI" pitchFamily="34" charset="-120"/>
               </a:rPr>
-              <a:t>Enterprise BI background: four countries, one datalake</a:t>
+              <a:t>Every source gets profiled: quirks, cadence, edge cases, and the polite way to collect from it.</a:t>
             </a:r>
             <a:endParaRPr lang="en-US" sz="1600" dirty="0"/>
           </a:p>
           <a:p>
             <a:pPr marL="342900" indent="-342900">
               <a:lnSpc>
-                <a:spcPct val="115000"/>
+                <a:spcPct val="112000"/>
               </a:lnSpc>
               <a:spcAft>
-                <a:spcPts val="1000"/>
+                <a:spcPts val="900"/>
               </a:spcAft>
               <a:buSzPct val="100000"/>
               <a:buChar char="▸"/>
@@ -3491,7 +10193,7 @@
                 <a:ea typeface="Segoe UI" pitchFamily="34" charset="-122"/>
                 <a:cs typeface="Segoe UI" pitchFamily="34" charset="-120"/>
               </a:rPr>
-              <a:t>Available worldwide via Upwork</a:t>
+              <a:t>If scope is fuzzy, the first deliverable is clarity - a fixed written scope, not a running bill.</a:t>
             </a:r>
             <a:endParaRPr lang="en-US" sz="1600" dirty="0"/>
           </a:p>
@@ -3499,13 +10201,75 @@
       </p:sp>
       <p:sp>
         <p:nvSpPr>
-          <p:cNvPr id="7" name="Text 5"/>
-          <p:cNvSpPr/>
-          <p:nvPr/>
-        </p:nvSpPr>
-        <p:spPr>
-          <a:xfrm>
-            <a:off x="10698480" y="6355080"/>
+          <p:cNvPr id="7" name="Shape 5"/>
+          <p:cNvSpPr/>
+          <p:nvPr/>
+        </p:nvSpPr>
+        <p:spPr>
+          <a:xfrm>
+            <a:off x="822960" y="5961888"/>
+            <a:ext cx="10515600" cy="0"/>
+          </a:xfrm>
+          <a:prstGeom prst="line">
+            <a:avLst/>
+          </a:prstGeom>
+          <a:noFill/>
+          <a:ln w="12700">
+            <a:solidFill>
+              <a:srgbClr val="1E2D45"/>
+            </a:solidFill>
+            <a:prstDash val="solid"/>
+          </a:ln>
+        </p:spPr>
+      </p:sp>
+      <p:sp>
+        <p:nvSpPr>
+          <p:cNvPr id="8" name="Text 6"/>
+          <p:cNvSpPr/>
+          <p:nvPr/>
+        </p:nvSpPr>
+        <p:spPr>
+          <a:xfrm>
+            <a:off x="822960" y="6053328"/>
+            <a:ext cx="9692640" cy="457200"/>
+          </a:xfrm>
+          <a:prstGeom prst="rect">
+            <a:avLst/>
+          </a:prstGeom>
+          <a:noFill/>
+          <a:ln/>
+        </p:spPr>
+        <p:txBody>
+          <a:bodyPr wrap="square" rtlCol="0" anchor="ctr"/>
+          <a:lstStyle/>
+          <a:p>
+            <a:pPr indent="0" marL="0">
+              <a:buNone/>
+            </a:pPr>
+            <a:r>
+              <a:rPr lang="en-US" sz="1150" dirty="0">
+                <a:solidFill>
+                  <a:srgbClr val="64748B"/>
+                </a:solidFill>
+                <a:latin typeface="Segoe UI" pitchFamily="34" charset="0"/>
+                <a:ea typeface="Segoe UI" pitchFamily="34" charset="-122"/>
+                <a:cs typeface="Segoe UI" pitchFamily="34" charset="-120"/>
+              </a:rPr>
+              <a:t>The most expensive bug in freelancing is building the right answer to the wrong question.</a:t>
+            </a:r>
+            <a:endParaRPr lang="en-US" sz="1150" dirty="0"/>
+          </a:p>
+        </p:txBody>
+      </p:sp>
+      <p:sp>
+        <p:nvSpPr>
+          <p:cNvPr id="9" name="Text 7"/>
+          <p:cNvSpPr/>
+          <p:nvPr/>
+        </p:nvSpPr>
+        <p:spPr>
+          <a:xfrm>
+            <a:off x="10698480" y="6382512"/>
             <a:ext cx="1188720" cy="365760"/>
           </a:xfrm>
           <a:prstGeom prst="rect">
@@ -3530,7 +10294,7 @@
                 <a:ea typeface="Consolas" pitchFamily="34" charset="-122"/>
                 <a:cs typeface="Consolas" pitchFamily="34" charset="-120"/>
               </a:rPr>
-              <a:t>7 / 8</a:t>
+              <a:t>7 / 14</a:t>
             </a:r>
             <a:endParaRPr lang="en-US" sz="1000" dirty="0"/>
           </a:p>
@@ -3616,8 +10380,8 @@
         </p:nvSpPr>
         <p:spPr>
           <a:xfrm>
-            <a:off x="822960" y="1554480"/>
-            <a:ext cx="10515600" cy="457200"/>
+            <a:off x="822960" y="502920"/>
+            <a:ext cx="10515600" cy="365760"/>
           </a:xfrm>
           <a:prstGeom prst="rect">
             <a:avLst/>
@@ -3633,7 +10397,7 @@
               <a:buNone/>
             </a:pPr>
             <a:r>
-              <a:rPr lang="en-US" sz="1400" spc="400" kern="0" dirty="0">
+              <a:rPr lang="en-US" sz="1200" spc="300" kern="0" dirty="0">
                 <a:solidFill>
                   <a:srgbClr val="06B6D4"/>
                 </a:solidFill>
@@ -3641,9 +10405,9 @@
                 <a:ea typeface="Consolas" pitchFamily="34" charset="-122"/>
                 <a:cs typeface="Consolas" pitchFamily="34" charset="-120"/>
               </a:rPr>
-              <a:t>TAKEAWAY</a:t>
-            </a:r>
-            <a:endParaRPr lang="en-US" sz="1400" dirty="0"/>
+              <a:t>FAILURE MODES</a:t>
+            </a:r>
+            <a:endParaRPr lang="en-US" sz="1200" dirty="0"/>
           </a:p>
         </p:txBody>
       </p:sp>
@@ -3655,8 +10419,8 @@
         </p:nvSpPr>
         <p:spPr>
           <a:xfrm>
-            <a:off x="822960" y="2286000"/>
-            <a:ext cx="10515600" cy="1737360"/>
+            <a:off x="822960" y="914400"/>
+            <a:ext cx="10561320" cy="868680"/>
           </a:xfrm>
           <a:prstGeom prst="rect">
             <a:avLst/>
@@ -3672,7 +10436,7 @@
               <a:buNone/>
             </a:pPr>
             <a:r>
-              <a:rPr lang="en-US" sz="4400" b="1" dirty="0">
+              <a:rPr lang="en-US" sz="2700" b="1" dirty="0">
                 <a:solidFill>
                   <a:srgbClr val="FFFFFF"/>
                 </a:solidFill>
@@ -3680,22 +10444,61 @@
                 <a:ea typeface="Segoe UI" pitchFamily="34" charset="-122"/>
                 <a:cs typeface="Segoe UI" pitchFamily="34" charset="-120"/>
               </a:rPr>
-              <a:t>Hire discipline, not tools</a:t>
-            </a:r>
-            <a:endParaRPr lang="en-US" sz="4400" dirty="0"/>
-          </a:p>
-        </p:txBody>
-      </p:sp>
-      <p:sp>
-        <p:nvSpPr>
-          <p:cNvPr id="6" name="Text 4"/>
-          <p:cNvSpPr/>
-          <p:nvPr/>
-        </p:nvSpPr>
-        <p:spPr>
-          <a:xfrm>
-            <a:off x="822960" y="4206240"/>
-            <a:ext cx="10515600" cy="914400"/>
+              <a:t>Where scraping projects actually fail</a:t>
+            </a:r>
+            <a:endParaRPr lang="en-US" sz="2700" dirty="0"/>
+          </a:p>
+        </p:txBody>
+      </p:sp>
+      <p:graphicFrame>
+        <p:nvGraphicFramePr>
+          <p:cNvPr id="6" name="Chart 0" descr=""/>
+          <p:cNvGraphicFramePr/>
+          <p:nvPr/>
+        </p:nvGraphicFramePr>
+        <p:xfrm>
+          <a:off x="822960" y="1874520"/>
+          <a:ext cx="10515600" cy="3337560"/>
+        </p:xfrm>
+        <a:graphic xmlns:a="http://schemas.openxmlformats.org/drawingml/2006/main">
+          <a:graphicData uri="http://schemas.openxmlformats.org/drawingml/2006/chart">
+            <c:chart xmlns:c="http://schemas.openxmlformats.org/drawingml/2006/chart" r:id="rId1"/>
+          </a:graphicData>
+        </a:graphic>
+      </p:graphicFrame>
+      <p:sp>
+        <p:nvSpPr>
+          <p:cNvPr id="7" name="Shape 4"/>
+          <p:cNvSpPr/>
+          <p:nvPr/>
+        </p:nvSpPr>
+        <p:spPr>
+          <a:xfrm>
+            <a:off x="822960" y="5413248"/>
+            <a:ext cx="10515600" cy="0"/>
+          </a:xfrm>
+          <a:prstGeom prst="line">
+            <a:avLst/>
+          </a:prstGeom>
+          <a:noFill/>
+          <a:ln w="12700">
+            <a:solidFill>
+              <a:srgbClr val="1E2D45"/>
+            </a:solidFill>
+            <a:prstDash val="solid"/>
+          </a:ln>
+        </p:spPr>
+      </p:sp>
+      <p:sp>
+        <p:nvSpPr>
+          <p:cNvPr id="8" name="Text 5"/>
+          <p:cNvSpPr/>
+          <p:nvPr/>
+        </p:nvSpPr>
+        <p:spPr>
+          <a:xfrm>
+            <a:off x="822960" y="5504688"/>
+            <a:ext cx="10424160" cy="411480"/>
           </a:xfrm>
           <a:prstGeom prst="rect">
             <a:avLst/>
@@ -3711,29 +10514,91 @@
               <a:buNone/>
             </a:pPr>
             <a:r>
-              <a:rPr lang="en-US" sz="1600" dirty="0">
-                <a:solidFill>
-                  <a:srgbClr val="94A3B8"/>
+              <a:rPr lang="en-US" sz="1300" i="1" dirty="0">
+                <a:solidFill>
+                  <a:srgbClr val="06B6D4"/>
                 </a:solidFill>
                 <a:latin typeface="Segoe UI" pitchFamily="34" charset="0"/>
                 <a:ea typeface="Segoe UI" pitchFamily="34" charset="-122"/>
                 <a:cs typeface="Segoe UI" pitchFamily="34" charset="-120"/>
               </a:rPr>
-              <a:t>Tools expire. Validation, honesty, and handover compound. · rezalianvatiady.github.io</a:t>
-            </a:r>
-            <a:endParaRPr lang="en-US" sz="1600" dirty="0"/>
-          </a:p>
-        </p:txBody>
-      </p:sp>
-      <p:sp>
-        <p:nvSpPr>
-          <p:cNvPr id="7" name="Text 5"/>
-          <p:cNvSpPr/>
-          <p:nvPr/>
-        </p:nvSpPr>
-        <p:spPr>
-          <a:xfrm>
-            <a:off x="10698480" y="6355080"/>
+              <a:t>→  The deadliest failure is silent: a scraper that exits zero and returns nothing - which is why every run validates row counts, schema, and sanity ranges.</a:t>
+            </a:r>
+            <a:endParaRPr lang="en-US" sz="1300" dirty="0"/>
+          </a:p>
+        </p:txBody>
+      </p:sp>
+      <p:sp>
+        <p:nvSpPr>
+          <p:cNvPr id="9" name="Shape 6"/>
+          <p:cNvSpPr/>
+          <p:nvPr/>
+        </p:nvSpPr>
+        <p:spPr>
+          <a:xfrm>
+            <a:off x="822960" y="5961888"/>
+            <a:ext cx="10515600" cy="0"/>
+          </a:xfrm>
+          <a:prstGeom prst="line">
+            <a:avLst/>
+          </a:prstGeom>
+          <a:noFill/>
+          <a:ln w="12700">
+            <a:solidFill>
+              <a:srgbClr val="1E2D45"/>
+            </a:solidFill>
+            <a:prstDash val="solid"/>
+          </a:ln>
+        </p:spPr>
+      </p:sp>
+      <p:sp>
+        <p:nvSpPr>
+          <p:cNvPr id="10" name="Text 7"/>
+          <p:cNvSpPr/>
+          <p:nvPr/>
+        </p:nvSpPr>
+        <p:spPr>
+          <a:xfrm>
+            <a:off x="822960" y="6053328"/>
+            <a:ext cx="9692640" cy="457200"/>
+          </a:xfrm>
+          <a:prstGeom prst="rect">
+            <a:avLst/>
+          </a:prstGeom>
+          <a:noFill/>
+          <a:ln/>
+        </p:spPr>
+        <p:txBody>
+          <a:bodyPr wrap="square" rtlCol="0" anchor="ctr"/>
+          <a:lstStyle/>
+          <a:p>
+            <a:pPr indent="0" marL="0">
+              <a:buNone/>
+            </a:pPr>
+            <a:r>
+              <a:rPr lang="en-US" sz="1150" dirty="0">
+                <a:solidFill>
+                  <a:srgbClr val="64748B"/>
+                </a:solidFill>
+                <a:latin typeface="Segoe UI" pitchFamily="34" charset="0"/>
+                <a:ea typeface="Segoe UI" pitchFamily="34" charset="-122"/>
+                <a:cs typeface="Segoe UI" pitchFamily="34" charset="-120"/>
+              </a:rPr>
+              <a:t>Illustrative incident mix consistent with the Web Scraping Toolkit design notes: tolerant extraction, fallbacks, and warnings over shrugs.</a:t>
+            </a:r>
+            <a:endParaRPr lang="en-US" sz="1150" dirty="0"/>
+          </a:p>
+        </p:txBody>
+      </p:sp>
+      <p:sp>
+        <p:nvSpPr>
+          <p:cNvPr id="11" name="Text 8"/>
+          <p:cNvSpPr/>
+          <p:nvPr/>
+        </p:nvSpPr>
+        <p:spPr>
+          <a:xfrm>
+            <a:off x="10698480" y="6382512"/>
             <a:ext cx="1188720" cy="365760"/>
           </a:xfrm>
           <a:prstGeom prst="rect">
@@ -3758,7 +10623,376 @@
                 <a:ea typeface="Consolas" pitchFamily="34" charset="-122"/>
                 <a:cs typeface="Consolas" pitchFamily="34" charset="-120"/>
               </a:rPr>
-              <a:t>8 / 8</a:t>
+              <a:t>8 / 14</a:t>
+            </a:r>
+            <a:endParaRPr lang="en-US" sz="1000" dirty="0"/>
+          </a:p>
+        </p:txBody>
+      </p:sp>
+    </p:spTree>
+  </p:cSld>
+  <p:clrMapOvr>
+    <a:masterClrMapping/>
+  </p:clrMapOvr>
+</p:sld>
+</file>
+
+<file path=ppt/slides/slide9.xml><?xml version="1.0" encoding="utf-8"?>
+<p:sld xmlns:a="http://schemas.openxmlformats.org/drawingml/2006/main" xmlns:r="http://schemas.openxmlformats.org/officeDocument/2006/relationships" xmlns:p="http://schemas.openxmlformats.org/presentationml/2006/main">
+  <p:cSld name="Slide 9">
+    <p:bg>
+      <p:bgPr>
+        <a:solidFill>
+          <a:srgbClr val="0A0C12"/>
+        </a:solidFill>
+      </p:bgPr>
+    </p:bg>
+    <p:spTree>
+      <p:nvGrpSpPr>
+        <p:cNvPr id="1" name=""/>
+        <p:cNvGrpSpPr/>
+        <p:nvPr/>
+      </p:nvGrpSpPr>
+      <p:grpSpPr>
+        <a:xfrm>
+          <a:off x="0" y="0"/>
+          <a:ext cx="0" cy="0"/>
+          <a:chOff x="0" y="0"/>
+          <a:chExt cx="0" cy="0"/>
+        </a:xfrm>
+      </p:grpSpPr>
+      <p:sp>
+        <p:nvSpPr>
+          <p:cNvPr id="2" name="Shape 0"/>
+          <p:cNvSpPr/>
+          <p:nvPr/>
+        </p:nvSpPr>
+        <p:spPr>
+          <a:xfrm>
+            <a:off x="0" y="0"/>
+            <a:ext cx="7680960" cy="64008"/>
+          </a:xfrm>
+          <a:prstGeom prst="rect">
+            <a:avLst/>
+          </a:prstGeom>
+          <a:solidFill>
+            <a:srgbClr val="3B82F6"/>
+          </a:solidFill>
+          <a:ln/>
+        </p:spPr>
+      </p:sp>
+      <p:sp>
+        <p:nvSpPr>
+          <p:cNvPr id="3" name="Shape 1"/>
+          <p:cNvSpPr/>
+          <p:nvPr/>
+        </p:nvSpPr>
+        <p:spPr>
+          <a:xfrm>
+            <a:off x="7680960" y="0"/>
+            <a:ext cx="4510735" cy="64008"/>
+          </a:xfrm>
+          <a:prstGeom prst="rect">
+            <a:avLst/>
+          </a:prstGeom>
+          <a:solidFill>
+            <a:srgbClr val="06B6D4"/>
+          </a:solidFill>
+          <a:ln/>
+        </p:spPr>
+      </p:sp>
+      <p:sp>
+        <p:nvSpPr>
+          <p:cNvPr id="4" name="Text 2"/>
+          <p:cNvSpPr/>
+          <p:nvPr/>
+        </p:nvSpPr>
+        <p:spPr>
+          <a:xfrm>
+            <a:off x="822960" y="502920"/>
+            <a:ext cx="10515600" cy="365760"/>
+          </a:xfrm>
+          <a:prstGeom prst="rect">
+            <a:avLst/>
+          </a:prstGeom>
+          <a:noFill/>
+          <a:ln/>
+        </p:spPr>
+        <p:txBody>
+          <a:bodyPr wrap="square" rtlCol="0" anchor="ctr"/>
+          <a:lstStyle/>
+          <a:p>
+            <a:pPr indent="0" marL="0">
+              <a:buNone/>
+            </a:pPr>
+            <a:r>
+              <a:rPr lang="en-US" sz="1200" spc="300" kern="0" dirty="0">
+                <a:solidFill>
+                  <a:srgbClr val="06B6D4"/>
+                </a:solidFill>
+                <a:latin typeface="Consolas" pitchFamily="34" charset="0"/>
+                <a:ea typeface="Consolas" pitchFamily="34" charset="-122"/>
+                <a:cs typeface="Consolas" pitchFamily="34" charset="-120"/>
+              </a:rPr>
+              <a:t>VALIDATION</a:t>
+            </a:r>
+            <a:endParaRPr lang="en-US" sz="1200" dirty="0"/>
+          </a:p>
+        </p:txBody>
+      </p:sp>
+      <p:sp>
+        <p:nvSpPr>
+          <p:cNvPr id="5" name="Text 3"/>
+          <p:cNvSpPr/>
+          <p:nvPr/>
+        </p:nvSpPr>
+        <p:spPr>
+          <a:xfrm>
+            <a:off x="822960" y="914400"/>
+            <a:ext cx="10561320" cy="868680"/>
+          </a:xfrm>
+          <a:prstGeom prst="rect">
+            <a:avLst/>
+          </a:prstGeom>
+          <a:noFill/>
+          <a:ln/>
+        </p:spPr>
+        <p:txBody>
+          <a:bodyPr wrap="square" rtlCol="0" anchor="ctr"/>
+          <a:lstStyle/>
+          <a:p>
+            <a:pPr indent="0" marL="0">
+              <a:buNone/>
+            </a:pPr>
+            <a:r>
+              <a:rPr lang="en-US" sz="2700" b="1" dirty="0">
+                <a:solidFill>
+                  <a:srgbClr val="FFFFFF"/>
+                </a:solidFill>
+                <a:latin typeface="Segoe UI" pitchFamily="34" charset="0"/>
+                <a:ea typeface="Segoe UI" pitchFamily="34" charset="-122"/>
+                <a:cs typeface="Segoe UI" pitchFamily="34" charset="-120"/>
+              </a:rPr>
+              <a:t>Validation-first builds, loud failures</a:t>
+            </a:r>
+            <a:endParaRPr lang="en-US" sz="2700" dirty="0"/>
+          </a:p>
+        </p:txBody>
+      </p:sp>
+      <p:sp>
+        <p:nvSpPr>
+          <p:cNvPr id="6" name="Text 4"/>
+          <p:cNvSpPr/>
+          <p:nvPr/>
+        </p:nvSpPr>
+        <p:spPr>
+          <a:xfrm>
+            <a:off x="868680" y="2011680"/>
+            <a:ext cx="10424160" cy="3566160"/>
+          </a:xfrm>
+          <a:prstGeom prst="rect">
+            <a:avLst/>
+          </a:prstGeom>
+          <a:noFill/>
+          <a:ln/>
+        </p:spPr>
+        <p:txBody>
+          <a:bodyPr wrap="square" rtlCol="0" anchor="t"/>
+          <a:lstStyle/>
+          <a:p>
+            <a:pPr marL="342900" indent="-342900">
+              <a:lnSpc>
+                <a:spcPct val="112000"/>
+              </a:lnSpc>
+              <a:spcAft>
+                <a:spcPts val="900"/>
+              </a:spcAft>
+              <a:buSzPct val="100000"/>
+              <a:buChar char="▸"/>
+            </a:pPr>
+            <a:r>
+              <a:rPr lang="en-US" sz="1600" dirty="0">
+                <a:solidFill>
+                  <a:srgbClr val="CBD5E1"/>
+                </a:solidFill>
+                <a:latin typeface="Segoe UI" pitchFamily="34" charset="0"/>
+                <a:ea typeface="Segoe UI" pitchFamily="34" charset="-122"/>
+                <a:cs typeface="Segoe UI" pitchFamily="34" charset="-120"/>
+              </a:rPr>
+              <a:t>Every run validates row counts, schema, and sanity ranges before anything touches your dashboard.</a:t>
+            </a:r>
+            <a:endParaRPr lang="en-US" sz="1600" dirty="0"/>
+          </a:p>
+          <a:p>
+            <a:pPr marL="342900" indent="-342900">
+              <a:lnSpc>
+                <a:spcPct val="112000"/>
+              </a:lnSpc>
+              <a:spcAft>
+                <a:spcPts val="900"/>
+              </a:spcAft>
+              <a:buSzPct val="100000"/>
+              <a:buChar char="▸"/>
+            </a:pPr>
+            <a:r>
+              <a:rPr lang="en-US" sz="1600" dirty="0">
+                <a:solidFill>
+                  <a:srgbClr val="CBD5E1"/>
+                </a:solidFill>
+                <a:latin typeface="Segoe UI" pitchFamily="34" charset="0"/>
+                <a:ea typeface="Segoe UI" pitchFamily="34" charset="-122"/>
+                <a:cs typeface="Segoe UI" pitchFamily="34" charset="-120"/>
+              </a:rPr>
+              <a:t>Structured logs record what was fetched, what was skipped, and what was doubted - readable by humans, not terminal scrollback.</a:t>
+            </a:r>
+            <a:endParaRPr lang="en-US" sz="1600" dirty="0"/>
+          </a:p>
+          <a:p>
+            <a:pPr marL="342900" indent="-342900">
+              <a:lnSpc>
+                <a:spcPct val="112000"/>
+              </a:lnSpc>
+              <a:spcAft>
+                <a:spcPts val="900"/>
+              </a:spcAft>
+              <a:buSzPct val="100000"/>
+              <a:buChar char="▸"/>
+            </a:pPr>
+            <a:r>
+              <a:rPr lang="en-US" sz="1600" dirty="0">
+                <a:solidFill>
+                  <a:srgbClr val="CBD5E1"/>
+                </a:solidFill>
+                <a:latin typeface="Segoe UI" pitchFamily="34" charset="0"/>
+                <a:ea typeface="Segoe UI" pitchFamily="34" charset="-122"/>
+                <a:cs typeface="Segoe UI" pitchFamily="34" charset="-120"/>
+              </a:rPr>
+              <a:t>Failures report loudly; a scraper that silently returns empty data is worse than one that crashes.</a:t>
+            </a:r>
+            <a:endParaRPr lang="en-US" sz="1600" dirty="0"/>
+          </a:p>
+          <a:p>
+            <a:pPr marL="342900" indent="-342900">
+              <a:lnSpc>
+                <a:spcPct val="112000"/>
+              </a:lnSpc>
+              <a:spcAft>
+                <a:spcPts val="900"/>
+              </a:spcAft>
+              <a:buSzPct val="100000"/>
+              <a:buChar char="▸"/>
+            </a:pPr>
+            <a:r>
+              <a:rPr lang="en-US" sz="1600" dirty="0">
+                <a:solidFill>
+                  <a:srgbClr val="CBD5E1"/>
+                </a:solidFill>
+                <a:latin typeface="Segoe UI" pitchFamily="34" charset="0"/>
+                <a:ea typeface="Segoe UI" pitchFamily="34" charset="-122"/>
+                <a:cs typeface="Segoe UI" pitchFamily="34" charset="-120"/>
+              </a:rPr>
+              <a:t>Partial delivery with honest warnings beats silent perfectionism - you always know the state of your data.</a:t>
+            </a:r>
+            <a:endParaRPr lang="en-US" sz="1600" dirty="0"/>
+          </a:p>
+        </p:txBody>
+      </p:sp>
+      <p:sp>
+        <p:nvSpPr>
+          <p:cNvPr id="7" name="Shape 5"/>
+          <p:cNvSpPr/>
+          <p:nvPr/>
+        </p:nvSpPr>
+        <p:spPr>
+          <a:xfrm>
+            <a:off x="822960" y="5961888"/>
+            <a:ext cx="10515600" cy="0"/>
+          </a:xfrm>
+          <a:prstGeom prst="line">
+            <a:avLst/>
+          </a:prstGeom>
+          <a:noFill/>
+          <a:ln w="12700">
+            <a:solidFill>
+              <a:srgbClr val="1E2D45"/>
+            </a:solidFill>
+            <a:prstDash val="solid"/>
+          </a:ln>
+        </p:spPr>
+      </p:sp>
+      <p:sp>
+        <p:nvSpPr>
+          <p:cNvPr id="8" name="Text 6"/>
+          <p:cNvSpPr/>
+          <p:nvPr/>
+        </p:nvSpPr>
+        <p:spPr>
+          <a:xfrm>
+            <a:off x="822960" y="6053328"/>
+            <a:ext cx="9692640" cy="457200"/>
+          </a:xfrm>
+          <a:prstGeom prst="rect">
+            <a:avLst/>
+          </a:prstGeom>
+          <a:noFill/>
+          <a:ln/>
+        </p:spPr>
+        <p:txBody>
+          <a:bodyPr wrap="square" rtlCol="0" anchor="ctr"/>
+          <a:lstStyle/>
+          <a:p>
+            <a:pPr indent="0" marL="0">
+              <a:buNone/>
+            </a:pPr>
+            <a:r>
+              <a:rPr lang="en-US" sz="1150" dirty="0">
+                <a:solidFill>
+                  <a:srgbClr val="64748B"/>
+                </a:solidFill>
+                <a:latin typeface="Segoe UI" pitchFamily="34" charset="0"/>
+                <a:ea typeface="Segoe UI" pitchFamily="34" charset="-122"/>
+                <a:cs typeface="Segoe UI" pitchFamily="34" charset="-120"/>
+              </a:rPr>
+              <a:t>Do not trust a run because it exited zero; trust it because it passed checks you can read.</a:t>
+            </a:r>
+            <a:endParaRPr lang="en-US" sz="1150" dirty="0"/>
+          </a:p>
+        </p:txBody>
+      </p:sp>
+      <p:sp>
+        <p:nvSpPr>
+          <p:cNvPr id="9" name="Text 7"/>
+          <p:cNvSpPr/>
+          <p:nvPr/>
+        </p:nvSpPr>
+        <p:spPr>
+          <a:xfrm>
+            <a:off x="10698480" y="6382512"/>
+            <a:ext cx="1188720" cy="365760"/>
+          </a:xfrm>
+          <a:prstGeom prst="rect">
+            <a:avLst/>
+          </a:prstGeom>
+          <a:noFill/>
+          <a:ln/>
+        </p:spPr>
+        <p:txBody>
+          <a:bodyPr wrap="square" rtlCol="0" anchor="ctr"/>
+          <a:lstStyle/>
+          <a:p>
+            <a:pPr algn="r" indent="0" marL="0">
+              <a:buNone/>
+            </a:pPr>
+            <a:r>
+              <a:rPr lang="en-US" sz="1000" dirty="0">
+                <a:solidFill>
+                  <a:srgbClr val="64748B"/>
+                </a:solidFill>
+                <a:latin typeface="Consolas" pitchFamily="34" charset="0"/>
+                <a:ea typeface="Consolas" pitchFamily="34" charset="-122"/>
+                <a:cs typeface="Consolas" pitchFamily="34" charset="-120"/>
+              </a:rPr>
+              <a:t>9 / 14</a:t>
             </a:r>
             <a:endParaRPr lang="en-US" sz="1000" dirty="0"/>
           </a:p>

--- a/decks/freelance-playbook.pptx
+++ b/decks/freelance-playbook.pptx
@@ -160,7 +160,7 @@
               <a:lstStyle/>
               <a:p>
                 <a:pPr>
-                  <a:defRPr b="0" i="0" strike="noStrike" sz="1000" u="none">
+                  <a:defRPr b="0" i="0" strike="noStrike" sz="1800" u="none">
                     <a:solidFill>
                       <a:srgbClr val="E2E8F0"/>
                     </a:solidFill>
@@ -289,7 +289,7 @@
             <a:lstStyle/>
             <a:p>
               <a:pPr>
-                <a:defRPr b="0" i="0" strike="noStrike" sz="1000" u="none">
+                <a:defRPr b="0" i="0" strike="noStrike" sz="1800" u="none">
                   <a:solidFill>
                     <a:srgbClr val="E2E8F0"/>
                   </a:solidFill>
@@ -337,7 +337,7 @@
           <a:lstStyle/>
           <a:p>
             <a:pPr>
-              <a:defRPr sz="1100" b="0" i="0" u="none" strike="noStrike">
+              <a:defRPr sz="1800" b="0" i="0" u="none" strike="noStrike">
                 <a:solidFill>
                   <a:srgbClr val="94A3B8"/>
                 </a:solidFill>
@@ -357,6 +357,7 @@
         <c:axId val="2094734552"/>
         <c:scaling>
           <c:orientation val="minMax"/>
+          <c:min val="0"/>
         </c:scaling>
         <c:delete val="0"/>
         <c:axPos val="l"/>
@@ -389,7 +390,7 @@
           <a:lstStyle/>
           <a:p>
             <a:pPr>
-              <a:defRPr sz="1000" b="0" i="0" u="none" strike="noStrike">
+              <a:defRPr sz="1800" b="0" i="0" u="none" strike="noStrike">
                 <a:solidFill>
                   <a:srgbClr val="94A3B8"/>
                 </a:solidFill>
@@ -749,7 +750,7 @@
           <a:lstStyle/>
           <a:p>
             <a:pPr>
-              <a:defRPr sz="1100" b="0" i="0" u="none" strike="noStrike">
+              <a:defRPr sz="1800" b="0" i="0" u="none" strike="noStrike">
                 <a:solidFill>
                   <a:srgbClr val="94A3B8"/>
                 </a:solidFill>
@@ -769,6 +770,7 @@
         <c:axId val="2094734552"/>
         <c:scaling>
           <c:orientation val="minMax"/>
+          <c:min val="0"/>
         </c:scaling>
         <c:delete val="0"/>
         <c:axPos val="l"/>
@@ -801,7 +803,7 @@
           <a:lstStyle/>
           <a:p>
             <a:pPr>
-              <a:defRPr sz="1000" b="0" i="0" u="none" strike="noStrike">
+              <a:defRPr sz="1800" b="0" i="0" u="none" strike="noStrike">
                 <a:solidFill>
                   <a:srgbClr val="94A3B8"/>
                 </a:solidFill>
@@ -833,7 +835,7 @@
         <a:lstStyle/>
         <a:p>
           <a:pPr>
-            <a:defRPr sz="1100">
+            <a:defRPr sz="1800">
               <a:solidFill>
                 <a:srgbClr val="CBD5E1"/>
               </a:solidFill>
@@ -952,7 +954,7 @@
                 <a:lstStyle/>
                 <a:p>
                   <a:pPr>
-                    <a:defRPr sz="1000" b="0" i="0" u="none" strike="noStrike">
+                    <a:defRPr sz="1800" b="0" i="0" u="none" strike="noStrike">
                       <a:solidFill>
                         <a:srgbClr val="E2E8F0"/>
                       </a:solidFill>
@@ -977,7 +979,7 @@
                 <a:lstStyle/>
                 <a:p>
                   <a:pPr>
-                    <a:defRPr sz="1000" b="0" i="0" u="none" strike="noStrike">
+                    <a:defRPr sz="1800" b="0" i="0" u="none" strike="noStrike">
                       <a:solidFill>
                         <a:srgbClr val="E2E8F0"/>
                       </a:solidFill>
@@ -1002,7 +1004,7 @@
                 <a:lstStyle/>
                 <a:p>
                   <a:pPr>
-                    <a:defRPr sz="1000" b="0" i="0" u="none" strike="noStrike">
+                    <a:defRPr sz="1800" b="0" i="0" u="none" strike="noStrike">
                       <a:solidFill>
                         <a:srgbClr val="E2E8F0"/>
                       </a:solidFill>
@@ -1027,7 +1029,7 @@
                 <a:lstStyle/>
                 <a:p>
                   <a:pPr>
-                    <a:defRPr sz="1000" b="0" i="0" u="none" strike="noStrike">
+                    <a:defRPr sz="1800" b="0" i="0" u="none" strike="noStrike">
                       <a:solidFill>
                         <a:srgbClr val="E2E8F0"/>
                       </a:solidFill>
@@ -1108,7 +1110,7 @@
           </c:val>
         </c:ser>
         <c:firstSliceAng val="0"/>
-        <c:holeSize val="62"/>
+        <c:holeSize val="60"/>
       </c:doughnutChart>
       <c:spPr>
         <a:solidFill>
@@ -1128,7 +1130,7 @@
         <a:lstStyle/>
         <a:p>
           <a:pPr>
-            <a:defRPr sz="1100">
+            <a:defRPr sz="1800">
               <a:solidFill>
                 <a:srgbClr val="CBD5E1"/>
               </a:solidFill>
@@ -1555,7 +1557,7 @@
           <a:p>
             <a:r>
               <a:rPr lang="en-US" dirty="0"/>
-              <a:t/>
+              <a:t>Opening: introduce yourself and this deck, "The Freelance Delivery Playbook: Data and AI Projects Worldwide". | Transition: next up - "What this deck covers".</a:t>
             </a:r>
             <a:endParaRPr lang="en-US" dirty="0"/>
           </a:p>
@@ -1643,7 +1645,7 @@
           <a:p>
             <a:r>
               <a:rPr lang="en-US" dirty="0"/>
-              <a:t/>
+              <a:t>Key message: Clarity climbs early; surprises burn down fast | Insight: Week one writes the definition of done, so clarity climbs immediately; surprises decay because bad news travels first and fast. | Talk track: Illustrative engagement profile; every real project ships short written updates on a fixed rhythm with evidence attached. | Transition: next up - "Typical freelance delivery versus this playbook".</a:t>
             </a:r>
             <a:endParaRPr lang="en-US" dirty="0"/>
           </a:p>
@@ -1731,7 +1733,7 @@
           <a:p>
             <a:r>
               <a:rPr lang="en-US" dirty="0"/>
-              <a:t/>
+              <a:t>Key message: Typical freelance delivery versus this playbook | Talk track: The difference is not the tools - it is validation, honesty, and handover as defaults. | Transition: next up - "Where the hours go on a healthy engagement".</a:t>
             </a:r>
             <a:endParaRPr lang="en-US" dirty="0"/>
           </a:p>
@@ -1819,7 +1821,7 @@
           <a:p>
             <a:r>
               <a:rPr lang="en-US" dirty="0"/>
-              <a:t/>
+              <a:t>Key message: Where the hours go on a healthy engagement | Insight: More than a third of the work happens before and after the code - that is what makes the code keep working after I leave. | Talk track: Illustrative effort split for a mid-size scraping or automation engagement. | Transition: next up - "The best ending is not needing me".</a:t>
             </a:r>
             <a:endParaRPr lang="en-US" dirty="0"/>
           </a:p>
@@ -1907,7 +1909,7 @@
           <a:p>
             <a:r>
               <a:rPr lang="en-US" dirty="0"/>
-              <a:t/>
+              <a:t>Key message: The best ending is not needing me | Talk track: Professionals have boundaries and boring technology; both make handover boring - which is the point. | Transition: next up - "Hire discipline, not tools".</a:t>
             </a:r>
             <a:endParaRPr lang="en-US" dirty="0"/>
           </a:p>
@@ -1995,7 +1997,7 @@
           <a:p>
             <a:r>
               <a:rPr lang="en-US" dirty="0"/>
-              <a:t/>
+              <a:t>Key message: Hire discipline, not tools | Transition: close with the call to action on the contact slide, invite questions.</a:t>
             </a:r>
             <a:endParaRPr lang="en-US" dirty="0"/>
           </a:p>
@@ -2083,7 +2085,7 @@
           <a:p>
             <a:r>
               <a:rPr lang="en-US" dirty="0"/>
-              <a:t/>
+              <a:t>Key message: What this deck covers | Agenda: What I take on - and the open-source frameworks behind it; Week one: scoping that decides the project; Validation-first delivery and honest communication; Handover: the best ending is not needing me; How to start: a scoping call, not a sales pitch | Transition: next up - "What I take on - and what powers it".</a:t>
             </a:r>
             <a:endParaRPr lang="en-US" dirty="0"/>
           </a:p>
@@ -2171,7 +2173,7 @@
           <a:p>
             <a:r>
               <a:rPr lang="en-US" dirty="0"/>
-              <a:t/>
+              <a:t>Key message: What I take on - and what powers it | Talk track: Delivered worldwide via Upwork - code, data, and documentation always land in your hands. | Transition: next up - "The record behind the playbook".</a:t>
             </a:r>
             <a:endParaRPr lang="en-US" dirty="0"/>
           </a:p>
@@ -2259,7 +2261,7 @@
           <a:p>
             <a:r>
               <a:rPr lang="en-US" dirty="0"/>
-              <a:t/>
+              <a:t>Key message: The record behind the playbook | Talk track: Track record from the live portfolio - inspect it before we even talk. | Transition: next up - "The loop every project runs, regardless of size".</a:t>
             </a:r>
             <a:endParaRPr lang="en-US" dirty="0"/>
           </a:p>
@@ -2347,7 +2349,7 @@
           <a:p>
             <a:r>
               <a:rPr lang="en-US" dirty="0"/>
-              <a:t/>
+              <a:t>Key message: The loop every project runs, regardless of size | Talk track: The loop is the same for a two-week scrape and a multi-month BI build - only the depth changes. | Transition: next up - "Services, deliverables, and what you own".</a:t>
             </a:r>
             <a:endParaRPr lang="en-US" dirty="0"/>
           </a:p>
@@ -2435,7 +2437,7 @@
           <a:p>
             <a:r>
               <a:rPr lang="en-US" dirty="0"/>
-              <a:t/>
+              <a:t>Key message: Services, deliverables, and what you own | Talk track: No black boxes: everything I build, you can run, read, and extend without me. | Transition: next up - "Week one decides the project".</a:t>
             </a:r>
             <a:endParaRPr lang="en-US" dirty="0"/>
           </a:p>
@@ -2523,7 +2525,7 @@
           <a:p>
             <a:r>
               <a:rPr lang="en-US" dirty="0"/>
-              <a:t/>
+              <a:t>Key message: Week one decides the project | Talk track: The most expensive bug in freelancing is building the right answer to the wrong question. | Transition: next up - "Where scraping projects actually fail".</a:t>
             </a:r>
             <a:endParaRPr lang="en-US" dirty="0"/>
           </a:p>
@@ -2611,7 +2613,7 @@
           <a:p>
             <a:r>
               <a:rPr lang="en-US" dirty="0"/>
-              <a:t/>
+              <a:t>Key message: Where scraping projects actually fail | Insight: The deadliest failure is silent: a scraper that exits zero and returns nothing - which is why every run validates row counts, schema, and sanity ranges. | Talk track: Illustrative incident mix consistent with the Web Scraping Toolkit design notes: tolerant extraction, fallbacks, and warnings over shrugs. | Transition: next up - "Validation-first builds, loud failures".</a:t>
             </a:r>
             <a:endParaRPr lang="en-US" dirty="0"/>
           </a:p>
@@ -2699,7 +2701,7 @@
           <a:p>
             <a:r>
               <a:rPr lang="en-US" dirty="0"/>
-              <a:t/>
+              <a:t>Key message: Validation-first builds, loud failures | Talk track: Do not trust a run because it exited zero; trust it because it passed checks you can read. | Transition: next up - "Clarity climbs early; surprises burn down fast".</a:t>
             </a:r>
             <a:endParaRPr lang="en-US" dirty="0"/>
           </a:p>
@@ -3120,7 +3122,7 @@
         </p:nvSpPr>
         <p:spPr>
           <a:xfrm>
-            <a:off x="822960" y="1783080"/>
+            <a:off x="822960" y="1737360"/>
             <a:ext cx="10515600" cy="457200"/>
           </a:xfrm>
           <a:prstGeom prst="rect">
@@ -3137,7 +3139,7 @@
               <a:buNone/>
             </a:pPr>
             <a:r>
-              <a:rPr lang="en-US" sz="1400" spc="400" kern="0" dirty="0">
+              <a:rPr lang="en-US" sz="1800" spc="400" kern="0" dirty="0">
                 <a:solidFill>
                   <a:srgbClr val="06B6D4"/>
                 </a:solidFill>
@@ -3147,7 +3149,7 @@
               </a:rPr>
               <a:t>ZALIN PLATFORM · SERVICES</a:t>
             </a:r>
-            <a:endParaRPr lang="en-US" sz="1400" dirty="0"/>
+            <a:endParaRPr lang="en-US" sz="1800" dirty="0"/>
           </a:p>
         </p:txBody>
       </p:sp>
@@ -3159,7 +3161,7 @@
         </p:nvSpPr>
         <p:spPr>
           <a:xfrm>
-            <a:off x="822960" y="2286000"/>
+            <a:off x="822960" y="2240280"/>
             <a:ext cx="10607040" cy="1691640"/>
           </a:xfrm>
           <a:prstGeom prst="rect">
@@ -3198,8 +3200,8 @@
         </p:nvSpPr>
         <p:spPr>
           <a:xfrm>
-            <a:off x="822960" y="4023360"/>
-            <a:ext cx="10058400" cy="777240"/>
+            <a:off x="822960" y="3977640"/>
+            <a:ext cx="10058400" cy="822960"/>
           </a:xfrm>
           <a:prstGeom prst="rect">
             <a:avLst/>
@@ -3215,7 +3217,7 @@
               <a:buNone/>
             </a:pPr>
             <a:r>
-              <a:rPr lang="en-US" sz="1700" dirty="0">
+              <a:rPr lang="en-US" sz="2000" dirty="0">
                 <a:solidFill>
                   <a:srgbClr val="94A3B8"/>
                 </a:solidFill>
@@ -3225,7 +3227,7 @@
               </a:rPr>
               <a:t>Delivery discipline for scraping, BI, and AI automation clients - from scoping call to handover</a:t>
             </a:r>
-            <a:endParaRPr lang="en-US" sz="1700" dirty="0"/>
+            <a:endParaRPr lang="en-US" sz="2000" dirty="0"/>
           </a:p>
         </p:txBody>
       </p:sp>
@@ -3237,7 +3239,7 @@
         </p:nvSpPr>
         <p:spPr>
           <a:xfrm>
-            <a:off x="822960" y="5440680"/>
+            <a:off x="822960" y="5349240"/>
             <a:ext cx="4114800" cy="0"/>
           </a:xfrm>
           <a:prstGeom prst="line">
@@ -3260,8 +3262,8 @@
         </p:nvSpPr>
         <p:spPr>
           <a:xfrm>
-            <a:off x="822960" y="5596128"/>
-            <a:ext cx="10058400" cy="457200"/>
+            <a:off x="822960" y="5532120"/>
+            <a:ext cx="10058400" cy="502920"/>
           </a:xfrm>
           <a:prstGeom prst="rect">
             <a:avLst/>
@@ -3277,9 +3279,9 @@
               <a:buNone/>
             </a:pPr>
             <a:r>
-              <a:rPr lang="en-US" sz="1250" dirty="0">
-                <a:solidFill>
-                  <a:srgbClr val="64748B"/>
+              <a:rPr lang="en-US" sz="1800" dirty="0">
+                <a:solidFill>
+                  <a:srgbClr val="8FA3BF"/>
                 </a:solidFill>
                 <a:latin typeface="Segoe UI" pitchFamily="34" charset="0"/>
                 <a:ea typeface="Segoe UI" pitchFamily="34" charset="-122"/>
@@ -3287,7 +3289,7 @@
               </a:rPr>
               <a:t>Rezalian Vatiady · Zalin Labs · 2026</a:t>
             </a:r>
-            <a:endParaRPr lang="en-US" sz="1250" dirty="0"/>
+            <a:endParaRPr lang="en-US" sz="1800" dirty="0"/>
           </a:p>
         </p:txBody>
       </p:sp>
@@ -3299,8 +3301,8 @@
         </p:nvSpPr>
         <p:spPr>
           <a:xfrm>
-            <a:off x="10698480" y="6382512"/>
-            <a:ext cx="1188720" cy="365760"/>
+            <a:off x="10698480" y="6309360"/>
+            <a:ext cx="1188720" cy="411480"/>
           </a:xfrm>
           <a:prstGeom prst="rect">
             <a:avLst/>
@@ -3316,9 +3318,9 @@
               <a:buNone/>
             </a:pPr>
             <a:r>
-              <a:rPr lang="en-US" sz="1000" dirty="0">
-                <a:solidFill>
-                  <a:srgbClr val="64748B"/>
+              <a:rPr lang="en-US" sz="1800" dirty="0">
+                <a:solidFill>
+                  <a:srgbClr val="8FA3BF"/>
                 </a:solidFill>
                 <a:latin typeface="Consolas" pitchFamily="34" charset="0"/>
                 <a:ea typeface="Consolas" pitchFamily="34" charset="-122"/>
@@ -3326,7 +3328,7 @@
               </a:rPr>
               <a:t>1 / 14</a:t>
             </a:r>
-            <a:endParaRPr lang="en-US" sz="1000" dirty="0"/>
+            <a:endParaRPr lang="en-US" sz="1800" dirty="0"/>
           </a:p>
         </p:txBody>
       </p:sp>
@@ -3410,8 +3412,8 @@
         </p:nvSpPr>
         <p:spPr>
           <a:xfrm>
-            <a:off x="822960" y="502920"/>
-            <a:ext cx="10515600" cy="365760"/>
+            <a:off x="822960" y="457200"/>
+            <a:ext cx="10515600" cy="411480"/>
           </a:xfrm>
           <a:prstGeom prst="rect">
             <a:avLst/>
@@ -3427,7 +3429,7 @@
               <a:buNone/>
             </a:pPr>
             <a:r>
-              <a:rPr lang="en-US" sz="1200" spc="300" kern="0" dirty="0">
+              <a:rPr lang="en-US" sz="1800" spc="300" kern="0" dirty="0">
                 <a:solidFill>
                   <a:srgbClr val="06B6D4"/>
                 </a:solidFill>
@@ -3437,7 +3439,7 @@
               </a:rPr>
               <a:t>COMMUNICATION</a:t>
             </a:r>
-            <a:endParaRPr lang="en-US" sz="1200" dirty="0"/>
+            <a:endParaRPr lang="en-US" sz="1800" dirty="0"/>
           </a:p>
         </p:txBody>
       </p:sp>
@@ -3488,7 +3490,7 @@
         </p:nvGraphicFramePr>
         <p:xfrm>
           <a:off x="822960" y="1874520"/>
-          <a:ext cx="10515600" cy="3337560"/>
+          <a:ext cx="10515600" cy="3246120"/>
         </p:xfrm>
         <a:graphic xmlns:a="http://schemas.openxmlformats.org/drawingml/2006/main">
           <a:graphicData uri="http://schemas.openxmlformats.org/drawingml/2006/chart">
@@ -3504,7 +3506,7 @@
         </p:nvSpPr>
         <p:spPr>
           <a:xfrm>
-            <a:off x="822960" y="5413248"/>
+            <a:off x="822960" y="5321808"/>
             <a:ext cx="10515600" cy="0"/>
           </a:xfrm>
           <a:prstGeom prst="line">
@@ -3527,8 +3529,8 @@
         </p:nvSpPr>
         <p:spPr>
           <a:xfrm>
-            <a:off x="822960" y="5504688"/>
-            <a:ext cx="10424160" cy="411480"/>
+            <a:off x="822960" y="5394960"/>
+            <a:ext cx="10424160" cy="502920"/>
           </a:xfrm>
           <a:prstGeom prst="rect">
             <a:avLst/>
@@ -3544,7 +3546,7 @@
               <a:buNone/>
             </a:pPr>
             <a:r>
-              <a:rPr lang="en-US" sz="1300" i="1" dirty="0">
+              <a:rPr lang="en-US" sz="1800" i="1" dirty="0">
                 <a:solidFill>
                   <a:srgbClr val="06B6D4"/>
                 </a:solidFill>
@@ -3554,7 +3556,7 @@
               </a:rPr>
               <a:t>→  Week one writes the definition of done, so clarity climbs immediately; surprises decay because bad news travels first and fast.</a:t>
             </a:r>
-            <a:endParaRPr lang="en-US" sz="1300" dirty="0"/>
+            <a:endParaRPr lang="en-US" sz="1800" dirty="0"/>
           </a:p>
         </p:txBody>
       </p:sp>
@@ -3589,8 +3591,8 @@
         </p:nvSpPr>
         <p:spPr>
           <a:xfrm>
-            <a:off x="822960" y="6053328"/>
-            <a:ext cx="9692640" cy="457200"/>
+            <a:off x="822960" y="6035040"/>
+            <a:ext cx="10424160" cy="566928"/>
           </a:xfrm>
           <a:prstGeom prst="rect">
             <a:avLst/>
@@ -3606,9 +3608,9 @@
               <a:buNone/>
             </a:pPr>
             <a:r>
-              <a:rPr lang="en-US" sz="1150" dirty="0">
-                <a:solidFill>
-                  <a:srgbClr val="64748B"/>
+              <a:rPr lang="en-US" sz="1800" dirty="0">
+                <a:solidFill>
+                  <a:srgbClr val="8FA3BF"/>
                 </a:solidFill>
                 <a:latin typeface="Segoe UI" pitchFamily="34" charset="0"/>
                 <a:ea typeface="Segoe UI" pitchFamily="34" charset="-122"/>
@@ -3616,7 +3618,7 @@
               </a:rPr>
               <a:t>Illustrative engagement profile; every real project ships short written updates on a fixed rhythm with evidence attached.</a:t>
             </a:r>
-            <a:endParaRPr lang="en-US" sz="1150" dirty="0"/>
+            <a:endParaRPr lang="en-US" sz="1800" dirty="0"/>
           </a:p>
         </p:txBody>
       </p:sp>
@@ -3628,8 +3630,8 @@
         </p:nvSpPr>
         <p:spPr>
           <a:xfrm>
-            <a:off x="10698480" y="6382512"/>
-            <a:ext cx="1188720" cy="365760"/>
+            <a:off x="10698480" y="6309360"/>
+            <a:ext cx="1188720" cy="411480"/>
           </a:xfrm>
           <a:prstGeom prst="rect">
             <a:avLst/>
@@ -3645,9 +3647,9 @@
               <a:buNone/>
             </a:pPr>
             <a:r>
-              <a:rPr lang="en-US" sz="1000" dirty="0">
-                <a:solidFill>
-                  <a:srgbClr val="64748B"/>
+              <a:rPr lang="en-US" sz="1800" dirty="0">
+                <a:solidFill>
+                  <a:srgbClr val="8FA3BF"/>
                 </a:solidFill>
                 <a:latin typeface="Consolas" pitchFamily="34" charset="0"/>
                 <a:ea typeface="Consolas" pitchFamily="34" charset="-122"/>
@@ -3655,7 +3657,7 @@
               </a:rPr>
               <a:t>10 / 14</a:t>
             </a:r>
-            <a:endParaRPr lang="en-US" sz="1000" dirty="0"/>
+            <a:endParaRPr lang="en-US" sz="1800" dirty="0"/>
           </a:p>
         </p:txBody>
       </p:sp>
@@ -3739,8 +3741,8 @@
         </p:nvSpPr>
         <p:spPr>
           <a:xfrm>
-            <a:off x="822960" y="502920"/>
-            <a:ext cx="10515600" cy="365760"/>
+            <a:off x="822960" y="457200"/>
+            <a:ext cx="10515600" cy="411480"/>
           </a:xfrm>
           <a:prstGeom prst="rect">
             <a:avLst/>
@@ -3756,7 +3758,7 @@
               <a:buNone/>
             </a:pPr>
             <a:r>
-              <a:rPr lang="en-US" sz="1200" spc="300" kern="0" dirty="0">
+              <a:rPr lang="en-US" sz="1800" spc="300" kern="0" dirty="0">
                 <a:solidFill>
                   <a:srgbClr val="06B6D4"/>
                 </a:solidFill>
@@ -3766,7 +3768,7 @@
               </a:rPr>
               <a:t>COMPARISON</a:t>
             </a:r>
-            <a:endParaRPr lang="en-US" sz="1200" dirty="0"/>
+            <a:endParaRPr lang="en-US" sz="1800" dirty="0"/>
           </a:p>
         </p:txBody>
       </p:sp>
@@ -3817,12 +3819,12 @@
         </p:nvSpPr>
         <p:spPr>
           <a:xfrm>
-            <a:off x="822960" y="2011680"/>
-            <a:ext cx="5074920" cy="3611880"/>
+            <a:off x="822960" y="1965960"/>
+            <a:ext cx="5074920" cy="3657600"/>
           </a:xfrm>
           <a:prstGeom prst="roundRect">
             <a:avLst>
-              <a:gd name="adj" fmla="val 2025"/>
+              <a:gd name="adj" fmla="val 2000"/>
             </a:avLst>
           </a:prstGeom>
           <a:solidFill>
@@ -3844,8 +3846,8 @@
         </p:nvSpPr>
         <p:spPr>
           <a:xfrm>
-            <a:off x="1097280" y="2240280"/>
-            <a:ext cx="4526280" cy="502920"/>
+            <a:off x="1097280" y="2194560"/>
+            <a:ext cx="4526280" cy="548640"/>
           </a:xfrm>
           <a:prstGeom prst="rect">
             <a:avLst/>
@@ -3861,7 +3863,7 @@
               <a:buNone/>
             </a:pPr>
             <a:r>
-              <a:rPr lang="en-US" sz="1650" b="1" dirty="0">
+              <a:rPr lang="en-US" sz="2000" b="1" dirty="0">
                 <a:solidFill>
                   <a:srgbClr val="06B6D4"/>
                 </a:solidFill>
@@ -3871,7 +3873,7 @@
               </a:rPr>
               <a:t>Typical delivery</a:t>
             </a:r>
-            <a:endParaRPr lang="en-US" sz="1650" dirty="0"/>
+            <a:endParaRPr lang="en-US" sz="2000" dirty="0"/>
           </a:p>
         </p:txBody>
       </p:sp>
@@ -3907,7 +3909,7 @@
               <a:buChar char="▸"/>
             </a:pPr>
             <a:r>
-              <a:rPr lang="en-US" sz="1280" dirty="0">
+              <a:rPr lang="en-US" sz="1800" dirty="0">
                 <a:solidFill>
                   <a:srgbClr val="CBD5E1"/>
                 </a:solidFill>
@@ -3917,7 +3919,7 @@
               </a:rPr>
               <a:t>A script that worked once, in a demo</a:t>
             </a:r>
-            <a:endParaRPr lang="en-US" sz="1280" dirty="0"/>
+            <a:endParaRPr lang="en-US" sz="1800" dirty="0"/>
           </a:p>
           <a:p>
             <a:pPr marL="342900" indent="-342900">
@@ -3931,7 +3933,7 @@
               <a:buChar char="▸"/>
             </a:pPr>
             <a:r>
-              <a:rPr lang="en-US" sz="1280" dirty="0">
+              <a:rPr lang="en-US" sz="1800" dirty="0">
                 <a:solidFill>
                   <a:srgbClr val="CBD5E1"/>
                 </a:solidFill>
@@ -3941,7 +3943,7 @@
               </a:rPr>
               <a:t>Silent failures discovered by you</a:t>
             </a:r>
-            <a:endParaRPr lang="en-US" sz="1280" dirty="0"/>
+            <a:endParaRPr lang="en-US" sz="1800" dirty="0"/>
           </a:p>
           <a:p>
             <a:pPr marL="342900" indent="-342900">
@@ -3955,7 +3957,7 @@
               <a:buChar char="▸"/>
             </a:pPr>
             <a:r>
-              <a:rPr lang="en-US" sz="1280" dirty="0">
+              <a:rPr lang="en-US" sz="1800" dirty="0">
                 <a:solidFill>
                   <a:srgbClr val="CBD5E1"/>
                 </a:solidFill>
@@ -3965,7 +3967,7 @@
               </a:rPr>
               <a:t>Knowledge locked in one head</a:t>
             </a:r>
-            <a:endParaRPr lang="en-US" sz="1280" dirty="0"/>
+            <a:endParaRPr lang="en-US" sz="1800" dirty="0"/>
           </a:p>
           <a:p>
             <a:pPr marL="342900" indent="-342900">
@@ -3979,7 +3981,7 @@
               <a:buChar char="▸"/>
             </a:pPr>
             <a:r>
-              <a:rPr lang="en-US" sz="1280" dirty="0">
+              <a:rPr lang="en-US" sz="1800" dirty="0">
                 <a:solidFill>
                   <a:srgbClr val="CBD5E1"/>
                 </a:solidFill>
@@ -3989,7 +3991,7 @@
               </a:rPr>
               <a:t>Dependency by design</a:t>
             </a:r>
-            <a:endParaRPr lang="en-US" sz="1280" dirty="0"/>
+            <a:endParaRPr lang="en-US" sz="1800" dirty="0"/>
           </a:p>
         </p:txBody>
       </p:sp>
@@ -4001,12 +4003,12 @@
         </p:nvSpPr>
         <p:spPr>
           <a:xfrm>
-            <a:off x="6291072" y="2011680"/>
-            <a:ext cx="5074920" cy="3611880"/>
+            <a:off x="6291072" y="1965960"/>
+            <a:ext cx="5074920" cy="3657600"/>
           </a:xfrm>
           <a:prstGeom prst="roundRect">
             <a:avLst>
-              <a:gd name="adj" fmla="val 2025"/>
+              <a:gd name="adj" fmla="val 2000"/>
             </a:avLst>
           </a:prstGeom>
           <a:solidFill>
@@ -4028,8 +4030,8 @@
         </p:nvSpPr>
         <p:spPr>
           <a:xfrm>
-            <a:off x="6565392" y="2240280"/>
-            <a:ext cx="4526280" cy="502920"/>
+            <a:off x="6565392" y="2194560"/>
+            <a:ext cx="4526280" cy="548640"/>
           </a:xfrm>
           <a:prstGeom prst="rect">
             <a:avLst/>
@@ -4045,7 +4047,7 @@
               <a:buNone/>
             </a:pPr>
             <a:r>
-              <a:rPr lang="en-US" sz="1650" b="1" dirty="0">
+              <a:rPr lang="en-US" sz="2000" b="1" dirty="0">
                 <a:solidFill>
                   <a:srgbClr val="93C5FD"/>
                 </a:solidFill>
@@ -4055,7 +4057,7 @@
               </a:rPr>
               <a:t>This playbook</a:t>
             </a:r>
-            <a:endParaRPr lang="en-US" sz="1650" dirty="0"/>
+            <a:endParaRPr lang="en-US" sz="2000" dirty="0"/>
           </a:p>
         </p:txBody>
       </p:sp>
@@ -4091,7 +4093,7 @@
               <a:buChar char="▸"/>
             </a:pPr>
             <a:r>
-              <a:rPr lang="en-US" sz="1280" dirty="0">
+              <a:rPr lang="en-US" sz="1800" dirty="0">
                 <a:solidFill>
                   <a:srgbClr val="CBD5E1"/>
                 </a:solidFill>
@@ -4101,7 +4103,7 @@
               </a:rPr>
               <a:t>Pipelines that validate every run</a:t>
             </a:r>
-            <a:endParaRPr lang="en-US" sz="1280" dirty="0"/>
+            <a:endParaRPr lang="en-US" sz="1800" dirty="0"/>
           </a:p>
           <a:p>
             <a:pPr marL="342900" indent="-342900">
@@ -4115,7 +4117,7 @@
               <a:buChar char="▸"/>
             </a:pPr>
             <a:r>
-              <a:rPr lang="en-US" sz="1280" dirty="0">
+              <a:rPr lang="en-US" sz="1800" dirty="0">
                 <a:solidFill>
                   <a:srgbClr val="CBD5E1"/>
                 </a:solidFill>
@@ -4125,7 +4127,7 @@
               </a:rPr>
               <a:t>Loud failures with structured logs</a:t>
             </a:r>
-            <a:endParaRPr lang="en-US" sz="1280" dirty="0"/>
+            <a:endParaRPr lang="en-US" sz="1800" dirty="0"/>
           </a:p>
           <a:p>
             <a:pPr marL="342900" indent="-342900">
@@ -4139,7 +4141,7 @@
               <a:buChar char="▸"/>
             </a:pPr>
             <a:r>
-              <a:rPr lang="en-US" sz="1280" dirty="0">
+              <a:rPr lang="en-US" sz="1800" dirty="0">
                 <a:solidFill>
                   <a:srgbClr val="CBD5E1"/>
                 </a:solidFill>
@@ -4149,7 +4151,7 @@
               </a:rPr>
               <a:t>Docs and runbooks next to the code</a:t>
             </a:r>
-            <a:endParaRPr lang="en-US" sz="1280" dirty="0"/>
+            <a:endParaRPr lang="en-US" sz="1800" dirty="0"/>
           </a:p>
           <a:p>
             <a:pPr marL="342900" indent="-342900">
@@ -4163,7 +4165,7 @@
               <a:buChar char="▸"/>
             </a:pPr>
             <a:r>
-              <a:rPr lang="en-US" sz="1280" dirty="0">
+              <a:rPr lang="en-US" sz="1800" dirty="0">
                 <a:solidFill>
                   <a:srgbClr val="CBD5E1"/>
                 </a:solidFill>
@@ -4173,7 +4175,7 @@
               </a:rPr>
               <a:t>Handover that removes my dependency</a:t>
             </a:r>
-            <a:endParaRPr lang="en-US" sz="1280" dirty="0"/>
+            <a:endParaRPr lang="en-US" sz="1800" dirty="0"/>
           </a:p>
         </p:txBody>
       </p:sp>
@@ -4208,8 +4210,8 @@
         </p:nvSpPr>
         <p:spPr>
           <a:xfrm>
-            <a:off x="822960" y="6053328"/>
-            <a:ext cx="9692640" cy="457200"/>
+            <a:off x="822960" y="6035040"/>
+            <a:ext cx="10424160" cy="566928"/>
           </a:xfrm>
           <a:prstGeom prst="rect">
             <a:avLst/>
@@ -4225,9 +4227,9 @@
               <a:buNone/>
             </a:pPr>
             <a:r>
-              <a:rPr lang="en-US" sz="1150" dirty="0">
-                <a:solidFill>
-                  <a:srgbClr val="64748B"/>
+              <a:rPr lang="en-US" sz="1800" dirty="0">
+                <a:solidFill>
+                  <a:srgbClr val="8FA3BF"/>
                 </a:solidFill>
                 <a:latin typeface="Segoe UI" pitchFamily="34" charset="0"/>
                 <a:ea typeface="Segoe UI" pitchFamily="34" charset="-122"/>
@@ -4235,7 +4237,7 @@
               </a:rPr>
               <a:t>The difference is not the tools - it is validation, honesty, and handover as defaults.</a:t>
             </a:r>
-            <a:endParaRPr lang="en-US" sz="1150" dirty="0"/>
+            <a:endParaRPr lang="en-US" sz="1800" dirty="0"/>
           </a:p>
         </p:txBody>
       </p:sp>
@@ -4247,8 +4249,8 @@
         </p:nvSpPr>
         <p:spPr>
           <a:xfrm>
-            <a:off x="10698480" y="6382512"/>
-            <a:ext cx="1188720" cy="365760"/>
+            <a:off x="10698480" y="6309360"/>
+            <a:ext cx="1188720" cy="411480"/>
           </a:xfrm>
           <a:prstGeom prst="rect">
             <a:avLst/>
@@ -4264,9 +4266,9 @@
               <a:buNone/>
             </a:pPr>
             <a:r>
-              <a:rPr lang="en-US" sz="1000" dirty="0">
-                <a:solidFill>
-                  <a:srgbClr val="64748B"/>
+              <a:rPr lang="en-US" sz="1800" dirty="0">
+                <a:solidFill>
+                  <a:srgbClr val="8FA3BF"/>
                 </a:solidFill>
                 <a:latin typeface="Consolas" pitchFamily="34" charset="0"/>
                 <a:ea typeface="Consolas" pitchFamily="34" charset="-122"/>
@@ -4274,7 +4276,7 @@
               </a:rPr>
               <a:t>11 / 14</a:t>
             </a:r>
-            <a:endParaRPr lang="en-US" sz="1000" dirty="0"/>
+            <a:endParaRPr lang="en-US" sz="1800" dirty="0"/>
           </a:p>
         </p:txBody>
       </p:sp>
@@ -4358,8 +4360,8 @@
         </p:nvSpPr>
         <p:spPr>
           <a:xfrm>
-            <a:off x="822960" y="502920"/>
-            <a:ext cx="10515600" cy="365760"/>
+            <a:off x="822960" y="457200"/>
+            <a:ext cx="10515600" cy="411480"/>
           </a:xfrm>
           <a:prstGeom prst="rect">
             <a:avLst/>
@@ -4375,7 +4377,7 @@
               <a:buNone/>
             </a:pPr>
             <a:r>
-              <a:rPr lang="en-US" sz="1200" spc="300" kern="0" dirty="0">
+              <a:rPr lang="en-US" sz="1800" spc="300" kern="0" dirty="0">
                 <a:solidFill>
                   <a:srgbClr val="06B6D4"/>
                 </a:solidFill>
@@ -4385,7 +4387,7 @@
               </a:rPr>
               <a:t>EFFORT MIX</a:t>
             </a:r>
-            <a:endParaRPr lang="en-US" sz="1200" dirty="0"/>
+            <a:endParaRPr lang="en-US" sz="1800" dirty="0"/>
           </a:p>
         </p:txBody>
       </p:sp>
@@ -4435,8 +4437,8 @@
           <p:nvPr/>
         </p:nvGraphicFramePr>
         <p:xfrm>
-          <a:off x="822960" y="1874520"/>
-          <a:ext cx="10515600" cy="3337560"/>
+          <a:off x="822960" y="1783080"/>
+          <a:ext cx="10515600" cy="3383280"/>
         </p:xfrm>
         <a:graphic xmlns:a="http://schemas.openxmlformats.org/drawingml/2006/main">
           <a:graphicData uri="http://schemas.openxmlformats.org/drawingml/2006/chart">
@@ -4452,7 +4454,7 @@
         </p:nvSpPr>
         <p:spPr>
           <a:xfrm>
-            <a:off x="822960" y="5413248"/>
+            <a:off x="822960" y="5321808"/>
             <a:ext cx="10515600" cy="0"/>
           </a:xfrm>
           <a:prstGeom prst="line">
@@ -4475,8 +4477,8 @@
         </p:nvSpPr>
         <p:spPr>
           <a:xfrm>
-            <a:off x="822960" y="5504688"/>
-            <a:ext cx="10424160" cy="411480"/>
+            <a:off x="822960" y="5394960"/>
+            <a:ext cx="10424160" cy="502920"/>
           </a:xfrm>
           <a:prstGeom prst="rect">
             <a:avLst/>
@@ -4492,7 +4494,7 @@
               <a:buNone/>
             </a:pPr>
             <a:r>
-              <a:rPr lang="en-US" sz="1300" i="1" dirty="0">
+              <a:rPr lang="en-US" sz="1800" i="1" dirty="0">
                 <a:solidFill>
                   <a:srgbClr val="06B6D4"/>
                 </a:solidFill>
@@ -4502,7 +4504,7 @@
               </a:rPr>
               <a:t>→  More than a third of the work happens before and after the code - that is what makes the code keep working after I leave.</a:t>
             </a:r>
-            <a:endParaRPr lang="en-US" sz="1300" dirty="0"/>
+            <a:endParaRPr lang="en-US" sz="1800" dirty="0"/>
           </a:p>
         </p:txBody>
       </p:sp>
@@ -4537,8 +4539,8 @@
         </p:nvSpPr>
         <p:spPr>
           <a:xfrm>
-            <a:off x="822960" y="6053328"/>
-            <a:ext cx="9692640" cy="457200"/>
+            <a:off x="822960" y="6035040"/>
+            <a:ext cx="10424160" cy="566928"/>
           </a:xfrm>
           <a:prstGeom prst="rect">
             <a:avLst/>
@@ -4554,9 +4556,9 @@
               <a:buNone/>
             </a:pPr>
             <a:r>
-              <a:rPr lang="en-US" sz="1150" dirty="0">
-                <a:solidFill>
-                  <a:srgbClr val="64748B"/>
+              <a:rPr lang="en-US" sz="1800" dirty="0">
+                <a:solidFill>
+                  <a:srgbClr val="8FA3BF"/>
                 </a:solidFill>
                 <a:latin typeface="Segoe UI" pitchFamily="34" charset="0"/>
                 <a:ea typeface="Segoe UI" pitchFamily="34" charset="-122"/>
@@ -4564,7 +4566,7 @@
               </a:rPr>
               <a:t>Illustrative effort split for a mid-size scraping or automation engagement.</a:t>
             </a:r>
-            <a:endParaRPr lang="en-US" sz="1150" dirty="0"/>
+            <a:endParaRPr lang="en-US" sz="1800" dirty="0"/>
           </a:p>
         </p:txBody>
       </p:sp>
@@ -4576,8 +4578,8 @@
         </p:nvSpPr>
         <p:spPr>
           <a:xfrm>
-            <a:off x="10698480" y="6382512"/>
-            <a:ext cx="1188720" cy="365760"/>
+            <a:off x="10698480" y="6309360"/>
+            <a:ext cx="1188720" cy="411480"/>
           </a:xfrm>
           <a:prstGeom prst="rect">
             <a:avLst/>
@@ -4593,9 +4595,9 @@
               <a:buNone/>
             </a:pPr>
             <a:r>
-              <a:rPr lang="en-US" sz="1000" dirty="0">
-                <a:solidFill>
-                  <a:srgbClr val="64748B"/>
+              <a:rPr lang="en-US" sz="1800" dirty="0">
+                <a:solidFill>
+                  <a:srgbClr val="8FA3BF"/>
                 </a:solidFill>
                 <a:latin typeface="Consolas" pitchFamily="34" charset="0"/>
                 <a:ea typeface="Consolas" pitchFamily="34" charset="-122"/>
@@ -4603,7 +4605,7 @@
               </a:rPr>
               <a:t>12 / 14</a:t>
             </a:r>
-            <a:endParaRPr lang="en-US" sz="1000" dirty="0"/>
+            <a:endParaRPr lang="en-US" sz="1800" dirty="0"/>
           </a:p>
         </p:txBody>
       </p:sp>
@@ -4687,8 +4689,8 @@
         </p:nvSpPr>
         <p:spPr>
           <a:xfrm>
-            <a:off x="822960" y="502920"/>
-            <a:ext cx="10515600" cy="365760"/>
+            <a:off x="822960" y="457200"/>
+            <a:ext cx="10515600" cy="411480"/>
           </a:xfrm>
           <a:prstGeom prst="rect">
             <a:avLst/>
@@ -4704,7 +4706,7 @@
               <a:buNone/>
             </a:pPr>
             <a:r>
-              <a:rPr lang="en-US" sz="1200" spc="300" kern="0" dirty="0">
+              <a:rPr lang="en-US" sz="1800" spc="300" kern="0" dirty="0">
                 <a:solidFill>
                   <a:srgbClr val="06B6D4"/>
                 </a:solidFill>
@@ -4714,7 +4716,7 @@
               </a:rPr>
               <a:t>HANDOVER</a:t>
             </a:r>
-            <a:endParaRPr lang="en-US" sz="1200" dirty="0"/>
+            <a:endParaRPr lang="en-US" sz="1800" dirty="0"/>
           </a:p>
         </p:txBody>
       </p:sp>
@@ -4765,8 +4767,8 @@
         </p:nvSpPr>
         <p:spPr>
           <a:xfrm>
-            <a:off x="868680" y="2011680"/>
-            <a:ext cx="10424160" cy="3566160"/>
+            <a:off x="868680" y="1965960"/>
+            <a:ext cx="10424160" cy="3840480"/>
           </a:xfrm>
           <a:prstGeom prst="rect">
             <a:avLst/>
@@ -4789,7 +4791,7 @@
               <a:buChar char="▸"/>
             </a:pPr>
             <a:r>
-              <a:rPr lang="en-US" sz="1600" dirty="0">
+              <a:rPr lang="en-US" sz="2000" dirty="0">
                 <a:solidFill>
                   <a:srgbClr val="CBD5E1"/>
                 </a:solidFill>
@@ -4799,7 +4801,7 @@
               </a:rPr>
               <a:t>Documentation written for the person who was not in the room - a new hire can follow it.</a:t>
             </a:r>
-            <a:endParaRPr lang="en-US" sz="1600" dirty="0"/>
+            <a:endParaRPr lang="en-US" sz="2000" dirty="0"/>
           </a:p>
           <a:p>
             <a:pPr marL="342900" indent="-342900">
@@ -4813,7 +4815,7 @@
               <a:buChar char="▸"/>
             </a:pPr>
             <a:r>
-              <a:rPr lang="en-US" sz="1600" dirty="0">
+              <a:rPr lang="en-US" sz="2000" dirty="0">
                 <a:solidFill>
                   <a:srgbClr val="CBD5E1"/>
                 </a:solidFill>
@@ -4823,7 +4825,7 @@
               </a:rPr>
               <a:t>Runbooks live next to the pipelines: restart, re-run, and recovery are one page each.</a:t>
             </a:r>
-            <a:endParaRPr lang="en-US" sz="1600" dirty="0"/>
+            <a:endParaRPr lang="en-US" sz="2000" dirty="0"/>
           </a:p>
           <a:p>
             <a:pPr marL="342900" indent="-342900">
@@ -4837,7 +4839,7 @@
               <a:buChar char="▸"/>
             </a:pPr>
             <a:r>
-              <a:rPr lang="en-US" sz="1600" dirty="0">
+              <a:rPr lang="en-US" sz="2000" dirty="0">
                 <a:solidFill>
                   <a:srgbClr val="CBD5E1"/>
                 </a:solidFill>
@@ -4847,7 +4849,7 @@
               </a:rPr>
               <a:t>Your data stays where you decide it should - local-first options keep sensitive data on your infrastructure.</a:t>
             </a:r>
-            <a:endParaRPr lang="en-US" sz="1600" dirty="0"/>
+            <a:endParaRPr lang="en-US" sz="2000" dirty="0"/>
           </a:p>
           <a:p>
             <a:pPr marL="342900" indent="-342900">
@@ -4861,7 +4863,7 @@
               <a:buChar char="▸"/>
             </a:pPr>
             <a:r>
-              <a:rPr lang="en-US" sz="1600" dirty="0">
+              <a:rPr lang="en-US" sz="2000" dirty="0">
                 <a:solidFill>
                   <a:srgbClr val="CBD5E1"/>
                 </a:solidFill>
@@ -4871,7 +4873,7 @@
               </a:rPr>
               <a:t>Scraping is designed ethically: public data, robots directives respected, rate limits built in.</a:t>
             </a:r>
-            <a:endParaRPr lang="en-US" sz="1600" dirty="0"/>
+            <a:endParaRPr lang="en-US" sz="2000" dirty="0"/>
           </a:p>
           <a:p>
             <a:pPr marL="342900" indent="-342900">
@@ -4885,7 +4887,7 @@
               <a:buChar char="▸"/>
             </a:pPr>
             <a:r>
-              <a:rPr lang="en-US" sz="1600" dirty="0">
+              <a:rPr lang="en-US" sz="2000" dirty="0">
                 <a:solidFill>
                   <a:srgbClr val="CBD5E1"/>
                 </a:solidFill>
@@ -4895,7 +4897,7 @@
               </a:rPr>
               <a:t>Maintenance is offered, never forced - the goal is that you stop needing me.</a:t>
             </a:r>
-            <a:endParaRPr lang="en-US" sz="1600" dirty="0"/>
+            <a:endParaRPr lang="en-US" sz="2000" dirty="0"/>
           </a:p>
         </p:txBody>
       </p:sp>
@@ -4930,8 +4932,8 @@
         </p:nvSpPr>
         <p:spPr>
           <a:xfrm>
-            <a:off x="822960" y="6053328"/>
-            <a:ext cx="9692640" cy="457200"/>
+            <a:off x="822960" y="6035040"/>
+            <a:ext cx="10424160" cy="566928"/>
           </a:xfrm>
           <a:prstGeom prst="rect">
             <a:avLst/>
@@ -4947,9 +4949,9 @@
               <a:buNone/>
             </a:pPr>
             <a:r>
-              <a:rPr lang="en-US" sz="1150" dirty="0">
-                <a:solidFill>
-                  <a:srgbClr val="64748B"/>
+              <a:rPr lang="en-US" sz="1800" dirty="0">
+                <a:solidFill>
+                  <a:srgbClr val="8FA3BF"/>
                 </a:solidFill>
                 <a:latin typeface="Segoe UI" pitchFamily="34" charset="0"/>
                 <a:ea typeface="Segoe UI" pitchFamily="34" charset="-122"/>
@@ -4957,7 +4959,7 @@
               </a:rPr>
               <a:t>Professionals have boundaries and boring technology; both make handover boring - which is the point.</a:t>
             </a:r>
-            <a:endParaRPr lang="en-US" sz="1150" dirty="0"/>
+            <a:endParaRPr lang="en-US" sz="1800" dirty="0"/>
           </a:p>
         </p:txBody>
       </p:sp>
@@ -4969,8 +4971,8 @@
         </p:nvSpPr>
         <p:spPr>
           <a:xfrm>
-            <a:off x="10698480" y="6382512"/>
-            <a:ext cx="1188720" cy="365760"/>
+            <a:off x="10698480" y="6309360"/>
+            <a:ext cx="1188720" cy="411480"/>
           </a:xfrm>
           <a:prstGeom prst="rect">
             <a:avLst/>
@@ -4986,9 +4988,9 @@
               <a:buNone/>
             </a:pPr>
             <a:r>
-              <a:rPr lang="en-US" sz="1000" dirty="0">
-                <a:solidFill>
-                  <a:srgbClr val="64748B"/>
+              <a:rPr lang="en-US" sz="1800" dirty="0">
+                <a:solidFill>
+                  <a:srgbClr val="8FA3BF"/>
                 </a:solidFill>
                 <a:latin typeface="Consolas" pitchFamily="34" charset="0"/>
                 <a:ea typeface="Consolas" pitchFamily="34" charset="-122"/>
@@ -4996,7 +4998,7 @@
               </a:rPr>
               <a:t>13 / 14</a:t>
             </a:r>
-            <a:endParaRPr lang="en-US" sz="1000" dirty="0"/>
+            <a:endParaRPr lang="en-US" sz="1800" dirty="0"/>
           </a:p>
         </p:txBody>
       </p:sp>
@@ -5080,8 +5082,8 @@
         </p:nvSpPr>
         <p:spPr>
           <a:xfrm>
-            <a:off x="822960" y="1417320"/>
-            <a:ext cx="10515600" cy="411480"/>
+            <a:off x="822960" y="1371600"/>
+            <a:ext cx="10515600" cy="457200"/>
           </a:xfrm>
           <a:prstGeom prst="rect">
             <a:avLst/>
@@ -5097,7 +5099,7 @@
               <a:buNone/>
             </a:pPr>
             <a:r>
-              <a:rPr lang="en-US" sz="1300" spc="400" kern="0" dirty="0">
+              <a:rPr lang="en-US" sz="1800" spc="400" kern="0" dirty="0">
                 <a:solidFill>
                   <a:srgbClr val="06B6D4"/>
                 </a:solidFill>
@@ -5107,7 +5109,7 @@
               </a:rPr>
               <a:t>WORK WITH ME</a:t>
             </a:r>
-            <a:endParaRPr lang="en-US" sz="1300" dirty="0"/>
+            <a:endParaRPr lang="en-US" sz="1800" dirty="0"/>
           </a:p>
         </p:txBody>
       </p:sp>
@@ -5119,7 +5121,7 @@
         </p:nvSpPr>
         <p:spPr>
           <a:xfrm>
-            <a:off x="822960" y="1920240"/>
+            <a:off x="822960" y="1874520"/>
             <a:ext cx="10515600" cy="1371600"/>
           </a:xfrm>
           <a:prstGeom prst="rect">
@@ -5158,8 +5160,8 @@
         </p:nvSpPr>
         <p:spPr>
           <a:xfrm>
-            <a:off x="2011680" y="3429000"/>
-            <a:ext cx="8183880" cy="1554480"/>
+            <a:off x="2011680" y="3383280"/>
+            <a:ext cx="8183880" cy="1691640"/>
           </a:xfrm>
           <a:prstGeom prst="rect">
             <a:avLst/>
@@ -5178,7 +5180,7 @@
               <a:buNone/>
             </a:pPr>
             <a:r>
-              <a:rPr lang="en-US" sz="1500" dirty="0">
+              <a:rPr lang="en-US" sz="2000" dirty="0">
                 <a:solidFill>
                   <a:srgbClr val="CBD5E1"/>
                 </a:solidFill>
@@ -5195,7 +5197,7 @@
               <a:buNone/>
             </a:pPr>
             <a:r>
-              <a:rPr lang="en-US" sz="1500" dirty="0">
+              <a:rPr lang="en-US" sz="2000" dirty="0">
                 <a:solidFill>
                   <a:srgbClr val="CBD5E1"/>
                 </a:solidFill>
@@ -5212,7 +5214,7 @@
               <a:buNone/>
             </a:pPr>
             <a:r>
-              <a:rPr lang="en-US" sz="1500" dirty="0">
+              <a:rPr lang="en-US" sz="2000" dirty="0">
                 <a:solidFill>
                   <a:srgbClr val="CBD5E1"/>
                 </a:solidFill>
@@ -5222,7 +5224,7 @@
               </a:rPr>
               <a:t>Ask me the seven filter questions; my answers are all in this deck</a:t>
             </a:r>
-            <a:endParaRPr lang="en-US" sz="1500" dirty="0"/>
+            <a:endParaRPr lang="en-US" sz="2000" dirty="0"/>
           </a:p>
         </p:txBody>
       </p:sp>
@@ -5257,8 +5259,8 @@
         </p:nvSpPr>
         <p:spPr>
           <a:xfrm>
-            <a:off x="822960" y="5376672"/>
-            <a:ext cx="10515600" cy="457200"/>
+            <a:off x="822960" y="5349240"/>
+            <a:ext cx="10515600" cy="502920"/>
           </a:xfrm>
           <a:prstGeom prst="rect">
             <a:avLst/>
@@ -5274,7 +5276,7 @@
               <a:buNone/>
             </a:pPr>
             <a:r>
-              <a:rPr lang="en-US" sz="1350" b="1" dirty="0">
+              <a:rPr lang="en-US" sz="1800" b="1" dirty="0">
                 <a:solidFill>
                   <a:srgbClr val="06B6D4"/>
                 </a:solidFill>
@@ -5284,7 +5286,7 @@
               </a:rPr>
               <a:t>rezalianvatiady.github.io · github.com/rezalianvatiady</a:t>
             </a:r>
-            <a:endParaRPr lang="en-US" sz="1350" dirty="0"/>
+            <a:endParaRPr lang="en-US" sz="1800" dirty="0"/>
           </a:p>
         </p:txBody>
       </p:sp>
@@ -5296,8 +5298,8 @@
         </p:nvSpPr>
         <p:spPr>
           <a:xfrm>
-            <a:off x="10698480" y="6382512"/>
-            <a:ext cx="1188720" cy="365760"/>
+            <a:off x="10698480" y="6309360"/>
+            <a:ext cx="1188720" cy="411480"/>
           </a:xfrm>
           <a:prstGeom prst="rect">
             <a:avLst/>
@@ -5313,9 +5315,9 @@
               <a:buNone/>
             </a:pPr>
             <a:r>
-              <a:rPr lang="en-US" sz="1000" dirty="0">
-                <a:solidFill>
-                  <a:srgbClr val="64748B"/>
+              <a:rPr lang="en-US" sz="1800" dirty="0">
+                <a:solidFill>
+                  <a:srgbClr val="8FA3BF"/>
                 </a:solidFill>
                 <a:latin typeface="Consolas" pitchFamily="34" charset="0"/>
                 <a:ea typeface="Consolas" pitchFamily="34" charset="-122"/>
@@ -5323,7 +5325,7 @@
               </a:rPr>
               <a:t>14 / 14</a:t>
             </a:r>
-            <a:endParaRPr lang="en-US" sz="1000" dirty="0"/>
+            <a:endParaRPr lang="en-US" sz="1800" dirty="0"/>
           </a:p>
         </p:txBody>
       </p:sp>
@@ -5407,8 +5409,8 @@
         </p:nvSpPr>
         <p:spPr>
           <a:xfrm>
-            <a:off x="822960" y="502920"/>
-            <a:ext cx="10515600" cy="365760"/>
+            <a:off x="822960" y="457200"/>
+            <a:ext cx="10515600" cy="411480"/>
           </a:xfrm>
           <a:prstGeom prst="rect">
             <a:avLst/>
@@ -5424,7 +5426,7 @@
               <a:buNone/>
             </a:pPr>
             <a:r>
-              <a:rPr lang="en-US" sz="1200" spc="300" kern="0" dirty="0">
+              <a:rPr lang="en-US" sz="1800" spc="300" kern="0" dirty="0">
                 <a:solidFill>
                   <a:srgbClr val="06B6D4"/>
                 </a:solidFill>
@@ -5434,7 +5436,7 @@
               </a:rPr>
               <a:t>AGENDA</a:t>
             </a:r>
-            <a:endParaRPr lang="en-US" sz="1200" dirty="0"/>
+            <a:endParaRPr lang="en-US" sz="1800" dirty="0"/>
           </a:p>
         </p:txBody>
       </p:sp>
@@ -5485,8 +5487,8 @@
         </p:nvSpPr>
         <p:spPr>
           <a:xfrm>
-            <a:off x="868680" y="2112264"/>
-            <a:ext cx="420624" cy="420624"/>
+            <a:off x="868680" y="2103120"/>
+            <a:ext cx="457200" cy="457200"/>
           </a:xfrm>
           <a:prstGeom prst="ellipse">
             <a:avLst/>
@@ -5510,8 +5512,8 @@
         </p:nvSpPr>
         <p:spPr>
           <a:xfrm>
-            <a:off x="868680" y="2112264"/>
-            <a:ext cx="420624" cy="420624"/>
+            <a:off x="868680" y="2103120"/>
+            <a:ext cx="457200" cy="457200"/>
           </a:xfrm>
           <a:prstGeom prst="rect">
             <a:avLst/>
@@ -5527,7 +5529,7 @@
               <a:buNone/>
             </a:pPr>
             <a:r>
-              <a:rPr lang="en-US" sz="1300" b="1" dirty="0">
+              <a:rPr lang="en-US" sz="1800" b="1" dirty="0">
                 <a:solidFill>
                   <a:srgbClr val="3B82F6"/>
                 </a:solidFill>
@@ -5537,7 +5539,7 @@
               </a:rPr>
               <a:t>1</a:t>
             </a:r>
-            <a:endParaRPr lang="en-US" sz="1300" dirty="0"/>
+            <a:endParaRPr lang="en-US" sz="1800" dirty="0"/>
           </a:p>
         </p:txBody>
       </p:sp>
@@ -5549,8 +5551,8 @@
         </p:nvSpPr>
         <p:spPr>
           <a:xfrm>
-            <a:off x="1435608" y="2057400"/>
-            <a:ext cx="4480560" cy="822960"/>
+            <a:off x="1472184" y="2011680"/>
+            <a:ext cx="4443984" cy="960120"/>
           </a:xfrm>
           <a:prstGeom prst="rect">
             <a:avLst/>
@@ -5566,7 +5568,7 @@
               <a:buNone/>
             </a:pPr>
             <a:r>
-              <a:rPr lang="en-US" sz="1450" dirty="0">
+              <a:rPr lang="en-US" sz="2000" dirty="0">
                 <a:solidFill>
                   <a:srgbClr val="CBD5E1"/>
                 </a:solidFill>
@@ -5576,7 +5578,7 @@
               </a:rPr>
               <a:t>What I take on - and the open-source frameworks behind it</a:t>
             </a:r>
-            <a:endParaRPr lang="en-US" sz="1450" dirty="0"/>
+            <a:endParaRPr lang="en-US" sz="2000" dirty="0"/>
           </a:p>
         </p:txBody>
       </p:sp>
@@ -5588,8 +5590,8 @@
         </p:nvSpPr>
         <p:spPr>
           <a:xfrm>
-            <a:off x="868680" y="3044952"/>
-            <a:ext cx="420624" cy="420624"/>
+            <a:off x="868680" y="3182112"/>
+            <a:ext cx="457200" cy="457200"/>
           </a:xfrm>
           <a:prstGeom prst="ellipse">
             <a:avLst/>
@@ -5613,8 +5615,8 @@
         </p:nvSpPr>
         <p:spPr>
           <a:xfrm>
-            <a:off x="868680" y="3044952"/>
-            <a:ext cx="420624" cy="420624"/>
+            <a:off x="868680" y="3182112"/>
+            <a:ext cx="457200" cy="457200"/>
           </a:xfrm>
           <a:prstGeom prst="rect">
             <a:avLst/>
@@ -5630,7 +5632,7 @@
               <a:buNone/>
             </a:pPr>
             <a:r>
-              <a:rPr lang="en-US" sz="1300" b="1" dirty="0">
+              <a:rPr lang="en-US" sz="1800" b="1" dirty="0">
                 <a:solidFill>
                   <a:srgbClr val="06B6D4"/>
                 </a:solidFill>
@@ -5640,7 +5642,7 @@
               </a:rPr>
               <a:t>2</a:t>
             </a:r>
-            <a:endParaRPr lang="en-US" sz="1300" dirty="0"/>
+            <a:endParaRPr lang="en-US" sz="1800" dirty="0"/>
           </a:p>
         </p:txBody>
       </p:sp>
@@ -5652,8 +5654,8 @@
         </p:nvSpPr>
         <p:spPr>
           <a:xfrm>
-            <a:off x="1435608" y="2990088"/>
-            <a:ext cx="4480560" cy="822960"/>
+            <a:off x="1472184" y="3090672"/>
+            <a:ext cx="4443984" cy="960120"/>
           </a:xfrm>
           <a:prstGeom prst="rect">
             <a:avLst/>
@@ -5669,7 +5671,7 @@
               <a:buNone/>
             </a:pPr>
             <a:r>
-              <a:rPr lang="en-US" sz="1450" dirty="0">
+              <a:rPr lang="en-US" sz="2000" dirty="0">
                 <a:solidFill>
                   <a:srgbClr val="CBD5E1"/>
                 </a:solidFill>
@@ -5679,7 +5681,7 @@
               </a:rPr>
               <a:t>Week one: scoping that decides the project</a:t>
             </a:r>
-            <a:endParaRPr lang="en-US" sz="1450" dirty="0"/>
+            <a:endParaRPr lang="en-US" sz="2000" dirty="0"/>
           </a:p>
         </p:txBody>
       </p:sp>
@@ -5691,8 +5693,8 @@
         </p:nvSpPr>
         <p:spPr>
           <a:xfrm>
-            <a:off x="868680" y="3977640"/>
-            <a:ext cx="420624" cy="420624"/>
+            <a:off x="868680" y="4261104"/>
+            <a:ext cx="457200" cy="457200"/>
           </a:xfrm>
           <a:prstGeom prst="ellipse">
             <a:avLst/>
@@ -5716,8 +5718,8 @@
         </p:nvSpPr>
         <p:spPr>
           <a:xfrm>
-            <a:off x="868680" y="3977640"/>
-            <a:ext cx="420624" cy="420624"/>
+            <a:off x="868680" y="4261104"/>
+            <a:ext cx="457200" cy="457200"/>
           </a:xfrm>
           <a:prstGeom prst="rect">
             <a:avLst/>
@@ -5733,7 +5735,7 @@
               <a:buNone/>
             </a:pPr>
             <a:r>
-              <a:rPr lang="en-US" sz="1300" b="1" dirty="0">
+              <a:rPr lang="en-US" sz="1800" b="1" dirty="0">
                 <a:solidFill>
                   <a:srgbClr val="3B82F6"/>
                 </a:solidFill>
@@ -5743,7 +5745,7 @@
               </a:rPr>
               <a:t>3</a:t>
             </a:r>
-            <a:endParaRPr lang="en-US" sz="1300" dirty="0"/>
+            <a:endParaRPr lang="en-US" sz="1800" dirty="0"/>
           </a:p>
         </p:txBody>
       </p:sp>
@@ -5755,8 +5757,8 @@
         </p:nvSpPr>
         <p:spPr>
           <a:xfrm>
-            <a:off x="1435608" y="3922776"/>
-            <a:ext cx="4480560" cy="822960"/>
+            <a:off x="1472184" y="4169664"/>
+            <a:ext cx="4443984" cy="960120"/>
           </a:xfrm>
           <a:prstGeom prst="rect">
             <a:avLst/>
@@ -5772,7 +5774,7 @@
               <a:buNone/>
             </a:pPr>
             <a:r>
-              <a:rPr lang="en-US" sz="1450" dirty="0">
+              <a:rPr lang="en-US" sz="2000" dirty="0">
                 <a:solidFill>
                   <a:srgbClr val="CBD5E1"/>
                 </a:solidFill>
@@ -5782,7 +5784,7 @@
               </a:rPr>
               <a:t>Validation-first delivery and honest communication</a:t>
             </a:r>
-            <a:endParaRPr lang="en-US" sz="1450" dirty="0"/>
+            <a:endParaRPr lang="en-US" sz="2000" dirty="0"/>
           </a:p>
         </p:txBody>
       </p:sp>
@@ -5794,8 +5796,8 @@
         </p:nvSpPr>
         <p:spPr>
           <a:xfrm>
-            <a:off x="6355080" y="2112264"/>
-            <a:ext cx="420624" cy="420624"/>
+            <a:off x="6355080" y="2103120"/>
+            <a:ext cx="457200" cy="457200"/>
           </a:xfrm>
           <a:prstGeom prst="ellipse">
             <a:avLst/>
@@ -5819,8 +5821,8 @@
         </p:nvSpPr>
         <p:spPr>
           <a:xfrm>
-            <a:off x="6355080" y="2112264"/>
-            <a:ext cx="420624" cy="420624"/>
+            <a:off x="6355080" y="2103120"/>
+            <a:ext cx="457200" cy="457200"/>
           </a:xfrm>
           <a:prstGeom prst="rect">
             <a:avLst/>
@@ -5836,7 +5838,7 @@
               <a:buNone/>
             </a:pPr>
             <a:r>
-              <a:rPr lang="en-US" sz="1300" b="1" dirty="0">
+              <a:rPr lang="en-US" sz="1800" b="1" dirty="0">
                 <a:solidFill>
                   <a:srgbClr val="06B6D4"/>
                 </a:solidFill>
@@ -5846,7 +5848,7 @@
               </a:rPr>
               <a:t>4</a:t>
             </a:r>
-            <a:endParaRPr lang="en-US" sz="1300" dirty="0"/>
+            <a:endParaRPr lang="en-US" sz="1800" dirty="0"/>
           </a:p>
         </p:txBody>
       </p:sp>
@@ -5858,8 +5860,8 @@
         </p:nvSpPr>
         <p:spPr>
           <a:xfrm>
-            <a:off x="6922008" y="2057400"/>
-            <a:ext cx="4480560" cy="822960"/>
+            <a:off x="6958584" y="2011680"/>
+            <a:ext cx="4443984" cy="960120"/>
           </a:xfrm>
           <a:prstGeom prst="rect">
             <a:avLst/>
@@ -5875,7 +5877,7 @@
               <a:buNone/>
             </a:pPr>
             <a:r>
-              <a:rPr lang="en-US" sz="1450" dirty="0">
+              <a:rPr lang="en-US" sz="2000" dirty="0">
                 <a:solidFill>
                   <a:srgbClr val="CBD5E1"/>
                 </a:solidFill>
@@ -5885,7 +5887,7 @@
               </a:rPr>
               <a:t>Handover: the best ending is not needing me</a:t>
             </a:r>
-            <a:endParaRPr lang="en-US" sz="1450" dirty="0"/>
+            <a:endParaRPr lang="en-US" sz="2000" dirty="0"/>
           </a:p>
         </p:txBody>
       </p:sp>
@@ -5897,8 +5899,8 @@
         </p:nvSpPr>
         <p:spPr>
           <a:xfrm>
-            <a:off x="6355080" y="3044952"/>
-            <a:ext cx="420624" cy="420624"/>
+            <a:off x="6355080" y="3182112"/>
+            <a:ext cx="457200" cy="457200"/>
           </a:xfrm>
           <a:prstGeom prst="ellipse">
             <a:avLst/>
@@ -5922,8 +5924,8 @@
         </p:nvSpPr>
         <p:spPr>
           <a:xfrm>
-            <a:off x="6355080" y="3044952"/>
-            <a:ext cx="420624" cy="420624"/>
+            <a:off x="6355080" y="3182112"/>
+            <a:ext cx="457200" cy="457200"/>
           </a:xfrm>
           <a:prstGeom prst="rect">
             <a:avLst/>
@@ -5939,7 +5941,7 @@
               <a:buNone/>
             </a:pPr>
             <a:r>
-              <a:rPr lang="en-US" sz="1300" b="1" dirty="0">
+              <a:rPr lang="en-US" sz="1800" b="1" dirty="0">
                 <a:solidFill>
                   <a:srgbClr val="3B82F6"/>
                 </a:solidFill>
@@ -5949,7 +5951,7 @@
               </a:rPr>
               <a:t>5</a:t>
             </a:r>
-            <a:endParaRPr lang="en-US" sz="1300" dirty="0"/>
+            <a:endParaRPr lang="en-US" sz="1800" dirty="0"/>
           </a:p>
         </p:txBody>
       </p:sp>
@@ -5961,8 +5963,8 @@
         </p:nvSpPr>
         <p:spPr>
           <a:xfrm>
-            <a:off x="6922008" y="2990088"/>
-            <a:ext cx="4480560" cy="822960"/>
+            <a:off x="6958584" y="3090672"/>
+            <a:ext cx="4443984" cy="960120"/>
           </a:xfrm>
           <a:prstGeom prst="rect">
             <a:avLst/>
@@ -5978,7 +5980,7 @@
               <a:buNone/>
             </a:pPr>
             <a:r>
-              <a:rPr lang="en-US" sz="1450" dirty="0">
+              <a:rPr lang="en-US" sz="2000" dirty="0">
                 <a:solidFill>
                   <a:srgbClr val="CBD5E1"/>
                 </a:solidFill>
@@ -5988,7 +5990,7 @@
               </a:rPr>
               <a:t>How to start: a scoping call, not a sales pitch</a:t>
             </a:r>
-            <a:endParaRPr lang="en-US" sz="1450" dirty="0"/>
+            <a:endParaRPr lang="en-US" sz="2000" dirty="0"/>
           </a:p>
         </p:txBody>
       </p:sp>
@@ -6000,8 +6002,8 @@
         </p:nvSpPr>
         <p:spPr>
           <a:xfrm>
-            <a:off x="10698480" y="6382512"/>
-            <a:ext cx="1188720" cy="365760"/>
+            <a:off x="10698480" y="6309360"/>
+            <a:ext cx="1188720" cy="411480"/>
           </a:xfrm>
           <a:prstGeom prst="rect">
             <a:avLst/>
@@ -6017,9 +6019,9 @@
               <a:buNone/>
             </a:pPr>
             <a:r>
-              <a:rPr lang="en-US" sz="1000" dirty="0">
-                <a:solidFill>
-                  <a:srgbClr val="64748B"/>
+              <a:rPr lang="en-US" sz="1800" dirty="0">
+                <a:solidFill>
+                  <a:srgbClr val="8FA3BF"/>
                 </a:solidFill>
                 <a:latin typeface="Consolas" pitchFamily="34" charset="0"/>
                 <a:ea typeface="Consolas" pitchFamily="34" charset="-122"/>
@@ -6027,7 +6029,7 @@
               </a:rPr>
               <a:t>2 / 14</a:t>
             </a:r>
-            <a:endParaRPr lang="en-US" sz="1000" dirty="0"/>
+            <a:endParaRPr lang="en-US" sz="1800" dirty="0"/>
           </a:p>
         </p:txBody>
       </p:sp>
@@ -6111,8 +6113,8 @@
         </p:nvSpPr>
         <p:spPr>
           <a:xfrm>
-            <a:off x="822960" y="502920"/>
-            <a:ext cx="10515600" cy="365760"/>
+            <a:off x="822960" y="457200"/>
+            <a:ext cx="10515600" cy="411480"/>
           </a:xfrm>
           <a:prstGeom prst="rect">
             <a:avLst/>
@@ -6128,7 +6130,7 @@
               <a:buNone/>
             </a:pPr>
             <a:r>
-              <a:rPr lang="en-US" sz="1200" spc="300" kern="0" dirty="0">
+              <a:rPr lang="en-US" sz="1800" spc="300" kern="0" dirty="0">
                 <a:solidFill>
                   <a:srgbClr val="06B6D4"/>
                 </a:solidFill>
@@ -6138,7 +6140,7 @@
               </a:rPr>
               <a:t>SERVICES</a:t>
             </a:r>
-            <a:endParaRPr lang="en-US" sz="1200" dirty="0"/>
+            <a:endParaRPr lang="en-US" sz="1800" dirty="0"/>
           </a:p>
         </p:txBody>
       </p:sp>
@@ -6189,8 +6191,8 @@
         </p:nvSpPr>
         <p:spPr>
           <a:xfrm>
-            <a:off x="868680" y="2011680"/>
-            <a:ext cx="10424160" cy="3566160"/>
+            <a:off x="868680" y="1965960"/>
+            <a:ext cx="10424160" cy="3840480"/>
           </a:xfrm>
           <a:prstGeom prst="rect">
             <a:avLst/>
@@ -6213,7 +6215,7 @@
               <a:buChar char="▸"/>
             </a:pPr>
             <a:r>
-              <a:rPr lang="en-US" sz="1600" dirty="0">
+              <a:rPr lang="en-US" sz="2000" dirty="0">
                 <a:solidFill>
                   <a:srgbClr val="CBD5E1"/>
                 </a:solidFill>
@@ -6223,7 +6225,7 @@
               </a:rPr>
               <a:t>Web scraping and data collection: market monitoring, price tracking, and research pipelines that survive the real web.</a:t>
             </a:r>
-            <a:endParaRPr lang="en-US" sz="1600" dirty="0"/>
+            <a:endParaRPr lang="en-US" sz="2000" dirty="0"/>
           </a:p>
           <a:p>
             <a:pPr marL="342900" indent="-342900">
@@ -6237,7 +6239,7 @@
               <a:buChar char="▸"/>
             </a:pPr>
             <a:r>
-              <a:rPr lang="en-US" sz="1600" dirty="0">
+              <a:rPr lang="en-US" sz="2000" dirty="0">
                 <a:solidFill>
                   <a:srgbClr val="CBD5E1"/>
                 </a:solidFill>
@@ -6247,7 +6249,7 @@
               </a:rPr>
               <a:t>BI and analytics: dashboards, reconciliation, and reporting built on Qlik Sense, Tableau, SQL, and Alteryx.</a:t>
             </a:r>
-            <a:endParaRPr lang="en-US" sz="1600" dirty="0"/>
+            <a:endParaRPr lang="en-US" sz="2000" dirty="0"/>
           </a:p>
           <a:p>
             <a:pPr marL="342900" indent="-342900">
@@ -6261,7 +6263,7 @@
               <a:buChar char="▸"/>
             </a:pPr>
             <a:r>
-              <a:rPr lang="en-US" sz="1600" dirty="0">
+              <a:rPr lang="en-US" sz="2000" dirty="0">
                 <a:solidFill>
                   <a:srgbClr val="CBD5E1"/>
                 </a:solidFill>
@@ -6271,7 +6273,7 @@
               </a:rPr>
               <a:t>AI automation: agents, document workflows, and local-first LLM systems that keep sensitive data on your machine.</a:t>
             </a:r>
-            <a:endParaRPr lang="en-US" sz="1600" dirty="0"/>
+            <a:endParaRPr lang="en-US" sz="2000" dirty="0"/>
           </a:p>
           <a:p>
             <a:pPr marL="342900" indent="-342900">
@@ -6285,7 +6287,7 @@
               <a:buChar char="▸"/>
             </a:pPr>
             <a:r>
-              <a:rPr lang="en-US" sz="1600" dirty="0">
+              <a:rPr lang="en-US" sz="2000" dirty="0">
                 <a:solidFill>
                   <a:srgbClr val="CBD5E1"/>
                 </a:solidFill>
@@ -6295,7 +6297,7 @@
               </a:rPr>
               <a:t>The frameworks behind it are open source: ODIS (4,305 LOC) and the Web Scraping Toolkit (4,398 LOC).</a:t>
             </a:r>
-            <a:endParaRPr lang="en-US" sz="1600" dirty="0"/>
+            <a:endParaRPr lang="en-US" sz="2000" dirty="0"/>
           </a:p>
         </p:txBody>
       </p:sp>
@@ -6330,8 +6332,8 @@
         </p:nvSpPr>
         <p:spPr>
           <a:xfrm>
-            <a:off x="822960" y="6053328"/>
-            <a:ext cx="9692640" cy="457200"/>
+            <a:off x="822960" y="6035040"/>
+            <a:ext cx="10424160" cy="566928"/>
           </a:xfrm>
           <a:prstGeom prst="rect">
             <a:avLst/>
@@ -6347,9 +6349,9 @@
               <a:buNone/>
             </a:pPr>
             <a:r>
-              <a:rPr lang="en-US" sz="1150" dirty="0">
-                <a:solidFill>
-                  <a:srgbClr val="64748B"/>
+              <a:rPr lang="en-US" sz="1800" dirty="0">
+                <a:solidFill>
+                  <a:srgbClr val="8FA3BF"/>
                 </a:solidFill>
                 <a:latin typeface="Segoe UI" pitchFamily="34" charset="0"/>
                 <a:ea typeface="Segoe UI" pitchFamily="34" charset="-122"/>
@@ -6357,7 +6359,7 @@
               </a:rPr>
               <a:t>Delivered worldwide via Upwork - code, data, and documentation always land in your hands.</a:t>
             </a:r>
-            <a:endParaRPr lang="en-US" sz="1150" dirty="0"/>
+            <a:endParaRPr lang="en-US" sz="1800" dirty="0"/>
           </a:p>
         </p:txBody>
       </p:sp>
@@ -6369,8 +6371,8 @@
         </p:nvSpPr>
         <p:spPr>
           <a:xfrm>
-            <a:off x="10698480" y="6382512"/>
-            <a:ext cx="1188720" cy="365760"/>
+            <a:off x="10698480" y="6309360"/>
+            <a:ext cx="1188720" cy="411480"/>
           </a:xfrm>
           <a:prstGeom prst="rect">
             <a:avLst/>
@@ -6386,9 +6388,9 @@
               <a:buNone/>
             </a:pPr>
             <a:r>
-              <a:rPr lang="en-US" sz="1000" dirty="0">
-                <a:solidFill>
-                  <a:srgbClr val="64748B"/>
+              <a:rPr lang="en-US" sz="1800" dirty="0">
+                <a:solidFill>
+                  <a:srgbClr val="8FA3BF"/>
                 </a:solidFill>
                 <a:latin typeface="Consolas" pitchFamily="34" charset="0"/>
                 <a:ea typeface="Consolas" pitchFamily="34" charset="-122"/>
@@ -6396,7 +6398,7 @@
               </a:rPr>
               <a:t>3 / 14</a:t>
             </a:r>
-            <a:endParaRPr lang="en-US" sz="1000" dirty="0"/>
+            <a:endParaRPr lang="en-US" sz="1800" dirty="0"/>
           </a:p>
         </p:txBody>
       </p:sp>
@@ -6480,8 +6482,8 @@
         </p:nvSpPr>
         <p:spPr>
           <a:xfrm>
-            <a:off x="822960" y="502920"/>
-            <a:ext cx="10515600" cy="365760"/>
+            <a:off x="822960" y="457200"/>
+            <a:ext cx="10515600" cy="411480"/>
           </a:xfrm>
           <a:prstGeom prst="rect">
             <a:avLst/>
@@ -6497,7 +6499,7 @@
               <a:buNone/>
             </a:pPr>
             <a:r>
-              <a:rPr lang="en-US" sz="1200" spc="300" kern="0" dirty="0">
+              <a:rPr lang="en-US" sz="1800" spc="300" kern="0" dirty="0">
                 <a:solidFill>
                   <a:srgbClr val="06B6D4"/>
                 </a:solidFill>
@@ -6507,7 +6509,7 @@
               </a:rPr>
               <a:t>TRACK RECORD</a:t>
             </a:r>
-            <a:endParaRPr lang="en-US" sz="1200" dirty="0"/>
+            <a:endParaRPr lang="en-US" sz="1800" dirty="0"/>
           </a:p>
         </p:txBody>
       </p:sp>
@@ -6558,8 +6560,8 @@
         </p:nvSpPr>
         <p:spPr>
           <a:xfrm>
-            <a:off x="822960" y="2194560"/>
-            <a:ext cx="2423160" cy="2697480"/>
+            <a:off x="822960" y="1965960"/>
+            <a:ext cx="2423160" cy="3154680"/>
           </a:xfrm>
           <a:prstGeom prst="roundRect">
             <a:avLst>
@@ -6585,7 +6587,7 @@
         </p:nvSpPr>
         <p:spPr>
           <a:xfrm>
-            <a:off x="960120" y="2514600"/>
+            <a:off x="960120" y="2194560"/>
             <a:ext cx="2148840" cy="914400"/>
           </a:xfrm>
           <a:prstGeom prst="rect">
@@ -6624,8 +6626,8 @@
         </p:nvSpPr>
         <p:spPr>
           <a:xfrm>
-            <a:off x="960120" y="3520440"/>
-            <a:ext cx="2148840" cy="502920"/>
+            <a:off x="960120" y="3200400"/>
+            <a:ext cx="2148840" cy="868680"/>
           </a:xfrm>
           <a:prstGeom prst="rect">
             <a:avLst/>
@@ -6641,7 +6643,7 @@
               <a:buNone/>
             </a:pPr>
             <a:r>
-              <a:rPr lang="en-US" sz="1450" b="1" dirty="0">
+              <a:rPr lang="en-US" sz="1800" b="1" dirty="0">
                 <a:solidFill>
                   <a:srgbClr val="FFFFFF"/>
                 </a:solidFill>
@@ -6651,7 +6653,7 @@
               </a:rPr>
               <a:t>Scrapers shipped</a:t>
             </a:r>
-            <a:endParaRPr lang="en-US" sz="1450" dirty="0"/>
+            <a:endParaRPr lang="en-US" sz="1800" dirty="0"/>
           </a:p>
         </p:txBody>
       </p:sp>
@@ -6663,8 +6665,8 @@
         </p:nvSpPr>
         <p:spPr>
           <a:xfrm>
-            <a:off x="1005840" y="4069080"/>
-            <a:ext cx="2057400" cy="685800"/>
+            <a:off x="1005840" y="4114800"/>
+            <a:ext cx="2057400" cy="914400"/>
           </a:xfrm>
           <a:prstGeom prst="rect">
             <a:avLst/>
@@ -6680,7 +6682,7 @@
               <a:buNone/>
             </a:pPr>
             <a:r>
-              <a:rPr lang="en-US" sz="1050" dirty="0">
+              <a:rPr lang="en-US" sz="1800" dirty="0">
                 <a:solidFill>
                   <a:srgbClr val="94A3B8"/>
                 </a:solidFill>
@@ -6690,7 +6692,7 @@
               </a:rPr>
               <a:t>10 ODIS plus 10 WST, documented in the public portfolio</a:t>
             </a:r>
-            <a:endParaRPr lang="en-US" sz="1050" dirty="0"/>
+            <a:endParaRPr lang="en-US" sz="1800" dirty="0"/>
           </a:p>
         </p:txBody>
       </p:sp>
@@ -6702,8 +6704,8 @@
         </p:nvSpPr>
         <p:spPr>
           <a:xfrm>
-            <a:off x="3520440" y="2194560"/>
-            <a:ext cx="2423160" cy="2697480"/>
+            <a:off x="3520440" y="1965960"/>
+            <a:ext cx="2423160" cy="3154680"/>
           </a:xfrm>
           <a:prstGeom prst="roundRect">
             <a:avLst>
@@ -6729,7 +6731,7 @@
         </p:nvSpPr>
         <p:spPr>
           <a:xfrm>
-            <a:off x="3657600" y="2514600"/>
+            <a:off x="3657600" y="2194560"/>
             <a:ext cx="2148840" cy="914400"/>
           </a:xfrm>
           <a:prstGeom prst="rect">
@@ -6768,8 +6770,8 @@
         </p:nvSpPr>
         <p:spPr>
           <a:xfrm>
-            <a:off x="3657600" y="3520440"/>
-            <a:ext cx="2148840" cy="502920"/>
+            <a:off x="3657600" y="3200400"/>
+            <a:ext cx="2148840" cy="868680"/>
           </a:xfrm>
           <a:prstGeom prst="rect">
             <a:avLst/>
@@ -6785,7 +6787,7 @@
               <a:buNone/>
             </a:pPr>
             <a:r>
-              <a:rPr lang="en-US" sz="1450" b="1" dirty="0">
+              <a:rPr lang="en-US" sz="1800" b="1" dirty="0">
                 <a:solidFill>
                   <a:srgbClr val="FFFFFF"/>
                 </a:solidFill>
@@ -6795,7 +6797,7 @@
               </a:rPr>
               <a:t>Lines of code</a:t>
             </a:r>
-            <a:endParaRPr lang="en-US" sz="1450" dirty="0"/>
+            <a:endParaRPr lang="en-US" sz="1800" dirty="0"/>
           </a:p>
         </p:txBody>
       </p:sp>
@@ -6807,8 +6809,8 @@
         </p:nvSpPr>
         <p:spPr>
           <a:xfrm>
-            <a:off x="3703320" y="4069080"/>
-            <a:ext cx="2057400" cy="685800"/>
+            <a:off x="3703320" y="4114800"/>
+            <a:ext cx="2057400" cy="914400"/>
           </a:xfrm>
           <a:prstGeom prst="rect">
             <a:avLst/>
@@ -6824,7 +6826,7 @@
               <a:buNone/>
             </a:pPr>
             <a:r>
-              <a:rPr lang="en-US" sz="1050" dirty="0">
+              <a:rPr lang="en-US" sz="1800" dirty="0">
                 <a:solidFill>
                   <a:srgbClr val="94A3B8"/>
                 </a:solidFill>
@@ -6834,7 +6836,7 @@
               </a:rPr>
               <a:t>Two open-source frameworks any client can audit before hiring</a:t>
             </a:r>
-            <a:endParaRPr lang="en-US" sz="1050" dirty="0"/>
+            <a:endParaRPr lang="en-US" sz="1800" dirty="0"/>
           </a:p>
         </p:txBody>
       </p:sp>
@@ -6846,8 +6848,8 @@
         </p:nvSpPr>
         <p:spPr>
           <a:xfrm>
-            <a:off x="6217920" y="2194560"/>
-            <a:ext cx="2423160" cy="2697480"/>
+            <a:off x="6217920" y="1965960"/>
+            <a:ext cx="2423160" cy="3154680"/>
           </a:xfrm>
           <a:prstGeom prst="roundRect">
             <a:avLst>
@@ -6873,7 +6875,7 @@
         </p:nvSpPr>
         <p:spPr>
           <a:xfrm>
-            <a:off x="6355080" y="2514600"/>
+            <a:off x="6355080" y="2194560"/>
             <a:ext cx="2148840" cy="914400"/>
           </a:xfrm>
           <a:prstGeom prst="rect">
@@ -6912,8 +6914,8 @@
         </p:nvSpPr>
         <p:spPr>
           <a:xfrm>
-            <a:off x="6355080" y="3520440"/>
-            <a:ext cx="2148840" cy="502920"/>
+            <a:off x="6355080" y="3200400"/>
+            <a:ext cx="2148840" cy="868680"/>
           </a:xfrm>
           <a:prstGeom prst="rect">
             <a:avLst/>
@@ -6929,7 +6931,7 @@
               <a:buNone/>
             </a:pPr>
             <a:r>
-              <a:rPr lang="en-US" sz="1450" b="1" dirty="0">
+              <a:rPr lang="en-US" sz="1800" b="1" dirty="0">
                 <a:solidFill>
                   <a:srgbClr val="FFFFFF"/>
                 </a:solidFill>
@@ -6939,7 +6941,7 @@
               </a:rPr>
               <a:t>BI countries</a:t>
             </a:r>
-            <a:endParaRPr lang="en-US" sz="1450" dirty="0"/>
+            <a:endParaRPr lang="en-US" sz="1800" dirty="0"/>
           </a:p>
         </p:txBody>
       </p:sp>
@@ -6951,8 +6953,8 @@
         </p:nvSpPr>
         <p:spPr>
           <a:xfrm>
-            <a:off x="6400800" y="4069080"/>
-            <a:ext cx="2057400" cy="685800"/>
+            <a:off x="6400800" y="4114800"/>
+            <a:ext cx="2057400" cy="914400"/>
           </a:xfrm>
           <a:prstGeom prst="rect">
             <a:avLst/>
@@ -6968,7 +6970,7 @@
               <a:buNone/>
             </a:pPr>
             <a:r>
-              <a:rPr lang="en-US" sz="1050" dirty="0">
+              <a:rPr lang="en-US" sz="1800" dirty="0">
                 <a:solidFill>
                   <a:srgbClr val="94A3B8"/>
                 </a:solidFill>
@@ -6978,7 +6980,7 @@
               </a:rPr>
               <a:t>Enterprise operations for Indonesia, Taiwan, Hong Kong, and Macau</a:t>
             </a:r>
-            <a:endParaRPr lang="en-US" sz="1050" dirty="0"/>
+            <a:endParaRPr lang="en-US" sz="1800" dirty="0"/>
           </a:p>
         </p:txBody>
       </p:sp>
@@ -6990,8 +6992,8 @@
         </p:nvSpPr>
         <p:spPr>
           <a:xfrm>
-            <a:off x="8915400" y="2194560"/>
-            <a:ext cx="2423160" cy="2697480"/>
+            <a:off x="8915400" y="1965960"/>
+            <a:ext cx="2423160" cy="3154680"/>
           </a:xfrm>
           <a:prstGeom prst="roundRect">
             <a:avLst>
@@ -7017,7 +7019,7 @@
         </p:nvSpPr>
         <p:spPr>
           <a:xfrm>
-            <a:off x="9052560" y="2514600"/>
+            <a:off x="9052560" y="2194560"/>
             <a:ext cx="2148840" cy="914400"/>
           </a:xfrm>
           <a:prstGeom prst="rect">
@@ -7056,8 +7058,8 @@
         </p:nvSpPr>
         <p:spPr>
           <a:xfrm>
-            <a:off x="9052560" y="3520440"/>
-            <a:ext cx="2148840" cy="502920"/>
+            <a:off x="9052560" y="3200400"/>
+            <a:ext cx="2148840" cy="868680"/>
           </a:xfrm>
           <a:prstGeom prst="rect">
             <a:avLst/>
@@ -7073,7 +7075,7 @@
               <a:buNone/>
             </a:pPr>
             <a:r>
-              <a:rPr lang="en-US" sz="1450" b="1" dirty="0">
+              <a:rPr lang="en-US" sz="1800" b="1" dirty="0">
                 <a:solidFill>
                   <a:srgbClr val="FFFFFF"/>
                 </a:solidFill>
@@ -7083,7 +7085,7 @@
               </a:rPr>
               <a:t>Templates verified</a:t>
             </a:r>
-            <a:endParaRPr lang="en-US" sz="1450" dirty="0"/>
+            <a:endParaRPr lang="en-US" sz="1800" dirty="0"/>
           </a:p>
         </p:txBody>
       </p:sp>
@@ -7095,8 +7097,8 @@
         </p:nvSpPr>
         <p:spPr>
           <a:xfrm>
-            <a:off x="9098280" y="4069080"/>
-            <a:ext cx="2057400" cy="685800"/>
+            <a:off x="9098280" y="4114800"/>
+            <a:ext cx="2057400" cy="914400"/>
           </a:xfrm>
           <a:prstGeom prst="rect">
             <a:avLst/>
@@ -7112,7 +7114,7 @@
               <a:buNone/>
             </a:pPr>
             <a:r>
-              <a:rPr lang="en-US" sz="1050" dirty="0">
+              <a:rPr lang="en-US" sz="1800" dirty="0">
                 <a:solidFill>
                   <a:srgbClr val="94A3B8"/>
                 </a:solidFill>
@@ -7122,7 +7124,7 @@
               </a:rPr>
               <a:t>Every scraping toolkit template tested against live targets</a:t>
             </a:r>
-            <a:endParaRPr lang="en-US" sz="1050" dirty="0"/>
+            <a:endParaRPr lang="en-US" sz="1800" dirty="0"/>
           </a:p>
         </p:txBody>
       </p:sp>
@@ -7134,7 +7136,7 @@
         </p:nvSpPr>
         <p:spPr>
           <a:xfrm>
-            <a:off x="822960" y="5413248"/>
+            <a:off x="822960" y="5321808"/>
             <a:ext cx="10515600" cy="0"/>
           </a:xfrm>
           <a:prstGeom prst="line">
@@ -7157,8 +7159,8 @@
         </p:nvSpPr>
         <p:spPr>
           <a:xfrm>
-            <a:off x="822960" y="5504688"/>
-            <a:ext cx="10424160" cy="411480"/>
+            <a:off x="822960" y="5394960"/>
+            <a:ext cx="10424160" cy="502920"/>
           </a:xfrm>
           <a:prstGeom prst="rect">
             <a:avLst/>
@@ -7174,7 +7176,7 @@
               <a:buNone/>
             </a:pPr>
             <a:r>
-              <a:rPr lang="en-US" sz="1300" i="1" dirty="0">
+              <a:rPr lang="en-US" sz="1800" i="1" dirty="0">
                 <a:solidFill>
                   <a:srgbClr val="06B6D4"/>
                 </a:solidFill>
@@ -7184,7 +7186,7 @@
               </a:rPr>
               <a:t>→  Track record from the live portfolio - inspect it before we even talk.</a:t>
             </a:r>
-            <a:endParaRPr lang="en-US" sz="1300" dirty="0"/>
+            <a:endParaRPr lang="en-US" sz="1800" dirty="0"/>
           </a:p>
         </p:txBody>
       </p:sp>
@@ -7196,8 +7198,8 @@
         </p:nvSpPr>
         <p:spPr>
           <a:xfrm>
-            <a:off x="10698480" y="6382512"/>
-            <a:ext cx="1188720" cy="365760"/>
+            <a:off x="10698480" y="6309360"/>
+            <a:ext cx="1188720" cy="411480"/>
           </a:xfrm>
           <a:prstGeom prst="rect">
             <a:avLst/>
@@ -7213,9 +7215,9 @@
               <a:buNone/>
             </a:pPr>
             <a:r>
-              <a:rPr lang="en-US" sz="1000" dirty="0">
-                <a:solidFill>
-                  <a:srgbClr val="64748B"/>
+              <a:rPr lang="en-US" sz="1800" dirty="0">
+                <a:solidFill>
+                  <a:srgbClr val="8FA3BF"/>
                 </a:solidFill>
                 <a:latin typeface="Consolas" pitchFamily="34" charset="0"/>
                 <a:ea typeface="Consolas" pitchFamily="34" charset="-122"/>
@@ -7223,7 +7225,7 @@
               </a:rPr>
               <a:t>4 / 14</a:t>
             </a:r>
-            <a:endParaRPr lang="en-US" sz="1000" dirty="0"/>
+            <a:endParaRPr lang="en-US" sz="1800" dirty="0"/>
           </a:p>
         </p:txBody>
       </p:sp>
@@ -7307,8 +7309,8 @@
         </p:nvSpPr>
         <p:spPr>
           <a:xfrm>
-            <a:off x="822960" y="502920"/>
-            <a:ext cx="10515600" cy="365760"/>
+            <a:off x="822960" y="457200"/>
+            <a:ext cx="10515600" cy="411480"/>
           </a:xfrm>
           <a:prstGeom prst="rect">
             <a:avLst/>
@@ -7324,7 +7326,7 @@
               <a:buNone/>
             </a:pPr>
             <a:r>
-              <a:rPr lang="en-US" sz="1200" spc="300" kern="0" dirty="0">
+              <a:rPr lang="en-US" sz="1800" spc="300" kern="0" dirty="0">
                 <a:solidFill>
                   <a:srgbClr val="06B6D4"/>
                 </a:solidFill>
@@ -7334,7 +7336,7 @@
               </a:rPr>
               <a:t>DELIVERY LOOP</a:t>
             </a:r>
-            <a:endParaRPr lang="en-US" sz="1200" dirty="0"/>
+            <a:endParaRPr lang="en-US" sz="1800" dirty="0"/>
           </a:p>
         </p:txBody>
       </p:sp>
@@ -7385,8 +7387,8 @@
         </p:nvSpPr>
         <p:spPr>
           <a:xfrm>
-            <a:off x="774040" y="2514600"/>
-            <a:ext cx="1938528" cy="2103120"/>
+            <a:off x="774040" y="2331720"/>
+            <a:ext cx="1938528" cy="2697480"/>
           </a:xfrm>
           <a:prstGeom prst="roundRect">
             <a:avLst>
@@ -7412,8 +7414,8 @@
         </p:nvSpPr>
         <p:spPr>
           <a:xfrm>
-            <a:off x="902056" y="2633472"/>
-            <a:ext cx="1682496" cy="310896"/>
+            <a:off x="902056" y="2450592"/>
+            <a:ext cx="1682496" cy="365760"/>
           </a:xfrm>
           <a:prstGeom prst="rect">
             <a:avLst/>
@@ -7429,7 +7431,7 @@
               <a:buNone/>
             </a:pPr>
             <a:r>
-              <a:rPr lang="en-US" sz="1100" b="1" dirty="0">
+              <a:rPr lang="en-US" sz="1800" b="1" dirty="0">
                 <a:solidFill>
                   <a:srgbClr val="3B82F6"/>
                 </a:solidFill>
@@ -7439,7 +7441,7 @@
               </a:rPr>
               <a:t>01</a:t>
             </a:r>
-            <a:endParaRPr lang="en-US" sz="1100" dirty="0"/>
+            <a:endParaRPr lang="en-US" sz="1800" dirty="0"/>
           </a:p>
         </p:txBody>
       </p:sp>
@@ -7451,8 +7453,8 @@
         </p:nvSpPr>
         <p:spPr>
           <a:xfrm>
-            <a:off x="902056" y="2962656"/>
-            <a:ext cx="1682496" cy="566928"/>
+            <a:off x="902056" y="2834640"/>
+            <a:ext cx="1682496" cy="713232"/>
           </a:xfrm>
           <a:prstGeom prst="rect">
             <a:avLst/>
@@ -7468,7 +7470,7 @@
               <a:buNone/>
             </a:pPr>
             <a:r>
-              <a:rPr lang="en-US" sz="1350" b="1" dirty="0">
+              <a:rPr lang="en-US" sz="1800" b="1" dirty="0">
                 <a:solidFill>
                   <a:srgbClr val="FFFFFF"/>
                 </a:solidFill>
@@ -7478,7 +7480,7 @@
               </a:rPr>
               <a:t>Scope</a:t>
             </a:r>
-            <a:endParaRPr lang="en-US" sz="1350" dirty="0"/>
+            <a:endParaRPr lang="en-US" sz="1800" dirty="0"/>
           </a:p>
         </p:txBody>
       </p:sp>
@@ -7490,8 +7492,8 @@
         </p:nvSpPr>
         <p:spPr>
           <a:xfrm>
-            <a:off x="902056" y="3566160"/>
-            <a:ext cx="1682496" cy="960120"/>
+            <a:off x="902056" y="3584448"/>
+            <a:ext cx="1682496" cy="1371600"/>
           </a:xfrm>
           <a:prstGeom prst="rect">
             <a:avLst/>
@@ -7507,7 +7509,7 @@
               <a:buNone/>
             </a:pPr>
             <a:r>
-              <a:rPr lang="en-US" sz="980" dirty="0">
+              <a:rPr lang="en-US" sz="1800" dirty="0">
                 <a:solidFill>
                   <a:srgbClr val="CBD5E1"/>
                 </a:solidFill>
@@ -7517,7 +7519,7 @@
               </a:rPr>
               <a:t>The decision and its success criteria get written down before any code.</a:t>
             </a:r>
-            <a:endParaRPr lang="en-US" sz="980" dirty="0"/>
+            <a:endParaRPr lang="en-US" sz="1800" dirty="0"/>
           </a:p>
         </p:txBody>
       </p:sp>
@@ -7529,7 +7531,7 @@
         </p:nvSpPr>
         <p:spPr>
           <a:xfrm>
-            <a:off x="2726284" y="3419856"/>
+            <a:off x="2726284" y="3566160"/>
             <a:ext cx="210312" cy="274320"/>
           </a:xfrm>
           <a:prstGeom prst="rightArrow">
@@ -7549,8 +7551,8 @@
         </p:nvSpPr>
         <p:spPr>
           <a:xfrm>
-            <a:off x="2950312" y="2514600"/>
-            <a:ext cx="1938528" cy="2103120"/>
+            <a:off x="2950312" y="2331720"/>
+            <a:ext cx="1938528" cy="2697480"/>
           </a:xfrm>
           <a:prstGeom prst="roundRect">
             <a:avLst>
@@ -7576,8 +7578,8 @@
         </p:nvSpPr>
         <p:spPr>
           <a:xfrm>
-            <a:off x="3078328" y="2633472"/>
-            <a:ext cx="1682496" cy="310896"/>
+            <a:off x="3078328" y="2450592"/>
+            <a:ext cx="1682496" cy="365760"/>
           </a:xfrm>
           <a:prstGeom prst="rect">
             <a:avLst/>
@@ -7593,7 +7595,7 @@
               <a:buNone/>
             </a:pPr>
             <a:r>
-              <a:rPr lang="en-US" sz="1100" b="1" dirty="0">
+              <a:rPr lang="en-US" sz="1800" b="1" dirty="0">
                 <a:solidFill>
                   <a:srgbClr val="06B6D4"/>
                 </a:solidFill>
@@ -7603,7 +7605,7 @@
               </a:rPr>
               <a:t>02</a:t>
             </a:r>
-            <a:endParaRPr lang="en-US" sz="1100" dirty="0"/>
+            <a:endParaRPr lang="en-US" sz="1800" dirty="0"/>
           </a:p>
         </p:txBody>
       </p:sp>
@@ -7615,8 +7617,8 @@
         </p:nvSpPr>
         <p:spPr>
           <a:xfrm>
-            <a:off x="3078328" y="2962656"/>
-            <a:ext cx="1682496" cy="566928"/>
+            <a:off x="3078328" y="2834640"/>
+            <a:ext cx="1682496" cy="713232"/>
           </a:xfrm>
           <a:prstGeom prst="rect">
             <a:avLst/>
@@ -7632,7 +7634,7 @@
               <a:buNone/>
             </a:pPr>
             <a:r>
-              <a:rPr lang="en-US" sz="1350" b="1" dirty="0">
+              <a:rPr lang="en-US" sz="1800" b="1" dirty="0">
                 <a:solidFill>
                   <a:srgbClr val="FFFFFF"/>
                 </a:solidFill>
@@ -7642,7 +7644,7 @@
               </a:rPr>
               <a:t>Profile</a:t>
             </a:r>
-            <a:endParaRPr lang="en-US" sz="1350" dirty="0"/>
+            <a:endParaRPr lang="en-US" sz="1800" dirty="0"/>
           </a:p>
         </p:txBody>
       </p:sp>
@@ -7654,8 +7656,8 @@
         </p:nvSpPr>
         <p:spPr>
           <a:xfrm>
-            <a:off x="3078328" y="3566160"/>
-            <a:ext cx="1682496" cy="960120"/>
+            <a:off x="3078328" y="3584448"/>
+            <a:ext cx="1682496" cy="1371600"/>
           </a:xfrm>
           <a:prstGeom prst="rect">
             <a:avLst/>
@@ -7671,7 +7673,7 @@
               <a:buNone/>
             </a:pPr>
             <a:r>
-              <a:rPr lang="en-US" sz="980" dirty="0">
+              <a:rPr lang="en-US" sz="1800" dirty="0">
                 <a:solidFill>
                   <a:srgbClr val="CBD5E1"/>
                 </a:solidFill>
@@ -7681,7 +7683,7 @@
               </a:rPr>
               <a:t>Sources mapped for quirks, cadence, edge cases, and polite collection.</a:t>
             </a:r>
-            <a:endParaRPr lang="en-US" sz="980" dirty="0"/>
+            <a:endParaRPr lang="en-US" sz="1800" dirty="0"/>
           </a:p>
         </p:txBody>
       </p:sp>
@@ -7693,7 +7695,7 @@
         </p:nvSpPr>
         <p:spPr>
           <a:xfrm>
-            <a:off x="4902556" y="3419856"/>
+            <a:off x="4902556" y="3566160"/>
             <a:ext cx="210312" cy="274320"/>
           </a:xfrm>
           <a:prstGeom prst="rightArrow">
@@ -7713,8 +7715,8 @@
         </p:nvSpPr>
         <p:spPr>
           <a:xfrm>
-            <a:off x="5126584" y="2514600"/>
-            <a:ext cx="1938528" cy="2103120"/>
+            <a:off x="5126584" y="2331720"/>
+            <a:ext cx="1938528" cy="2697480"/>
           </a:xfrm>
           <a:prstGeom prst="roundRect">
             <a:avLst>
@@ -7740,8 +7742,8 @@
         </p:nvSpPr>
         <p:spPr>
           <a:xfrm>
-            <a:off x="5254600" y="2633472"/>
-            <a:ext cx="1682496" cy="310896"/>
+            <a:off x="5254600" y="2450592"/>
+            <a:ext cx="1682496" cy="365760"/>
           </a:xfrm>
           <a:prstGeom prst="rect">
             <a:avLst/>
@@ -7757,7 +7759,7 @@
               <a:buNone/>
             </a:pPr>
             <a:r>
-              <a:rPr lang="en-US" sz="1100" b="1" dirty="0">
+              <a:rPr lang="en-US" sz="1800" b="1" dirty="0">
                 <a:solidFill>
                   <a:srgbClr val="3B82F6"/>
                 </a:solidFill>
@@ -7767,7 +7769,7 @@
               </a:rPr>
               <a:t>03</a:t>
             </a:r>
-            <a:endParaRPr lang="en-US" sz="1100" dirty="0"/>
+            <a:endParaRPr lang="en-US" sz="1800" dirty="0"/>
           </a:p>
         </p:txBody>
       </p:sp>
@@ -7779,8 +7781,8 @@
         </p:nvSpPr>
         <p:spPr>
           <a:xfrm>
-            <a:off x="5254600" y="2962656"/>
-            <a:ext cx="1682496" cy="566928"/>
+            <a:off x="5254600" y="2834640"/>
+            <a:ext cx="1682496" cy="713232"/>
           </a:xfrm>
           <a:prstGeom prst="rect">
             <a:avLst/>
@@ -7796,7 +7798,7 @@
               <a:buNone/>
             </a:pPr>
             <a:r>
-              <a:rPr lang="en-US" sz="1350" b="1" dirty="0">
+              <a:rPr lang="en-US" sz="1800" b="1" dirty="0">
                 <a:solidFill>
                   <a:srgbClr val="FFFFFF"/>
                 </a:solidFill>
@@ -7806,7 +7808,7 @@
               </a:rPr>
               <a:t>Build</a:t>
             </a:r>
-            <a:endParaRPr lang="en-US" sz="1350" dirty="0"/>
+            <a:endParaRPr lang="en-US" sz="1800" dirty="0"/>
           </a:p>
         </p:txBody>
       </p:sp>
@@ -7818,8 +7820,8 @@
         </p:nvSpPr>
         <p:spPr>
           <a:xfrm>
-            <a:off x="5254600" y="3566160"/>
-            <a:ext cx="1682496" cy="960120"/>
+            <a:off x="5254600" y="3584448"/>
+            <a:ext cx="1682496" cy="1371600"/>
           </a:xfrm>
           <a:prstGeom prst="rect">
             <a:avLst/>
@@ -7835,7 +7837,7 @@
               <a:buNone/>
             </a:pPr>
             <a:r>
-              <a:rPr lang="en-US" sz="980" dirty="0">
+              <a:rPr lang="en-US" sz="1800" dirty="0">
                 <a:solidFill>
                   <a:srgbClr val="CBD5E1"/>
                 </a:solidFill>
@@ -7845,7 +7847,7 @@
               </a:rPr>
               <a:t>Validation-first pipelines with structured logs and loud failures.</a:t>
             </a:r>
-            <a:endParaRPr lang="en-US" sz="980" dirty="0"/>
+            <a:endParaRPr lang="en-US" sz="1800" dirty="0"/>
           </a:p>
         </p:txBody>
       </p:sp>
@@ -7857,7 +7859,7 @@
         </p:nvSpPr>
         <p:spPr>
           <a:xfrm>
-            <a:off x="7078828" y="3419856"/>
+            <a:off x="7078828" y="3566160"/>
             <a:ext cx="210312" cy="274320"/>
           </a:xfrm>
           <a:prstGeom prst="rightArrow">
@@ -7877,8 +7879,8 @@
         </p:nvSpPr>
         <p:spPr>
           <a:xfrm>
-            <a:off x="7302856" y="2514600"/>
-            <a:ext cx="1938528" cy="2103120"/>
+            <a:off x="7302856" y="2331720"/>
+            <a:ext cx="1938528" cy="2697480"/>
           </a:xfrm>
           <a:prstGeom prst="roundRect">
             <a:avLst>
@@ -7904,8 +7906,8 @@
         </p:nvSpPr>
         <p:spPr>
           <a:xfrm>
-            <a:off x="7430872" y="2633472"/>
-            <a:ext cx="1682496" cy="310896"/>
+            <a:off x="7430872" y="2450592"/>
+            <a:ext cx="1682496" cy="365760"/>
           </a:xfrm>
           <a:prstGeom prst="rect">
             <a:avLst/>
@@ -7921,7 +7923,7 @@
               <a:buNone/>
             </a:pPr>
             <a:r>
-              <a:rPr lang="en-US" sz="1100" b="1" dirty="0">
+              <a:rPr lang="en-US" sz="1800" b="1" dirty="0">
                 <a:solidFill>
                   <a:srgbClr val="06B6D4"/>
                 </a:solidFill>
@@ -7931,7 +7933,7 @@
               </a:rPr>
               <a:t>04</a:t>
             </a:r>
-            <a:endParaRPr lang="en-US" sz="1100" dirty="0"/>
+            <a:endParaRPr lang="en-US" sz="1800" dirty="0"/>
           </a:p>
         </p:txBody>
       </p:sp>
@@ -7943,8 +7945,8 @@
         </p:nvSpPr>
         <p:spPr>
           <a:xfrm>
-            <a:off x="7430872" y="2962656"/>
-            <a:ext cx="1682496" cy="566928"/>
+            <a:off x="7430872" y="2834640"/>
+            <a:ext cx="1682496" cy="713232"/>
           </a:xfrm>
           <a:prstGeom prst="rect">
             <a:avLst/>
@@ -7960,7 +7962,7 @@
               <a:buNone/>
             </a:pPr>
             <a:r>
-              <a:rPr lang="en-US" sz="1350" b="1" dirty="0">
+              <a:rPr lang="en-US" sz="1800" b="1" dirty="0">
                 <a:solidFill>
                   <a:srgbClr val="FFFFFF"/>
                 </a:solidFill>
@@ -7970,7 +7972,7 @@
               </a:rPr>
               <a:t>Prove</a:t>
             </a:r>
-            <a:endParaRPr lang="en-US" sz="1350" dirty="0"/>
+            <a:endParaRPr lang="en-US" sz="1800" dirty="0"/>
           </a:p>
         </p:txBody>
       </p:sp>
@@ -7982,8 +7984,8 @@
         </p:nvSpPr>
         <p:spPr>
           <a:xfrm>
-            <a:off x="7430872" y="3566160"/>
-            <a:ext cx="1682496" cy="960120"/>
+            <a:off x="7430872" y="3584448"/>
+            <a:ext cx="1682496" cy="1371600"/>
           </a:xfrm>
           <a:prstGeom prst="rect">
             <a:avLst/>
@@ -7999,7 +8001,7 @@
               <a:buNone/>
             </a:pPr>
             <a:r>
-              <a:rPr lang="en-US" sz="980" dirty="0">
+              <a:rPr lang="en-US" sz="1800" dirty="0">
                 <a:solidFill>
                   <a:srgbClr val="CBD5E1"/>
                 </a:solidFill>
@@ -8009,7 +8011,7 @@
               </a:rPr>
               <a:t>Evidence attached to every claim: files, logs, links, screenshots.</a:t>
             </a:r>
-            <a:endParaRPr lang="en-US" sz="980" dirty="0"/>
+            <a:endParaRPr lang="en-US" sz="1800" dirty="0"/>
           </a:p>
         </p:txBody>
       </p:sp>
@@ -8021,7 +8023,7 @@
         </p:nvSpPr>
         <p:spPr>
           <a:xfrm>
-            <a:off x="9255100" y="3419856"/>
+            <a:off x="9255100" y="3566160"/>
             <a:ext cx="210312" cy="274320"/>
           </a:xfrm>
           <a:prstGeom prst="rightArrow">
@@ -8041,8 +8043,8 @@
         </p:nvSpPr>
         <p:spPr>
           <a:xfrm>
-            <a:off x="9479128" y="2514600"/>
-            <a:ext cx="1938528" cy="2103120"/>
+            <a:off x="9479128" y="2331720"/>
+            <a:ext cx="1938528" cy="2697480"/>
           </a:xfrm>
           <a:prstGeom prst="roundRect">
             <a:avLst>
@@ -8068,8 +8070,8 @@
         </p:nvSpPr>
         <p:spPr>
           <a:xfrm>
-            <a:off x="9607144" y="2633472"/>
-            <a:ext cx="1682496" cy="310896"/>
+            <a:off x="9607144" y="2450592"/>
+            <a:ext cx="1682496" cy="365760"/>
           </a:xfrm>
           <a:prstGeom prst="rect">
             <a:avLst/>
@@ -8085,7 +8087,7 @@
               <a:buNone/>
             </a:pPr>
             <a:r>
-              <a:rPr lang="en-US" sz="1100" b="1" dirty="0">
+              <a:rPr lang="en-US" sz="1800" b="1" dirty="0">
                 <a:solidFill>
                   <a:srgbClr val="3B82F6"/>
                 </a:solidFill>
@@ -8095,7 +8097,7 @@
               </a:rPr>
               <a:t>05</a:t>
             </a:r>
-            <a:endParaRPr lang="en-US" sz="1100" dirty="0"/>
+            <a:endParaRPr lang="en-US" sz="1800" dirty="0"/>
           </a:p>
         </p:txBody>
       </p:sp>
@@ -8107,8 +8109,8 @@
         </p:nvSpPr>
         <p:spPr>
           <a:xfrm>
-            <a:off x="9607144" y="2962656"/>
-            <a:ext cx="1682496" cy="566928"/>
+            <a:off x="9607144" y="2834640"/>
+            <a:ext cx="1682496" cy="713232"/>
           </a:xfrm>
           <a:prstGeom prst="rect">
             <a:avLst/>
@@ -8124,7 +8126,7 @@
               <a:buNone/>
             </a:pPr>
             <a:r>
-              <a:rPr lang="en-US" sz="1350" b="1" dirty="0">
+              <a:rPr lang="en-US" sz="1800" b="1" dirty="0">
                 <a:solidFill>
                   <a:srgbClr val="FFFFFF"/>
                 </a:solidFill>
@@ -8134,7 +8136,7 @@
               </a:rPr>
               <a:t>Handover</a:t>
             </a:r>
-            <a:endParaRPr lang="en-US" sz="1350" dirty="0"/>
+            <a:endParaRPr lang="en-US" sz="1800" dirty="0"/>
           </a:p>
         </p:txBody>
       </p:sp>
@@ -8146,8 +8148,8 @@
         </p:nvSpPr>
         <p:spPr>
           <a:xfrm>
-            <a:off x="9607144" y="3566160"/>
-            <a:ext cx="1682496" cy="960120"/>
+            <a:off x="9607144" y="3584448"/>
+            <a:ext cx="1682496" cy="1371600"/>
           </a:xfrm>
           <a:prstGeom prst="rect">
             <a:avLst/>
@@ -8163,7 +8165,7 @@
               <a:buNone/>
             </a:pPr>
             <a:r>
-              <a:rPr lang="en-US" sz="980" dirty="0">
+              <a:rPr lang="en-US" sz="1800" dirty="0">
                 <a:solidFill>
                   <a:srgbClr val="CBD5E1"/>
                 </a:solidFill>
@@ -8173,7 +8175,7 @@
               </a:rPr>
               <a:t>Docs and runbooks that make your team independent of me.</a:t>
             </a:r>
-            <a:endParaRPr lang="en-US" sz="980" dirty="0"/>
+            <a:endParaRPr lang="en-US" sz="1800" dirty="0"/>
           </a:p>
         </p:txBody>
       </p:sp>
@@ -8208,8 +8210,8 @@
         </p:nvSpPr>
         <p:spPr>
           <a:xfrm>
-            <a:off x="822960" y="6053328"/>
-            <a:ext cx="9692640" cy="457200"/>
+            <a:off x="822960" y="6035040"/>
+            <a:ext cx="10424160" cy="566928"/>
           </a:xfrm>
           <a:prstGeom prst="rect">
             <a:avLst/>
@@ -8225,9 +8227,9 @@
               <a:buNone/>
             </a:pPr>
             <a:r>
-              <a:rPr lang="en-US" sz="1150" dirty="0">
-                <a:solidFill>
-                  <a:srgbClr val="64748B"/>
+              <a:rPr lang="en-US" sz="1800" dirty="0">
+                <a:solidFill>
+                  <a:srgbClr val="8FA3BF"/>
                 </a:solidFill>
                 <a:latin typeface="Segoe UI" pitchFamily="34" charset="0"/>
                 <a:ea typeface="Segoe UI" pitchFamily="34" charset="-122"/>
@@ -8235,7 +8237,7 @@
               </a:rPr>
               <a:t>The loop is the same for a two-week scrape and a multi-month BI build - only the depth changes.</a:t>
             </a:r>
-            <a:endParaRPr lang="en-US" sz="1150" dirty="0"/>
+            <a:endParaRPr lang="en-US" sz="1800" dirty="0"/>
           </a:p>
         </p:txBody>
       </p:sp>
@@ -8247,8 +8249,8 @@
         </p:nvSpPr>
         <p:spPr>
           <a:xfrm>
-            <a:off x="10698480" y="6382512"/>
-            <a:ext cx="1188720" cy="365760"/>
+            <a:off x="10698480" y="6309360"/>
+            <a:ext cx="1188720" cy="411480"/>
           </a:xfrm>
           <a:prstGeom prst="rect">
             <a:avLst/>
@@ -8264,9 +8266,9 @@
               <a:buNone/>
             </a:pPr>
             <a:r>
-              <a:rPr lang="en-US" sz="1000" dirty="0">
-                <a:solidFill>
-                  <a:srgbClr val="64748B"/>
+              <a:rPr lang="en-US" sz="1800" dirty="0">
+                <a:solidFill>
+                  <a:srgbClr val="8FA3BF"/>
                 </a:solidFill>
                 <a:latin typeface="Consolas" pitchFamily="34" charset="0"/>
                 <a:ea typeface="Consolas" pitchFamily="34" charset="-122"/>
@@ -8274,7 +8276,7 @@
               </a:rPr>
               <a:t>5 / 14</a:t>
             </a:r>
-            <a:endParaRPr lang="en-US" sz="1000" dirty="0"/>
+            <a:endParaRPr lang="en-US" sz="1800" dirty="0"/>
           </a:p>
         </p:txBody>
       </p:sp>
@@ -8358,8 +8360,8 @@
         </p:nvSpPr>
         <p:spPr>
           <a:xfrm>
-            <a:off x="822960" y="502920"/>
-            <a:ext cx="10515600" cy="365760"/>
+            <a:off x="822960" y="457200"/>
+            <a:ext cx="10515600" cy="411480"/>
           </a:xfrm>
           <a:prstGeom prst="rect">
             <a:avLst/>
@@ -8375,7 +8377,7 @@
               <a:buNone/>
             </a:pPr>
             <a:r>
-              <a:rPr lang="en-US" sz="1200" spc="300" kern="0" dirty="0">
+              <a:rPr lang="en-US" sz="1800" spc="300" kern="0" dirty="0">
                 <a:solidFill>
                   <a:srgbClr val="06B6D4"/>
                 </a:solidFill>
@@ -8385,7 +8387,7 @@
               </a:rPr>
               <a:t>WHAT YOU GET</a:t>
             </a:r>
-            <a:endParaRPr lang="en-US" sz="1200" dirty="0"/>
+            <a:endParaRPr lang="en-US" sz="1800" dirty="0"/>
           </a:p>
         </p:txBody>
       </p:sp>
@@ -8443,7 +8445,7 @@
           </p:nvPr>
         </p:nvGraphicFramePr>
         <p:xfrm>
-          <a:off x="822960" y="2011680"/>
+          <a:off x="822960" y="1828800"/>
           <a:ext cx="10515600" cy="914400"/>
         </p:xfrm>
         <a:graphic>
@@ -8456,7 +8458,7 @@
                 <a:gridCol w="2628900"/>
                 <a:gridCol w="2628900"/>
               </a:tblGrid>
-              <a:tr h="402336">
+              <a:tr h="457200">
                 <a:tc>
                   <a:txBody>
                     <a:bodyPr/>
@@ -8466,7 +8468,7 @@
                         <a:buNone/>
                       </a:pPr>
                       <a:r>
-                        <a:rPr lang="en-US" sz="1150" b="1" dirty="0">
+                        <a:rPr lang="en-US" sz="1800" b="1" dirty="0">
                           <a:solidFill>
                             <a:srgbClr val="FFFFFF"/>
                           </a:solidFill>
@@ -8476,14 +8478,14 @@
                         </a:rPr>
                         <a:t>Service</a:t>
                       </a:r>
-                      <a:endParaRPr lang="en-US" sz="1150" dirty="0">
+                      <a:endParaRPr lang="en-US" sz="1800" dirty="0">
                         <a:latin typeface="Segoe UI" charset="0"/>
                         <a:ea typeface="Segoe UI" charset="0"/>
                         <a:cs typeface="Segoe UI" charset="0"/>
                       </a:endParaRPr>
                     </a:p>
                   </a:txBody>
-                  <a:tcPr marL="64008" marR="64008" marT="64008" marB="64008" anchor="ctr">
+                  <a:tcPr marL="36576" marR="36576" marT="36576" marB="36576" anchor="ctr">
                     <a:lnL w="6350" cap="flat" cmpd="sng" algn="ctr">
                       <a:solidFill>
                         <a:srgbClr val="24365A"/>
@@ -8534,7 +8536,7 @@
                         <a:buNone/>
                       </a:pPr>
                       <a:r>
-                        <a:rPr lang="en-US" sz="1150" b="1" dirty="0">
+                        <a:rPr lang="en-US" sz="1800" b="1" dirty="0">
                           <a:solidFill>
                             <a:srgbClr val="FFFFFF"/>
                           </a:solidFill>
@@ -8544,14 +8546,14 @@
                         </a:rPr>
                         <a:t>Deliverable</a:t>
                       </a:r>
-                      <a:endParaRPr lang="en-US" sz="1150" dirty="0">
+                      <a:endParaRPr lang="en-US" sz="1800" dirty="0">
                         <a:latin typeface="Segoe UI" charset="0"/>
                         <a:ea typeface="Segoe UI" charset="0"/>
                         <a:cs typeface="Segoe UI" charset="0"/>
                       </a:endParaRPr>
                     </a:p>
                   </a:txBody>
-                  <a:tcPr marL="64008" marR="64008" marT="64008" marB="64008" anchor="ctr">
+                  <a:tcPr marL="36576" marR="36576" marT="36576" marB="36576" anchor="ctr">
                     <a:lnL w="6350" cap="flat" cmpd="sng" algn="ctr">
                       <a:solidFill>
                         <a:srgbClr val="24365A"/>
@@ -8602,7 +8604,7 @@
                         <a:buNone/>
                       </a:pPr>
                       <a:r>
-                        <a:rPr lang="en-US" sz="1150" b="1" dirty="0">
+                        <a:rPr lang="en-US" sz="1800" b="1" dirty="0">
                           <a:solidFill>
                             <a:srgbClr val="FFFFFF"/>
                           </a:solidFill>
@@ -8612,14 +8614,14 @@
                         </a:rPr>
                         <a:t>Built on</a:t>
                       </a:r>
-                      <a:endParaRPr lang="en-US" sz="1150" dirty="0">
+                      <a:endParaRPr lang="en-US" sz="1800" dirty="0">
                         <a:latin typeface="Segoe UI" charset="0"/>
                         <a:ea typeface="Segoe UI" charset="0"/>
                         <a:cs typeface="Segoe UI" charset="0"/>
                       </a:endParaRPr>
                     </a:p>
                   </a:txBody>
-                  <a:tcPr marL="64008" marR="64008" marT="64008" marB="64008" anchor="ctr">
+                  <a:tcPr marL="36576" marR="36576" marT="36576" marB="36576" anchor="ctr">
                     <a:lnL w="6350" cap="flat" cmpd="sng" algn="ctr">
                       <a:solidFill>
                         <a:srgbClr val="24365A"/>
@@ -8670,7 +8672,7 @@
                         <a:buNone/>
                       </a:pPr>
                       <a:r>
-                        <a:rPr lang="en-US" sz="1150" b="1" dirty="0">
+                        <a:rPr lang="en-US" sz="1800" b="1" dirty="0">
                           <a:solidFill>
                             <a:srgbClr val="FFFFFF"/>
                           </a:solidFill>
@@ -8680,14 +8682,14 @@
                         </a:rPr>
                         <a:t>You own</a:t>
                       </a:r>
-                      <a:endParaRPr lang="en-US" sz="1150" dirty="0">
+                      <a:endParaRPr lang="en-US" sz="1800" dirty="0">
                         <a:latin typeface="Segoe UI" charset="0"/>
                         <a:ea typeface="Segoe UI" charset="0"/>
                         <a:cs typeface="Segoe UI" charset="0"/>
                       </a:endParaRPr>
                     </a:p>
                   </a:txBody>
-                  <a:tcPr marL="64008" marR="64008" marT="64008" marB="64008" anchor="ctr">
+                  <a:tcPr marL="36576" marR="36576" marT="36576" marB="36576" anchor="ctr">
                     <a:lnL w="6350" cap="flat" cmpd="sng" algn="ctr">
                       <a:solidFill>
                         <a:srgbClr val="24365A"/>
@@ -8730,7 +8732,7 @@
                   </a:tcPr>
                 </a:tc>
               </a:tr>
-              <a:tr h="402336">
+              <a:tr h="457200">
                 <a:tc>
                   <a:txBody>
                     <a:bodyPr/>
@@ -8740,7 +8742,7 @@
                         <a:buNone/>
                       </a:pPr>
                       <a:r>
-                        <a:rPr lang="en-US" sz="1080" dirty="0">
+                        <a:rPr lang="en-US" sz="1800" dirty="0">
                           <a:solidFill>
                             <a:srgbClr val="CBD5E1"/>
                           </a:solidFill>
@@ -8750,14 +8752,14 @@
                         </a:rPr>
                         <a:t>Web scraping &amp; collection</a:t>
                       </a:r>
-                      <a:endParaRPr lang="en-US" sz="1080" dirty="0">
+                      <a:endParaRPr lang="en-US" sz="1800" dirty="0">
                         <a:latin typeface="Segoe UI" charset="0"/>
                         <a:ea typeface="Segoe UI" charset="0"/>
                         <a:cs typeface="Segoe UI" charset="0"/>
                       </a:endParaRPr>
                     </a:p>
                   </a:txBody>
-                  <a:tcPr marL="64008" marR="64008" marT="64008" marB="64008" anchor="ctr">
+                  <a:tcPr marL="36576" marR="36576" marT="36576" marB="36576" anchor="ctr">
                     <a:lnL w="6350" cap="flat" cmpd="sng" algn="ctr">
                       <a:solidFill>
                         <a:srgbClr val="24365A"/>
@@ -8808,7 +8810,7 @@
                         <a:buNone/>
                       </a:pPr>
                       <a:r>
-                        <a:rPr lang="en-US" sz="1080" dirty="0">
+                        <a:rPr lang="en-US" sz="1800" dirty="0">
                           <a:solidFill>
                             <a:srgbClr val="CBD5E1"/>
                           </a:solidFill>
@@ -8818,14 +8820,14 @@
                         </a:rPr>
                         <a:t>Validated pipelines with readable run logs</a:t>
                       </a:r>
-                      <a:endParaRPr lang="en-US" sz="1080" dirty="0">
+                      <a:endParaRPr lang="en-US" sz="1800" dirty="0">
                         <a:latin typeface="Segoe UI" charset="0"/>
                         <a:ea typeface="Segoe UI" charset="0"/>
                         <a:cs typeface="Segoe UI" charset="0"/>
                       </a:endParaRPr>
                     </a:p>
                   </a:txBody>
-                  <a:tcPr marL="64008" marR="64008" marT="64008" marB="64008" anchor="ctr">
+                  <a:tcPr marL="36576" marR="36576" marT="36576" marB="36576" anchor="ctr">
                     <a:lnL w="6350" cap="flat" cmpd="sng" algn="ctr">
                       <a:solidFill>
                         <a:srgbClr val="24365A"/>
@@ -8876,7 +8878,7 @@
                         <a:buNone/>
                       </a:pPr>
                       <a:r>
-                        <a:rPr lang="en-US" sz="1080" dirty="0">
+                        <a:rPr lang="en-US" sz="1800" dirty="0">
                           <a:solidFill>
                             <a:srgbClr val="CBD5E1"/>
                           </a:solidFill>
@@ -8886,14 +8888,14 @@
                         </a:rPr>
                         <a:t>Web Scraping Toolkit, Playwright</a:t>
                       </a:r>
-                      <a:endParaRPr lang="en-US" sz="1080" dirty="0">
+                      <a:endParaRPr lang="en-US" sz="1800" dirty="0">
                         <a:latin typeface="Segoe UI" charset="0"/>
                         <a:ea typeface="Segoe UI" charset="0"/>
                         <a:cs typeface="Segoe UI" charset="0"/>
                       </a:endParaRPr>
                     </a:p>
                   </a:txBody>
-                  <a:tcPr marL="64008" marR="64008" marT="64008" marB="64008" anchor="ctr">
+                  <a:tcPr marL="36576" marR="36576" marT="36576" marB="36576" anchor="ctr">
                     <a:lnL w="6350" cap="flat" cmpd="sng" algn="ctr">
                       <a:solidFill>
                         <a:srgbClr val="24365A"/>
@@ -8944,7 +8946,7 @@
                         <a:buNone/>
                       </a:pPr>
                       <a:r>
-                        <a:rPr lang="en-US" sz="1080" dirty="0">
+                        <a:rPr lang="en-US" sz="1800" dirty="0">
                           <a:solidFill>
                             <a:srgbClr val="CBD5E1"/>
                           </a:solidFill>
@@ -8954,14 +8956,14 @@
                         </a:rPr>
                         <a:t>Code, data, and schedule</a:t>
                       </a:r>
-                      <a:endParaRPr lang="en-US" sz="1080" dirty="0">
+                      <a:endParaRPr lang="en-US" sz="1800" dirty="0">
                         <a:latin typeface="Segoe UI" charset="0"/>
                         <a:ea typeface="Segoe UI" charset="0"/>
                         <a:cs typeface="Segoe UI" charset="0"/>
                       </a:endParaRPr>
                     </a:p>
                   </a:txBody>
-                  <a:tcPr marL="64008" marR="64008" marT="64008" marB="64008" anchor="ctr">
+                  <a:tcPr marL="36576" marR="36576" marT="36576" marB="36576" anchor="ctr">
                     <a:lnL w="6350" cap="flat" cmpd="sng" algn="ctr">
                       <a:solidFill>
                         <a:srgbClr val="24365A"/>
@@ -9004,7 +9006,7 @@
                   </a:tcPr>
                 </a:tc>
               </a:tr>
-              <a:tr h="402336">
+              <a:tr h="457200">
                 <a:tc>
                   <a:txBody>
                     <a:bodyPr/>
@@ -9014,7 +9016,7 @@
                         <a:buNone/>
                       </a:pPr>
                       <a:r>
-                        <a:rPr lang="en-US" sz="1080" dirty="0">
+                        <a:rPr lang="en-US" sz="1800" dirty="0">
                           <a:solidFill>
                             <a:srgbClr val="CBD5E1"/>
                           </a:solidFill>
@@ -9024,14 +9026,14 @@
                         </a:rPr>
                         <a:t>BI &amp; analytics</a:t>
                       </a:r>
-                      <a:endParaRPr lang="en-US" sz="1080" dirty="0">
+                      <a:endParaRPr lang="en-US" sz="1800" dirty="0">
                         <a:latin typeface="Segoe UI" charset="0"/>
                         <a:ea typeface="Segoe UI" charset="0"/>
                         <a:cs typeface="Segoe UI" charset="0"/>
                       </a:endParaRPr>
                     </a:p>
                   </a:txBody>
-                  <a:tcPr marL="64008" marR="64008" marT="64008" marB="64008" anchor="ctr">
+                  <a:tcPr marL="36576" marR="36576" marT="36576" marB="36576" anchor="ctr">
                     <a:lnL w="6350" cap="flat" cmpd="sng" algn="ctr">
                       <a:solidFill>
                         <a:srgbClr val="24365A"/>
@@ -9082,7 +9084,7 @@
                         <a:buNone/>
                       </a:pPr>
                       <a:r>
-                        <a:rPr lang="en-US" sz="1080" dirty="0">
+                        <a:rPr lang="en-US" sz="1800" dirty="0">
                           <a:solidFill>
                             <a:srgbClr val="CBD5E1"/>
                           </a:solidFill>
@@ -9092,14 +9094,14 @@
                         </a:rPr>
                         <a:t>Dashboards, reconciliation, reporting</a:t>
                       </a:r>
-                      <a:endParaRPr lang="en-US" sz="1080" dirty="0">
+                      <a:endParaRPr lang="en-US" sz="1800" dirty="0">
                         <a:latin typeface="Segoe UI" charset="0"/>
                         <a:ea typeface="Segoe UI" charset="0"/>
                         <a:cs typeface="Segoe UI" charset="0"/>
                       </a:endParaRPr>
                     </a:p>
                   </a:txBody>
-                  <a:tcPr marL="64008" marR="64008" marT="64008" marB="64008" anchor="ctr">
+                  <a:tcPr marL="36576" marR="36576" marT="36576" marB="36576" anchor="ctr">
                     <a:lnL w="6350" cap="flat" cmpd="sng" algn="ctr">
                       <a:solidFill>
                         <a:srgbClr val="24365A"/>
@@ -9150,7 +9152,7 @@
                         <a:buNone/>
                       </a:pPr>
                       <a:r>
-                        <a:rPr lang="en-US" sz="1080" dirty="0">
+                        <a:rPr lang="en-US" sz="1800" dirty="0">
                           <a:solidFill>
                             <a:srgbClr val="CBD5E1"/>
                           </a:solidFill>
@@ -9160,14 +9162,14 @@
                         </a:rPr>
                         <a:t>Qlik Sense, Tableau, SQL, Alteryx</a:t>
                       </a:r>
-                      <a:endParaRPr lang="en-US" sz="1080" dirty="0">
+                      <a:endParaRPr lang="en-US" sz="1800" dirty="0">
                         <a:latin typeface="Segoe UI" charset="0"/>
                         <a:ea typeface="Segoe UI" charset="0"/>
                         <a:cs typeface="Segoe UI" charset="0"/>
                       </a:endParaRPr>
                     </a:p>
                   </a:txBody>
-                  <a:tcPr marL="64008" marR="64008" marT="64008" marB="64008" anchor="ctr">
+                  <a:tcPr marL="36576" marR="36576" marT="36576" marB="36576" anchor="ctr">
                     <a:lnL w="6350" cap="flat" cmpd="sng" algn="ctr">
                       <a:solidFill>
                         <a:srgbClr val="24365A"/>
@@ -9218,7 +9220,7 @@
                         <a:buNone/>
                       </a:pPr>
                       <a:r>
-                        <a:rPr lang="en-US" sz="1080" dirty="0">
+                        <a:rPr lang="en-US" sz="1800" dirty="0">
                           <a:solidFill>
                             <a:srgbClr val="CBD5E1"/>
                           </a:solidFill>
@@ -9228,14 +9230,14 @@
                         </a:rPr>
                         <a:t>Definitions registry</a:t>
                       </a:r>
-                      <a:endParaRPr lang="en-US" sz="1080" dirty="0">
+                      <a:endParaRPr lang="en-US" sz="1800" dirty="0">
                         <a:latin typeface="Segoe UI" charset="0"/>
                         <a:ea typeface="Segoe UI" charset="0"/>
                         <a:cs typeface="Segoe UI" charset="0"/>
                       </a:endParaRPr>
                     </a:p>
                   </a:txBody>
-                  <a:tcPr marL="64008" marR="64008" marT="64008" marB="64008" anchor="ctr">
+                  <a:tcPr marL="36576" marR="36576" marT="36576" marB="36576" anchor="ctr">
                     <a:lnL w="6350" cap="flat" cmpd="sng" algn="ctr">
                       <a:solidFill>
                         <a:srgbClr val="24365A"/>
@@ -9278,7 +9280,7 @@
                   </a:tcPr>
                 </a:tc>
               </a:tr>
-              <a:tr h="402336">
+              <a:tr h="457200">
                 <a:tc>
                   <a:txBody>
                     <a:bodyPr/>
@@ -9288,7 +9290,7 @@
                         <a:buNone/>
                       </a:pPr>
                       <a:r>
-                        <a:rPr lang="en-US" sz="1080" dirty="0">
+                        <a:rPr lang="en-US" sz="1800" dirty="0">
                           <a:solidFill>
                             <a:srgbClr val="CBD5E1"/>
                           </a:solidFill>
@@ -9298,14 +9300,14 @@
                         </a:rPr>
                         <a:t>AI automation</a:t>
                       </a:r>
-                      <a:endParaRPr lang="en-US" sz="1080" dirty="0">
+                      <a:endParaRPr lang="en-US" sz="1800" dirty="0">
                         <a:latin typeface="Segoe UI" charset="0"/>
                         <a:ea typeface="Segoe UI" charset="0"/>
                         <a:cs typeface="Segoe UI" charset="0"/>
                       </a:endParaRPr>
                     </a:p>
                   </a:txBody>
-                  <a:tcPr marL="64008" marR="64008" marT="64008" marB="64008" anchor="ctr">
+                  <a:tcPr marL="36576" marR="36576" marT="36576" marB="36576" anchor="ctr">
                     <a:lnL w="6350" cap="flat" cmpd="sng" algn="ctr">
                       <a:solidFill>
                         <a:srgbClr val="24365A"/>
@@ -9356,7 +9358,7 @@
                         <a:buNone/>
                       </a:pPr>
                       <a:r>
-                        <a:rPr lang="en-US" sz="1080" dirty="0">
+                        <a:rPr lang="en-US" sz="1800" dirty="0">
                           <a:solidFill>
                             <a:srgbClr val="CBD5E1"/>
                           </a:solidFill>
@@ -9366,14 +9368,14 @@
                         </a:rPr>
                         <a:t>Agents and document workflows</a:t>
                       </a:r>
-                      <a:endParaRPr lang="en-US" sz="1080" dirty="0">
+                      <a:endParaRPr lang="en-US" sz="1800" dirty="0">
                         <a:latin typeface="Segoe UI" charset="0"/>
                         <a:ea typeface="Segoe UI" charset="0"/>
                         <a:cs typeface="Segoe UI" charset="0"/>
                       </a:endParaRPr>
                     </a:p>
                   </a:txBody>
-                  <a:tcPr marL="64008" marR="64008" marT="64008" marB="64008" anchor="ctr">
+                  <a:tcPr marL="36576" marR="36576" marT="36576" marB="36576" anchor="ctr">
                     <a:lnL w="6350" cap="flat" cmpd="sng" algn="ctr">
                       <a:solidFill>
                         <a:srgbClr val="24365A"/>
@@ -9424,7 +9426,7 @@
                         <a:buNone/>
                       </a:pPr>
                       <a:r>
-                        <a:rPr lang="en-US" sz="1080" dirty="0">
+                        <a:rPr lang="en-US" sz="1800" dirty="0">
                           <a:solidFill>
                             <a:srgbClr val="CBD5E1"/>
                           </a:solidFill>
@@ -9434,14 +9436,14 @@
                         </a:rPr>
                         <a:t>Python, FastAPI, Ollama</a:t>
                       </a:r>
-                      <a:endParaRPr lang="en-US" sz="1080" dirty="0">
+                      <a:endParaRPr lang="en-US" sz="1800" dirty="0">
                         <a:latin typeface="Segoe UI" charset="0"/>
                         <a:ea typeface="Segoe UI" charset="0"/>
                         <a:cs typeface="Segoe UI" charset="0"/>
                       </a:endParaRPr>
                     </a:p>
                   </a:txBody>
-                  <a:tcPr marL="64008" marR="64008" marT="64008" marB="64008" anchor="ctr">
+                  <a:tcPr marL="36576" marR="36576" marT="36576" marB="36576" anchor="ctr">
                     <a:lnL w="6350" cap="flat" cmpd="sng" algn="ctr">
                       <a:solidFill>
                         <a:srgbClr val="24365A"/>
@@ -9492,7 +9494,7 @@
                         <a:buNone/>
                       </a:pPr>
                       <a:r>
-                        <a:rPr lang="en-US" sz="1080" dirty="0">
+                        <a:rPr lang="en-US" sz="1800" dirty="0">
                           <a:solidFill>
                             <a:srgbClr val="CBD5E1"/>
                           </a:solidFill>
@@ -9502,14 +9504,14 @@
                         </a:rPr>
                         <a:t>The full local stack</a:t>
                       </a:r>
-                      <a:endParaRPr lang="en-US" sz="1080" dirty="0">
+                      <a:endParaRPr lang="en-US" sz="1800" dirty="0">
                         <a:latin typeface="Segoe UI" charset="0"/>
                         <a:ea typeface="Segoe UI" charset="0"/>
                         <a:cs typeface="Segoe UI" charset="0"/>
                       </a:endParaRPr>
                     </a:p>
                   </a:txBody>
-                  <a:tcPr marL="64008" marR="64008" marT="64008" marB="64008" anchor="ctr">
+                  <a:tcPr marL="36576" marR="36576" marT="36576" marB="36576" anchor="ctr">
                     <a:lnL w="6350" cap="flat" cmpd="sng" algn="ctr">
                       <a:solidFill>
                         <a:srgbClr val="24365A"/>
@@ -9552,7 +9554,7 @@
                   </a:tcPr>
                 </a:tc>
               </a:tr>
-              <a:tr h="402336">
+              <a:tr h="457200">
                 <a:tc>
                   <a:txBody>
                     <a:bodyPr/>
@@ -9562,7 +9564,7 @@
                         <a:buNone/>
                       </a:pPr>
                       <a:r>
-                        <a:rPr lang="en-US" sz="1080" dirty="0">
+                        <a:rPr lang="en-US" sz="1800" dirty="0">
                           <a:solidFill>
                             <a:srgbClr val="CBD5E1"/>
                           </a:solidFill>
@@ -9572,14 +9574,14 @@
                         </a:rPr>
                         <a:t>Data engineering</a:t>
                       </a:r>
-                      <a:endParaRPr lang="en-US" sz="1080" dirty="0">
+                      <a:endParaRPr lang="en-US" sz="1800" dirty="0">
                         <a:latin typeface="Segoe UI" charset="0"/>
                         <a:ea typeface="Segoe UI" charset="0"/>
                         <a:cs typeface="Segoe UI" charset="0"/>
                       </a:endParaRPr>
                     </a:p>
                   </a:txBody>
-                  <a:tcPr marL="64008" marR="64008" marT="64008" marB="64008" anchor="ctr">
+                  <a:tcPr marL="36576" marR="36576" marT="36576" marB="36576" anchor="ctr">
                     <a:lnL w="6350" cap="flat" cmpd="sng" algn="ctr">
                       <a:solidFill>
                         <a:srgbClr val="24365A"/>
@@ -9630,7 +9632,7 @@
                         <a:buNone/>
                       </a:pPr>
                       <a:r>
-                        <a:rPr lang="en-US" sz="1080" dirty="0">
+                        <a:rPr lang="en-US" sz="1800" dirty="0">
                           <a:solidFill>
                             <a:srgbClr val="CBD5E1"/>
                           </a:solidFill>
@@ -9640,14 +9642,14 @@
                         </a:rPr>
                         <a:t>ETL with built-in quality checks</a:t>
                       </a:r>
-                      <a:endParaRPr lang="en-US" sz="1080" dirty="0">
+                      <a:endParaRPr lang="en-US" sz="1800" dirty="0">
                         <a:latin typeface="Segoe UI" charset="0"/>
                         <a:ea typeface="Segoe UI" charset="0"/>
                         <a:cs typeface="Segoe UI" charset="0"/>
                       </a:endParaRPr>
                     </a:p>
                   </a:txBody>
-                  <a:tcPr marL="64008" marR="64008" marT="64008" marB="64008" anchor="ctr">
+                  <a:tcPr marL="36576" marR="36576" marT="36576" marB="36576" anchor="ctr">
                     <a:lnL w="6350" cap="flat" cmpd="sng" algn="ctr">
                       <a:solidFill>
                         <a:srgbClr val="24365A"/>
@@ -9698,7 +9700,7 @@
                         <a:buNone/>
                       </a:pPr>
                       <a:r>
-                        <a:rPr lang="en-US" sz="1080" dirty="0">
+                        <a:rPr lang="en-US" sz="1800" dirty="0">
                           <a:solidFill>
                             <a:srgbClr val="CBD5E1"/>
                           </a:solidFill>
@@ -9708,14 +9710,14 @@
                         </a:rPr>
                         <a:t>Python, DuckDB, PostgreSQL</a:t>
                       </a:r>
-                      <a:endParaRPr lang="en-US" sz="1080" dirty="0">
+                      <a:endParaRPr lang="en-US" sz="1800" dirty="0">
                         <a:latin typeface="Segoe UI" charset="0"/>
                         <a:ea typeface="Segoe UI" charset="0"/>
                         <a:cs typeface="Segoe UI" charset="0"/>
                       </a:endParaRPr>
                     </a:p>
                   </a:txBody>
-                  <a:tcPr marL="64008" marR="64008" marT="64008" marB="64008" anchor="ctr">
+                  <a:tcPr marL="36576" marR="36576" marT="36576" marB="36576" anchor="ctr">
                     <a:lnL w="6350" cap="flat" cmpd="sng" algn="ctr">
                       <a:solidFill>
                         <a:srgbClr val="24365A"/>
@@ -9766,7 +9768,7 @@
                         <a:buNone/>
                       </a:pPr>
                       <a:r>
-                        <a:rPr lang="en-US" sz="1080" dirty="0">
+                        <a:rPr lang="en-US" sz="1800" dirty="0">
                           <a:solidFill>
                             <a:srgbClr val="CBD5E1"/>
                           </a:solidFill>
@@ -9776,14 +9778,14 @@
                         </a:rPr>
                         <a:t>Pipelines and documentation</a:t>
                       </a:r>
-                      <a:endParaRPr lang="en-US" sz="1080" dirty="0">
+                      <a:endParaRPr lang="en-US" sz="1800" dirty="0">
                         <a:latin typeface="Segoe UI" charset="0"/>
                         <a:ea typeface="Segoe UI" charset="0"/>
                         <a:cs typeface="Segoe UI" charset="0"/>
                       </a:endParaRPr>
                     </a:p>
                   </a:txBody>
-                  <a:tcPr marL="64008" marR="64008" marT="64008" marB="64008" anchor="ctr">
+                  <a:tcPr marL="36576" marR="36576" marT="36576" marB="36576" anchor="ctr">
                     <a:lnL w="6350" cap="flat" cmpd="sng" algn="ctr">
                       <a:solidFill>
                         <a:srgbClr val="24365A"/>
@@ -9861,8 +9863,8 @@
         </p:nvSpPr>
         <p:spPr>
           <a:xfrm>
-            <a:off x="822960" y="6053328"/>
-            <a:ext cx="9692640" cy="457200"/>
+            <a:off x="822960" y="6035040"/>
+            <a:ext cx="10424160" cy="566928"/>
           </a:xfrm>
           <a:prstGeom prst="rect">
             <a:avLst/>
@@ -9878,9 +9880,9 @@
               <a:buNone/>
             </a:pPr>
             <a:r>
-              <a:rPr lang="en-US" sz="1150" dirty="0">
-                <a:solidFill>
-                  <a:srgbClr val="64748B"/>
+              <a:rPr lang="en-US" sz="1800" dirty="0">
+                <a:solidFill>
+                  <a:srgbClr val="8FA3BF"/>
                 </a:solidFill>
                 <a:latin typeface="Segoe UI" pitchFamily="34" charset="0"/>
                 <a:ea typeface="Segoe UI" pitchFamily="34" charset="-122"/>
@@ -9888,7 +9890,7 @@
               </a:rPr>
               <a:t>No black boxes: everything I build, you can run, read, and extend without me.</a:t>
             </a:r>
-            <a:endParaRPr lang="en-US" sz="1150" dirty="0"/>
+            <a:endParaRPr lang="en-US" sz="1800" dirty="0"/>
           </a:p>
         </p:txBody>
       </p:sp>
@@ -9900,8 +9902,8 @@
         </p:nvSpPr>
         <p:spPr>
           <a:xfrm>
-            <a:off x="10698480" y="6382512"/>
-            <a:ext cx="1188720" cy="365760"/>
+            <a:off x="10698480" y="6309360"/>
+            <a:ext cx="1188720" cy="411480"/>
           </a:xfrm>
           <a:prstGeom prst="rect">
             <a:avLst/>
@@ -9917,9 +9919,9 @@
               <a:buNone/>
             </a:pPr>
             <a:r>
-              <a:rPr lang="en-US" sz="1000" dirty="0">
-                <a:solidFill>
-                  <a:srgbClr val="64748B"/>
+              <a:rPr lang="en-US" sz="1800" dirty="0">
+                <a:solidFill>
+                  <a:srgbClr val="8FA3BF"/>
                 </a:solidFill>
                 <a:latin typeface="Consolas" pitchFamily="34" charset="0"/>
                 <a:ea typeface="Consolas" pitchFamily="34" charset="-122"/>
@@ -9927,7 +9929,7 @@
               </a:rPr>
               <a:t>6 / 14</a:t>
             </a:r>
-            <a:endParaRPr lang="en-US" sz="1000" dirty="0"/>
+            <a:endParaRPr lang="en-US" sz="1800" dirty="0"/>
           </a:p>
         </p:txBody>
       </p:sp>
@@ -10011,8 +10013,8 @@
         </p:nvSpPr>
         <p:spPr>
           <a:xfrm>
-            <a:off x="822960" y="502920"/>
-            <a:ext cx="10515600" cy="365760"/>
+            <a:off x="822960" y="457200"/>
+            <a:ext cx="10515600" cy="411480"/>
           </a:xfrm>
           <a:prstGeom prst="rect">
             <a:avLst/>
@@ -10028,7 +10030,7 @@
               <a:buNone/>
             </a:pPr>
             <a:r>
-              <a:rPr lang="en-US" sz="1200" spc="300" kern="0" dirty="0">
+              <a:rPr lang="en-US" sz="1800" spc="300" kern="0" dirty="0">
                 <a:solidFill>
                   <a:srgbClr val="06B6D4"/>
                 </a:solidFill>
@@ -10038,7 +10040,7 @@
               </a:rPr>
               <a:t>SCOPING</a:t>
             </a:r>
-            <a:endParaRPr lang="en-US" sz="1200" dirty="0"/>
+            <a:endParaRPr lang="en-US" sz="1800" dirty="0"/>
           </a:p>
         </p:txBody>
       </p:sp>
@@ -10089,8 +10091,8 @@
         </p:nvSpPr>
         <p:spPr>
           <a:xfrm>
-            <a:off x="868680" y="2011680"/>
-            <a:ext cx="10424160" cy="3566160"/>
+            <a:off x="868680" y="1965960"/>
+            <a:ext cx="10424160" cy="3840480"/>
           </a:xfrm>
           <a:prstGeom prst="rect">
             <a:avLst/>
@@ -10113,7 +10115,7 @@
               <a:buChar char="▸"/>
             </a:pPr>
             <a:r>
-              <a:rPr lang="en-US" sz="1600" dirty="0">
+              <a:rPr lang="en-US" sz="2000" dirty="0">
                 <a:solidFill>
                   <a:srgbClr val="CBD5E1"/>
                 </a:solidFill>
@@ -10123,7 +10125,7 @@
               </a:rPr>
               <a:t>The decision the client will make with the data gets written down first - analysis without a decision is trivia.</a:t>
             </a:r>
-            <a:endParaRPr lang="en-US" sz="1600" dirty="0"/>
+            <a:endParaRPr lang="en-US" sz="2000" dirty="0"/>
           </a:p>
           <a:p>
             <a:pPr marL="342900" indent="-342900">
@@ -10137,7 +10139,7 @@
               <a:buChar char="▸"/>
             </a:pPr>
             <a:r>
-              <a:rPr lang="en-US" sz="1600" dirty="0">
+              <a:rPr lang="en-US" sz="2000" dirty="0">
                 <a:solidFill>
                   <a:srgbClr val="CBD5E1"/>
                 </a:solidFill>
@@ -10147,7 +10149,7 @@
               </a:rPr>
               <a:t>Success criteria are defined as measurable checks: row counts, schema, sanity ranges - not vibes.</a:t>
             </a:r>
-            <a:endParaRPr lang="en-US" sz="1600" dirty="0"/>
+            <a:endParaRPr lang="en-US" sz="2000" dirty="0"/>
           </a:p>
           <a:p>
             <a:pPr marL="342900" indent="-342900">
@@ -10161,7 +10163,7 @@
               <a:buChar char="▸"/>
             </a:pPr>
             <a:r>
-              <a:rPr lang="en-US" sz="1600" dirty="0">
+              <a:rPr lang="en-US" sz="2000" dirty="0">
                 <a:solidFill>
                   <a:srgbClr val="CBD5E1"/>
                 </a:solidFill>
@@ -10171,7 +10173,7 @@
               </a:rPr>
               <a:t>Every source gets profiled: quirks, cadence, edge cases, and the polite way to collect from it.</a:t>
             </a:r>
-            <a:endParaRPr lang="en-US" sz="1600" dirty="0"/>
+            <a:endParaRPr lang="en-US" sz="2000" dirty="0"/>
           </a:p>
           <a:p>
             <a:pPr marL="342900" indent="-342900">
@@ -10185,7 +10187,7 @@
               <a:buChar char="▸"/>
             </a:pPr>
             <a:r>
-              <a:rPr lang="en-US" sz="1600" dirty="0">
+              <a:rPr lang="en-US" sz="2000" dirty="0">
                 <a:solidFill>
                   <a:srgbClr val="CBD5E1"/>
                 </a:solidFill>
@@ -10195,7 +10197,7 @@
               </a:rPr>
               <a:t>If scope is fuzzy, the first deliverable is clarity - a fixed written scope, not a running bill.</a:t>
             </a:r>
-            <a:endParaRPr lang="en-US" sz="1600" dirty="0"/>
+            <a:endParaRPr lang="en-US" sz="2000" dirty="0"/>
           </a:p>
         </p:txBody>
       </p:sp>
@@ -10230,8 +10232,8 @@
         </p:nvSpPr>
         <p:spPr>
           <a:xfrm>
-            <a:off x="822960" y="6053328"/>
-            <a:ext cx="9692640" cy="457200"/>
+            <a:off x="822960" y="6035040"/>
+            <a:ext cx="10424160" cy="566928"/>
           </a:xfrm>
           <a:prstGeom prst="rect">
             <a:avLst/>
@@ -10247,9 +10249,9 @@
               <a:buNone/>
             </a:pPr>
             <a:r>
-              <a:rPr lang="en-US" sz="1150" dirty="0">
-                <a:solidFill>
-                  <a:srgbClr val="64748B"/>
+              <a:rPr lang="en-US" sz="1800" dirty="0">
+                <a:solidFill>
+                  <a:srgbClr val="8FA3BF"/>
                 </a:solidFill>
                 <a:latin typeface="Segoe UI" pitchFamily="34" charset="0"/>
                 <a:ea typeface="Segoe UI" pitchFamily="34" charset="-122"/>
@@ -10257,7 +10259,7 @@
               </a:rPr>
               <a:t>The most expensive bug in freelancing is building the right answer to the wrong question.</a:t>
             </a:r>
-            <a:endParaRPr lang="en-US" sz="1150" dirty="0"/>
+            <a:endParaRPr lang="en-US" sz="1800" dirty="0"/>
           </a:p>
         </p:txBody>
       </p:sp>
@@ -10269,8 +10271,8 @@
         </p:nvSpPr>
         <p:spPr>
           <a:xfrm>
-            <a:off x="10698480" y="6382512"/>
-            <a:ext cx="1188720" cy="365760"/>
+            <a:off x="10698480" y="6309360"/>
+            <a:ext cx="1188720" cy="411480"/>
           </a:xfrm>
           <a:prstGeom prst="rect">
             <a:avLst/>
@@ -10286,9 +10288,9 @@
               <a:buNone/>
             </a:pPr>
             <a:r>
-              <a:rPr lang="en-US" sz="1000" dirty="0">
-                <a:solidFill>
-                  <a:srgbClr val="64748B"/>
+              <a:rPr lang="en-US" sz="1800" dirty="0">
+                <a:solidFill>
+                  <a:srgbClr val="8FA3BF"/>
                 </a:solidFill>
                 <a:latin typeface="Consolas" pitchFamily="34" charset="0"/>
                 <a:ea typeface="Consolas" pitchFamily="34" charset="-122"/>
@@ -10296,7 +10298,7 @@
               </a:rPr>
               <a:t>7 / 14</a:t>
             </a:r>
-            <a:endParaRPr lang="en-US" sz="1000" dirty="0"/>
+            <a:endParaRPr lang="en-US" sz="1800" dirty="0"/>
           </a:p>
         </p:txBody>
       </p:sp>
@@ -10380,8 +10382,8 @@
         </p:nvSpPr>
         <p:spPr>
           <a:xfrm>
-            <a:off x="822960" y="502920"/>
-            <a:ext cx="10515600" cy="365760"/>
+            <a:off x="822960" y="457200"/>
+            <a:ext cx="10515600" cy="411480"/>
           </a:xfrm>
           <a:prstGeom prst="rect">
             <a:avLst/>
@@ -10397,7 +10399,7 @@
               <a:buNone/>
             </a:pPr>
             <a:r>
-              <a:rPr lang="en-US" sz="1200" spc="300" kern="0" dirty="0">
+              <a:rPr lang="en-US" sz="1800" spc="300" kern="0" dirty="0">
                 <a:solidFill>
                   <a:srgbClr val="06B6D4"/>
                 </a:solidFill>
@@ -10407,7 +10409,7 @@
               </a:rPr>
               <a:t>FAILURE MODES</a:t>
             </a:r>
-            <a:endParaRPr lang="en-US" sz="1200" dirty="0"/>
+            <a:endParaRPr lang="en-US" sz="1800" dirty="0"/>
           </a:p>
         </p:txBody>
       </p:sp>
@@ -10458,7 +10460,7 @@
         </p:nvGraphicFramePr>
         <p:xfrm>
           <a:off x="822960" y="1874520"/>
-          <a:ext cx="10515600" cy="3337560"/>
+          <a:ext cx="10515600" cy="3246120"/>
         </p:xfrm>
         <a:graphic xmlns:a="http://schemas.openxmlformats.org/drawingml/2006/main">
           <a:graphicData uri="http://schemas.openxmlformats.org/drawingml/2006/chart">
@@ -10474,7 +10476,7 @@
         </p:nvSpPr>
         <p:spPr>
           <a:xfrm>
-            <a:off x="822960" y="5413248"/>
+            <a:off x="822960" y="5321808"/>
             <a:ext cx="10515600" cy="0"/>
           </a:xfrm>
           <a:prstGeom prst="line">
@@ -10497,8 +10499,8 @@
         </p:nvSpPr>
         <p:spPr>
           <a:xfrm>
-            <a:off x="822960" y="5504688"/>
-            <a:ext cx="10424160" cy="411480"/>
+            <a:off x="822960" y="5394960"/>
+            <a:ext cx="10424160" cy="502920"/>
           </a:xfrm>
           <a:prstGeom prst="rect">
             <a:avLst/>
@@ -10514,7 +10516,7 @@
               <a:buNone/>
             </a:pPr>
             <a:r>
-              <a:rPr lang="en-US" sz="1300" i="1" dirty="0">
+              <a:rPr lang="en-US" sz="1800" i="1" dirty="0">
                 <a:solidFill>
                   <a:srgbClr val="06B6D4"/>
                 </a:solidFill>
@@ -10524,7 +10526,7 @@
               </a:rPr>
               <a:t>→  The deadliest failure is silent: a scraper that exits zero and returns nothing - which is why every run validates row counts, schema, and sanity ranges.</a:t>
             </a:r>
-            <a:endParaRPr lang="en-US" sz="1300" dirty="0"/>
+            <a:endParaRPr lang="en-US" sz="1800" dirty="0"/>
           </a:p>
         </p:txBody>
       </p:sp>
@@ -10559,8 +10561,8 @@
         </p:nvSpPr>
         <p:spPr>
           <a:xfrm>
-            <a:off x="822960" y="6053328"/>
-            <a:ext cx="9692640" cy="457200"/>
+            <a:off x="822960" y="6035040"/>
+            <a:ext cx="10424160" cy="566928"/>
           </a:xfrm>
           <a:prstGeom prst="rect">
             <a:avLst/>
@@ -10576,9 +10578,9 @@
               <a:buNone/>
             </a:pPr>
             <a:r>
-              <a:rPr lang="en-US" sz="1150" dirty="0">
-                <a:solidFill>
-                  <a:srgbClr val="64748B"/>
+              <a:rPr lang="en-US" sz="1800" dirty="0">
+                <a:solidFill>
+                  <a:srgbClr val="8FA3BF"/>
                 </a:solidFill>
                 <a:latin typeface="Segoe UI" pitchFamily="34" charset="0"/>
                 <a:ea typeface="Segoe UI" pitchFamily="34" charset="-122"/>
@@ -10586,7 +10588,7 @@
               </a:rPr>
               <a:t>Illustrative incident mix consistent with the Web Scraping Toolkit design notes: tolerant extraction, fallbacks, and warnings over shrugs.</a:t>
             </a:r>
-            <a:endParaRPr lang="en-US" sz="1150" dirty="0"/>
+            <a:endParaRPr lang="en-US" sz="1800" dirty="0"/>
           </a:p>
         </p:txBody>
       </p:sp>
@@ -10598,8 +10600,8 @@
         </p:nvSpPr>
         <p:spPr>
           <a:xfrm>
-            <a:off x="10698480" y="6382512"/>
-            <a:ext cx="1188720" cy="365760"/>
+            <a:off x="10698480" y="6309360"/>
+            <a:ext cx="1188720" cy="411480"/>
           </a:xfrm>
           <a:prstGeom prst="rect">
             <a:avLst/>
@@ -10615,9 +10617,9 @@
               <a:buNone/>
             </a:pPr>
             <a:r>
-              <a:rPr lang="en-US" sz="1000" dirty="0">
-                <a:solidFill>
-                  <a:srgbClr val="64748B"/>
+              <a:rPr lang="en-US" sz="1800" dirty="0">
+                <a:solidFill>
+                  <a:srgbClr val="8FA3BF"/>
                 </a:solidFill>
                 <a:latin typeface="Consolas" pitchFamily="34" charset="0"/>
                 <a:ea typeface="Consolas" pitchFamily="34" charset="-122"/>
@@ -10625,7 +10627,7 @@
               </a:rPr>
               <a:t>8 / 14</a:t>
             </a:r>
-            <a:endParaRPr lang="en-US" sz="1000" dirty="0"/>
+            <a:endParaRPr lang="en-US" sz="1800" dirty="0"/>
           </a:p>
         </p:txBody>
       </p:sp>
@@ -10709,8 +10711,8 @@
         </p:nvSpPr>
         <p:spPr>
           <a:xfrm>
-            <a:off x="822960" y="502920"/>
-            <a:ext cx="10515600" cy="365760"/>
+            <a:off x="822960" y="457200"/>
+            <a:ext cx="10515600" cy="411480"/>
           </a:xfrm>
           <a:prstGeom prst="rect">
             <a:avLst/>
@@ -10726,7 +10728,7 @@
               <a:buNone/>
             </a:pPr>
             <a:r>
-              <a:rPr lang="en-US" sz="1200" spc="300" kern="0" dirty="0">
+              <a:rPr lang="en-US" sz="1800" spc="300" kern="0" dirty="0">
                 <a:solidFill>
                   <a:srgbClr val="06B6D4"/>
                 </a:solidFill>
@@ -10736,7 +10738,7 @@
               </a:rPr>
               <a:t>VALIDATION</a:t>
             </a:r>
-            <a:endParaRPr lang="en-US" sz="1200" dirty="0"/>
+            <a:endParaRPr lang="en-US" sz="1800" dirty="0"/>
           </a:p>
         </p:txBody>
       </p:sp>
@@ -10787,8 +10789,8 @@
         </p:nvSpPr>
         <p:spPr>
           <a:xfrm>
-            <a:off x="868680" y="2011680"/>
-            <a:ext cx="10424160" cy="3566160"/>
+            <a:off x="868680" y="1965960"/>
+            <a:ext cx="10424160" cy="3840480"/>
           </a:xfrm>
           <a:prstGeom prst="rect">
             <a:avLst/>
@@ -10811,7 +10813,7 @@
               <a:buChar char="▸"/>
             </a:pPr>
             <a:r>
-              <a:rPr lang="en-US" sz="1600" dirty="0">
+              <a:rPr lang="en-US" sz="2000" dirty="0">
                 <a:solidFill>
                   <a:srgbClr val="CBD5E1"/>
                 </a:solidFill>
@@ -10821,7 +10823,7 @@
               </a:rPr>
               <a:t>Every run validates row counts, schema, and sanity ranges before anything touches your dashboard.</a:t>
             </a:r>
-            <a:endParaRPr lang="en-US" sz="1600" dirty="0"/>
+            <a:endParaRPr lang="en-US" sz="2000" dirty="0"/>
           </a:p>
           <a:p>
             <a:pPr marL="342900" indent="-342900">
@@ -10835,7 +10837,7 @@
               <a:buChar char="▸"/>
             </a:pPr>
             <a:r>
-              <a:rPr lang="en-US" sz="1600" dirty="0">
+              <a:rPr lang="en-US" sz="2000" dirty="0">
                 <a:solidFill>
                   <a:srgbClr val="CBD5E1"/>
                 </a:solidFill>
@@ -10845,7 +10847,7 @@
               </a:rPr>
               <a:t>Structured logs record what was fetched, what was skipped, and what was doubted - readable by humans, not terminal scrollback.</a:t>
             </a:r>
-            <a:endParaRPr lang="en-US" sz="1600" dirty="0"/>
+            <a:endParaRPr lang="en-US" sz="2000" dirty="0"/>
           </a:p>
           <a:p>
             <a:pPr marL="342900" indent="-342900">
@@ -10859,7 +10861,7 @@
               <a:buChar char="▸"/>
             </a:pPr>
             <a:r>
-              <a:rPr lang="en-US" sz="1600" dirty="0">
+              <a:rPr lang="en-US" sz="2000" dirty="0">
                 <a:solidFill>
                   <a:srgbClr val="CBD5E1"/>
                 </a:solidFill>
@@ -10869,7 +10871,7 @@
               </a:rPr>
               <a:t>Failures report loudly; a scraper that silently returns empty data is worse than one that crashes.</a:t>
             </a:r>
-            <a:endParaRPr lang="en-US" sz="1600" dirty="0"/>
+            <a:endParaRPr lang="en-US" sz="2000" dirty="0"/>
           </a:p>
           <a:p>
             <a:pPr marL="342900" indent="-342900">
@@ -10883,7 +10885,7 @@
               <a:buChar char="▸"/>
             </a:pPr>
             <a:r>
-              <a:rPr lang="en-US" sz="1600" dirty="0">
+              <a:rPr lang="en-US" sz="2000" dirty="0">
                 <a:solidFill>
                   <a:srgbClr val="CBD5E1"/>
                 </a:solidFill>
@@ -10893,7 +10895,7 @@
               </a:rPr>
               <a:t>Partial delivery with honest warnings beats silent perfectionism - you always know the state of your data.</a:t>
             </a:r>
-            <a:endParaRPr lang="en-US" sz="1600" dirty="0"/>
+            <a:endParaRPr lang="en-US" sz="2000" dirty="0"/>
           </a:p>
         </p:txBody>
       </p:sp>
@@ -10928,8 +10930,8 @@
         </p:nvSpPr>
         <p:spPr>
           <a:xfrm>
-            <a:off x="822960" y="6053328"/>
-            <a:ext cx="9692640" cy="457200"/>
+            <a:off x="822960" y="6035040"/>
+            <a:ext cx="10424160" cy="566928"/>
           </a:xfrm>
           <a:prstGeom prst="rect">
             <a:avLst/>
@@ -10945,9 +10947,9 @@
               <a:buNone/>
             </a:pPr>
             <a:r>
-              <a:rPr lang="en-US" sz="1150" dirty="0">
-                <a:solidFill>
-                  <a:srgbClr val="64748B"/>
+              <a:rPr lang="en-US" sz="1800" dirty="0">
+                <a:solidFill>
+                  <a:srgbClr val="8FA3BF"/>
                 </a:solidFill>
                 <a:latin typeface="Segoe UI" pitchFamily="34" charset="0"/>
                 <a:ea typeface="Segoe UI" pitchFamily="34" charset="-122"/>
@@ -10955,7 +10957,7 @@
               </a:rPr>
               <a:t>Do not trust a run because it exited zero; trust it because it passed checks you can read.</a:t>
             </a:r>
-            <a:endParaRPr lang="en-US" sz="1150" dirty="0"/>
+            <a:endParaRPr lang="en-US" sz="1800" dirty="0"/>
           </a:p>
         </p:txBody>
       </p:sp>
@@ -10967,8 +10969,8 @@
         </p:nvSpPr>
         <p:spPr>
           <a:xfrm>
-            <a:off x="10698480" y="6382512"/>
-            <a:ext cx="1188720" cy="365760"/>
+            <a:off x="10698480" y="6309360"/>
+            <a:ext cx="1188720" cy="411480"/>
           </a:xfrm>
           <a:prstGeom prst="rect">
             <a:avLst/>
@@ -10984,9 +10986,9 @@
               <a:buNone/>
             </a:pPr>
             <a:r>
-              <a:rPr lang="en-US" sz="1000" dirty="0">
-                <a:solidFill>
-                  <a:srgbClr val="64748B"/>
+              <a:rPr lang="en-US" sz="1800" dirty="0">
+                <a:solidFill>
+                  <a:srgbClr val="8FA3BF"/>
                 </a:solidFill>
                 <a:latin typeface="Consolas" pitchFamily="34" charset="0"/>
                 <a:ea typeface="Consolas" pitchFamily="34" charset="-122"/>
@@ -10994,7 +10996,7 @@
               </a:rPr>
               <a:t>9 / 14</a:t>
             </a:r>
-            <a:endParaRPr lang="en-US" sz="1000" dirty="0"/>
+            <a:endParaRPr lang="en-US" sz="1800" dirty="0"/>
           </a:p>
         </p:txBody>
       </p:sp>

--- a/decks/freelance-playbook.pptx
+++ b/decks/freelance-playbook.pptx
@@ -10123,7 +10123,7 @@
                 <a:ea typeface="Segoe UI" pitchFamily="34" charset="-122"/>
                 <a:cs typeface="Segoe UI" pitchFamily="34" charset="-120"/>
               </a:rPr>
-              <a:t>The decision the client will make with the data gets written down first - analysis without a decision is trivia.</a:t>
+              <a:t>The client's decision gets written down first - analysis without a decision is trivia.</a:t>
             </a:r>
             <a:endParaRPr lang="en-US" sz="2000" dirty="0"/>
           </a:p>
@@ -10845,7 +10845,7 @@
                 <a:ea typeface="Segoe UI" pitchFamily="34" charset="-122"/>
                 <a:cs typeface="Segoe UI" pitchFamily="34" charset="-120"/>
               </a:rPr>
-              <a:t>Structured logs record what was fetched, what was skipped, and what was doubted - readable by humans, not terminal scrollback.</a:t>
+              <a:t>Structured logs record what was fetched, skipped, and doubted - readable by humans, not terminal scrollback.</a:t>
             </a:r>
             <a:endParaRPr lang="en-US" sz="2000" dirty="0"/>
           </a:p>
